--- a/deliverables/StudyCrew_Milestone_Presentation.pptx
+++ b/deliverables/StudyCrew_Milestone_Presentation.pptx
@@ -2,18 +2,18 @@
 <file path=ppt/presentation.xml><?xml version="1.0" encoding="utf-8"?>
 <p:presentation xmlns:p="http://schemas.openxmlformats.org/presentationml/2006/main">
   <p:sldMasterIdLst>
-    <p:sldMasterId xmlns:r="http://schemas.openxmlformats.org/officeDocument/2006/relationships" id="2147483648" r:id="R86dc61a88d814054"/>
+    <p:sldMasterId xmlns:r="http://schemas.openxmlformats.org/officeDocument/2006/relationships" id="2147483648" r:id="R2bb0890a3bab44d2"/>
   </p:sldMasterIdLst>
   <p:notesMasterIdLst>
-    <p:notesMasterId xmlns:r="http://schemas.openxmlformats.org/officeDocument/2006/relationships" r:id="Rc95f318b3e3a43f4"/>
+    <p:notesMasterId xmlns:r="http://schemas.openxmlformats.org/officeDocument/2006/relationships" r:id="Rf980805dc242475a"/>
   </p:notesMasterIdLst>
   <p:sldIdLst>
-    <p:sldId xmlns:r="http://schemas.openxmlformats.org/officeDocument/2006/relationships" id="256" r:id="R83adc34415e84b3e"/>
-    <p:sldId xmlns:r="http://schemas.openxmlformats.org/officeDocument/2006/relationships" id="257" r:id="R105d351432114409"/>
-    <p:sldId xmlns:r="http://schemas.openxmlformats.org/officeDocument/2006/relationships" id="258" r:id="Rdd6a498f12ba448c"/>
-    <p:sldId xmlns:r="http://schemas.openxmlformats.org/officeDocument/2006/relationships" id="259" r:id="R7196fb04ebf34e6c"/>
-    <p:sldId xmlns:r="http://schemas.openxmlformats.org/officeDocument/2006/relationships" id="260" r:id="R900cf94fc3aa4f61"/>
-    <p:sldId xmlns:r="http://schemas.openxmlformats.org/officeDocument/2006/relationships" id="261" r:id="R0a13c873756748c7"/>
+    <p:sldId xmlns:r="http://schemas.openxmlformats.org/officeDocument/2006/relationships" id="256" r:id="Rcaf2c6cf3f9641f7"/>
+    <p:sldId xmlns:r="http://schemas.openxmlformats.org/officeDocument/2006/relationships" id="257" r:id="R6be37eb5b1674b93"/>
+    <p:sldId xmlns:r="http://schemas.openxmlformats.org/officeDocument/2006/relationships" id="258" r:id="Rf16311fc159644fa"/>
+    <p:sldId xmlns:r="http://schemas.openxmlformats.org/officeDocument/2006/relationships" id="259" r:id="R004ac8ed25764721"/>
+    <p:sldId xmlns:r="http://schemas.openxmlformats.org/officeDocument/2006/relationships" id="260" r:id="R8c6232198aa04b6b"/>
+    <p:sldId xmlns:r="http://schemas.openxmlformats.org/officeDocument/2006/relationships" id="261" r:id="Rea54e7f9a34042cf"/>
   </p:sldIdLst>
   <p:sldSz cx="12192000" cy="6858000"/>
   <p:notesSz cx="6858000" cy="9144000"/>
@@ -962,7 +962,7 @@
           </a:p>
           <a:p xmlns:a="http://schemas.openxmlformats.org/drawingml/2006/main">
             <a:r>
-              <a:t>Our approved baseline is authentication, private projects, tasks, comments, meetings, notifications and contribution evidence. We build those from weeks 7 to 10, integrate and test in weeks 10 to 11, then rehearse and harden in week 12. Search and export remain stretch goals until the core passes.</a:t>
+              <a:t>Our approved baseline is authentication, private projects, tasks, comments, meetings, notifications and contribution evidence. We will build it with React and Express, PostgreSQL with Prisma, Vitest and Playwright, plus Docker and GitHub Actions. The Gantt moves from MVP validation into core vertical slices, integration and testing, then rehearsal and hardening. Search and export remain gated stretch goals.</a:t>
             </a:r>
           </a:p>
           <a:p xmlns:a="http://schemas.openxmlformats.org/drawingml/2006/main">
@@ -1075,7 +1075,7 @@
   </p:cSld>
   <p:clrMap bg1="lt1" tx1="dk1" bg2="lt2" tx2="dk2" accent1="accent1" accent2="accent2" accent3="accent3" accent4="accent4" accent5="accent5" accent6="accent6" hlink="hlink" folHlink="folHlink"/>
   <p:sldLayoutIdLst>
-    <p:sldLayoutId xmlns:r="http://schemas.openxmlformats.org/officeDocument/2006/relationships" id="2147483649" r:id="Rd661ae35cd4c4b80"/>
+    <p:sldLayoutId xmlns:r="http://schemas.openxmlformats.org/officeDocument/2006/relationships" id="2147483649" r:id="Rd8106d415e1645ac"/>
   </p:sldLayoutIdLst>
   <p:txStyles>
     <p:titleStyle>
@@ -1685,6 +1685,7 @@
           <a:lstStyle xmlns:a="http://schemas.openxmlformats.org/drawingml/2006/main"/>
           <a:p xmlns:a="http://schemas.openxmlformats.org/drawingml/2006/main">
             <a:pPr>
+              <a:buNone/>
               <a:defRPr sz="1275" b="1">
                 <a:solidFill>
                   <a:srgbClr val="BFE2D4"/>
@@ -1735,6 +1736,7 @@
           <a:lstStyle xmlns:a="http://schemas.openxmlformats.org/drawingml/2006/main"/>
           <a:p xmlns:a="http://schemas.openxmlformats.org/drawingml/2006/main">
             <a:pPr>
+              <a:buNone/>
               <a:defRPr sz="4650" b="1">
                 <a:solidFill>
                   <a:srgbClr val="FFFFFF"/>
@@ -1752,6 +1754,7 @@
           </a:p>
           <a:p xmlns:a="http://schemas.openxmlformats.org/drawingml/2006/main">
             <a:pPr>
+              <a:buNone/>
               <a:defRPr sz="4650" b="1">
                 <a:solidFill>
                   <a:srgbClr val="FFFFFF"/>
@@ -1769,6 +1772,7 @@
           </a:p>
           <a:p xmlns:a="http://schemas.openxmlformats.org/drawingml/2006/main">
             <a:pPr>
+              <a:buNone/>
               <a:defRPr sz="4650" b="1">
                 <a:solidFill>
                   <a:srgbClr val="FFFFFF"/>
@@ -1850,6 +1854,7 @@
           <a:lstStyle xmlns:a="http://schemas.openxmlformats.org/drawingml/2006/main"/>
           <a:p xmlns:a="http://schemas.openxmlformats.org/drawingml/2006/main">
             <a:pPr>
+              <a:buNone/>
               <a:defRPr sz="1800" b="0">
                 <a:solidFill>
                   <a:srgbClr val="D8E3EC"/>
@@ -1933,6 +1938,7 @@
           <a:lstStyle xmlns:a="http://schemas.openxmlformats.org/drawingml/2006/main"/>
           <a:p xmlns:a="http://schemas.openxmlformats.org/drawingml/2006/main">
             <a:pPr>
+              <a:buNone/>
               <a:defRPr sz="1800" b="1">
                 <a:solidFill>
                   <a:srgbClr val="FFFFFF"/>
@@ -1983,6 +1989,7 @@
           <a:lstStyle xmlns:a="http://schemas.openxmlformats.org/drawingml/2006/main"/>
           <a:p xmlns:a="http://schemas.openxmlformats.org/drawingml/2006/main">
             <a:pPr>
+              <a:buNone/>
               <a:defRPr sz="1800" b="1">
                 <a:solidFill>
                   <a:srgbClr val="FFFFFF"/>
@@ -2033,6 +2040,7 @@
           <a:lstStyle xmlns:a="http://schemas.openxmlformats.org/drawingml/2006/main"/>
           <a:p xmlns:a="http://schemas.openxmlformats.org/drawingml/2006/main">
             <a:pPr>
+              <a:buNone/>
               <a:defRPr sz="1800" b="1">
                 <a:solidFill>
                   <a:srgbClr val="FFFFFF"/>
@@ -2083,6 +2091,7 @@
           <a:lstStyle xmlns:a="http://schemas.openxmlformats.org/drawingml/2006/main"/>
           <a:p xmlns:a="http://schemas.openxmlformats.org/drawingml/2006/main">
             <a:pPr>
+              <a:buNone/>
               <a:defRPr sz="1200" b="0" i="1">
                 <a:solidFill>
                   <a:srgbClr val="BFE2D4"/>
@@ -2133,6 +2142,7 @@
           <a:lstStyle xmlns:a="http://schemas.openxmlformats.org/drawingml/2006/main"/>
           <a:p xmlns:a="http://schemas.openxmlformats.org/drawingml/2006/main">
             <a:pPr>
+              <a:buNone/>
               <a:defRPr sz="900" b="1">
                 <a:solidFill>
                   <a:srgbClr val="A8BAC9"/>
@@ -2212,6 +2222,7 @@
           <a:lstStyle xmlns:a="http://schemas.openxmlformats.org/drawingml/2006/main"/>
           <a:p xmlns:a="http://schemas.openxmlformats.org/drawingml/2006/main">
             <a:pPr>
+              <a:buNone/>
               <a:defRPr sz="1125" b="1">
                 <a:solidFill>
                   <a:srgbClr val="2774C7"/>
@@ -2262,6 +2273,7 @@
           <a:lstStyle xmlns:a="http://schemas.openxmlformats.org/drawingml/2006/main"/>
           <a:p xmlns:a="http://schemas.openxmlformats.org/drawingml/2006/main">
             <a:pPr>
+              <a:buNone/>
               <a:defRPr sz="3150" b="1">
                 <a:solidFill>
                   <a:srgbClr val="12263A"/>
@@ -2343,6 +2355,7 @@
           <a:lstStyle xmlns:a="http://schemas.openxmlformats.org/drawingml/2006/main"/>
           <a:p xmlns:a="http://schemas.openxmlformats.org/drawingml/2006/main">
             <a:pPr>
+              <a:buNone/>
               <a:defRPr sz="1275" b="0">
                 <a:solidFill>
                   <a:srgbClr val="667482"/>
@@ -2461,6 +2474,7 @@
           <a:lstStyle xmlns:a="http://schemas.openxmlformats.org/drawingml/2006/main"/>
           <a:p xmlns:a="http://schemas.openxmlformats.org/drawingml/2006/main">
             <a:pPr>
+              <a:buNone/>
               <a:defRPr sz="1050" b="1">
                 <a:solidFill>
                   <a:srgbClr val="2774C7"/>
@@ -2511,6 +2525,7 @@
           <a:lstStyle xmlns:a="http://schemas.openxmlformats.org/drawingml/2006/main"/>
           <a:p xmlns:a="http://schemas.openxmlformats.org/drawingml/2006/main">
             <a:pPr>
+              <a:buNone/>
               <a:defRPr sz="2400" b="1">
                 <a:solidFill>
                   <a:srgbClr val="12263A"/>
@@ -2528,6 +2543,7 @@
           </a:p>
           <a:p xmlns:a="http://schemas.openxmlformats.org/drawingml/2006/main">
             <a:pPr>
+              <a:buNone/>
               <a:defRPr sz="2400" b="1">
                 <a:solidFill>
                   <a:srgbClr val="12263A"/>
@@ -2545,6 +2561,7 @@
           </a:p>
           <a:p xmlns:a="http://schemas.openxmlformats.org/drawingml/2006/main">
             <a:pPr>
+              <a:buNone/>
               <a:defRPr sz="2400" b="1">
                 <a:solidFill>
                   <a:srgbClr val="12263A"/>
@@ -2595,6 +2612,7 @@
           <a:lstStyle xmlns:a="http://schemas.openxmlformats.org/drawingml/2006/main"/>
           <a:p xmlns:a="http://schemas.openxmlformats.org/drawingml/2006/main">
             <a:pPr>
+              <a:buNone/>
               <a:defRPr sz="1425" b="0">
                 <a:solidFill>
                   <a:srgbClr val="667482"/>
@@ -2645,6 +2663,7 @@
           <a:lstStyle xmlns:a="http://schemas.openxmlformats.org/drawingml/2006/main"/>
           <a:p xmlns:a="http://schemas.openxmlformats.org/drawingml/2006/main">
             <a:pPr>
+              <a:buNone/>
               <a:defRPr sz="1050" b="1">
                 <a:solidFill>
                   <a:srgbClr val="BFE2D4"/>
@@ -2695,6 +2714,7 @@
           <a:lstStyle xmlns:a="http://schemas.openxmlformats.org/drawingml/2006/main"/>
           <a:p xmlns:a="http://schemas.openxmlformats.org/drawingml/2006/main">
             <a:pPr>
+              <a:buNone/>
               <a:defRPr sz="2400" b="1">
                 <a:solidFill>
                   <a:srgbClr val="FFFFFF"/>
@@ -2712,6 +2732,7 @@
           </a:p>
           <a:p xmlns:a="http://schemas.openxmlformats.org/drawingml/2006/main">
             <a:pPr>
+              <a:buNone/>
               <a:defRPr sz="2400" b="1">
                 <a:solidFill>
                   <a:srgbClr val="FFFFFF"/>
@@ -2729,6 +2750,7 @@
           </a:p>
           <a:p xmlns:a="http://schemas.openxmlformats.org/drawingml/2006/main">
             <a:pPr>
+              <a:buNone/>
               <a:defRPr sz="2400" b="1">
                 <a:solidFill>
                   <a:srgbClr val="FFFFFF"/>
@@ -2779,6 +2801,7 @@
           <a:lstStyle xmlns:a="http://schemas.openxmlformats.org/drawingml/2006/main"/>
           <a:p xmlns:a="http://schemas.openxmlformats.org/drawingml/2006/main">
             <a:pPr>
+              <a:buNone/>
               <a:defRPr sz="1425" b="0">
                 <a:solidFill>
                   <a:srgbClr val="D8E3EC"/>
@@ -2862,6 +2885,7 @@
           <a:lstStyle xmlns:a="http://schemas.openxmlformats.org/drawingml/2006/main"/>
           <a:p xmlns:a="http://schemas.openxmlformats.org/drawingml/2006/main">
             <a:pPr>
+              <a:buNone/>
               <a:defRPr sz="975" b="1">
                 <a:solidFill>
                   <a:srgbClr val="FFFFFF"/>
@@ -2912,6 +2936,7 @@
           <a:lstStyle xmlns:a="http://schemas.openxmlformats.org/drawingml/2006/main"/>
           <a:p xmlns:a="http://schemas.openxmlformats.org/drawingml/2006/main">
             <a:pPr>
+              <a:buNone/>
               <a:defRPr sz="825" b="1">
                 <a:solidFill>
                   <a:srgbClr val="667482"/>
@@ -2962,6 +2987,7 @@
           <a:lstStyle xmlns:a="http://schemas.openxmlformats.org/drawingml/2006/main"/>
           <a:p xmlns:a="http://schemas.openxmlformats.org/drawingml/2006/main">
             <a:pPr>
+              <a:buNone/>
               <a:defRPr sz="825" b="1">
                 <a:solidFill>
                   <a:srgbClr val="667482"/>
@@ -3041,6 +3067,7 @@
           <a:lstStyle xmlns:a="http://schemas.openxmlformats.org/drawingml/2006/main"/>
           <a:p xmlns:a="http://schemas.openxmlformats.org/drawingml/2006/main">
             <a:pPr>
+              <a:buNone/>
               <a:defRPr sz="1125" b="1">
                 <a:solidFill>
                   <a:srgbClr val="2774C7"/>
@@ -3091,6 +3118,7 @@
           <a:lstStyle xmlns:a="http://schemas.openxmlformats.org/drawingml/2006/main"/>
           <a:p xmlns:a="http://schemas.openxmlformats.org/drawingml/2006/main">
             <a:pPr>
+              <a:buNone/>
               <a:defRPr sz="3150" b="1">
                 <a:solidFill>
                   <a:srgbClr val="12263A"/>
@@ -3172,6 +3200,7 @@
           <a:lstStyle xmlns:a="http://schemas.openxmlformats.org/drawingml/2006/main"/>
           <a:p xmlns:a="http://schemas.openxmlformats.org/drawingml/2006/main">
             <a:pPr>
+              <a:buNone/>
               <a:defRPr sz="1275" b="0">
                 <a:solidFill>
                   <a:srgbClr val="667482"/>
@@ -3257,6 +3286,7 @@
           <a:lstStyle xmlns:a="http://schemas.openxmlformats.org/drawingml/2006/main"/>
           <a:p xmlns:a="http://schemas.openxmlformats.org/drawingml/2006/main">
             <a:pPr>
+              <a:buNone/>
               <a:defRPr sz="1275" b="1">
                 <a:solidFill>
                   <a:srgbClr val="E96B4B"/>
@@ -3307,6 +3337,7 @@
           <a:lstStyle xmlns:a="http://schemas.openxmlformats.org/drawingml/2006/main"/>
           <a:p xmlns:a="http://schemas.openxmlformats.org/drawingml/2006/main">
             <a:pPr>
+              <a:buNone/>
               <a:defRPr sz="2025" b="1">
                 <a:solidFill>
                   <a:srgbClr val="12263A"/>
@@ -3357,6 +3388,7 @@
           <a:lstStyle xmlns:a="http://schemas.openxmlformats.org/drawingml/2006/main"/>
           <a:p xmlns:a="http://schemas.openxmlformats.org/drawingml/2006/main">
             <a:pPr>
+              <a:buNone/>
               <a:defRPr sz="1575" b="0">
                 <a:solidFill>
                   <a:srgbClr val="667482"/>
@@ -3374,6 +3406,7 @@
           </a:p>
           <a:p xmlns:a="http://schemas.openxmlformats.org/drawingml/2006/main">
             <a:pPr>
+              <a:buNone/>
               <a:defRPr sz="1575" b="0">
                 <a:solidFill>
                   <a:srgbClr val="667482"/>
@@ -3391,6 +3424,7 @@
           </a:p>
           <a:p xmlns:a="http://schemas.openxmlformats.org/drawingml/2006/main">
             <a:pPr>
+              <a:buNone/>
               <a:defRPr sz="1575" b="0">
                 <a:solidFill>
                   <a:srgbClr val="667482"/>
@@ -3476,6 +3510,7 @@
           <a:lstStyle xmlns:a="http://schemas.openxmlformats.org/drawingml/2006/main"/>
           <a:p xmlns:a="http://schemas.openxmlformats.org/drawingml/2006/main">
             <a:pPr>
+              <a:buNone/>
               <a:defRPr sz="1275" b="1">
                 <a:solidFill>
                   <a:srgbClr val="E96B4B"/>
@@ -3526,6 +3561,7 @@
           <a:lstStyle xmlns:a="http://schemas.openxmlformats.org/drawingml/2006/main"/>
           <a:p xmlns:a="http://schemas.openxmlformats.org/drawingml/2006/main">
             <a:pPr>
+              <a:buNone/>
               <a:defRPr sz="2025" b="1">
                 <a:solidFill>
                   <a:srgbClr val="12263A"/>
@@ -3576,6 +3612,7 @@
           <a:lstStyle xmlns:a="http://schemas.openxmlformats.org/drawingml/2006/main"/>
           <a:p xmlns:a="http://schemas.openxmlformats.org/drawingml/2006/main">
             <a:pPr>
+              <a:buNone/>
               <a:defRPr sz="1575" b="0">
                 <a:solidFill>
                   <a:srgbClr val="667482"/>
@@ -3593,6 +3630,7 @@
           </a:p>
           <a:p xmlns:a="http://schemas.openxmlformats.org/drawingml/2006/main">
             <a:pPr>
+              <a:buNone/>
               <a:defRPr sz="1575" b="0">
                 <a:solidFill>
                   <a:srgbClr val="667482"/>
@@ -3610,6 +3648,7 @@
           </a:p>
           <a:p xmlns:a="http://schemas.openxmlformats.org/drawingml/2006/main">
             <a:pPr>
+              <a:buNone/>
               <a:defRPr sz="1575" b="0">
                 <a:solidFill>
                   <a:srgbClr val="667482"/>
@@ -3695,6 +3734,7 @@
           <a:lstStyle xmlns:a="http://schemas.openxmlformats.org/drawingml/2006/main"/>
           <a:p xmlns:a="http://schemas.openxmlformats.org/drawingml/2006/main">
             <a:pPr>
+              <a:buNone/>
               <a:defRPr sz="1275" b="1">
                 <a:solidFill>
                   <a:srgbClr val="E96B4B"/>
@@ -3745,6 +3785,7 @@
           <a:lstStyle xmlns:a="http://schemas.openxmlformats.org/drawingml/2006/main"/>
           <a:p xmlns:a="http://schemas.openxmlformats.org/drawingml/2006/main">
             <a:pPr>
+              <a:buNone/>
               <a:defRPr sz="2025" b="1">
                 <a:solidFill>
                   <a:srgbClr val="12263A"/>
@@ -3795,6 +3836,7 @@
           <a:lstStyle xmlns:a="http://schemas.openxmlformats.org/drawingml/2006/main"/>
           <a:p xmlns:a="http://schemas.openxmlformats.org/drawingml/2006/main">
             <a:pPr>
+              <a:buNone/>
               <a:defRPr sz="1575" b="0">
                 <a:solidFill>
                   <a:srgbClr val="667482"/>
@@ -3812,6 +3854,7 @@
           </a:p>
           <a:p xmlns:a="http://schemas.openxmlformats.org/drawingml/2006/main">
             <a:pPr>
+              <a:buNone/>
               <a:defRPr sz="1575" b="0">
                 <a:solidFill>
                   <a:srgbClr val="667482"/>
@@ -3829,6 +3872,7 @@
           </a:p>
           <a:p xmlns:a="http://schemas.openxmlformats.org/drawingml/2006/main">
             <a:pPr>
+              <a:buNone/>
               <a:defRPr sz="1575" b="0">
                 <a:solidFill>
                   <a:srgbClr val="667482"/>
@@ -3879,6 +3923,7 @@
           <a:lstStyle xmlns:a="http://schemas.openxmlformats.org/drawingml/2006/main"/>
           <a:p xmlns:a="http://schemas.openxmlformats.org/drawingml/2006/main">
             <a:pPr>
+              <a:buNone/>
               <a:defRPr sz="2550" b="1">
                 <a:solidFill>
                   <a:srgbClr val="2774C7"/>
@@ -3929,6 +3974,7 @@
           <a:lstStyle xmlns:a="http://schemas.openxmlformats.org/drawingml/2006/main"/>
           <a:p xmlns:a="http://schemas.openxmlformats.org/drawingml/2006/main">
             <a:pPr>
+              <a:buNone/>
               <a:defRPr sz="2550" b="1">
                 <a:solidFill>
                   <a:srgbClr val="2774C7"/>
@@ -4012,6 +4058,7 @@
           <a:lstStyle xmlns:a="http://schemas.openxmlformats.org/drawingml/2006/main"/>
           <a:p xmlns:a="http://schemas.openxmlformats.org/drawingml/2006/main">
             <a:pPr>
+              <a:buNone/>
               <a:defRPr sz="1275" b="1">
                 <a:solidFill>
                   <a:srgbClr val="BFE2D4"/>
@@ -4062,6 +4109,7 @@
           <a:lstStyle xmlns:a="http://schemas.openxmlformats.org/drawingml/2006/main"/>
           <a:p xmlns:a="http://schemas.openxmlformats.org/drawingml/2006/main">
             <a:pPr>
+              <a:buNone/>
               <a:defRPr sz="1350" b="0" i="1">
                 <a:solidFill>
                   <a:srgbClr val="FFFFFF"/>
@@ -4112,6 +4160,7 @@
           <a:lstStyle xmlns:a="http://schemas.openxmlformats.org/drawingml/2006/main"/>
           <a:p xmlns:a="http://schemas.openxmlformats.org/drawingml/2006/main">
             <a:pPr>
+              <a:buNone/>
               <a:defRPr sz="825" b="1">
                 <a:solidFill>
                   <a:srgbClr val="667482"/>
@@ -4162,6 +4211,7 @@
           <a:lstStyle xmlns:a="http://schemas.openxmlformats.org/drawingml/2006/main"/>
           <a:p xmlns:a="http://schemas.openxmlformats.org/drawingml/2006/main">
             <a:pPr>
+              <a:buNone/>
               <a:defRPr sz="825" b="1">
                 <a:solidFill>
                   <a:srgbClr val="667482"/>
@@ -4241,6 +4291,7 @@
           <a:lstStyle xmlns:a="http://schemas.openxmlformats.org/drawingml/2006/main"/>
           <a:p xmlns:a="http://schemas.openxmlformats.org/drawingml/2006/main">
             <a:pPr>
+              <a:buNone/>
               <a:defRPr sz="1125" b="1">
                 <a:solidFill>
                   <a:srgbClr val="2774C7"/>
@@ -4291,6 +4342,7 @@
           <a:lstStyle xmlns:a="http://schemas.openxmlformats.org/drawingml/2006/main"/>
           <a:p xmlns:a="http://schemas.openxmlformats.org/drawingml/2006/main">
             <a:pPr>
+              <a:buNone/>
               <a:defRPr sz="3150" b="1">
                 <a:solidFill>
                   <a:srgbClr val="12263A"/>
@@ -4372,6 +4424,7 @@
           <a:lstStyle xmlns:a="http://schemas.openxmlformats.org/drawingml/2006/main"/>
           <a:p xmlns:a="http://schemas.openxmlformats.org/drawingml/2006/main">
             <a:pPr>
+              <a:buNone/>
               <a:defRPr sz="1275" b="0">
                 <a:solidFill>
                   <a:srgbClr val="667482"/>
@@ -4461,14 +4514,14 @@
       </p:sp>
       <p:pic>
         <p:nvPicPr>
-          <p:cNvPr id="21" name=""/>
+          <p:cNvPr id="24" name=""/>
           <p:cNvPicPr>
             <a:picLocks xmlns:a="http://schemas.openxmlformats.org/drawingml/2006/main" noChangeAspect="1"/>
           </p:cNvPicPr>
           <p:nvPr/>
         </p:nvPicPr>
         <p:blipFill>
-          <a:blip xmlns:r="http://schemas.openxmlformats.org/officeDocument/2006/relationships" xmlns:a="http://schemas.openxmlformats.org/drawingml/2006/main" r:embed="R37714002f2904851"/>
+          <a:blip xmlns:r="http://schemas.openxmlformats.org/officeDocument/2006/relationships" xmlns:a="http://schemas.openxmlformats.org/drawingml/2006/main" r:embed="R32d8ec87a39446d3"/>
           <a:stretch xmlns:a="http://schemas.openxmlformats.org/drawingml/2006/main"/>
         </p:blipFill>
         <p:spPr>
@@ -4483,14 +4536,14 @@
       </p:pic>
       <p:pic>
         <p:nvPicPr>
-          <p:cNvPr id="22" name=""/>
+          <p:cNvPr id="25" name=""/>
           <p:cNvPicPr>
             <a:picLocks xmlns:a="http://schemas.openxmlformats.org/drawingml/2006/main" noChangeAspect="1"/>
           </p:cNvPicPr>
           <p:nvPr/>
         </p:nvPicPr>
         <p:blipFill>
-          <a:blip xmlns:r="http://schemas.openxmlformats.org/officeDocument/2006/relationships" xmlns:a="http://schemas.openxmlformats.org/drawingml/2006/main" r:embed="R46852466eeac444b"/>
+          <a:blip xmlns:r="http://schemas.openxmlformats.org/officeDocument/2006/relationships" xmlns:a="http://schemas.openxmlformats.org/drawingml/2006/main" r:embed="R44f41d651fac48a6"/>
           <a:stretch xmlns:a="http://schemas.openxmlformats.org/drawingml/2006/main"/>
         </p:blipFill>
         <p:spPr>
@@ -4536,6 +4589,7 @@
           <a:lstStyle xmlns:a="http://schemas.openxmlformats.org/drawingml/2006/main"/>
           <a:p xmlns:a="http://schemas.openxmlformats.org/drawingml/2006/main">
             <a:pPr>
+              <a:buNone/>
               <a:defRPr sz="1125" b="1">
                 <a:solidFill>
                   <a:srgbClr val="2774C7"/>
@@ -4586,6 +4640,7 @@
           <a:lstStyle xmlns:a="http://schemas.openxmlformats.org/drawingml/2006/main"/>
           <a:p xmlns:a="http://schemas.openxmlformats.org/drawingml/2006/main">
             <a:pPr>
+              <a:buNone/>
               <a:defRPr sz="1125" b="0">
                 <a:solidFill>
                   <a:srgbClr val="667482"/>
@@ -4636,6 +4691,7 @@
           <a:lstStyle xmlns:a="http://schemas.openxmlformats.org/drawingml/2006/main"/>
           <a:p xmlns:a="http://schemas.openxmlformats.org/drawingml/2006/main">
             <a:pPr>
+              <a:buNone/>
               <a:defRPr sz="1125" b="1">
                 <a:solidFill>
                   <a:srgbClr val="2774C7"/>
@@ -4686,6 +4742,7 @@
           <a:lstStyle xmlns:a="http://schemas.openxmlformats.org/drawingml/2006/main"/>
           <a:p xmlns:a="http://schemas.openxmlformats.org/drawingml/2006/main">
             <a:pPr>
+              <a:buNone/>
               <a:defRPr sz="1125" b="0">
                 <a:solidFill>
                   <a:srgbClr val="667482"/>
@@ -4736,6 +4793,7 @@
           <a:lstStyle xmlns:a="http://schemas.openxmlformats.org/drawingml/2006/main"/>
           <a:p xmlns:a="http://schemas.openxmlformats.org/drawingml/2006/main">
             <a:pPr>
+              <a:buNone/>
               <a:defRPr sz="825" b="1">
                 <a:solidFill>
                   <a:srgbClr val="667482"/>
@@ -4786,6 +4844,7 @@
           <a:lstStyle xmlns:a="http://schemas.openxmlformats.org/drawingml/2006/main"/>
           <a:p xmlns:a="http://schemas.openxmlformats.org/drawingml/2006/main">
             <a:pPr>
+              <a:buNone/>
               <a:defRPr sz="825" b="1">
                 <a:solidFill>
                   <a:srgbClr val="667482"/>
@@ -4865,6 +4924,7 @@
           <a:lstStyle xmlns:a="http://schemas.openxmlformats.org/drawingml/2006/main"/>
           <a:p xmlns:a="http://schemas.openxmlformats.org/drawingml/2006/main">
             <a:pPr>
+              <a:buNone/>
               <a:defRPr sz="1125" b="1">
                 <a:solidFill>
                   <a:srgbClr val="2774C7"/>
@@ -4915,14 +4975,15 @@
           <a:lstStyle xmlns:a="http://schemas.openxmlformats.org/drawingml/2006/main"/>
           <a:p xmlns:a="http://schemas.openxmlformats.org/drawingml/2006/main">
             <a:pPr>
-              <a:defRPr sz="3150" b="1">
+              <a:buNone/>
+              <a:defRPr sz="2850" b="1">
                 <a:solidFill>
                   <a:srgbClr val="12263A"/>
                 </a:solidFill>
               </a:defRPr>
             </a:pPr>
             <a:r>
-              <a:rPr sz="3150" b="1">
+              <a:rPr sz="2850" b="1">
                 <a:solidFill>
                   <a:srgbClr val="12263A"/>
                 </a:solidFill>
@@ -4996,6 +5057,7 @@
           <a:lstStyle xmlns:a="http://schemas.openxmlformats.org/drawingml/2006/main"/>
           <a:p xmlns:a="http://schemas.openxmlformats.org/drawingml/2006/main">
             <a:pPr>
+              <a:buNone/>
               <a:defRPr sz="1275" b="0">
                 <a:solidFill>
                   <a:srgbClr val="667482"/>
@@ -5081,6 +5143,7 @@
           <a:lstStyle xmlns:a="http://schemas.openxmlformats.org/drawingml/2006/main"/>
           <a:p xmlns:a="http://schemas.openxmlformats.org/drawingml/2006/main">
             <a:pPr>
+              <a:buNone/>
               <a:defRPr sz="3000" b="1">
                 <a:solidFill>
                   <a:srgbClr val="2774C7"/>
@@ -5131,6 +5194,7 @@
           <a:lstStyle xmlns:a="http://schemas.openxmlformats.org/drawingml/2006/main"/>
           <a:p xmlns:a="http://schemas.openxmlformats.org/drawingml/2006/main">
             <a:pPr>
+              <a:buNone/>
               <a:defRPr sz="1050" b="0">
                 <a:solidFill>
                   <a:srgbClr val="667482"/>
@@ -5216,6 +5280,7 @@
           <a:lstStyle xmlns:a="http://schemas.openxmlformats.org/drawingml/2006/main"/>
           <a:p xmlns:a="http://schemas.openxmlformats.org/drawingml/2006/main">
             <a:pPr>
+              <a:buNone/>
               <a:defRPr sz="3000" b="1">
                 <a:solidFill>
                   <a:srgbClr val="2774C7"/>
@@ -5266,6 +5331,7 @@
           <a:lstStyle xmlns:a="http://schemas.openxmlformats.org/drawingml/2006/main"/>
           <a:p xmlns:a="http://schemas.openxmlformats.org/drawingml/2006/main">
             <a:pPr>
+              <a:buNone/>
               <a:defRPr sz="1050" b="0">
                 <a:solidFill>
                   <a:srgbClr val="667482"/>
@@ -5351,6 +5417,7 @@
           <a:lstStyle xmlns:a="http://schemas.openxmlformats.org/drawingml/2006/main"/>
           <a:p xmlns:a="http://schemas.openxmlformats.org/drawingml/2006/main">
             <a:pPr>
+              <a:buNone/>
               <a:defRPr sz="3000" b="1">
                 <a:solidFill>
                   <a:srgbClr val="2774C7"/>
@@ -5401,6 +5468,7 @@
           <a:lstStyle xmlns:a="http://schemas.openxmlformats.org/drawingml/2006/main"/>
           <a:p xmlns:a="http://schemas.openxmlformats.org/drawingml/2006/main">
             <a:pPr>
+              <a:buNone/>
               <a:defRPr sz="1050" b="0">
                 <a:solidFill>
                   <a:srgbClr val="667482"/>
@@ -5484,6 +5552,7 @@
           <a:lstStyle xmlns:a="http://schemas.openxmlformats.org/drawingml/2006/main"/>
           <a:p xmlns:a="http://schemas.openxmlformats.org/drawingml/2006/main">
             <a:pPr>
+              <a:buNone/>
               <a:defRPr sz="1125" b="1">
                 <a:solidFill>
                   <a:srgbClr val="BFE2D4"/>
@@ -5534,6 +5603,7 @@
           <a:lstStyle xmlns:a="http://schemas.openxmlformats.org/drawingml/2006/main"/>
           <a:p xmlns:a="http://schemas.openxmlformats.org/drawingml/2006/main">
             <a:pPr>
+              <a:buNone/>
               <a:defRPr sz="1725" b="1">
                 <a:solidFill>
                   <a:srgbClr val="FFFFFF"/>
@@ -5584,6 +5654,7 @@
           <a:lstStyle xmlns:a="http://schemas.openxmlformats.org/drawingml/2006/main"/>
           <a:p xmlns:a="http://schemas.openxmlformats.org/drawingml/2006/main">
             <a:pPr>
+              <a:buNone/>
               <a:defRPr sz="1725" b="1">
                 <a:solidFill>
                   <a:srgbClr val="FFFFFF"/>
@@ -5634,6 +5705,7 @@
           <a:lstStyle xmlns:a="http://schemas.openxmlformats.org/drawingml/2006/main"/>
           <a:p xmlns:a="http://schemas.openxmlformats.org/drawingml/2006/main">
             <a:pPr>
+              <a:buNone/>
               <a:defRPr sz="1725" b="1">
                 <a:solidFill>
                   <a:srgbClr val="FFFFFF"/>
@@ -5717,6 +5789,7 @@
           <a:lstStyle xmlns:a="http://schemas.openxmlformats.org/drawingml/2006/main"/>
           <a:p xmlns:a="http://schemas.openxmlformats.org/drawingml/2006/main">
             <a:pPr>
+              <a:buNone/>
               <a:defRPr sz="1125" b="1">
                 <a:solidFill>
                   <a:srgbClr val="2774C7"/>
@@ -5767,6 +5840,7 @@
           <a:lstStyle xmlns:a="http://schemas.openxmlformats.org/drawingml/2006/main"/>
           <a:p xmlns:a="http://schemas.openxmlformats.org/drawingml/2006/main">
             <a:pPr>
+              <a:buNone/>
               <a:defRPr sz="1350" b="0">
                 <a:solidFill>
                   <a:srgbClr val="12263A"/>
@@ -5852,6 +5926,7 @@
           <a:lstStyle xmlns:a="http://schemas.openxmlformats.org/drawingml/2006/main"/>
           <a:p xmlns:a="http://schemas.openxmlformats.org/drawingml/2006/main">
             <a:pPr>
+              <a:buNone/>
               <a:defRPr sz="1050" b="1">
                 <a:solidFill>
                   <a:srgbClr val="E96B4B"/>
@@ -5902,6 +5977,7 @@
           <a:lstStyle xmlns:a="http://schemas.openxmlformats.org/drawingml/2006/main"/>
           <a:p xmlns:a="http://schemas.openxmlformats.org/drawingml/2006/main">
             <a:pPr>
+              <a:buNone/>
               <a:defRPr sz="1275" b="1">
                 <a:solidFill>
                   <a:srgbClr val="12263A"/>
@@ -5952,6 +6028,7 @@
           <a:lstStyle xmlns:a="http://schemas.openxmlformats.org/drawingml/2006/main"/>
           <a:p xmlns:a="http://schemas.openxmlformats.org/drawingml/2006/main">
             <a:pPr>
+              <a:buNone/>
               <a:defRPr sz="825" b="1">
                 <a:solidFill>
                   <a:srgbClr val="667482"/>
@@ -6002,6 +6079,7 @@
           <a:lstStyle xmlns:a="http://schemas.openxmlformats.org/drawingml/2006/main"/>
           <a:p xmlns:a="http://schemas.openxmlformats.org/drawingml/2006/main">
             <a:pPr>
+              <a:buNone/>
               <a:defRPr sz="825" b="1">
                 <a:solidFill>
                   <a:srgbClr val="667482"/>
@@ -6081,6 +6159,7 @@
           <a:lstStyle xmlns:a="http://schemas.openxmlformats.org/drawingml/2006/main"/>
           <a:p xmlns:a="http://schemas.openxmlformats.org/drawingml/2006/main">
             <a:pPr>
+              <a:buNone/>
               <a:defRPr sz="1125" b="1">
                 <a:solidFill>
                   <a:srgbClr val="2774C7"/>
@@ -6131,6 +6210,7 @@
           <a:lstStyle xmlns:a="http://schemas.openxmlformats.org/drawingml/2006/main"/>
           <a:p xmlns:a="http://schemas.openxmlformats.org/drawingml/2006/main">
             <a:pPr>
+              <a:buNone/>
               <a:defRPr sz="3150" b="1">
                 <a:solidFill>
                   <a:srgbClr val="12263A"/>
@@ -6212,6 +6292,7 @@
           <a:lstStyle xmlns:a="http://schemas.openxmlformats.org/drawingml/2006/main"/>
           <a:p xmlns:a="http://schemas.openxmlformats.org/drawingml/2006/main">
             <a:pPr>
+              <a:buNone/>
               <a:defRPr sz="1275" b="0">
                 <a:solidFill>
                   <a:srgbClr val="667482"/>
@@ -6245,7 +6326,7 @@
         </p:nvSpPr>
         <p:spPr>
           <a:xfrm xmlns:a="http://schemas.openxmlformats.org/drawingml/2006/main">
-            <a:off x="3295650" y="2209800"/>
+            <a:off x="3295650" y="2571750"/>
             <a:ext cx="571500" cy="228600"/>
           </a:xfrm>
           <a:prstGeom xmlns:a="http://schemas.openxmlformats.org/drawingml/2006/main" prst="rect">
@@ -6262,6 +6343,7 @@
           <a:lstStyle xmlns:a="http://schemas.openxmlformats.org/drawingml/2006/main"/>
           <a:p xmlns:a="http://schemas.openxmlformats.org/drawingml/2006/main">
             <a:pPr>
+              <a:buNone/>
               <a:defRPr sz="975" b="1">
                 <a:solidFill>
                   <a:srgbClr val="667482"/>
@@ -6295,8 +6377,8 @@
         </p:nvSpPr>
         <p:spPr>
           <a:xfrm xmlns:a="http://schemas.openxmlformats.org/drawingml/2006/main">
-            <a:off x="3295650" y="2495550"/>
-            <a:ext cx="9525" cy="2724150"/>
+            <a:off x="3295650" y="2819400"/>
+            <a:ext cx="9525" cy="2057400"/>
           </a:xfrm>
           <a:prstGeom xmlns:a="http://schemas.openxmlformats.org/drawingml/2006/main" prst="rect">
             <a:avLst/>
@@ -6326,7 +6408,7 @@
         </p:nvSpPr>
         <p:spPr>
           <a:xfrm xmlns:a="http://schemas.openxmlformats.org/drawingml/2006/main">
-            <a:off x="4248150" y="2209800"/>
+            <a:off x="4248150" y="2571750"/>
             <a:ext cx="571500" cy="228600"/>
           </a:xfrm>
           <a:prstGeom xmlns:a="http://schemas.openxmlformats.org/drawingml/2006/main" prst="rect">
@@ -6343,6 +6425,7 @@
           <a:lstStyle xmlns:a="http://schemas.openxmlformats.org/drawingml/2006/main"/>
           <a:p xmlns:a="http://schemas.openxmlformats.org/drawingml/2006/main">
             <a:pPr>
+              <a:buNone/>
               <a:defRPr sz="975" b="1">
                 <a:solidFill>
                   <a:srgbClr val="667482"/>
@@ -6376,8 +6459,8 @@
         </p:nvSpPr>
         <p:spPr>
           <a:xfrm xmlns:a="http://schemas.openxmlformats.org/drawingml/2006/main">
-            <a:off x="4248150" y="2495550"/>
-            <a:ext cx="9525" cy="2724150"/>
+            <a:off x="4248150" y="2819400"/>
+            <a:ext cx="9525" cy="2057400"/>
           </a:xfrm>
           <a:prstGeom xmlns:a="http://schemas.openxmlformats.org/drawingml/2006/main" prst="rect">
             <a:avLst/>
@@ -6407,7 +6490,7 @@
         </p:nvSpPr>
         <p:spPr>
           <a:xfrm xmlns:a="http://schemas.openxmlformats.org/drawingml/2006/main">
-            <a:off x="5200650" y="2209800"/>
+            <a:off x="5200650" y="2571750"/>
             <a:ext cx="571500" cy="228600"/>
           </a:xfrm>
           <a:prstGeom xmlns:a="http://schemas.openxmlformats.org/drawingml/2006/main" prst="rect">
@@ -6424,6 +6507,7 @@
           <a:lstStyle xmlns:a="http://schemas.openxmlformats.org/drawingml/2006/main"/>
           <a:p xmlns:a="http://schemas.openxmlformats.org/drawingml/2006/main">
             <a:pPr>
+              <a:buNone/>
               <a:defRPr sz="975" b="1">
                 <a:solidFill>
                   <a:srgbClr val="667482"/>
@@ -6457,8 +6541,8 @@
         </p:nvSpPr>
         <p:spPr>
           <a:xfrm xmlns:a="http://schemas.openxmlformats.org/drawingml/2006/main">
-            <a:off x="5200650" y="2495550"/>
-            <a:ext cx="9525" cy="2724150"/>
+            <a:off x="5200650" y="2819400"/>
+            <a:ext cx="9525" cy="2057400"/>
           </a:xfrm>
           <a:prstGeom xmlns:a="http://schemas.openxmlformats.org/drawingml/2006/main" prst="rect">
             <a:avLst/>
@@ -6488,7 +6572,7 @@
         </p:nvSpPr>
         <p:spPr>
           <a:xfrm xmlns:a="http://schemas.openxmlformats.org/drawingml/2006/main">
-            <a:off x="6153150" y="2209800"/>
+            <a:off x="6153150" y="2571750"/>
             <a:ext cx="571500" cy="228600"/>
           </a:xfrm>
           <a:prstGeom xmlns:a="http://schemas.openxmlformats.org/drawingml/2006/main" prst="rect">
@@ -6505,6 +6589,7 @@
           <a:lstStyle xmlns:a="http://schemas.openxmlformats.org/drawingml/2006/main"/>
           <a:p xmlns:a="http://schemas.openxmlformats.org/drawingml/2006/main">
             <a:pPr>
+              <a:buNone/>
               <a:defRPr sz="975" b="1">
                 <a:solidFill>
                   <a:srgbClr val="667482"/>
@@ -6538,8 +6623,8 @@
         </p:nvSpPr>
         <p:spPr>
           <a:xfrm xmlns:a="http://schemas.openxmlformats.org/drawingml/2006/main">
-            <a:off x="6153150" y="2495550"/>
-            <a:ext cx="9525" cy="2724150"/>
+            <a:off x="6153150" y="2819400"/>
+            <a:ext cx="9525" cy="2057400"/>
           </a:xfrm>
           <a:prstGeom xmlns:a="http://schemas.openxmlformats.org/drawingml/2006/main" prst="rect">
             <a:avLst/>
@@ -6569,7 +6654,7 @@
         </p:nvSpPr>
         <p:spPr>
           <a:xfrm xmlns:a="http://schemas.openxmlformats.org/drawingml/2006/main">
-            <a:off x="7105650" y="2209800"/>
+            <a:off x="7105650" y="2571750"/>
             <a:ext cx="571500" cy="228600"/>
           </a:xfrm>
           <a:prstGeom xmlns:a="http://schemas.openxmlformats.org/drawingml/2006/main" prst="rect">
@@ -6586,6 +6671,7 @@
           <a:lstStyle xmlns:a="http://schemas.openxmlformats.org/drawingml/2006/main"/>
           <a:p xmlns:a="http://schemas.openxmlformats.org/drawingml/2006/main">
             <a:pPr>
+              <a:buNone/>
               <a:defRPr sz="975" b="1">
                 <a:solidFill>
                   <a:srgbClr val="667482"/>
@@ -6619,8 +6705,8 @@
         </p:nvSpPr>
         <p:spPr>
           <a:xfrm xmlns:a="http://schemas.openxmlformats.org/drawingml/2006/main">
-            <a:off x="7105650" y="2495550"/>
-            <a:ext cx="9525" cy="2724150"/>
+            <a:off x="7105650" y="2819400"/>
+            <a:ext cx="9525" cy="2057400"/>
           </a:xfrm>
           <a:prstGeom xmlns:a="http://schemas.openxmlformats.org/drawingml/2006/main" prst="rect">
             <a:avLst/>
@@ -6650,7 +6736,7 @@
         </p:nvSpPr>
         <p:spPr>
           <a:xfrm xmlns:a="http://schemas.openxmlformats.org/drawingml/2006/main">
-            <a:off x="8058150" y="2209800"/>
+            <a:off x="8058150" y="2571750"/>
             <a:ext cx="571500" cy="228600"/>
           </a:xfrm>
           <a:prstGeom xmlns:a="http://schemas.openxmlformats.org/drawingml/2006/main" prst="rect">
@@ -6667,6 +6753,7 @@
           <a:lstStyle xmlns:a="http://schemas.openxmlformats.org/drawingml/2006/main"/>
           <a:p xmlns:a="http://schemas.openxmlformats.org/drawingml/2006/main">
             <a:pPr>
+              <a:buNone/>
               <a:defRPr sz="975" b="1">
                 <a:solidFill>
                   <a:srgbClr val="667482"/>
@@ -6700,8 +6787,8 @@
         </p:nvSpPr>
         <p:spPr>
           <a:xfrm xmlns:a="http://schemas.openxmlformats.org/drawingml/2006/main">
-            <a:off x="8058150" y="2495550"/>
-            <a:ext cx="9525" cy="2724150"/>
+            <a:off x="8058150" y="2819400"/>
+            <a:ext cx="9525" cy="2057400"/>
           </a:xfrm>
           <a:prstGeom xmlns:a="http://schemas.openxmlformats.org/drawingml/2006/main" prst="rect">
             <a:avLst/>
@@ -6731,7 +6818,7 @@
         </p:nvSpPr>
         <p:spPr>
           <a:xfrm xmlns:a="http://schemas.openxmlformats.org/drawingml/2006/main">
-            <a:off x="9010650" y="2209800"/>
+            <a:off x="9010650" y="2571750"/>
             <a:ext cx="571500" cy="228600"/>
           </a:xfrm>
           <a:prstGeom xmlns:a="http://schemas.openxmlformats.org/drawingml/2006/main" prst="rect">
@@ -6748,6 +6835,7 @@
           <a:lstStyle xmlns:a="http://schemas.openxmlformats.org/drawingml/2006/main"/>
           <a:p xmlns:a="http://schemas.openxmlformats.org/drawingml/2006/main">
             <a:pPr>
+              <a:buNone/>
               <a:defRPr sz="975" b="1">
                 <a:solidFill>
                   <a:srgbClr val="667482"/>
@@ -6781,8 +6869,8 @@
         </p:nvSpPr>
         <p:spPr>
           <a:xfrm xmlns:a="http://schemas.openxmlformats.org/drawingml/2006/main">
-            <a:off x="9010650" y="2495550"/>
-            <a:ext cx="9525" cy="2724150"/>
+            <a:off x="9010650" y="2819400"/>
+            <a:ext cx="9525" cy="2057400"/>
           </a:xfrm>
           <a:prstGeom xmlns:a="http://schemas.openxmlformats.org/drawingml/2006/main" prst="rect">
             <a:avLst/>
@@ -6812,7 +6900,7 @@
         </p:nvSpPr>
         <p:spPr>
           <a:xfrm xmlns:a="http://schemas.openxmlformats.org/drawingml/2006/main">
-            <a:off x="9963150" y="2209800"/>
+            <a:off x="9963150" y="2571750"/>
             <a:ext cx="571500" cy="228600"/>
           </a:xfrm>
           <a:prstGeom xmlns:a="http://schemas.openxmlformats.org/drawingml/2006/main" prst="rect">
@@ -6829,6 +6917,7 @@
           <a:lstStyle xmlns:a="http://schemas.openxmlformats.org/drawingml/2006/main"/>
           <a:p xmlns:a="http://schemas.openxmlformats.org/drawingml/2006/main">
             <a:pPr>
+              <a:buNone/>
               <a:defRPr sz="975" b="1">
                 <a:solidFill>
                   <a:srgbClr val="667482"/>
@@ -6862,8 +6951,8 @@
         </p:nvSpPr>
         <p:spPr>
           <a:xfrm xmlns:a="http://schemas.openxmlformats.org/drawingml/2006/main">
-            <a:off x="9963150" y="2495550"/>
-            <a:ext cx="9525" cy="2724150"/>
+            <a:off x="9963150" y="2819400"/>
+            <a:ext cx="9525" cy="2057400"/>
           </a:xfrm>
           <a:prstGeom xmlns:a="http://schemas.openxmlformats.org/drawingml/2006/main" prst="rect">
             <a:avLst/>
@@ -6893,7 +6982,7 @@
         </p:nvSpPr>
         <p:spPr>
           <a:xfrm xmlns:a="http://schemas.openxmlformats.org/drawingml/2006/main">
-            <a:off x="552450" y="2705100"/>
+            <a:off x="552450" y="3028950"/>
             <a:ext cx="2381250" cy="266700"/>
           </a:xfrm>
           <a:prstGeom xmlns:a="http://schemas.openxmlformats.org/drawingml/2006/main" prst="rect">
@@ -6910,6 +6999,7 @@
           <a:lstStyle xmlns:a="http://schemas.openxmlformats.org/drawingml/2006/main"/>
           <a:p xmlns:a="http://schemas.openxmlformats.org/drawingml/2006/main">
             <a:pPr>
+              <a:buNone/>
               <a:defRPr sz="1275" b="1">
                 <a:solidFill>
                   <a:srgbClr val="12263A"/>
@@ -6943,8 +7033,8 @@
         </p:nvSpPr>
         <p:spPr>
           <a:xfrm xmlns:a="http://schemas.openxmlformats.org/drawingml/2006/main">
-            <a:off x="3352800" y="2647950"/>
-            <a:ext cx="819150" cy="400050"/>
+            <a:off x="3352800" y="2971800"/>
+            <a:ext cx="819150" cy="323850"/>
           </a:xfrm>
           <a:prstGeom xmlns:a="http://schemas.openxmlformats.org/drawingml/2006/main" prst="roundRect">
             <a:avLst>
@@ -6976,7 +7066,7 @@
         </p:nvSpPr>
         <p:spPr>
           <a:xfrm xmlns:a="http://schemas.openxmlformats.org/drawingml/2006/main">
-            <a:off x="552450" y="3333750"/>
+            <a:off x="552450" y="3505200"/>
             <a:ext cx="2381250" cy="266700"/>
           </a:xfrm>
           <a:prstGeom xmlns:a="http://schemas.openxmlformats.org/drawingml/2006/main" prst="rect">
@@ -6993,6 +7083,7 @@
           <a:lstStyle xmlns:a="http://schemas.openxmlformats.org/drawingml/2006/main"/>
           <a:p xmlns:a="http://schemas.openxmlformats.org/drawingml/2006/main">
             <a:pPr>
+              <a:buNone/>
               <a:defRPr sz="1275" b="1">
                 <a:solidFill>
                   <a:srgbClr val="12263A"/>
@@ -7026,8 +7117,8 @@
         </p:nvSpPr>
         <p:spPr>
           <a:xfrm xmlns:a="http://schemas.openxmlformats.org/drawingml/2006/main">
-            <a:off x="4305300" y="3276600"/>
-            <a:ext cx="3676650" cy="400050"/>
+            <a:off x="4305300" y="3448050"/>
+            <a:ext cx="3676650" cy="323850"/>
           </a:xfrm>
           <a:prstGeom xmlns:a="http://schemas.openxmlformats.org/drawingml/2006/main" prst="roundRect">
             <a:avLst>
@@ -7059,7 +7150,7 @@
         </p:nvSpPr>
         <p:spPr>
           <a:xfrm xmlns:a="http://schemas.openxmlformats.org/drawingml/2006/main">
-            <a:off x="552450" y="3962400"/>
+            <a:off x="552450" y="3981450"/>
             <a:ext cx="2381250" cy="266700"/>
           </a:xfrm>
           <a:prstGeom xmlns:a="http://schemas.openxmlformats.org/drawingml/2006/main" prst="rect">
@@ -7076,6 +7167,7 @@
           <a:lstStyle xmlns:a="http://schemas.openxmlformats.org/drawingml/2006/main"/>
           <a:p xmlns:a="http://schemas.openxmlformats.org/drawingml/2006/main">
             <a:pPr>
+              <a:buNone/>
               <a:defRPr sz="1275" b="1">
                 <a:solidFill>
                   <a:srgbClr val="12263A"/>
@@ -7109,8 +7201,8 @@
         </p:nvSpPr>
         <p:spPr>
           <a:xfrm xmlns:a="http://schemas.openxmlformats.org/drawingml/2006/main">
-            <a:off x="8115300" y="3905250"/>
-            <a:ext cx="1771650" cy="400050"/>
+            <a:off x="8115300" y="3924300"/>
+            <a:ext cx="1771650" cy="323850"/>
           </a:xfrm>
           <a:prstGeom xmlns:a="http://schemas.openxmlformats.org/drawingml/2006/main" prst="roundRect">
             <a:avLst>
@@ -7142,7 +7234,7 @@
         </p:nvSpPr>
         <p:spPr>
           <a:xfrm xmlns:a="http://schemas.openxmlformats.org/drawingml/2006/main">
-            <a:off x="552450" y="4591050"/>
+            <a:off x="552450" y="4457700"/>
             <a:ext cx="2381250" cy="266700"/>
           </a:xfrm>
           <a:prstGeom xmlns:a="http://schemas.openxmlformats.org/drawingml/2006/main" prst="rect">
@@ -7159,6 +7251,7 @@
           <a:lstStyle xmlns:a="http://schemas.openxmlformats.org/drawingml/2006/main"/>
           <a:p xmlns:a="http://schemas.openxmlformats.org/drawingml/2006/main">
             <a:pPr>
+              <a:buNone/>
               <a:defRPr sz="1275" b="1">
                 <a:solidFill>
                   <a:srgbClr val="12263A"/>
@@ -7192,8 +7285,8 @@
         </p:nvSpPr>
         <p:spPr>
           <a:xfrm xmlns:a="http://schemas.openxmlformats.org/drawingml/2006/main">
-            <a:off x="10020300" y="4533900"/>
-            <a:ext cx="819150" cy="400050"/>
+            <a:off x="10020300" y="4400550"/>
+            <a:ext cx="819150" cy="323850"/>
           </a:xfrm>
           <a:prstGeom xmlns:a="http://schemas.openxmlformats.org/drawingml/2006/main" prst="roundRect">
             <a:avLst>
@@ -7225,8 +7318,8 @@
         </p:nvSpPr>
         <p:spPr>
           <a:xfrm xmlns:a="http://schemas.openxmlformats.org/drawingml/2006/main">
-            <a:off x="552450" y="5448300"/>
-            <a:ext cx="11087100" cy="609600"/>
+            <a:off x="552450" y="5105400"/>
+            <a:ext cx="11087100" cy="800100"/>
           </a:xfrm>
           <a:prstGeom xmlns:a="http://schemas.openxmlformats.org/drawingml/2006/main" prst="roundRect">
             <a:avLst>
@@ -7258,7 +7351,7 @@
         </p:nvSpPr>
         <p:spPr>
           <a:xfrm xmlns:a="http://schemas.openxmlformats.org/drawingml/2006/main">
-            <a:off x="800100" y="5638800"/>
+            <a:off x="800100" y="5362575"/>
             <a:ext cx="1619250" cy="228600"/>
           </a:xfrm>
           <a:prstGeom xmlns:a="http://schemas.openxmlformats.org/drawingml/2006/main" prst="rect">
@@ -7275,6 +7368,7 @@
           <a:lstStyle xmlns:a="http://schemas.openxmlformats.org/drawingml/2006/main"/>
           <a:p xmlns:a="http://schemas.openxmlformats.org/drawingml/2006/main">
             <a:pPr>
+              <a:buNone/>
               <a:defRPr sz="1050" b="1">
                 <a:solidFill>
                   <a:srgbClr val="BFE2D4"/>
@@ -7308,7 +7402,7 @@
         </p:nvSpPr>
         <p:spPr>
           <a:xfrm xmlns:a="http://schemas.openxmlformats.org/drawingml/2006/main">
-            <a:off x="2476500" y="5619750"/>
+            <a:off x="2476500" y="5343525"/>
             <a:ext cx="8572500" cy="266700"/>
           </a:xfrm>
           <a:prstGeom xmlns:a="http://schemas.openxmlformats.org/drawingml/2006/main" prst="rect">
@@ -7325,6 +7419,7 @@
           <a:lstStyle xmlns:a="http://schemas.openxmlformats.org/drawingml/2006/main"/>
           <a:p xmlns:a="http://schemas.openxmlformats.org/drawingml/2006/main">
             <a:pPr>
+              <a:buNone/>
               <a:defRPr sz="1425" b="1">
                 <a:solidFill>
                   <a:srgbClr val="FFFFFF"/>
@@ -7375,6 +7470,7 @@
           <a:lstStyle xmlns:a="http://schemas.openxmlformats.org/drawingml/2006/main"/>
           <a:p xmlns:a="http://schemas.openxmlformats.org/drawingml/2006/main">
             <a:pPr>
+              <a:buNone/>
               <a:defRPr sz="825" b="1">
                 <a:solidFill>
                   <a:srgbClr val="667482"/>
@@ -7425,6 +7521,7 @@
           <a:lstStyle xmlns:a="http://schemas.openxmlformats.org/drawingml/2006/main"/>
           <a:p xmlns:a="http://schemas.openxmlformats.org/drawingml/2006/main">
             <a:pPr>
+              <a:buNone/>
               <a:defRPr sz="825" b="1">
                 <a:solidFill>
                   <a:srgbClr val="667482"/>
@@ -7438,6 +7535,143 @@
                 </a:solidFill>
               </a:rPr>
               <a:t>06</a:t>
+            </a:r>
+          </a:p>
+        </p:txBody>
+      </p:sp>
+      <p:sp>
+        <p:nvSpPr>
+          <p:cNvPr id="35" name="framework-strip">
+            <a:extLst xmlns:a="http://schemas.openxmlformats.org/drawingml/2006/main">
+              <a:ext uri="{FF2B5EF4-FFF2-40B4-BE49-F238E27FC236}">
+                <a16:creationId xmlns:a16="http://schemas.microsoft.com/office/drawing/2014/main" id="{7242F7D8-4EBD-454B-9A51-9E0794F7A1D7}"/>
+              </a:ext>
+            </a:extLst>
+          </p:cNvPr>
+          <p:cNvSpPr>
+            <a:spLocks xmlns:a="http://schemas.openxmlformats.org/drawingml/2006/main" noGrp="1"/>
+          </p:cNvSpPr>
+          <p:nvPr/>
+        </p:nvSpPr>
+        <p:spPr>
+          <a:xfrm xmlns:a="http://schemas.openxmlformats.org/drawingml/2006/main">
+            <a:off x="552450" y="2076450"/>
+            <a:ext cx="11087100" cy="400050"/>
+          </a:xfrm>
+          <a:prstGeom xmlns:a="http://schemas.openxmlformats.org/drawingml/2006/main" prst="roundRect">
+            <a:avLst>
+              <a:gd name="adj" fmla="val 28571"/>
+            </a:avLst>
+          </a:prstGeom>
+          <a:solidFill xmlns:a="http://schemas.openxmlformats.org/drawingml/2006/main">
+            <a:srgbClr val="EAF2FA"/>
+          </a:solidFill>
+          <a:ln xmlns:a="http://schemas.openxmlformats.org/drawingml/2006/main" w="9525">
+            <a:solidFill>
+              <a:srgbClr val="CBD5DF"/>
+            </a:solidFill>
+            <a:prstDash val="solid"/>
+          </a:ln>
+        </p:spPr>
+      </p:sp>
+      <p:sp>
+        <p:nvSpPr>
+          <p:cNvPr id="36" name="framework-label">
+            <a:extLst xmlns:a="http://schemas.openxmlformats.org/drawingml/2006/main">
+              <a:ext uri="{FF2B5EF4-FFF2-40B4-BE49-F238E27FC236}">
+                <a16:creationId xmlns:a16="http://schemas.microsoft.com/office/drawing/2014/main" id="{5401567E-948B-45B3-9D7F-B8C0798DAC51}"/>
+              </a:ext>
+            </a:extLst>
+          </p:cNvPr>
+          <p:cNvSpPr>
+            <a:spLocks xmlns:a="http://schemas.openxmlformats.org/drawingml/2006/main" noGrp="1"/>
+          </p:cNvSpPr>
+          <p:nvPr/>
+        </p:nvSpPr>
+        <p:spPr>
+          <a:xfrm xmlns:a="http://schemas.openxmlformats.org/drawingml/2006/main">
+            <a:off x="781050" y="2152650"/>
+            <a:ext cx="1428750" cy="247650"/>
+          </a:xfrm>
+          <a:prstGeom xmlns:a="http://schemas.openxmlformats.org/drawingml/2006/main" prst="rect">
+            <a:avLst/>
+          </a:prstGeom>
+          <a:noFill xmlns:a="http://schemas.openxmlformats.org/drawingml/2006/main"/>
+          <a:ln xmlns:a="http://schemas.openxmlformats.org/drawingml/2006/main" w="0">
+            <a:noFill/>
+            <a:prstDash val="solid"/>
+          </a:ln>
+        </p:spPr>
+        <p:txBody>
+          <a:bodyPr xmlns:a="http://schemas.openxmlformats.org/drawingml/2006/main"/>
+          <a:lstStyle xmlns:a="http://schemas.openxmlformats.org/drawingml/2006/main"/>
+          <a:p xmlns:a="http://schemas.openxmlformats.org/drawingml/2006/main">
+            <a:pPr>
+              <a:buNone/>
+              <a:defRPr sz="1200" b="1">
+                <a:solidFill>
+                  <a:srgbClr val="2774C7"/>
+                </a:solidFill>
+              </a:defRPr>
+            </a:pPr>
+            <a:r>
+              <a:rPr sz="1200" b="1">
+                <a:solidFill>
+                  <a:srgbClr val="2774C7"/>
+                </a:solidFill>
+              </a:rPr>
+              <a:t>FRAMEWORKS</a:t>
+            </a:r>
+          </a:p>
+        </p:txBody>
+      </p:sp>
+      <p:sp>
+        <p:nvSpPr>
+          <p:cNvPr id="37" name="framework-list">
+            <a:extLst xmlns:a="http://schemas.openxmlformats.org/drawingml/2006/main">
+              <a:ext uri="{FF2B5EF4-FFF2-40B4-BE49-F238E27FC236}">
+                <a16:creationId xmlns:a16="http://schemas.microsoft.com/office/drawing/2014/main" id="{EB13FE2A-9DFE-4004-8720-6AC345E49E40}"/>
+              </a:ext>
+            </a:extLst>
+          </p:cNvPr>
+          <p:cNvSpPr>
+            <a:spLocks xmlns:a="http://schemas.openxmlformats.org/drawingml/2006/main" noGrp="1"/>
+          </p:cNvSpPr>
+          <p:nvPr/>
+        </p:nvSpPr>
+        <p:spPr>
+          <a:xfrm xmlns:a="http://schemas.openxmlformats.org/drawingml/2006/main">
+            <a:off x="2228850" y="2143125"/>
+            <a:ext cx="9048750" cy="266700"/>
+          </a:xfrm>
+          <a:prstGeom xmlns:a="http://schemas.openxmlformats.org/drawingml/2006/main" prst="rect">
+            <a:avLst/>
+          </a:prstGeom>
+          <a:noFill xmlns:a="http://schemas.openxmlformats.org/drawingml/2006/main"/>
+          <a:ln xmlns:a="http://schemas.openxmlformats.org/drawingml/2006/main" w="0">
+            <a:noFill/>
+            <a:prstDash val="solid"/>
+          </a:ln>
+        </p:spPr>
+        <p:txBody>
+          <a:bodyPr xmlns:a="http://schemas.openxmlformats.org/drawingml/2006/main"/>
+          <a:lstStyle xmlns:a="http://schemas.openxmlformats.org/drawingml/2006/main"/>
+          <a:p xmlns:a="http://schemas.openxmlformats.org/drawingml/2006/main">
+            <a:pPr>
+              <a:buNone/>
+              <a:defRPr sz="1200" b="1">
+                <a:solidFill>
+                  <a:srgbClr val="12263A"/>
+                </a:solidFill>
+              </a:defRPr>
+            </a:pPr>
+            <a:r>
+              <a:rPr sz="1200" b="1">
+                <a:solidFill>
+                  <a:srgbClr val="12263A"/>
+                </a:solidFill>
+              </a:rPr>
+              <a:t>React  ·  Express  ·  PostgreSQL + Prisma  ·  Vitest + Playwright  ·  Docker + GitHub Actions</a:t>
             </a:r>
           </a:p>
         </p:txBody>

--- a/deliverables/StudyCrew_Milestone_Presentation.pptx
+++ b/deliverables/StudyCrew_Milestone_Presentation.pptx
@@ -1,31 +1,131 @@
 
 <file path=ppt/presentation.xml><?xml version="1.0" encoding="utf-8"?>
-<p:presentation xmlns:p="http://schemas.openxmlformats.org/presentationml/2006/main">
+<p:presentation xmlns:a="http://schemas.openxmlformats.org/drawingml/2006/main" xmlns:r="http://schemas.openxmlformats.org/officeDocument/2006/relationships" xmlns:p="http://schemas.openxmlformats.org/presentationml/2006/main">
   <p:sldMasterIdLst>
-    <p:sldMasterId xmlns:r="http://schemas.openxmlformats.org/officeDocument/2006/relationships" id="2147483648" r:id="R2bb0890a3bab44d2"/>
+    <p:sldMasterId id="2147483648" r:id="rId1"/>
   </p:sldMasterIdLst>
   <p:notesMasterIdLst>
-    <p:notesMasterId xmlns:r="http://schemas.openxmlformats.org/officeDocument/2006/relationships" r:id="Rf980805dc242475a"/>
+    <p:notesMasterId r:id="rId8"/>
   </p:notesMasterIdLst>
   <p:sldIdLst>
-    <p:sldId xmlns:r="http://schemas.openxmlformats.org/officeDocument/2006/relationships" id="256" r:id="Rcaf2c6cf3f9641f7"/>
-    <p:sldId xmlns:r="http://schemas.openxmlformats.org/officeDocument/2006/relationships" id="257" r:id="R6be37eb5b1674b93"/>
-    <p:sldId xmlns:r="http://schemas.openxmlformats.org/officeDocument/2006/relationships" id="258" r:id="Rf16311fc159644fa"/>
-    <p:sldId xmlns:r="http://schemas.openxmlformats.org/officeDocument/2006/relationships" id="259" r:id="R004ac8ed25764721"/>
-    <p:sldId xmlns:r="http://schemas.openxmlformats.org/officeDocument/2006/relationships" id="260" r:id="R8c6232198aa04b6b"/>
-    <p:sldId xmlns:r="http://schemas.openxmlformats.org/officeDocument/2006/relationships" id="261" r:id="Rea54e7f9a34042cf"/>
+    <p:sldId id="256" r:id="rId2"/>
+    <p:sldId id="257" r:id="rId3"/>
+    <p:sldId id="258" r:id="rId4"/>
+    <p:sldId id="259" r:id="rId5"/>
+    <p:sldId id="260" r:id="rId6"/>
+    <p:sldId id="261" r:id="rId7"/>
   </p:sldIdLst>
   <p:sldSz cx="12192000" cy="6858000"/>
   <p:notesSz cx="6858000" cy="9144000"/>
+  <p:defaultTextStyle>
+    <a:defPPr>
+      <a:defRPr lang="zh-CN"/>
+    </a:defPPr>
+    <a:lvl1pPr marL="0" algn="l" defTabSz="914400" rtl="0" eaLnBrk="1" latinLnBrk="0" hangingPunct="1">
+      <a:defRPr sz="1800" kern="1200">
+        <a:solidFill>
+          <a:schemeClr val="tx1"/>
+        </a:solidFill>
+        <a:latin typeface="+mn-lt"/>
+        <a:ea typeface="+mn-ea"/>
+        <a:cs typeface="+mn-cs"/>
+      </a:defRPr>
+    </a:lvl1pPr>
+    <a:lvl2pPr marL="457200" algn="l" defTabSz="914400" rtl="0" eaLnBrk="1" latinLnBrk="0" hangingPunct="1">
+      <a:defRPr sz="1800" kern="1200">
+        <a:solidFill>
+          <a:schemeClr val="tx1"/>
+        </a:solidFill>
+        <a:latin typeface="+mn-lt"/>
+        <a:ea typeface="+mn-ea"/>
+        <a:cs typeface="+mn-cs"/>
+      </a:defRPr>
+    </a:lvl2pPr>
+    <a:lvl3pPr marL="914400" algn="l" defTabSz="914400" rtl="0" eaLnBrk="1" latinLnBrk="0" hangingPunct="1">
+      <a:defRPr sz="1800" kern="1200">
+        <a:solidFill>
+          <a:schemeClr val="tx1"/>
+        </a:solidFill>
+        <a:latin typeface="+mn-lt"/>
+        <a:ea typeface="+mn-ea"/>
+        <a:cs typeface="+mn-cs"/>
+      </a:defRPr>
+    </a:lvl3pPr>
+    <a:lvl4pPr marL="1371600" algn="l" defTabSz="914400" rtl="0" eaLnBrk="1" latinLnBrk="0" hangingPunct="1">
+      <a:defRPr sz="1800" kern="1200">
+        <a:solidFill>
+          <a:schemeClr val="tx1"/>
+        </a:solidFill>
+        <a:latin typeface="+mn-lt"/>
+        <a:ea typeface="+mn-ea"/>
+        <a:cs typeface="+mn-cs"/>
+      </a:defRPr>
+    </a:lvl4pPr>
+    <a:lvl5pPr marL="1828800" algn="l" defTabSz="914400" rtl="0" eaLnBrk="1" latinLnBrk="0" hangingPunct="1">
+      <a:defRPr sz="1800" kern="1200">
+        <a:solidFill>
+          <a:schemeClr val="tx1"/>
+        </a:solidFill>
+        <a:latin typeface="+mn-lt"/>
+        <a:ea typeface="+mn-ea"/>
+        <a:cs typeface="+mn-cs"/>
+      </a:defRPr>
+    </a:lvl5pPr>
+    <a:lvl6pPr marL="2286000" algn="l" defTabSz="914400" rtl="0" eaLnBrk="1" latinLnBrk="0" hangingPunct="1">
+      <a:defRPr sz="1800" kern="1200">
+        <a:solidFill>
+          <a:schemeClr val="tx1"/>
+        </a:solidFill>
+        <a:latin typeface="+mn-lt"/>
+        <a:ea typeface="+mn-ea"/>
+        <a:cs typeface="+mn-cs"/>
+      </a:defRPr>
+    </a:lvl6pPr>
+    <a:lvl7pPr marL="2743200" algn="l" defTabSz="914400" rtl="0" eaLnBrk="1" latinLnBrk="0" hangingPunct="1">
+      <a:defRPr sz="1800" kern="1200">
+        <a:solidFill>
+          <a:schemeClr val="tx1"/>
+        </a:solidFill>
+        <a:latin typeface="+mn-lt"/>
+        <a:ea typeface="+mn-ea"/>
+        <a:cs typeface="+mn-cs"/>
+      </a:defRPr>
+    </a:lvl7pPr>
+    <a:lvl8pPr marL="3200400" algn="l" defTabSz="914400" rtl="0" eaLnBrk="1" latinLnBrk="0" hangingPunct="1">
+      <a:defRPr sz="1800" kern="1200">
+        <a:solidFill>
+          <a:schemeClr val="tx1"/>
+        </a:solidFill>
+        <a:latin typeface="+mn-lt"/>
+        <a:ea typeface="+mn-ea"/>
+        <a:cs typeface="+mn-cs"/>
+      </a:defRPr>
+    </a:lvl8pPr>
+    <a:lvl9pPr marL="3657600" algn="l" defTabSz="914400" rtl="0" eaLnBrk="1" latinLnBrk="0" hangingPunct="1">
+      <a:defRPr sz="1800" kern="1200">
+        <a:solidFill>
+          <a:schemeClr val="tx1"/>
+        </a:solidFill>
+        <a:latin typeface="+mn-lt"/>
+        <a:ea typeface="+mn-ea"/>
+        <a:cs typeface="+mn-cs"/>
+      </a:defRPr>
+    </a:lvl9pPr>
+  </p:defaultTextStyle>
+  <p:extLst>
+    <p:ext uri="{EFAFB233-063F-42B5-8137-9DF3F51BA10A}">
+      <p15:sldGuideLst xmlns:p15="http://schemas.microsoft.com/office/powerpoint/2012/main"/>
+    </p:ext>
+  </p:extLst>
 </p:presentation>
 </file>
 
 <file path=ppt/notesMasters/notesMaster1.xml><?xml version="1.0" encoding="utf-8"?>
-<p:notesMaster xmlns:p="http://schemas.openxmlformats.org/presentationml/2006/main">
+<p:notesMaster xmlns:a="http://schemas.openxmlformats.org/drawingml/2006/main" xmlns:r="http://schemas.openxmlformats.org/officeDocument/2006/relationships" xmlns:p="http://schemas.openxmlformats.org/presentationml/2006/main">
   <p:cSld>
     <p:bg>
       <p:bgRef idx="1001">
-        <a:schemeClr xmlns:a="http://schemas.openxmlformats.org/drawingml/2006/main" val="bg1"/>
+        <a:schemeClr val="bg1"/>
       </p:bgRef>
     </p:bg>
     <p:spTree>
@@ -35,380 +135,164 @@
         <p:nvPr/>
       </p:nvGrpSpPr>
       <p:grpSpPr>
-        <a:xfrm xmlns:a="http://schemas.openxmlformats.org/drawingml/2006/main"/>
+        <a:xfrm>
+          <a:off x="0" y="0"/>
+          <a:ext cx="0" cy="0"/>
+          <a:chOff x="0" y="0"/>
+          <a:chExt cx="0" cy="0"/>
+        </a:xfrm>
       </p:grpSpPr>
       <p:sp>
         <p:nvSpPr>
           <p:cNvPr id="2" name="Header Placeholder"/>
-          <p:cNvSpPr/>
+          <p:cNvSpPr>
+            <a:spLocks noGrp="1"/>
+          </p:cNvSpPr>
           <p:nvPr>
             <p:ph type="hdr" sz="quarter"/>
           </p:nvPr>
         </p:nvSpPr>
         <p:spPr>
-          <a:prstGeom xmlns:a="http://schemas.openxmlformats.org/drawingml/2006/main" prst="rect">
-            <a:avLst/>
-          </a:prstGeom>
-        </p:spPr>
-        <p:txBody>
-          <a:bodyPr xmlns:a="http://schemas.openxmlformats.org/drawingml/2006/main"/>
-          <a:lstStyle xmlns:a="http://schemas.openxmlformats.org/drawingml/2006/main"/>
-          <a:p xmlns:a="http://schemas.openxmlformats.org/drawingml/2006/main"/>
+          <a:prstGeom prst="rect">
+            <a:avLst/>
+          </a:prstGeom>
+        </p:spPr>
+        <p:txBody>
+          <a:bodyPr/>
+          <a:lstStyle/>
+          <a:p>
+            <a:endParaRPr/>
+          </a:p>
         </p:txBody>
       </p:sp>
       <p:sp>
         <p:nvSpPr>
           <p:cNvPr id="3" name="Date Placeholder"/>
-          <p:cNvSpPr/>
+          <p:cNvSpPr>
+            <a:spLocks noGrp="1"/>
+          </p:cNvSpPr>
           <p:nvPr>
             <p:ph type="dt" sz="quarter" idx="1"/>
           </p:nvPr>
         </p:nvSpPr>
         <p:spPr>
-          <a:prstGeom xmlns:a="http://schemas.openxmlformats.org/drawingml/2006/main" prst="rect">
-            <a:avLst/>
-          </a:prstGeom>
-        </p:spPr>
-        <p:txBody>
-          <a:bodyPr xmlns:a="http://schemas.openxmlformats.org/drawingml/2006/main"/>
-          <a:lstStyle xmlns:a="http://schemas.openxmlformats.org/drawingml/2006/main"/>
-          <a:p xmlns:a="http://schemas.openxmlformats.org/drawingml/2006/main"/>
+          <a:prstGeom prst="rect">
+            <a:avLst/>
+          </a:prstGeom>
+        </p:spPr>
+        <p:txBody>
+          <a:bodyPr/>
+          <a:lstStyle/>
+          <a:p>
+            <a:endParaRPr/>
+          </a:p>
         </p:txBody>
       </p:sp>
       <p:sp>
         <p:nvSpPr>
           <p:cNvPr id="4" name="Slide Image Placeholder"/>
-          <p:cNvSpPr/>
+          <p:cNvSpPr>
+            <a:spLocks noGrp="1" noRot="1" noChangeAspect="1"/>
+          </p:cNvSpPr>
           <p:nvPr>
             <p:ph type="sldImg" idx="2"/>
           </p:nvPr>
         </p:nvSpPr>
         <p:spPr>
-          <a:prstGeom xmlns:a="http://schemas.openxmlformats.org/drawingml/2006/main" prst="rect">
-            <a:avLst/>
-          </a:prstGeom>
-        </p:spPr>
-        <p:txBody>
-          <a:bodyPr xmlns:a="http://schemas.openxmlformats.org/drawingml/2006/main"/>
-          <a:lstStyle xmlns:a="http://schemas.openxmlformats.org/drawingml/2006/main"/>
-          <a:p xmlns:a="http://schemas.openxmlformats.org/drawingml/2006/main"/>
+          <a:prstGeom prst="rect">
+            <a:avLst/>
+          </a:prstGeom>
+        </p:spPr>
+        <p:txBody>
+          <a:bodyPr/>
+          <a:lstStyle/>
+          <a:p>
+            <a:endParaRPr/>
+          </a:p>
         </p:txBody>
       </p:sp>
       <p:sp>
         <p:nvSpPr>
           <p:cNvPr id="5" name="Notes Placeholder"/>
-          <p:cNvSpPr/>
+          <p:cNvSpPr>
+            <a:spLocks noGrp="1"/>
+          </p:cNvSpPr>
           <p:nvPr>
             <p:ph type="body" sz="quarter" idx="3"/>
           </p:nvPr>
         </p:nvSpPr>
         <p:spPr>
-          <a:prstGeom xmlns:a="http://schemas.openxmlformats.org/drawingml/2006/main" prst="rect">
-            <a:avLst/>
-          </a:prstGeom>
-        </p:spPr>
-        <p:txBody>
-          <a:bodyPr xmlns:a="http://schemas.openxmlformats.org/drawingml/2006/main"/>
-          <a:lstStyle xmlns:a="http://schemas.openxmlformats.org/drawingml/2006/main"/>
-          <a:p xmlns:a="http://schemas.openxmlformats.org/drawingml/2006/main"/>
+          <a:prstGeom prst="rect">
+            <a:avLst/>
+          </a:prstGeom>
+        </p:spPr>
+        <p:txBody>
+          <a:bodyPr/>
+          <a:lstStyle/>
+          <a:p>
+            <a:endParaRPr/>
+          </a:p>
         </p:txBody>
       </p:sp>
       <p:sp>
         <p:nvSpPr>
           <p:cNvPr id="6" name="Footer Placeholder"/>
-          <p:cNvSpPr/>
+          <p:cNvSpPr>
+            <a:spLocks noGrp="1"/>
+          </p:cNvSpPr>
           <p:nvPr>
             <p:ph type="ftr" sz="quarter" idx="4"/>
           </p:nvPr>
         </p:nvSpPr>
         <p:spPr>
-          <a:prstGeom xmlns:a="http://schemas.openxmlformats.org/drawingml/2006/main" prst="rect">
-            <a:avLst/>
-          </a:prstGeom>
-        </p:spPr>
-        <p:txBody>
-          <a:bodyPr xmlns:a="http://schemas.openxmlformats.org/drawingml/2006/main"/>
-          <a:lstStyle xmlns:a="http://schemas.openxmlformats.org/drawingml/2006/main"/>
-          <a:p xmlns:a="http://schemas.openxmlformats.org/drawingml/2006/main"/>
+          <a:prstGeom prst="rect">
+            <a:avLst/>
+          </a:prstGeom>
+        </p:spPr>
+        <p:txBody>
+          <a:bodyPr/>
+          <a:lstStyle/>
+          <a:p>
+            <a:endParaRPr/>
+          </a:p>
         </p:txBody>
       </p:sp>
       <p:sp>
         <p:nvSpPr>
           <p:cNvPr id="7" name="Slide Number Placeholder"/>
-          <p:cNvSpPr/>
+          <p:cNvSpPr>
+            <a:spLocks noGrp="1"/>
+          </p:cNvSpPr>
           <p:nvPr>
             <p:ph type="sldNum" sz="quarter" idx="5"/>
           </p:nvPr>
         </p:nvSpPr>
         <p:spPr>
-          <a:prstGeom xmlns:a="http://schemas.openxmlformats.org/drawingml/2006/main" prst="rect">
-            <a:avLst/>
-          </a:prstGeom>
-        </p:spPr>
-        <p:txBody>
-          <a:bodyPr xmlns:a="http://schemas.openxmlformats.org/drawingml/2006/main"/>
-          <a:lstStyle xmlns:a="http://schemas.openxmlformats.org/drawingml/2006/main"/>
-          <a:p xmlns:a="http://schemas.openxmlformats.org/drawingml/2006/main"/>
+          <a:prstGeom prst="rect">
+            <a:avLst/>
+          </a:prstGeom>
+        </p:spPr>
+        <p:txBody>
+          <a:bodyPr/>
+          <a:lstStyle/>
+          <a:p>
+            <a:endParaRPr/>
+          </a:p>
         </p:txBody>
       </p:sp>
     </p:spTree>
   </p:cSld>
   <p:clrMap bg1="lt1" tx1="dk1" bg2="lt2" tx2="dk2" accent1="accent1" accent2="accent2" accent3="accent3" accent4="accent4" accent5="accent5" accent6="accent6" hlink="hlink" folHlink="folHlink"/>
   <p:notesStyle>
-    <a:lvl1pPr xmlns:a="http://schemas.openxmlformats.org/drawingml/2006/main" marL="0" algn="l" defTabSz="914400" rtl="0" eaLnBrk="1" latinLnBrk="0" hangingPunct="1">
+    <a:lvl1pPr marL="0" algn="l" defTabSz="914400" rtl="0" eaLnBrk="1" latinLnBrk="0" hangingPunct="1">
       <a:defRPr sz="1200" kern="1200"/>
     </a:lvl1pPr>
   </p:notesStyle>
 </p:notesMaster>
 </file>
 
-<file path=ppt/notesMasters/theme/theme3.xml><?xml version="1.0" encoding="utf-8"?>
-<a:theme xmlns:a="http://schemas.openxmlformats.org/drawingml/2006/main" name="ChatGPT">
-  <a:themeElements>
-    <a:clrScheme name="StudyCrew Editorial">
-      <a:dk1>
-        <a:srgbClr val="0B1825"/>
-      </a:dk1>
-      <a:lt1>
-        <a:srgbClr val="FFFFFF"/>
-      </a:lt1>
-      <a:dk2>
-        <a:srgbClr val="12263A"/>
-      </a:dk2>
-      <a:lt2>
-        <a:srgbClr val="EAF2FA"/>
-      </a:lt2>
-      <a:accent1>
-        <a:srgbClr val="2774C7"/>
-      </a:accent1>
-      <a:accent2>
-        <a:srgbClr val="E96B4B"/>
-      </a:accent2>
-      <a:accent3>
-        <a:srgbClr val="BFE2D4"/>
-      </a:accent3>
-      <a:accent4>
-        <a:srgbClr val="D8A72A"/>
-      </a:accent4>
-      <a:accent5>
-        <a:srgbClr val="4D7C78"/>
-      </a:accent5>
-      <a:accent6>
-        <a:srgbClr val="8A6F4D"/>
-      </a:accent6>
-      <a:hlink>
-        <a:srgbClr val="2774C7"/>
-      </a:hlink>
-      <a:folHlink>
-        <a:srgbClr val="E96B4B"/>
-      </a:folHlink>
-    </a:clrScheme>
-    <a:fontScheme name="Office">
-      <a:majorFont>
-        <a:latin typeface="Calibri Light"/>
-        <a:ea typeface="Calibri Light"/>
-        <a:cs typeface="Calibri Light"/>
-      </a:majorFont>
-      <a:minorFont>
-        <a:latin typeface="Calibri"/>
-        <a:ea typeface="Calibri"/>
-        <a:cs typeface="Calibri"/>
-      </a:minorFont>
-    </a:fontScheme>
-    <a:fmtScheme name="StudyCrew Editorial">
-      <a:fillStyleLst>
-        <a:solidFill>
-          <a:schemeClr val="phClr"/>
-        </a:solidFill>
-        <a:gradFill>
-          <a:gsLst>
-            <a:gs pos="0">
-              <a:schemeClr val="phClr">
-                <a:tint val="67000"/>
-                <a:lumMod val="110000"/>
-                <a:satMod val="105000"/>
-              </a:schemeClr>
-            </a:gs>
-            <a:gs pos="50000">
-              <a:schemeClr val="phClr">
-                <a:tint val="73000"/>
-                <a:lumMod val="105000"/>
-                <a:satMod val="103000"/>
-              </a:schemeClr>
-            </a:gs>
-            <a:gs pos="100000">
-              <a:schemeClr val="phClr">
-                <a:tint val="81000"/>
-                <a:lumMod val="105000"/>
-                <a:satMod val="109000"/>
-              </a:schemeClr>
-            </a:gs>
-          </a:gsLst>
-          <a:lin ang="5400000" scaled="0"/>
-        </a:gradFill>
-        <a:gradFill>
-          <a:gsLst>
-            <a:gs pos="0">
-              <a:schemeClr val="phClr">
-                <a:tint val="94000"/>
-                <a:lumMod val="102000"/>
-                <a:satMod val="103000"/>
-              </a:schemeClr>
-            </a:gs>
-            <a:gs pos="50000">
-              <a:schemeClr val="phClr">
-                <a:shade val="100000"/>
-                <a:lumMod val="100000"/>
-                <a:satMod val="110000"/>
-              </a:schemeClr>
-            </a:gs>
-            <a:gs pos="100000">
-              <a:schemeClr val="phClr">
-                <a:shade val="78000"/>
-                <a:lumMod val="99000"/>
-                <a:satMod val="120000"/>
-              </a:schemeClr>
-            </a:gs>
-          </a:gsLst>
-          <a:lin ang="5400000" scaled="0"/>
-        </a:gradFill>
-      </a:fillStyleLst>
-      <a:lnStyleLst>
-        <a:ln w="12700">
-          <a:solidFill>
-            <a:schemeClr val="phClr"/>
-          </a:solidFill>
-          <a:prstDash val="solid"/>
-        </a:ln>
-        <a:ln w="19050">
-          <a:solidFill>
-            <a:schemeClr val="phClr"/>
-          </a:solidFill>
-          <a:prstDash val="solid"/>
-        </a:ln>
-        <a:ln w="25400">
-          <a:solidFill>
-            <a:schemeClr val="phClr"/>
-          </a:solidFill>
-          <a:prstDash val="solid"/>
-        </a:ln>
-      </a:lnStyleLst>
-      <a:effectStyleLst>
-        <a:effectStyle>
-          <a:effectLst/>
-        </a:effectStyle>
-        <a:effectStyle>
-          <a:effectLst/>
-        </a:effectStyle>
-        <a:effectStyle>
-          <a:effectLst>
-            <a:outerShdw blurRad="57150" dist="19050" dir="5400000">
-              <a:srgbClr val="000000">
-                <a:alpha val="16000"/>
-              </a:srgbClr>
-            </a:outerShdw>
-          </a:effectLst>
-        </a:effectStyle>
-        <a:effectStyle>
-          <a:effectLst>
-            <a:outerShdw blurRad="19050" dist="9525" dir="5400000">
-              <a:srgbClr val="000000">
-                <a:alpha val="6000"/>
-              </a:srgbClr>
-            </a:outerShdw>
-          </a:effectLst>
-        </a:effectStyle>
-        <a:effectStyle>
-          <a:effectLst>
-            <a:outerShdw blurRad="28575" dist="9525" dir="5400000">
-              <a:srgbClr val="000000">
-                <a:alpha val="8000"/>
-              </a:srgbClr>
-            </a:outerShdw>
-          </a:effectLst>
-        </a:effectStyle>
-        <a:effectStyle>
-          <a:effectLst>
-            <a:outerShdw blurRad="57150" dist="19050" dir="5400000">
-              <a:srgbClr val="000000">
-                <a:alpha val="10000"/>
-              </a:srgbClr>
-            </a:outerShdw>
-          </a:effectLst>
-        </a:effectStyle>
-        <a:effectStyle>
-          <a:effectLst>
-            <a:outerShdw blurRad="114300" dist="38100" dir="5400000">
-              <a:srgbClr val="000000">
-                <a:alpha val="12000"/>
-              </a:srgbClr>
-            </a:outerShdw>
-          </a:effectLst>
-        </a:effectStyle>
-        <a:effectStyle>
-          <a:effectLst>
-            <a:outerShdw blurRad="171450" dist="57150" dir="5400000">
-              <a:srgbClr val="000000">
-                <a:alpha val="16000"/>
-              </a:srgbClr>
-            </a:outerShdw>
-          </a:effectLst>
-        </a:effectStyle>
-        <a:effectStyle>
-          <a:effectLst>
-            <a:outerShdw blurRad="266700" dist="95250" dir="5400000">
-              <a:srgbClr val="000000">
-                <a:alpha val="24000"/>
-              </a:srgbClr>
-            </a:outerShdw>
-          </a:effectLst>
-        </a:effectStyle>
-      </a:effectStyleLst>
-      <a:bgFillStyleLst>
-        <a:solidFill>
-          <a:schemeClr val="phClr"/>
-        </a:solidFill>
-        <a:solidFill>
-          <a:schemeClr val="phClr">
-            <a:tint val="95000"/>
-            <a:satMod val="170000"/>
-          </a:schemeClr>
-        </a:solidFill>
-        <a:gradFill>
-          <a:gsLst>
-            <a:gs pos="0">
-              <a:schemeClr val="phClr">
-                <a:tint val="93000"/>
-                <a:shade val="98000"/>
-                <a:lumMod val="102000"/>
-                <a:satMod val="150000"/>
-              </a:schemeClr>
-            </a:gs>
-            <a:gs pos="50000">
-              <a:schemeClr val="phClr">
-                <a:tint val="98000"/>
-                <a:shade val="90000"/>
-                <a:lumMod val="103000"/>
-                <a:satMod val="130000"/>
-              </a:schemeClr>
-            </a:gs>
-            <a:gs pos="100000">
-              <a:schemeClr val="phClr">
-                <a:shade val="63000"/>
-                <a:satMod val="120000"/>
-              </a:schemeClr>
-            </a:gs>
-          </a:gsLst>
-          <a:lin ang="5400000" scaled="0"/>
-        </a:gradFill>
-      </a:bgFillStyleLst>
-    </a:fmtScheme>
-  </a:themeElements>
-</a:theme>
-</file>
-
 <file path=ppt/notesSlides/notesSlide1.xml><?xml version="1.0" encoding="utf-8"?>
-<p:notes xmlns:p="http://schemas.openxmlformats.org/presentationml/2006/main">
+<p:notes xmlns:a="http://schemas.openxmlformats.org/drawingml/2006/main" xmlns:r="http://schemas.openxmlformats.org/officeDocument/2006/relationships" xmlns:p="http://schemas.openxmlformats.org/presentationml/2006/main">
   <p:cSld>
     <p:spTree>
       <p:nvGrpSpPr>
@@ -417,16 +301,21 @@
         <p:nvPr/>
       </p:nvGrpSpPr>
       <p:grpSpPr>
-        <a:xfrm xmlns:a="http://schemas.openxmlformats.org/drawingml/2006/main"/>
+        <a:xfrm>
+          <a:off x="0" y="0"/>
+          <a:ext cx="0" cy="0"/>
+          <a:chOff x="0" y="0"/>
+          <a:chExt cx="0" cy="0"/>
+        </a:xfrm>
       </p:grpSpPr>
       <p:sp>
         <p:nvSpPr>
           <p:cNvPr id="2" name="Slide Image Placeholder 1"/>
           <p:cNvSpPr>
-            <a:spLocks xmlns:a="http://schemas.openxmlformats.org/drawingml/2006/main" noGrp="1"/>
+            <a:spLocks noGrp="1" noRot="1" noChangeAspect="1"/>
           </p:cNvSpPr>
           <p:nvPr>
-            <p:ph type="sldImg" idx="0"/>
+            <p:ph type="sldImg"/>
           </p:nvPr>
         </p:nvSpPr>
         <p:spPr/>
@@ -435,7 +324,7 @@
         <p:nvSpPr>
           <p:cNvPr id="3" name="Notes Placeholder 2"/>
           <p:cNvSpPr>
-            <a:spLocks xmlns:a="http://schemas.openxmlformats.org/drawingml/2006/main" noGrp="1"/>
+            <a:spLocks noGrp="1"/>
           </p:cNvSpPr>
           <p:nvPr>
             <p:ph type="body" idx="1"/>
@@ -443,39 +332,37 @@
         </p:nvSpPr>
         <p:spPr/>
         <p:txBody>
-          <a:bodyPr xmlns:a="http://schemas.openxmlformats.org/drawingml/2006/main"/>
-          <a:lstStyle xmlns:a="http://schemas.openxmlformats.org/drawingml/2006/main"/>
-          <a:p xmlns:a="http://schemas.openxmlformats.org/drawingml/2006/main">
+          <a:bodyPr/>
+          <a:lstStyle/>
+          <a:p>
             <a:r>
               <a:t>0:00-0:25 · Speaker A</a:t>
             </a:r>
           </a:p>
-          <a:p xmlns:a="http://schemas.openxmlformats.org/drawingml/2006/main">
+          <a:p>
             <a:r>
               <a:t>StudyCrew makes group work visible before it becomes a problem. It gives student teams one place to coordinate tasks and meetings, then backs contribution conversations with transparent activity evidence.</a:t>
             </a:r>
           </a:p>
-          <a:p xmlns:a="http://schemas.openxmlformats.org/drawingml/2006/main">
-            <a:r>
-              <a:t/>
-            </a:r>
-          </a:p>
-          <a:p xmlns:a="http://schemas.openxmlformats.org/drawingml/2006/main">
+          <a:p>
+            <a:endParaRPr/>
+          </a:p>
+          <a:p>
             <a:r>
               <a:t>[Sources]</a:t>
             </a:r>
           </a:p>
-          <a:p xmlns:a="http://schemas.openxmlformats.org/drawingml/2006/main">
+          <a:p>
             <a:r>
               <a:t>- Assignment brief supplied by the unit, 2026.</a:t>
             </a:r>
           </a:p>
-          <a:p xmlns:a="http://schemas.openxmlformats.org/drawingml/2006/main">
+          <a:p>
             <a:r>
               <a:t>- StudyCrew System Design Report, Section 1.</a:t>
             </a:r>
           </a:p>
-          <a:p xmlns:a="http://schemas.openxmlformats.org/drawingml/2006/main">
+          <a:p>
             <a:r>
               <a:t>[/Sources]</a:t>
             </a:r>
@@ -486,7 +373,7 @@
         <p:nvSpPr>
           <p:cNvPr id="4" name="Slide Number Placeholder 3"/>
           <p:cNvSpPr>
-            <a:spLocks xmlns:a="http://schemas.openxmlformats.org/drawingml/2006/main" noGrp="1"/>
+            <a:spLocks noGrp="1"/>
           </p:cNvSpPr>
           <p:nvPr>
             <p:ph type="sldNum" idx="5"/>
@@ -494,21 +381,23 @@
         </p:nvSpPr>
         <p:spPr/>
         <p:txBody>
-          <a:bodyPr xmlns:a="http://schemas.openxmlformats.org/drawingml/2006/main"/>
-          <a:lstStyle xmlns:a="http://schemas.openxmlformats.org/drawingml/2006/main"/>
-          <a:p xmlns:a="http://schemas.openxmlformats.org/drawingml/2006/main"/>
+          <a:bodyPr/>
+          <a:lstStyle/>
+          <a:p>
+            <a:endParaRPr/>
+          </a:p>
         </p:txBody>
       </p:sp>
     </p:spTree>
   </p:cSld>
   <p:clrMapOvr>
-    <a:masterClrMapping xmlns:a="http://schemas.openxmlformats.org/drawingml/2006/main"/>
+    <a:masterClrMapping/>
   </p:clrMapOvr>
 </p:notes>
 </file>
 
 <file path=ppt/notesSlides/notesSlide2.xml><?xml version="1.0" encoding="utf-8"?>
-<p:notes xmlns:p="http://schemas.openxmlformats.org/presentationml/2006/main">
+<p:notes xmlns:a="http://schemas.openxmlformats.org/drawingml/2006/main" xmlns:r="http://schemas.openxmlformats.org/officeDocument/2006/relationships" xmlns:p="http://schemas.openxmlformats.org/presentationml/2006/main">
   <p:cSld>
     <p:spTree>
       <p:nvGrpSpPr>
@@ -517,16 +406,21 @@
         <p:nvPr/>
       </p:nvGrpSpPr>
       <p:grpSpPr>
-        <a:xfrm xmlns:a="http://schemas.openxmlformats.org/drawingml/2006/main"/>
+        <a:xfrm>
+          <a:off x="0" y="0"/>
+          <a:ext cx="0" cy="0"/>
+          <a:chOff x="0" y="0"/>
+          <a:chExt cx="0" cy="0"/>
+        </a:xfrm>
       </p:grpSpPr>
       <p:sp>
         <p:nvSpPr>
           <p:cNvPr id="2" name="Slide Image Placeholder 1"/>
           <p:cNvSpPr>
-            <a:spLocks xmlns:a="http://schemas.openxmlformats.org/drawingml/2006/main" noGrp="1"/>
+            <a:spLocks noGrp="1" noRot="1" noChangeAspect="1"/>
           </p:cNvSpPr>
           <p:nvPr>
-            <p:ph type="sldImg" idx="0"/>
+            <p:ph type="sldImg"/>
           </p:nvPr>
         </p:nvSpPr>
         <p:spPr/>
@@ -535,7 +429,7 @@
         <p:nvSpPr>
           <p:cNvPr id="3" name="Notes Placeholder 2"/>
           <p:cNvSpPr>
-            <a:spLocks xmlns:a="http://schemas.openxmlformats.org/drawingml/2006/main" noGrp="1"/>
+            <a:spLocks noGrp="1"/>
           </p:cNvSpPr>
           <p:nvPr>
             <p:ph type="body" idx="1"/>
@@ -543,39 +437,37 @@
         </p:nvSpPr>
         <p:spPr/>
         <p:txBody>
-          <a:bodyPr xmlns:a="http://schemas.openxmlformats.org/drawingml/2006/main"/>
-          <a:lstStyle xmlns:a="http://schemas.openxmlformats.org/drawingml/2006/main"/>
-          <a:p xmlns:a="http://schemas.openxmlformats.org/drawingml/2006/main">
+          <a:bodyPr/>
+          <a:lstStyle/>
+          <a:p>
             <a:r>
               <a:t>0:25-1:05 · Speaker A</a:t>
             </a:r>
           </a:p>
-          <a:p xmlns:a="http://schemas.openxmlformats.org/drawingml/2006/main">
+          <a:p>
             <a:r>
               <a:t>Today, work is often split across chat, calendars and task lists. Status becomes stale, blockers surface late, and contribution discussions depend on memory. Teams need coordination and evidence together, without a black-box score.</a:t>
             </a:r>
           </a:p>
-          <a:p xmlns:a="http://schemas.openxmlformats.org/drawingml/2006/main">
-            <a:r>
-              <a:t/>
-            </a:r>
-          </a:p>
-          <a:p xmlns:a="http://schemas.openxmlformats.org/drawingml/2006/main">
+          <a:p>
+            <a:endParaRPr/>
+          </a:p>
+          <a:p>
             <a:r>
               <a:t>[Sources]</a:t>
             </a:r>
           </a:p>
-          <a:p xmlns:a="http://schemas.openxmlformats.org/drawingml/2006/main">
+          <a:p>
             <a:r>
               <a:t>- StudyCrew System Design Report, Section 1.1.</a:t>
             </a:r>
           </a:p>
-          <a:p xmlns:a="http://schemas.openxmlformats.org/drawingml/2006/main">
+          <a:p>
             <a:r>
               <a:t>- Team problem synthesis based on the assignment context.</a:t>
             </a:r>
           </a:p>
-          <a:p xmlns:a="http://schemas.openxmlformats.org/drawingml/2006/main">
+          <a:p>
             <a:r>
               <a:t>[/Sources]</a:t>
             </a:r>
@@ -586,7 +478,7 @@
         <p:nvSpPr>
           <p:cNvPr id="4" name="Slide Number Placeholder 3"/>
           <p:cNvSpPr>
-            <a:spLocks xmlns:a="http://schemas.openxmlformats.org/drawingml/2006/main" noGrp="1"/>
+            <a:spLocks noGrp="1"/>
           </p:cNvSpPr>
           <p:nvPr>
             <p:ph type="sldNum" idx="5"/>
@@ -594,21 +486,23 @@
         </p:nvSpPr>
         <p:spPr/>
         <p:txBody>
-          <a:bodyPr xmlns:a="http://schemas.openxmlformats.org/drawingml/2006/main"/>
-          <a:lstStyle xmlns:a="http://schemas.openxmlformats.org/drawingml/2006/main"/>
-          <a:p xmlns:a="http://schemas.openxmlformats.org/drawingml/2006/main"/>
+          <a:bodyPr/>
+          <a:lstStyle/>
+          <a:p>
+            <a:endParaRPr/>
+          </a:p>
         </p:txBody>
       </p:sp>
     </p:spTree>
   </p:cSld>
   <p:clrMapOvr>
-    <a:masterClrMapping xmlns:a="http://schemas.openxmlformats.org/drawingml/2006/main"/>
+    <a:masterClrMapping/>
   </p:clrMapOvr>
 </p:notes>
 </file>
 
 <file path=ppt/notesSlides/notesSlide3.xml><?xml version="1.0" encoding="utf-8"?>
-<p:notes xmlns:p="http://schemas.openxmlformats.org/presentationml/2006/main">
+<p:notes xmlns:a="http://schemas.openxmlformats.org/drawingml/2006/main" xmlns:r="http://schemas.openxmlformats.org/officeDocument/2006/relationships" xmlns:p="http://schemas.openxmlformats.org/presentationml/2006/main">
   <p:cSld>
     <p:spTree>
       <p:nvGrpSpPr>
@@ -617,16 +511,21 @@
         <p:nvPr/>
       </p:nvGrpSpPr>
       <p:grpSpPr>
-        <a:xfrm xmlns:a="http://schemas.openxmlformats.org/drawingml/2006/main"/>
+        <a:xfrm>
+          <a:off x="0" y="0"/>
+          <a:ext cx="0" cy="0"/>
+          <a:chOff x="0" y="0"/>
+          <a:chExt cx="0" cy="0"/>
+        </a:xfrm>
       </p:grpSpPr>
       <p:sp>
         <p:nvSpPr>
           <p:cNvPr id="2" name="Slide Image Placeholder 1"/>
           <p:cNvSpPr>
-            <a:spLocks xmlns:a="http://schemas.openxmlformats.org/drawingml/2006/main" noGrp="1"/>
+            <a:spLocks noGrp="1" noRot="1" noChangeAspect="1"/>
           </p:cNvSpPr>
           <p:nvPr>
-            <p:ph type="sldImg" idx="0"/>
+            <p:ph type="sldImg"/>
           </p:nvPr>
         </p:nvSpPr>
         <p:spPr/>
@@ -635,7 +534,7 @@
         <p:nvSpPr>
           <p:cNvPr id="3" name="Notes Placeholder 2"/>
           <p:cNvSpPr>
-            <a:spLocks xmlns:a="http://schemas.openxmlformats.org/drawingml/2006/main" noGrp="1"/>
+            <a:spLocks noGrp="1"/>
           </p:cNvSpPr>
           <p:nvPr>
             <p:ph type="body" idx="1"/>
@@ -643,39 +542,37 @@
         </p:nvSpPr>
         <p:spPr/>
         <p:txBody>
-          <a:bodyPr xmlns:a="http://schemas.openxmlformats.org/drawingml/2006/main"/>
-          <a:lstStyle xmlns:a="http://schemas.openxmlformats.org/drawingml/2006/main"/>
-          <a:p xmlns:a="http://schemas.openxmlformats.org/drawingml/2006/main">
+          <a:bodyPr/>
+          <a:lstStyle/>
+          <a:p>
             <a:r>
               <a:t>1:05-2:00 · Speaker B</a:t>
             </a:r>
           </a:p>
-          <a:p xmlns:a="http://schemas.openxmlformats.org/drawingml/2006/main">
+          <a:p>
             <a:r>
               <a:t>StudyCrew follows a simple loop: plan the work, coordinate delivery, and review evidence. Members create and assign tasks, explain blockers, schedule meetings and RSVP. Each successful action adds an immutable event, so totals always lead back to context.</a:t>
             </a:r>
           </a:p>
-          <a:p xmlns:a="http://schemas.openxmlformats.org/drawingml/2006/main">
-            <a:r>
-              <a:t/>
-            </a:r>
-          </a:p>
-          <a:p xmlns:a="http://schemas.openxmlformats.org/drawingml/2006/main">
+          <a:p>
+            <a:endParaRPr/>
+          </a:p>
+          <a:p>
             <a:r>
               <a:t>[Sources]</a:t>
             </a:r>
           </a:p>
-          <a:p xmlns:a="http://schemas.openxmlformats.org/drawingml/2006/main">
+          <a:p>
             <a:r>
               <a:t>- StudyCrew functional requirements FR-PROJ-01 through FR-CONTR-02.</a:t>
             </a:r>
           </a:p>
-          <a:p xmlns:a="http://schemas.openxmlformats.org/drawingml/2006/main">
+          <a:p>
             <a:r>
               <a:t>- database/schema.sql: activity_events table and related foreign keys.</a:t>
             </a:r>
           </a:p>
-          <a:p xmlns:a="http://schemas.openxmlformats.org/drawingml/2006/main">
+          <a:p>
             <a:r>
               <a:t>[/Sources]</a:t>
             </a:r>
@@ -686,7 +583,7 @@
         <p:nvSpPr>
           <p:cNvPr id="4" name="Slide Number Placeholder 3"/>
           <p:cNvSpPr>
-            <a:spLocks xmlns:a="http://schemas.openxmlformats.org/drawingml/2006/main" noGrp="1"/>
+            <a:spLocks noGrp="1"/>
           </p:cNvSpPr>
           <p:nvPr>
             <p:ph type="sldNum" idx="5"/>
@@ -694,21 +591,23 @@
         </p:nvSpPr>
         <p:spPr/>
         <p:txBody>
-          <a:bodyPr xmlns:a="http://schemas.openxmlformats.org/drawingml/2006/main"/>
-          <a:lstStyle xmlns:a="http://schemas.openxmlformats.org/drawingml/2006/main"/>
-          <a:p xmlns:a="http://schemas.openxmlformats.org/drawingml/2006/main"/>
+          <a:bodyPr/>
+          <a:lstStyle/>
+          <a:p>
+            <a:endParaRPr/>
+          </a:p>
         </p:txBody>
       </p:sp>
     </p:spTree>
   </p:cSld>
   <p:clrMapOvr>
-    <a:masterClrMapping xmlns:a="http://schemas.openxmlformats.org/drawingml/2006/main"/>
+    <a:masterClrMapping/>
   </p:clrMapOvr>
 </p:notes>
 </file>
 
 <file path=ppt/notesSlides/notesSlide4.xml><?xml version="1.0" encoding="utf-8"?>
-<p:notes xmlns:p="http://schemas.openxmlformats.org/presentationml/2006/main">
+<p:notes xmlns:a="http://schemas.openxmlformats.org/drawingml/2006/main" xmlns:r="http://schemas.openxmlformats.org/officeDocument/2006/relationships" xmlns:p="http://schemas.openxmlformats.org/presentationml/2006/main">
   <p:cSld>
     <p:spTree>
       <p:nvGrpSpPr>
@@ -717,16 +616,21 @@
         <p:nvPr/>
       </p:nvGrpSpPr>
       <p:grpSpPr>
-        <a:xfrm xmlns:a="http://schemas.openxmlformats.org/drawingml/2006/main"/>
+        <a:xfrm>
+          <a:off x="0" y="0"/>
+          <a:ext cx="0" cy="0"/>
+          <a:chOff x="0" y="0"/>
+          <a:chExt cx="0" cy="0"/>
+        </a:xfrm>
       </p:grpSpPr>
       <p:sp>
         <p:nvSpPr>
           <p:cNvPr id="2" name="Slide Image Placeholder 1"/>
           <p:cNvSpPr>
-            <a:spLocks xmlns:a="http://schemas.openxmlformats.org/drawingml/2006/main" noGrp="1"/>
+            <a:spLocks noGrp="1" noRot="1" noChangeAspect="1"/>
           </p:cNvSpPr>
           <p:nvPr>
-            <p:ph type="sldImg" idx="0"/>
+            <p:ph type="sldImg"/>
           </p:nvPr>
         </p:nvSpPr>
         <p:spPr/>
@@ -735,7 +639,7 @@
         <p:nvSpPr>
           <p:cNvPr id="3" name="Notes Placeholder 2"/>
           <p:cNvSpPr>
-            <a:spLocks xmlns:a="http://schemas.openxmlformats.org/drawingml/2006/main" noGrp="1"/>
+            <a:spLocks noGrp="1"/>
           </p:cNvSpPr>
           <p:nvPr>
             <p:ph type="body" idx="1"/>
@@ -743,44 +647,42 @@
         </p:nvSpPr>
         <p:spPr/>
         <p:txBody>
-          <a:bodyPr xmlns:a="http://schemas.openxmlformats.org/drawingml/2006/main"/>
-          <a:lstStyle xmlns:a="http://schemas.openxmlformats.org/drawingml/2006/main"/>
-          <a:p xmlns:a="http://schemas.openxmlformats.org/drawingml/2006/main">
+          <a:bodyPr/>
+          <a:lstStyle/>
+          <a:p>
             <a:r>
               <a:t>2:00-3:10 · Speaker C</a:t>
             </a:r>
           </a:p>
-          <a:p xmlns:a="http://schemas.openxmlformats.org/drawingml/2006/main">
+          <a:p>
             <a:r>
               <a:t>The task board shows ownership and risk at a glance. Task detail keeps assignments, workflow and discussion together. The contribution view compares activity using both a chart and table, but deliberately avoids grading. Selecting a member reveals the events behind each total.</a:t>
             </a:r>
           </a:p>
-          <a:p xmlns:a="http://schemas.openxmlformats.org/drawingml/2006/main">
-            <a:r>
-              <a:t/>
-            </a:r>
-          </a:p>
-          <a:p xmlns:a="http://schemas.openxmlformats.org/drawingml/2006/main">
+          <a:p>
+            <a:endParaRPr/>
+          </a:p>
+          <a:p>
             <a:r>
               <a:t>[Sources]</a:t>
             </a:r>
           </a:p>
-          <a:p xmlns:a="http://schemas.openxmlformats.org/drawingml/2006/main">
+          <a:p>
             <a:r>
               <a:t>- design/generated/wf-04-task-board.png.</a:t>
             </a:r>
           </a:p>
-          <a:p xmlns:a="http://schemas.openxmlformats.org/drawingml/2006/main">
+          <a:p>
             <a:r>
               <a:t>- design/generated/wf-08-contributions.png.</a:t>
             </a:r>
           </a:p>
-          <a:p xmlns:a="http://schemas.openxmlformats.org/drawingml/2006/main">
+          <a:p>
             <a:r>
               <a:t>- StudyCrew traceability matrix, FR-TASK-01/02/03 and FR-CONTR-01/02.</a:t>
             </a:r>
           </a:p>
-          <a:p xmlns:a="http://schemas.openxmlformats.org/drawingml/2006/main">
+          <a:p>
             <a:r>
               <a:t>[/Sources]</a:t>
             </a:r>
@@ -791,7 +693,7 @@
         <p:nvSpPr>
           <p:cNvPr id="4" name="Slide Number Placeholder 3"/>
           <p:cNvSpPr>
-            <a:spLocks xmlns:a="http://schemas.openxmlformats.org/drawingml/2006/main" noGrp="1"/>
+            <a:spLocks noGrp="1"/>
           </p:cNvSpPr>
           <p:nvPr>
             <p:ph type="sldNum" idx="5"/>
@@ -799,21 +701,23 @@
         </p:nvSpPr>
         <p:spPr/>
         <p:txBody>
-          <a:bodyPr xmlns:a="http://schemas.openxmlformats.org/drawingml/2006/main"/>
-          <a:lstStyle xmlns:a="http://schemas.openxmlformats.org/drawingml/2006/main"/>
-          <a:p xmlns:a="http://schemas.openxmlformats.org/drawingml/2006/main"/>
+          <a:bodyPr/>
+          <a:lstStyle/>
+          <a:p>
+            <a:endParaRPr/>
+          </a:p>
         </p:txBody>
       </p:sp>
     </p:spTree>
   </p:cSld>
   <p:clrMapOvr>
-    <a:masterClrMapping xmlns:a="http://schemas.openxmlformats.org/drawingml/2006/main"/>
+    <a:masterClrMapping/>
   </p:clrMapOvr>
 </p:notes>
 </file>
 
 <file path=ppt/notesSlides/notesSlide5.xml><?xml version="1.0" encoding="utf-8"?>
-<p:notes xmlns:p="http://schemas.openxmlformats.org/presentationml/2006/main">
+<p:notes xmlns:a="http://schemas.openxmlformats.org/drawingml/2006/main" xmlns:r="http://schemas.openxmlformats.org/officeDocument/2006/relationships" xmlns:p="http://schemas.openxmlformats.org/presentationml/2006/main">
   <p:cSld>
     <p:spTree>
       <p:nvGrpSpPr>
@@ -822,16 +726,21 @@
         <p:nvPr/>
       </p:nvGrpSpPr>
       <p:grpSpPr>
-        <a:xfrm xmlns:a="http://schemas.openxmlformats.org/drawingml/2006/main"/>
+        <a:xfrm>
+          <a:off x="0" y="0"/>
+          <a:ext cx="0" cy="0"/>
+          <a:chOff x="0" y="0"/>
+          <a:chExt cx="0" cy="0"/>
+        </a:xfrm>
       </p:grpSpPr>
       <p:sp>
         <p:nvSpPr>
           <p:cNvPr id="2" name="Slide Image Placeholder 1"/>
           <p:cNvSpPr>
-            <a:spLocks xmlns:a="http://schemas.openxmlformats.org/drawingml/2006/main" noGrp="1"/>
+            <a:spLocks noGrp="1" noRot="1" noChangeAspect="1"/>
           </p:cNvSpPr>
           <p:nvPr>
-            <p:ph type="sldImg" idx="0"/>
+            <p:ph type="sldImg"/>
           </p:nvPr>
         </p:nvSpPr>
         <p:spPr/>
@@ -840,7 +749,7 @@
         <p:nvSpPr>
           <p:cNvPr id="3" name="Notes Placeholder 2"/>
           <p:cNvSpPr>
-            <a:spLocks xmlns:a="http://schemas.openxmlformats.org/drawingml/2006/main" noGrp="1"/>
+            <a:spLocks noGrp="1"/>
           </p:cNvSpPr>
           <p:nvPr>
             <p:ph type="body" idx="1"/>
@@ -848,44 +757,42 @@
         </p:nvSpPr>
         <p:spPr/>
         <p:txBody>
-          <a:bodyPr xmlns:a="http://schemas.openxmlformats.org/drawingml/2006/main"/>
-          <a:lstStyle xmlns:a="http://schemas.openxmlformats.org/drawingml/2006/main"/>
-          <a:p xmlns:a="http://schemas.openxmlformats.org/drawingml/2006/main">
+          <a:bodyPr/>
+          <a:lstStyle/>
+          <a:p>
             <a:r>
               <a:t>3:10-4:00 · Speaker C</a:t>
             </a:r>
           </a:p>
-          <a:p xmlns:a="http://schemas.openxmlformats.org/drawingml/2006/main">
+          <a:p>
             <a:r>
               <a:t>The design is feasible and safe. Thirteen normalised PostgreSQL tables support explicit one-to-one, one-to-many and many-to-many relationships. Every protected request checks current membership. React, Express and PostgreSQL let us deliver in tested vertical slices.</a:t>
             </a:r>
           </a:p>
-          <a:p xmlns:a="http://schemas.openxmlformats.org/drawingml/2006/main">
-            <a:r>
-              <a:t/>
-            </a:r>
-          </a:p>
-          <a:p xmlns:a="http://schemas.openxmlformats.org/drawingml/2006/main">
+          <a:p>
+            <a:endParaRPr/>
+          </a:p>
+          <a:p>
             <a:r>
               <a:t>[Sources]</a:t>
             </a:r>
           </a:p>
-          <a:p xmlns:a="http://schemas.openxmlformats.org/drawingml/2006/main">
+          <a:p>
             <a:r>
               <a:t>- database/schema.sql, PostgreSQL 16 physical schema.</a:t>
             </a:r>
           </a:p>
-          <a:p xmlns:a="http://schemas.openxmlformats.org/drawingml/2006/main">
+          <a:p>
             <a:r>
               <a:t>- StudyCrew System Design Report, Sections 3 and 6.</a:t>
             </a:r>
           </a:p>
-          <a:p xmlns:a="http://schemas.openxmlformats.org/drawingml/2006/main">
+          <a:p>
             <a:r>
               <a:t>- IEEE Std 830-1998 is used because the assignment explicitly requests Section 5.3.2.</a:t>
             </a:r>
           </a:p>
-          <a:p xmlns:a="http://schemas.openxmlformats.org/drawingml/2006/main">
+          <a:p>
             <a:r>
               <a:t>[/Sources]</a:t>
             </a:r>
@@ -896,7 +803,7 @@
         <p:nvSpPr>
           <p:cNvPr id="4" name="Slide Number Placeholder 3"/>
           <p:cNvSpPr>
-            <a:spLocks xmlns:a="http://schemas.openxmlformats.org/drawingml/2006/main" noGrp="1"/>
+            <a:spLocks noGrp="1"/>
           </p:cNvSpPr>
           <p:nvPr>
             <p:ph type="sldNum" idx="5"/>
@@ -904,21 +811,23 @@
         </p:nvSpPr>
         <p:spPr/>
         <p:txBody>
-          <a:bodyPr xmlns:a="http://schemas.openxmlformats.org/drawingml/2006/main"/>
-          <a:lstStyle xmlns:a="http://schemas.openxmlformats.org/drawingml/2006/main"/>
-          <a:p xmlns:a="http://schemas.openxmlformats.org/drawingml/2006/main"/>
+          <a:bodyPr/>
+          <a:lstStyle/>
+          <a:p>
+            <a:endParaRPr/>
+          </a:p>
         </p:txBody>
       </p:sp>
     </p:spTree>
   </p:cSld>
   <p:clrMapOvr>
-    <a:masterClrMapping xmlns:a="http://schemas.openxmlformats.org/drawingml/2006/main"/>
+    <a:masterClrMapping/>
   </p:clrMapOvr>
 </p:notes>
 </file>
 
 <file path=ppt/notesSlides/notesSlide6.xml><?xml version="1.0" encoding="utf-8"?>
-<p:notes xmlns:p="http://schemas.openxmlformats.org/presentationml/2006/main">
+<p:notes xmlns:a="http://schemas.openxmlformats.org/drawingml/2006/main" xmlns:r="http://schemas.openxmlformats.org/officeDocument/2006/relationships" xmlns:p="http://schemas.openxmlformats.org/presentationml/2006/main">
   <p:cSld>
     <p:spTree>
       <p:nvGrpSpPr>
@@ -927,16 +836,21 @@
         <p:nvPr/>
       </p:nvGrpSpPr>
       <p:grpSpPr>
-        <a:xfrm xmlns:a="http://schemas.openxmlformats.org/drawingml/2006/main"/>
+        <a:xfrm>
+          <a:off x="0" y="0"/>
+          <a:ext cx="0" cy="0"/>
+          <a:chOff x="0" y="0"/>
+          <a:chExt cx="0" cy="0"/>
+        </a:xfrm>
       </p:grpSpPr>
       <p:sp>
         <p:nvSpPr>
           <p:cNvPr id="2" name="Slide Image Placeholder 1"/>
           <p:cNvSpPr>
-            <a:spLocks xmlns:a="http://schemas.openxmlformats.org/drawingml/2006/main" noGrp="1"/>
+            <a:spLocks noGrp="1" noRot="1" noChangeAspect="1"/>
           </p:cNvSpPr>
           <p:nvPr>
-            <p:ph type="sldImg" idx="0"/>
+            <p:ph type="sldImg"/>
           </p:nvPr>
         </p:nvSpPr>
         <p:spPr/>
@@ -945,7 +859,7 @@
         <p:nvSpPr>
           <p:cNvPr id="3" name="Notes Placeholder 2"/>
           <p:cNvSpPr>
-            <a:spLocks xmlns:a="http://schemas.openxmlformats.org/drawingml/2006/main" noGrp="1"/>
+            <a:spLocks noGrp="1"/>
           </p:cNvSpPr>
           <p:nvPr>
             <p:ph type="body" idx="1"/>
@@ -953,59 +867,55 @@
         </p:nvSpPr>
         <p:spPr/>
         <p:txBody>
-          <a:bodyPr xmlns:a="http://schemas.openxmlformats.org/drawingml/2006/main"/>
-          <a:lstStyle xmlns:a="http://schemas.openxmlformats.org/drawingml/2006/main"/>
-          <a:p xmlns:a="http://schemas.openxmlformats.org/drawingml/2006/main">
+          <a:bodyPr/>
+          <a:lstStyle/>
+          <a:p>
             <a:r>
               <a:t>4:00-4:50 · Speaker D</a:t>
             </a:r>
           </a:p>
-          <a:p xmlns:a="http://schemas.openxmlformats.org/drawingml/2006/main">
+          <a:p>
             <a:r>
               <a:t>Our approved baseline is authentication, private projects, tasks, comments, meetings, notifications and contribution evidence. We will build it with React and Express, PostgreSQL with Prisma, Vitest and Playwright, plus Docker and GitHub Actions. The Gantt moves from MVP validation into core vertical slices, integration and testing, then rehearsal and hardening. Search and export remain gated stretch goals.</a:t>
             </a:r>
           </a:p>
-          <a:p xmlns:a="http://schemas.openxmlformats.org/drawingml/2006/main">
-            <a:r>
-              <a:t/>
-            </a:r>
-          </a:p>
-          <a:p xmlns:a="http://schemas.openxmlformats.org/drawingml/2006/main">
+          <a:p>
+            <a:endParaRPr/>
+          </a:p>
+          <a:p>
             <a:r>
               <a:t>4:50-5:00 close</a:t>
             </a:r>
           </a:p>
-          <a:p xmlns:a="http://schemas.openxmlformats.org/drawingml/2006/main">
+          <a:p>
             <a:r>
               <a:t>StudyCrew does not judge who worked hardest. It gives teams the shared facts to notice risk earlier, coordinate better, and have fairer conversations. We are ready to validate the MVP and begin implementation.</a:t>
             </a:r>
           </a:p>
-          <a:p xmlns:a="http://schemas.openxmlformats.org/drawingml/2006/main">
-            <a:r>
-              <a:t/>
-            </a:r>
-          </a:p>
-          <a:p xmlns:a="http://schemas.openxmlformats.org/drawingml/2006/main">
+          <a:p>
+            <a:endParaRPr/>
+          </a:p>
+          <a:p>
             <a:r>
               <a:t>[Sources]</a:t>
             </a:r>
           </a:p>
-          <a:p xmlns:a="http://schemas.openxmlformats.org/drawingml/2006/main">
+          <a:p>
             <a:r>
               <a:t>- StudyCrew Proposed MVP, approved-baseline candidate.</a:t>
             </a:r>
           </a:p>
-          <a:p xmlns:a="http://schemas.openxmlformats.org/drawingml/2006/main">
+          <a:p>
             <a:r>
               <a:t>- Assignment brief: milestone and final submission schedule.</a:t>
             </a:r>
           </a:p>
-          <a:p xmlns:a="http://schemas.openxmlformats.org/drawingml/2006/main">
+          <a:p>
             <a:r>
               <a:t>- StudyCrew Presentation Script, rehearsal timings.</a:t>
             </a:r>
           </a:p>
-          <a:p xmlns:a="http://schemas.openxmlformats.org/drawingml/2006/main">
+          <a:p>
             <a:r>
               <a:t>[/Sources]</a:t>
             </a:r>
@@ -1016,7 +926,7 @@
         <p:nvSpPr>
           <p:cNvPr id="4" name="Slide Number Placeholder 3"/>
           <p:cNvSpPr>
-            <a:spLocks xmlns:a="http://schemas.openxmlformats.org/drawingml/2006/main" noGrp="1"/>
+            <a:spLocks noGrp="1"/>
           </p:cNvSpPr>
           <p:nvPr>
             <p:ph type="sldNum" idx="5"/>
@@ -1024,21 +934,23 @@
         </p:nvSpPr>
         <p:spPr/>
         <p:txBody>
-          <a:bodyPr xmlns:a="http://schemas.openxmlformats.org/drawingml/2006/main"/>
-          <a:lstStyle xmlns:a="http://schemas.openxmlformats.org/drawingml/2006/main"/>
-          <a:p xmlns:a="http://schemas.openxmlformats.org/drawingml/2006/main"/>
+          <a:bodyPr/>
+          <a:lstStyle/>
+          <a:p>
+            <a:endParaRPr/>
+          </a:p>
         </p:txBody>
       </p:sp>
     </p:spTree>
   </p:cSld>
   <p:clrMapOvr>
-    <a:masterClrMapping xmlns:a="http://schemas.openxmlformats.org/drawingml/2006/main"/>
+    <a:masterClrMapping/>
   </p:clrMapOvr>
 </p:notes>
 </file>
 
 <file path=ppt/slideLayouts/slideLayout1.xml><?xml version="1.0" encoding="utf-8"?>
-<p:sldLayout xmlns:p="http://schemas.openxmlformats.org/presentationml/2006/main" type="title">
+<p:sldLayout xmlns:a="http://schemas.openxmlformats.org/drawingml/2006/main" xmlns:r="http://schemas.openxmlformats.org/officeDocument/2006/relationships" xmlns:p="http://schemas.openxmlformats.org/presentationml/2006/main" type="title">
   <p:cSld name="Title Slide">
     <p:spTree>
       <p:nvGrpSpPr>
@@ -1047,19 +959,27 @@
         <p:nvPr/>
       </p:nvGrpSpPr>
       <p:grpSpPr>
-        <a:xfrm xmlns:a="http://schemas.openxmlformats.org/drawingml/2006/main"/>
+        <a:xfrm>
+          <a:off x="0" y="0"/>
+          <a:ext cx="0" cy="0"/>
+          <a:chOff x="0" y="0"/>
+          <a:chExt cx="0" cy="0"/>
+        </a:xfrm>
       </p:grpSpPr>
     </p:spTree>
   </p:cSld>
+  <p:clrMapOvr>
+    <a:masterClrMapping/>
+  </p:clrMapOvr>
 </p:sldLayout>
 </file>
 
 <file path=ppt/slideMasters/slideMaster1.xml><?xml version="1.0" encoding="utf-8"?>
-<p:sldMaster xmlns:p="http://schemas.openxmlformats.org/presentationml/2006/main">
+<p:sldMaster xmlns:a="http://schemas.openxmlformats.org/drawingml/2006/main" xmlns:r="http://schemas.openxmlformats.org/officeDocument/2006/relationships" xmlns:p="http://schemas.openxmlformats.org/presentationml/2006/main">
   <p:cSld name="Master">
     <p:bg>
       <p:bgRef idx="1001">
-        <a:schemeClr xmlns:a="http://schemas.openxmlformats.org/drawingml/2006/main" val="bg1"/>
+        <a:schemeClr val="bg1"/>
       </p:bgRef>
     </p:bg>
     <p:spTree>
@@ -1069,17 +989,22 @@
         <p:nvPr/>
       </p:nvGrpSpPr>
       <p:grpSpPr>
-        <a:xfrm xmlns:a="http://schemas.openxmlformats.org/drawingml/2006/main"/>
+        <a:xfrm>
+          <a:off x="0" y="0"/>
+          <a:ext cx="0" cy="0"/>
+          <a:chOff x="0" y="0"/>
+          <a:chExt cx="0" cy="0"/>
+        </a:xfrm>
       </p:grpSpPr>
     </p:spTree>
   </p:cSld>
   <p:clrMap bg1="lt1" tx1="dk1" bg2="lt2" tx2="dk2" accent1="accent1" accent2="accent2" accent3="accent3" accent4="accent4" accent5="accent5" accent6="accent6" hlink="hlink" folHlink="folHlink"/>
   <p:sldLayoutIdLst>
-    <p:sldLayoutId xmlns:r="http://schemas.openxmlformats.org/officeDocument/2006/relationships" id="2147483649" r:id="Rd8106d415e1645ac"/>
+    <p:sldLayoutId id="2147483649" r:id="rId1"/>
   </p:sldLayoutIdLst>
   <p:txStyles>
     <p:titleStyle>
-      <a:lvl1pPr xmlns:a="http://schemas.openxmlformats.org/drawingml/2006/main" algn="l">
+      <a:lvl1pPr algn="l">
         <a:lnSpc>
           <a:spcPct val="90000"/>
         </a:lnSpc>
@@ -1098,7 +1023,7 @@
       </a:lvl1pPr>
     </p:titleStyle>
     <p:bodyStyle>
-      <a:lvl1pPr xmlns:a="http://schemas.openxmlformats.org/drawingml/2006/main" marL="228600" indent="-228600" algn="l">
+      <a:lvl1pPr marL="228600" indent="-228600" algn="l">
         <a:lnSpc>
           <a:spcPct val="90000"/>
         </a:lnSpc>
@@ -1115,7 +1040,7 @@
           <a:cs typeface="+mn-lt"/>
         </a:defRPr>
       </a:lvl1pPr>
-      <a:lvl2pPr xmlns:a="http://schemas.openxmlformats.org/drawingml/2006/main" marL="685800" indent="-228600" algn="l">
+      <a:lvl2pPr marL="685800" indent="-228600" algn="l">
         <a:lnSpc>
           <a:spcPct val="90000"/>
         </a:lnSpc>
@@ -1132,7 +1057,7 @@
           <a:cs typeface="+mn-lt"/>
         </a:defRPr>
       </a:lvl2pPr>
-      <a:lvl3pPr xmlns:a="http://schemas.openxmlformats.org/drawingml/2006/main" marL="1143000" indent="-228600" algn="l">
+      <a:lvl3pPr marL="1143000" indent="-228600" algn="l">
         <a:lnSpc>
           <a:spcPct val="90000"/>
         </a:lnSpc>
@@ -1149,7 +1074,7 @@
           <a:cs typeface="+mn-lt"/>
         </a:defRPr>
       </a:lvl3pPr>
-      <a:lvl4pPr xmlns:a="http://schemas.openxmlformats.org/drawingml/2006/main" marL="1600200" indent="-228600" algn="l">
+      <a:lvl4pPr marL="1600200" indent="-228600" algn="l">
         <a:lnSpc>
           <a:spcPct val="90000"/>
         </a:lnSpc>
@@ -1166,7 +1091,7 @@
           <a:cs typeface="+mn-lt"/>
         </a:defRPr>
       </a:lvl4pPr>
-      <a:lvl5pPr xmlns:a="http://schemas.openxmlformats.org/drawingml/2006/main" marL="2057400" indent="-228600" algn="l">
+      <a:lvl5pPr marL="2057400" indent="-228600" algn="l">
         <a:lnSpc>
           <a:spcPct val="90000"/>
         </a:lnSpc>
@@ -1183,7 +1108,7 @@
           <a:cs typeface="+mn-lt"/>
         </a:defRPr>
       </a:lvl5pPr>
-      <a:lvl6pPr xmlns:a="http://schemas.openxmlformats.org/drawingml/2006/main" marL="2514600" indent="-228600" algn="l">
+      <a:lvl6pPr marL="2514600" indent="-228600" algn="l">
         <a:lnSpc>
           <a:spcPct val="90000"/>
         </a:lnSpc>
@@ -1200,7 +1125,7 @@
           <a:cs typeface="+mn-lt"/>
         </a:defRPr>
       </a:lvl6pPr>
-      <a:lvl7pPr xmlns:a="http://schemas.openxmlformats.org/drawingml/2006/main" marL="2971800" indent="-228600" algn="l">
+      <a:lvl7pPr marL="2971800" indent="-228600" algn="l">
         <a:lnSpc>
           <a:spcPct val="90000"/>
         </a:lnSpc>
@@ -1217,7 +1142,7 @@
           <a:cs typeface="+mn-lt"/>
         </a:defRPr>
       </a:lvl7pPr>
-      <a:lvl8pPr xmlns:a="http://schemas.openxmlformats.org/drawingml/2006/main" marL="3429000" indent="-228600" algn="l">
+      <a:lvl8pPr marL="3429000" indent="-228600" algn="l">
         <a:lnSpc>
           <a:spcPct val="90000"/>
         </a:lnSpc>
@@ -1234,7 +1159,7 @@
           <a:cs typeface="+mn-lt"/>
         </a:defRPr>
       </a:lvl8pPr>
-      <a:lvl9pPr xmlns:a="http://schemas.openxmlformats.org/drawingml/2006/main" marL="3886200" indent="-228600" algn="l">
+      <a:lvl9pPr marL="3886200" indent="-228600" algn="l">
         <a:lnSpc>
           <a:spcPct val="90000"/>
         </a:lnSpc>
@@ -1253,7 +1178,7 @@
       </a:lvl9pPr>
     </p:bodyStyle>
     <p:otherStyle>
-      <a:lvl1pPr xmlns:a="http://schemas.openxmlformats.org/drawingml/2006/main" marL="0" algn="l">
+      <a:lvl1pPr marL="0" algn="l">
         <a:buNone/>
         <a:defRPr sz="1800">
           <a:solidFill>
@@ -1264,7 +1189,7 @@
           <a:cs typeface="+mn-lt"/>
         </a:defRPr>
       </a:lvl1pPr>
-      <a:lvl2pPr xmlns:a="http://schemas.openxmlformats.org/drawingml/2006/main" marL="457200" algn="l">
+      <a:lvl2pPr marL="457200" algn="l">
         <a:buNone/>
         <a:defRPr sz="1800">
           <a:solidFill>
@@ -1275,7 +1200,7 @@
           <a:cs typeface="+mn-lt"/>
         </a:defRPr>
       </a:lvl2pPr>
-      <a:lvl3pPr xmlns:a="http://schemas.openxmlformats.org/drawingml/2006/main" marL="914400" algn="l">
+      <a:lvl3pPr marL="914400" algn="l">
         <a:buNone/>
         <a:defRPr sz="1800">
           <a:solidFill>
@@ -1286,7 +1211,7 @@
           <a:cs typeface="+mn-lt"/>
         </a:defRPr>
       </a:lvl3pPr>
-      <a:lvl4pPr xmlns:a="http://schemas.openxmlformats.org/drawingml/2006/main" marL="1371600" algn="l">
+      <a:lvl4pPr marL="1371600" algn="l">
         <a:buNone/>
         <a:defRPr sz="1800">
           <a:solidFill>
@@ -1297,7 +1222,7 @@
           <a:cs typeface="+mn-lt"/>
         </a:defRPr>
       </a:lvl4pPr>
-      <a:lvl5pPr xmlns:a="http://schemas.openxmlformats.org/drawingml/2006/main" marL="1828800" algn="l">
+      <a:lvl5pPr marL="1828800" algn="l">
         <a:buNone/>
         <a:defRPr sz="1800">
           <a:solidFill>
@@ -1308,7 +1233,7 @@
           <a:cs typeface="+mn-lt"/>
         </a:defRPr>
       </a:lvl5pPr>
-      <a:lvl6pPr xmlns:a="http://schemas.openxmlformats.org/drawingml/2006/main" marL="2286000" algn="l">
+      <a:lvl6pPr marL="2286000" algn="l">
         <a:buNone/>
         <a:defRPr sz="1800">
           <a:solidFill>
@@ -1319,7 +1244,7 @@
           <a:cs typeface="+mn-lt"/>
         </a:defRPr>
       </a:lvl6pPr>
-      <a:lvl7pPr xmlns:a="http://schemas.openxmlformats.org/drawingml/2006/main" marL="2743200" algn="l">
+      <a:lvl7pPr marL="2743200" algn="l">
         <a:buNone/>
         <a:defRPr sz="1800">
           <a:solidFill>
@@ -1330,7 +1255,7 @@
           <a:cs typeface="+mn-lt"/>
         </a:defRPr>
       </a:lvl7pPr>
-      <a:lvl8pPr xmlns:a="http://schemas.openxmlformats.org/drawingml/2006/main" marL="3200400" algn="l">
+      <a:lvl8pPr marL="3200400" algn="l">
         <a:buNone/>
         <a:defRPr sz="1800">
           <a:solidFill>
@@ -1341,7 +1266,7 @@
           <a:cs typeface="+mn-lt"/>
         </a:defRPr>
       </a:lvl8pPr>
-      <a:lvl9pPr xmlns:a="http://schemas.openxmlformats.org/drawingml/2006/main" marL="3657600" algn="l">
+      <a:lvl9pPr marL="3657600" algn="l">
         <a:buNone/>
         <a:defRPr sz="1800">
           <a:solidFill>
@@ -1357,259 +1282,15 @@
 </p:sldMaster>
 </file>
 
-<file path=ppt/slideMasters/theme/theme2.xml><?xml version="1.0" encoding="utf-8"?>
-<a:theme xmlns:a="http://schemas.openxmlformats.org/drawingml/2006/main" name="ChatGPT">
-  <a:themeElements>
-    <a:clrScheme name="StudyCrew Editorial">
-      <a:dk1>
-        <a:srgbClr val="0B1825"/>
-      </a:dk1>
-      <a:lt1>
-        <a:srgbClr val="FFFFFF"/>
-      </a:lt1>
-      <a:dk2>
-        <a:srgbClr val="12263A"/>
-      </a:dk2>
-      <a:lt2>
-        <a:srgbClr val="EAF2FA"/>
-      </a:lt2>
-      <a:accent1>
-        <a:srgbClr val="2774C7"/>
-      </a:accent1>
-      <a:accent2>
-        <a:srgbClr val="E96B4B"/>
-      </a:accent2>
-      <a:accent3>
-        <a:srgbClr val="BFE2D4"/>
-      </a:accent3>
-      <a:accent4>
-        <a:srgbClr val="D8A72A"/>
-      </a:accent4>
-      <a:accent5>
-        <a:srgbClr val="4D7C78"/>
-      </a:accent5>
-      <a:accent6>
-        <a:srgbClr val="8A6F4D"/>
-      </a:accent6>
-      <a:hlink>
-        <a:srgbClr val="2774C7"/>
-      </a:hlink>
-      <a:folHlink>
-        <a:srgbClr val="E96B4B"/>
-      </a:folHlink>
-    </a:clrScheme>
-    <a:fontScheme name="Office">
-      <a:majorFont>
-        <a:latin typeface="Calibri Light"/>
-        <a:ea typeface="Calibri Light"/>
-        <a:cs typeface="Calibri Light"/>
-      </a:majorFont>
-      <a:minorFont>
-        <a:latin typeface="Calibri"/>
-        <a:ea typeface="Calibri"/>
-        <a:cs typeface="Calibri"/>
-      </a:minorFont>
-    </a:fontScheme>
-    <a:fmtScheme name="StudyCrew Editorial">
-      <a:fillStyleLst>
-        <a:solidFill>
-          <a:schemeClr val="phClr"/>
-        </a:solidFill>
-        <a:gradFill>
-          <a:gsLst>
-            <a:gs pos="0">
-              <a:schemeClr val="phClr">
-                <a:tint val="67000"/>
-                <a:lumMod val="110000"/>
-                <a:satMod val="105000"/>
-              </a:schemeClr>
-            </a:gs>
-            <a:gs pos="50000">
-              <a:schemeClr val="phClr">
-                <a:tint val="73000"/>
-                <a:lumMod val="105000"/>
-                <a:satMod val="103000"/>
-              </a:schemeClr>
-            </a:gs>
-            <a:gs pos="100000">
-              <a:schemeClr val="phClr">
-                <a:tint val="81000"/>
-                <a:lumMod val="105000"/>
-                <a:satMod val="109000"/>
-              </a:schemeClr>
-            </a:gs>
-          </a:gsLst>
-          <a:lin ang="5400000" scaled="0"/>
-        </a:gradFill>
-        <a:gradFill>
-          <a:gsLst>
-            <a:gs pos="0">
-              <a:schemeClr val="phClr">
-                <a:tint val="94000"/>
-                <a:lumMod val="102000"/>
-                <a:satMod val="103000"/>
-              </a:schemeClr>
-            </a:gs>
-            <a:gs pos="50000">
-              <a:schemeClr val="phClr">
-                <a:shade val="100000"/>
-                <a:lumMod val="100000"/>
-                <a:satMod val="110000"/>
-              </a:schemeClr>
-            </a:gs>
-            <a:gs pos="100000">
-              <a:schemeClr val="phClr">
-                <a:shade val="78000"/>
-                <a:lumMod val="99000"/>
-                <a:satMod val="120000"/>
-              </a:schemeClr>
-            </a:gs>
-          </a:gsLst>
-          <a:lin ang="5400000" scaled="0"/>
-        </a:gradFill>
-      </a:fillStyleLst>
-      <a:lnStyleLst>
-        <a:ln w="12700">
-          <a:solidFill>
-            <a:schemeClr val="phClr"/>
-          </a:solidFill>
-          <a:prstDash val="solid"/>
-        </a:ln>
-        <a:ln w="19050">
-          <a:solidFill>
-            <a:schemeClr val="phClr"/>
-          </a:solidFill>
-          <a:prstDash val="solid"/>
-        </a:ln>
-        <a:ln w="25400">
-          <a:solidFill>
-            <a:schemeClr val="phClr"/>
-          </a:solidFill>
-          <a:prstDash val="solid"/>
-        </a:ln>
-      </a:lnStyleLst>
-      <a:effectStyleLst>
-        <a:effectStyle>
-          <a:effectLst/>
-        </a:effectStyle>
-        <a:effectStyle>
-          <a:effectLst/>
-        </a:effectStyle>
-        <a:effectStyle>
-          <a:effectLst>
-            <a:outerShdw blurRad="57150" dist="19050" dir="5400000">
-              <a:srgbClr val="000000">
-                <a:alpha val="16000"/>
-              </a:srgbClr>
-            </a:outerShdw>
-          </a:effectLst>
-        </a:effectStyle>
-        <a:effectStyle>
-          <a:effectLst>
-            <a:outerShdw blurRad="19050" dist="9525" dir="5400000">
-              <a:srgbClr val="000000">
-                <a:alpha val="6000"/>
-              </a:srgbClr>
-            </a:outerShdw>
-          </a:effectLst>
-        </a:effectStyle>
-        <a:effectStyle>
-          <a:effectLst>
-            <a:outerShdw blurRad="28575" dist="9525" dir="5400000">
-              <a:srgbClr val="000000">
-                <a:alpha val="8000"/>
-              </a:srgbClr>
-            </a:outerShdw>
-          </a:effectLst>
-        </a:effectStyle>
-        <a:effectStyle>
-          <a:effectLst>
-            <a:outerShdw blurRad="57150" dist="19050" dir="5400000">
-              <a:srgbClr val="000000">
-                <a:alpha val="10000"/>
-              </a:srgbClr>
-            </a:outerShdw>
-          </a:effectLst>
-        </a:effectStyle>
-        <a:effectStyle>
-          <a:effectLst>
-            <a:outerShdw blurRad="114300" dist="38100" dir="5400000">
-              <a:srgbClr val="000000">
-                <a:alpha val="12000"/>
-              </a:srgbClr>
-            </a:outerShdw>
-          </a:effectLst>
-        </a:effectStyle>
-        <a:effectStyle>
-          <a:effectLst>
-            <a:outerShdw blurRad="171450" dist="57150" dir="5400000">
-              <a:srgbClr val="000000">
-                <a:alpha val="16000"/>
-              </a:srgbClr>
-            </a:outerShdw>
-          </a:effectLst>
-        </a:effectStyle>
-        <a:effectStyle>
-          <a:effectLst>
-            <a:outerShdw blurRad="266700" dist="95250" dir="5400000">
-              <a:srgbClr val="000000">
-                <a:alpha val="24000"/>
-              </a:srgbClr>
-            </a:outerShdw>
-          </a:effectLst>
-        </a:effectStyle>
-      </a:effectStyleLst>
-      <a:bgFillStyleLst>
-        <a:solidFill>
-          <a:schemeClr val="phClr"/>
-        </a:solidFill>
-        <a:solidFill>
-          <a:schemeClr val="phClr">
-            <a:tint val="95000"/>
-            <a:satMod val="170000"/>
-          </a:schemeClr>
-        </a:solidFill>
-        <a:gradFill>
-          <a:gsLst>
-            <a:gs pos="0">
-              <a:schemeClr val="phClr">
-                <a:tint val="93000"/>
-                <a:shade val="98000"/>
-                <a:lumMod val="102000"/>
-                <a:satMod val="150000"/>
-              </a:schemeClr>
-            </a:gs>
-            <a:gs pos="50000">
-              <a:schemeClr val="phClr">
-                <a:tint val="98000"/>
-                <a:shade val="90000"/>
-                <a:lumMod val="103000"/>
-                <a:satMod val="130000"/>
-              </a:schemeClr>
-            </a:gs>
-            <a:gs pos="100000">
-              <a:schemeClr val="phClr">
-                <a:shade val="63000"/>
-                <a:satMod val="120000"/>
-              </a:schemeClr>
-            </a:gs>
-          </a:gsLst>
-          <a:lin ang="5400000" scaled="0"/>
-        </a:gradFill>
-      </a:bgFillStyleLst>
-    </a:fmtScheme>
-  </a:themeElements>
-</a:theme>
-</file>
-
 <file path=ppt/slides/slide1.xml><?xml version="1.0" encoding="utf-8"?>
-<p:sld xmlns:p="http://schemas.openxmlformats.org/presentationml/2006/main">
+<p:sld xmlns:a="http://schemas.openxmlformats.org/drawingml/2006/main" xmlns:r="http://schemas.openxmlformats.org/officeDocument/2006/relationships" xmlns:p="http://schemas.openxmlformats.org/presentationml/2006/main">
   <p:cSld>
     <p:bg>
       <p:bgPr>
-        <a:solidFill xmlns:a="http://schemas.openxmlformats.org/drawingml/2006/main">
+        <a:solidFill>
           <a:srgbClr val="0B1825"/>
         </a:solidFill>
+        <a:effectLst/>
       </p:bgPr>
     </p:bg>
     <p:spTree>
@@ -1619,71 +1300,83 @@
         <p:nvPr/>
       </p:nvGrpSpPr>
       <p:grpSpPr>
-        <a:xfrm xmlns:a="http://schemas.openxmlformats.org/drawingml/2006/main"/>
+        <a:xfrm>
+          <a:off x="0" y="0"/>
+          <a:ext cx="0" cy="0"/>
+          <a:chOff x="0" y="0"/>
+          <a:chExt cx="0" cy="0"/>
+        </a:xfrm>
       </p:grpSpPr>
       <p:sp>
         <p:nvSpPr>
-          <p:cNvPr id="12" name="">
-            <a:extLst xmlns:a="http://schemas.openxmlformats.org/drawingml/2006/main">
+          <p:cNvPr id="12" name="矩形 11">
+            <a:extLst>
               <a:ext uri="{FF2B5EF4-FFF2-40B4-BE49-F238E27FC236}">
                 <a16:creationId xmlns:a16="http://schemas.microsoft.com/office/drawing/2014/main" id="{7E5E9A08-0DD1-44F8-A88A-4809D076FAF7}"/>
               </a:ext>
             </a:extLst>
           </p:cNvPr>
           <p:cNvSpPr>
-            <a:spLocks xmlns:a="http://schemas.openxmlformats.org/drawingml/2006/main" noGrp="1"/>
-          </p:cNvSpPr>
-          <p:nvPr/>
-        </p:nvSpPr>
-        <p:spPr>
-          <a:xfrm xmlns:a="http://schemas.openxmlformats.org/drawingml/2006/main">
+            <a:spLocks noGrp="1"/>
+          </p:cNvSpPr>
+          <p:nvPr/>
+        </p:nvSpPr>
+        <p:spPr>
+          <a:xfrm>
             <a:off x="0" y="0"/>
             <a:ext cx="152400" cy="6858000"/>
           </a:xfrm>
-          <a:prstGeom xmlns:a="http://schemas.openxmlformats.org/drawingml/2006/main" prst="rect">
-            <a:avLst/>
-          </a:prstGeom>
-          <a:solidFill xmlns:a="http://schemas.openxmlformats.org/drawingml/2006/main">
+          <a:prstGeom prst="rect">
+            <a:avLst/>
+          </a:prstGeom>
+          <a:solidFill>
             <a:srgbClr val="2774C7"/>
           </a:solidFill>
-          <a:ln xmlns:a="http://schemas.openxmlformats.org/drawingml/2006/main" w="0">
-            <a:noFill/>
-            <a:prstDash val="solid"/>
-          </a:ln>
-        </p:spPr>
-      </p:sp>
-      <p:sp>
-        <p:nvSpPr>
-          <p:cNvPr id="2" name="">
-            <a:extLst xmlns:a="http://schemas.openxmlformats.org/drawingml/2006/main">
+          <a:ln w="0">
+            <a:noFill/>
+            <a:prstDash val="solid"/>
+          </a:ln>
+        </p:spPr>
+        <p:txBody>
+          <a:bodyPr/>
+          <a:lstStyle/>
+          <a:p>
+            <a:endParaRPr lang="zh-CN" altLang="en-US"/>
+          </a:p>
+        </p:txBody>
+      </p:sp>
+      <p:sp>
+        <p:nvSpPr>
+          <p:cNvPr id="2" name="矩形 1">
+            <a:extLst>
               <a:ext uri="{FF2B5EF4-FFF2-40B4-BE49-F238E27FC236}">
                 <a16:creationId xmlns:a16="http://schemas.microsoft.com/office/drawing/2014/main" id="{9E25AFC3-AF64-40B7-80E5-0C38F56CE7C2}"/>
               </a:ext>
             </a:extLst>
           </p:cNvPr>
           <p:cNvSpPr>
-            <a:spLocks xmlns:a="http://schemas.openxmlformats.org/drawingml/2006/main" noGrp="1"/>
-          </p:cNvSpPr>
-          <p:nvPr/>
-        </p:nvSpPr>
-        <p:spPr>
-          <a:xfrm xmlns:a="http://schemas.openxmlformats.org/drawingml/2006/main">
+            <a:spLocks noGrp="1"/>
+          </p:cNvSpPr>
+          <p:nvPr/>
+        </p:nvSpPr>
+        <p:spPr>
+          <a:xfrm>
             <a:off x="685800" y="628650"/>
             <a:ext cx="2286000" cy="323850"/>
           </a:xfrm>
-          <a:prstGeom xmlns:a="http://schemas.openxmlformats.org/drawingml/2006/main" prst="rect">
-            <a:avLst/>
-          </a:prstGeom>
-          <a:noFill xmlns:a="http://schemas.openxmlformats.org/drawingml/2006/main"/>
-          <a:ln xmlns:a="http://schemas.openxmlformats.org/drawingml/2006/main" w="0">
-            <a:noFill/>
-            <a:prstDash val="solid"/>
-          </a:ln>
-        </p:spPr>
-        <p:txBody>
-          <a:bodyPr xmlns:a="http://schemas.openxmlformats.org/drawingml/2006/main"/>
-          <a:lstStyle xmlns:a="http://schemas.openxmlformats.org/drawingml/2006/main"/>
-          <a:p xmlns:a="http://schemas.openxmlformats.org/drawingml/2006/main">
+          <a:prstGeom prst="rect">
+            <a:avLst/>
+          </a:prstGeom>
+          <a:noFill/>
+          <a:ln w="0">
+            <a:noFill/>
+            <a:prstDash val="solid"/>
+          </a:ln>
+        </p:spPr>
+        <p:txBody>
+          <a:bodyPr/>
+          <a:lstStyle/>
+          <a:p>
             <a:pPr>
               <a:buNone/>
               <a:defRPr sz="1275" b="1">
@@ -1705,36 +1398,36 @@
       </p:sp>
       <p:sp>
         <p:nvSpPr>
-          <p:cNvPr id="3" name="">
-            <a:extLst xmlns:a="http://schemas.openxmlformats.org/drawingml/2006/main">
+          <p:cNvPr id="3" name="矩形 2">
+            <a:extLst>
               <a:ext uri="{FF2B5EF4-FFF2-40B4-BE49-F238E27FC236}">
                 <a16:creationId xmlns:a16="http://schemas.microsoft.com/office/drawing/2014/main" id="{FC3C9C8E-511C-4992-85C6-2CEB38FE9212}"/>
               </a:ext>
             </a:extLst>
           </p:cNvPr>
           <p:cNvSpPr>
-            <a:spLocks xmlns:a="http://schemas.openxmlformats.org/drawingml/2006/main" noGrp="1"/>
-          </p:cNvSpPr>
-          <p:nvPr/>
-        </p:nvSpPr>
-        <p:spPr>
-          <a:xfrm xmlns:a="http://schemas.openxmlformats.org/drawingml/2006/main">
+            <a:spLocks noGrp="1"/>
+          </p:cNvSpPr>
+          <p:nvPr/>
+        </p:nvSpPr>
+        <p:spPr>
+          <a:xfrm>
             <a:off x="685800" y="1428750"/>
             <a:ext cx="8477250" cy="2571750"/>
           </a:xfrm>
-          <a:prstGeom xmlns:a="http://schemas.openxmlformats.org/drawingml/2006/main" prst="rect">
-            <a:avLst/>
-          </a:prstGeom>
-          <a:noFill xmlns:a="http://schemas.openxmlformats.org/drawingml/2006/main"/>
-          <a:ln xmlns:a="http://schemas.openxmlformats.org/drawingml/2006/main" w="0">
-            <a:noFill/>
-            <a:prstDash val="solid"/>
-          </a:ln>
-        </p:spPr>
-        <p:txBody>
-          <a:bodyPr xmlns:a="http://schemas.openxmlformats.org/drawingml/2006/main"/>
-          <a:lstStyle xmlns:a="http://schemas.openxmlformats.org/drawingml/2006/main"/>
-          <a:p xmlns:a="http://schemas.openxmlformats.org/drawingml/2006/main">
+          <a:prstGeom prst="rect">
+            <a:avLst/>
+          </a:prstGeom>
+          <a:noFill/>
+          <a:ln w="0">
+            <a:noFill/>
+            <a:prstDash val="solid"/>
+          </a:ln>
+        </p:spPr>
+        <p:txBody>
+          <a:bodyPr/>
+          <a:lstStyle/>
+          <a:p>
             <a:pPr>
               <a:buNone/>
               <a:defRPr sz="4650" b="1">
@@ -1744,7 +1437,7 @@
               </a:defRPr>
             </a:pPr>
             <a:r>
-              <a:rPr sz="4650" b="1">
+              <a:rPr sz="4650" b="1" dirty="0">
                 <a:solidFill>
                   <a:srgbClr val="FFFFFF"/>
                 </a:solidFill>
@@ -1752,7 +1445,7 @@
               <a:t>Make group work</a:t>
             </a:r>
           </a:p>
-          <a:p xmlns:a="http://schemas.openxmlformats.org/drawingml/2006/main">
+          <a:p>
             <a:pPr>
               <a:buNone/>
               <a:defRPr sz="4650" b="1">
@@ -1762,7 +1455,7 @@
               </a:defRPr>
             </a:pPr>
             <a:r>
-              <a:rPr sz="4650" b="1">
+              <a:rPr sz="4650" b="1" dirty="0">
                 <a:solidFill>
                   <a:srgbClr val="FFFFFF"/>
                 </a:solidFill>
@@ -1770,7 +1463,7 @@
               <a:t>visible before it</a:t>
             </a:r>
           </a:p>
-          <a:p xmlns:a="http://schemas.openxmlformats.org/drawingml/2006/main">
+          <a:p>
             <a:pPr>
               <a:buNone/>
               <a:defRPr sz="4650" b="1">
@@ -1780,7 +1473,7 @@
               </a:defRPr>
             </a:pPr>
             <a:r>
-              <a:rPr sz="4650" b="1">
+              <a:rPr sz="4650" b="1" dirty="0">
                 <a:solidFill>
                   <a:srgbClr val="FFFFFF"/>
                 </a:solidFill>
@@ -1792,67 +1485,74 @@
       </p:sp>
       <p:sp>
         <p:nvSpPr>
-          <p:cNvPr id="4" name="">
-            <a:extLst xmlns:a="http://schemas.openxmlformats.org/drawingml/2006/main">
+          <p:cNvPr id="4" name="矩形 3">
+            <a:extLst>
               <a:ext uri="{FF2B5EF4-FFF2-40B4-BE49-F238E27FC236}">
                 <a16:creationId xmlns:a16="http://schemas.microsoft.com/office/drawing/2014/main" id="{65451645-413F-44FA-86F9-8D4FB89850D8}"/>
               </a:ext>
             </a:extLst>
           </p:cNvPr>
           <p:cNvSpPr>
-            <a:spLocks xmlns:a="http://schemas.openxmlformats.org/drawingml/2006/main" noGrp="1"/>
-          </p:cNvSpPr>
-          <p:nvPr/>
-        </p:nvSpPr>
-        <p:spPr>
-          <a:xfrm xmlns:a="http://schemas.openxmlformats.org/drawingml/2006/main">
+            <a:spLocks noGrp="1"/>
+          </p:cNvSpPr>
+          <p:nvPr/>
+        </p:nvSpPr>
+        <p:spPr>
+          <a:xfrm>
             <a:off x="685800" y="4343400"/>
             <a:ext cx="2762250" cy="57150"/>
           </a:xfrm>
-          <a:prstGeom xmlns:a="http://schemas.openxmlformats.org/drawingml/2006/main" prst="rect">
-            <a:avLst/>
-          </a:prstGeom>
-          <a:solidFill xmlns:a="http://schemas.openxmlformats.org/drawingml/2006/main">
+          <a:prstGeom prst="rect">
+            <a:avLst/>
+          </a:prstGeom>
+          <a:solidFill>
             <a:srgbClr val="E96B4B"/>
           </a:solidFill>
-          <a:ln xmlns:a="http://schemas.openxmlformats.org/drawingml/2006/main" w="0">
-            <a:noFill/>
-            <a:prstDash val="solid"/>
-          </a:ln>
-        </p:spPr>
-      </p:sp>
-      <p:sp>
-        <p:nvSpPr>
-          <p:cNvPr id="5" name="">
-            <a:extLst xmlns:a="http://schemas.openxmlformats.org/drawingml/2006/main">
+          <a:ln w="0">
+            <a:noFill/>
+            <a:prstDash val="solid"/>
+          </a:ln>
+        </p:spPr>
+        <p:txBody>
+          <a:bodyPr/>
+          <a:lstStyle/>
+          <a:p>
+            <a:endParaRPr lang="zh-CN" altLang="en-US"/>
+          </a:p>
+        </p:txBody>
+      </p:sp>
+      <p:sp>
+        <p:nvSpPr>
+          <p:cNvPr id="5" name="矩形 4">
+            <a:extLst>
               <a:ext uri="{FF2B5EF4-FFF2-40B4-BE49-F238E27FC236}">
                 <a16:creationId xmlns:a16="http://schemas.microsoft.com/office/drawing/2014/main" id="{A357ABE0-34FC-42AE-8892-B705450577F6}"/>
               </a:ext>
             </a:extLst>
           </p:cNvPr>
           <p:cNvSpPr>
-            <a:spLocks xmlns:a="http://schemas.openxmlformats.org/drawingml/2006/main" noGrp="1"/>
-          </p:cNvSpPr>
-          <p:nvPr/>
-        </p:nvSpPr>
-        <p:spPr>
-          <a:xfrm xmlns:a="http://schemas.openxmlformats.org/drawingml/2006/main">
+            <a:spLocks noGrp="1"/>
+          </p:cNvSpPr>
+          <p:nvPr/>
+        </p:nvSpPr>
+        <p:spPr>
+          <a:xfrm>
             <a:off x="685800" y="4629150"/>
             <a:ext cx="6953250" cy="742950"/>
           </a:xfrm>
-          <a:prstGeom xmlns:a="http://schemas.openxmlformats.org/drawingml/2006/main" prst="rect">
-            <a:avLst/>
-          </a:prstGeom>
-          <a:noFill xmlns:a="http://schemas.openxmlformats.org/drawingml/2006/main"/>
-          <a:ln xmlns:a="http://schemas.openxmlformats.org/drawingml/2006/main" w="0">
-            <a:noFill/>
-            <a:prstDash val="solid"/>
-          </a:ln>
-        </p:spPr>
-        <p:txBody>
-          <a:bodyPr xmlns:a="http://schemas.openxmlformats.org/drawingml/2006/main"/>
-          <a:lstStyle xmlns:a="http://schemas.openxmlformats.org/drawingml/2006/main"/>
-          <a:p xmlns:a="http://schemas.openxmlformats.org/drawingml/2006/main">
+          <a:prstGeom prst="rect">
+            <a:avLst/>
+          </a:prstGeom>
+          <a:noFill/>
+          <a:ln w="0">
+            <a:noFill/>
+            <a:prstDash val="solid"/>
+          </a:ln>
+        </p:spPr>
+        <p:txBody>
+          <a:bodyPr/>
+          <a:lstStyle/>
+          <a:p>
             <a:pPr>
               <a:buNone/>
               <a:defRPr sz="1800" b="0">
@@ -1862,7 +1562,7 @@
               </a:defRPr>
             </a:pPr>
             <a:r>
-              <a:rPr sz="1800" b="0">
+              <a:rPr sz="1800" b="0" dirty="0">
                 <a:solidFill>
                   <a:srgbClr val="D8E3EC"/>
                 </a:solidFill>
@@ -1874,69 +1574,76 @@
       </p:sp>
       <p:sp>
         <p:nvSpPr>
-          <p:cNvPr id="6" name="">
-            <a:extLst xmlns:a="http://schemas.openxmlformats.org/drawingml/2006/main">
+          <p:cNvPr id="6" name="矩形: 圆角 5">
+            <a:extLst>
               <a:ext uri="{FF2B5EF4-FFF2-40B4-BE49-F238E27FC236}">
                 <a16:creationId xmlns:a16="http://schemas.microsoft.com/office/drawing/2014/main" id="{31F14BA2-FCEC-4D01-A325-35E654EE9B06}"/>
               </a:ext>
             </a:extLst>
           </p:cNvPr>
           <p:cNvSpPr>
-            <a:spLocks xmlns:a="http://schemas.openxmlformats.org/drawingml/2006/main" noGrp="1"/>
-          </p:cNvSpPr>
-          <p:nvPr/>
-        </p:nvSpPr>
-        <p:spPr>
-          <a:xfrm xmlns:a="http://schemas.openxmlformats.org/drawingml/2006/main">
+            <a:spLocks noGrp="1"/>
+          </p:cNvSpPr>
+          <p:nvPr/>
+        </p:nvSpPr>
+        <p:spPr>
+          <a:xfrm>
             <a:off x="9124950" y="1200150"/>
             <a:ext cx="2095500" cy="3848100"/>
           </a:xfrm>
-          <a:prstGeom xmlns:a="http://schemas.openxmlformats.org/drawingml/2006/main" prst="roundRect">
+          <a:prstGeom prst="roundRect">
             <a:avLst>
               <a:gd name="adj" fmla="val 10000"/>
             </a:avLst>
           </a:prstGeom>
-          <a:solidFill xmlns:a="http://schemas.openxmlformats.org/drawingml/2006/main">
+          <a:solidFill>
             <a:srgbClr val="2774C7"/>
           </a:solidFill>
-          <a:ln xmlns:a="http://schemas.openxmlformats.org/drawingml/2006/main" w="0">
-            <a:noFill/>
-            <a:prstDash val="solid"/>
-          </a:ln>
-        </p:spPr>
-      </p:sp>
-      <p:sp>
-        <p:nvSpPr>
-          <p:cNvPr id="7" name="">
-            <a:extLst xmlns:a="http://schemas.openxmlformats.org/drawingml/2006/main">
+          <a:ln w="0">
+            <a:noFill/>
+            <a:prstDash val="solid"/>
+          </a:ln>
+        </p:spPr>
+        <p:txBody>
+          <a:bodyPr/>
+          <a:lstStyle/>
+          <a:p>
+            <a:endParaRPr lang="zh-CN" altLang="en-US"/>
+          </a:p>
+        </p:txBody>
+      </p:sp>
+      <p:sp>
+        <p:nvSpPr>
+          <p:cNvPr id="7" name="矩形 6">
+            <a:extLst>
               <a:ext uri="{FF2B5EF4-FFF2-40B4-BE49-F238E27FC236}">
                 <a16:creationId xmlns:a16="http://schemas.microsoft.com/office/drawing/2014/main" id="{E49A5B29-1A40-496A-A28B-DDEB558CE420}"/>
               </a:ext>
             </a:extLst>
           </p:cNvPr>
           <p:cNvSpPr>
-            <a:spLocks xmlns:a="http://schemas.openxmlformats.org/drawingml/2006/main" noGrp="1"/>
-          </p:cNvSpPr>
-          <p:nvPr/>
-        </p:nvSpPr>
-        <p:spPr>
-          <a:xfrm xmlns:a="http://schemas.openxmlformats.org/drawingml/2006/main">
+            <a:spLocks noGrp="1"/>
+          </p:cNvSpPr>
+          <p:nvPr/>
+        </p:nvSpPr>
+        <p:spPr>
+          <a:xfrm>
             <a:off x="9448800" y="1657350"/>
             <a:ext cx="1428750" cy="342900"/>
           </a:xfrm>
-          <a:prstGeom xmlns:a="http://schemas.openxmlformats.org/drawingml/2006/main" prst="rect">
-            <a:avLst/>
-          </a:prstGeom>
-          <a:noFill xmlns:a="http://schemas.openxmlformats.org/drawingml/2006/main"/>
-          <a:ln xmlns:a="http://schemas.openxmlformats.org/drawingml/2006/main" w="0">
-            <a:noFill/>
-            <a:prstDash val="solid"/>
-          </a:ln>
-        </p:spPr>
-        <p:txBody>
-          <a:bodyPr xmlns:a="http://schemas.openxmlformats.org/drawingml/2006/main"/>
-          <a:lstStyle xmlns:a="http://schemas.openxmlformats.org/drawingml/2006/main"/>
-          <a:p xmlns:a="http://schemas.openxmlformats.org/drawingml/2006/main">
+          <a:prstGeom prst="rect">
+            <a:avLst/>
+          </a:prstGeom>
+          <a:noFill/>
+          <a:ln w="0">
+            <a:noFill/>
+            <a:prstDash val="solid"/>
+          </a:ln>
+        </p:spPr>
+        <p:txBody>
+          <a:bodyPr/>
+          <a:lstStyle/>
+          <a:p>
             <a:pPr>
               <a:buNone/>
               <a:defRPr sz="1800" b="1">
@@ -1958,36 +1665,36 @@
       </p:sp>
       <p:sp>
         <p:nvSpPr>
-          <p:cNvPr id="8" name="">
-            <a:extLst xmlns:a="http://schemas.openxmlformats.org/drawingml/2006/main">
+          <p:cNvPr id="8" name="矩形 7">
+            <a:extLst>
               <a:ext uri="{FF2B5EF4-FFF2-40B4-BE49-F238E27FC236}">
                 <a16:creationId xmlns:a16="http://schemas.microsoft.com/office/drawing/2014/main" id="{D3AF8C70-1C77-4453-9859-EDD6155FDDA2}"/>
               </a:ext>
             </a:extLst>
           </p:cNvPr>
           <p:cNvSpPr>
-            <a:spLocks xmlns:a="http://schemas.openxmlformats.org/drawingml/2006/main" noGrp="1"/>
-          </p:cNvSpPr>
-          <p:nvPr/>
-        </p:nvSpPr>
-        <p:spPr>
-          <a:xfrm xmlns:a="http://schemas.openxmlformats.org/drawingml/2006/main">
+            <a:spLocks noGrp="1"/>
+          </p:cNvSpPr>
+          <p:nvPr/>
+        </p:nvSpPr>
+        <p:spPr>
+          <a:xfrm>
             <a:off x="9448800" y="2705100"/>
             <a:ext cx="1619250" cy="342900"/>
           </a:xfrm>
-          <a:prstGeom xmlns:a="http://schemas.openxmlformats.org/drawingml/2006/main" prst="rect">
-            <a:avLst/>
-          </a:prstGeom>
-          <a:noFill xmlns:a="http://schemas.openxmlformats.org/drawingml/2006/main"/>
-          <a:ln xmlns:a="http://schemas.openxmlformats.org/drawingml/2006/main" w="0">
-            <a:noFill/>
-            <a:prstDash val="solid"/>
-          </a:ln>
-        </p:spPr>
-        <p:txBody>
-          <a:bodyPr xmlns:a="http://schemas.openxmlformats.org/drawingml/2006/main"/>
-          <a:lstStyle xmlns:a="http://schemas.openxmlformats.org/drawingml/2006/main"/>
-          <a:p xmlns:a="http://schemas.openxmlformats.org/drawingml/2006/main">
+          <a:prstGeom prst="rect">
+            <a:avLst/>
+          </a:prstGeom>
+          <a:noFill/>
+          <a:ln w="0">
+            <a:noFill/>
+            <a:prstDash val="solid"/>
+          </a:ln>
+        </p:spPr>
+        <p:txBody>
+          <a:bodyPr/>
+          <a:lstStyle/>
+          <a:p>
             <a:pPr>
               <a:buNone/>
               <a:defRPr sz="1800" b="1">
@@ -1997,7 +1704,7 @@
               </a:defRPr>
             </a:pPr>
             <a:r>
-              <a:rPr sz="1800" b="1">
+              <a:rPr sz="1800" b="1" dirty="0">
                 <a:solidFill>
                   <a:srgbClr val="FFFFFF"/>
                 </a:solidFill>
@@ -2009,36 +1716,36 @@
       </p:sp>
       <p:sp>
         <p:nvSpPr>
-          <p:cNvPr id="9" name="">
-            <a:extLst xmlns:a="http://schemas.openxmlformats.org/drawingml/2006/main">
+          <p:cNvPr id="9" name="矩形 8">
+            <a:extLst>
               <a:ext uri="{FF2B5EF4-FFF2-40B4-BE49-F238E27FC236}">
                 <a16:creationId xmlns:a16="http://schemas.microsoft.com/office/drawing/2014/main" id="{F0F36EEC-C812-4E2C-B96C-443FD5D7C90B}"/>
               </a:ext>
             </a:extLst>
           </p:cNvPr>
           <p:cNvSpPr>
-            <a:spLocks xmlns:a="http://schemas.openxmlformats.org/drawingml/2006/main" noGrp="1"/>
-          </p:cNvSpPr>
-          <p:nvPr/>
-        </p:nvSpPr>
-        <p:spPr>
-          <a:xfrm xmlns:a="http://schemas.openxmlformats.org/drawingml/2006/main">
+            <a:spLocks noGrp="1"/>
+          </p:cNvSpPr>
+          <p:nvPr/>
+        </p:nvSpPr>
+        <p:spPr>
+          <a:xfrm>
             <a:off x="9448800" y="3752850"/>
             <a:ext cx="1428750" cy="342900"/>
           </a:xfrm>
-          <a:prstGeom xmlns:a="http://schemas.openxmlformats.org/drawingml/2006/main" prst="rect">
-            <a:avLst/>
-          </a:prstGeom>
-          <a:noFill xmlns:a="http://schemas.openxmlformats.org/drawingml/2006/main"/>
-          <a:ln xmlns:a="http://schemas.openxmlformats.org/drawingml/2006/main" w="0">
-            <a:noFill/>
-            <a:prstDash val="solid"/>
-          </a:ln>
-        </p:spPr>
-        <p:txBody>
-          <a:bodyPr xmlns:a="http://schemas.openxmlformats.org/drawingml/2006/main"/>
-          <a:lstStyle xmlns:a="http://schemas.openxmlformats.org/drawingml/2006/main"/>
-          <a:p xmlns:a="http://schemas.openxmlformats.org/drawingml/2006/main">
+          <a:prstGeom prst="rect">
+            <a:avLst/>
+          </a:prstGeom>
+          <a:noFill/>
+          <a:ln w="0">
+            <a:noFill/>
+            <a:prstDash val="solid"/>
+          </a:ln>
+        </p:spPr>
+        <p:txBody>
+          <a:bodyPr/>
+          <a:lstStyle/>
+          <a:p>
             <a:pPr>
               <a:buNone/>
               <a:defRPr sz="1800" b="1">
@@ -2060,36 +1767,36 @@
       </p:sp>
       <p:sp>
         <p:nvSpPr>
-          <p:cNvPr id="10" name="">
-            <a:extLst xmlns:a="http://schemas.openxmlformats.org/drawingml/2006/main">
+          <p:cNvPr id="10" name="矩形 9">
+            <a:extLst>
               <a:ext uri="{FF2B5EF4-FFF2-40B4-BE49-F238E27FC236}">
                 <a16:creationId xmlns:a16="http://schemas.microsoft.com/office/drawing/2014/main" id="{2E2CF188-83FB-4560-A3D9-82EF0686BB46}"/>
               </a:ext>
             </a:extLst>
           </p:cNvPr>
           <p:cNvSpPr>
-            <a:spLocks xmlns:a="http://schemas.openxmlformats.org/drawingml/2006/main" noGrp="1"/>
-          </p:cNvSpPr>
-          <p:nvPr/>
-        </p:nvSpPr>
-        <p:spPr>
-          <a:xfrm xmlns:a="http://schemas.openxmlformats.org/drawingml/2006/main">
+            <a:spLocks noGrp="1"/>
+          </p:cNvSpPr>
+          <p:nvPr/>
+        </p:nvSpPr>
+        <p:spPr>
+          <a:xfrm>
             <a:off x="9448800" y="4171950"/>
             <a:ext cx="1428750" cy="266700"/>
           </a:xfrm>
-          <a:prstGeom xmlns:a="http://schemas.openxmlformats.org/drawingml/2006/main" prst="rect">
-            <a:avLst/>
-          </a:prstGeom>
-          <a:noFill xmlns:a="http://schemas.openxmlformats.org/drawingml/2006/main"/>
-          <a:ln xmlns:a="http://schemas.openxmlformats.org/drawingml/2006/main" w="0">
-            <a:noFill/>
-            <a:prstDash val="solid"/>
-          </a:ln>
-        </p:spPr>
-        <p:txBody>
-          <a:bodyPr xmlns:a="http://schemas.openxmlformats.org/drawingml/2006/main"/>
-          <a:lstStyle xmlns:a="http://schemas.openxmlformats.org/drawingml/2006/main"/>
-          <a:p xmlns:a="http://schemas.openxmlformats.org/drawingml/2006/main">
+          <a:prstGeom prst="rect">
+            <a:avLst/>
+          </a:prstGeom>
+          <a:noFill/>
+          <a:ln w="0">
+            <a:noFill/>
+            <a:prstDash val="solid"/>
+          </a:ln>
+        </p:spPr>
+        <p:txBody>
+          <a:bodyPr/>
+          <a:lstStyle/>
+          <a:p>
             <a:pPr>
               <a:buNone/>
               <a:defRPr sz="1200" b="0" i="1">
@@ -2111,36 +1818,36 @@
       </p:sp>
       <p:sp>
         <p:nvSpPr>
-          <p:cNvPr id="11" name="">
-            <a:extLst xmlns:a="http://schemas.openxmlformats.org/drawingml/2006/main">
+          <p:cNvPr id="11" name="矩形 10">
+            <a:extLst>
               <a:ext uri="{FF2B5EF4-FFF2-40B4-BE49-F238E27FC236}">
                 <a16:creationId xmlns:a16="http://schemas.microsoft.com/office/drawing/2014/main" id="{1753BA1A-04CD-4905-82FF-C8DC781D32D2}"/>
               </a:ext>
             </a:extLst>
           </p:cNvPr>
           <p:cNvSpPr>
-            <a:spLocks xmlns:a="http://schemas.openxmlformats.org/drawingml/2006/main" noGrp="1"/>
-          </p:cNvSpPr>
-          <p:nvPr/>
-        </p:nvSpPr>
-        <p:spPr>
-          <a:xfrm xmlns:a="http://schemas.openxmlformats.org/drawingml/2006/main">
+            <a:spLocks noGrp="1"/>
+          </p:cNvSpPr>
+          <p:nvPr/>
+        </p:nvSpPr>
+        <p:spPr>
+          <a:xfrm>
             <a:off x="685800" y="6305550"/>
             <a:ext cx="5143500" cy="209550"/>
           </a:xfrm>
-          <a:prstGeom xmlns:a="http://schemas.openxmlformats.org/drawingml/2006/main" prst="rect">
-            <a:avLst/>
-          </a:prstGeom>
-          <a:noFill xmlns:a="http://schemas.openxmlformats.org/drawingml/2006/main"/>
-          <a:ln xmlns:a="http://schemas.openxmlformats.org/drawingml/2006/main" w="0">
-            <a:noFill/>
-            <a:prstDash val="solid"/>
-          </a:ln>
-        </p:spPr>
-        <p:txBody>
-          <a:bodyPr xmlns:a="http://schemas.openxmlformats.org/drawingml/2006/main"/>
-          <a:lstStyle xmlns:a="http://schemas.openxmlformats.org/drawingml/2006/main"/>
-          <a:p xmlns:a="http://schemas.openxmlformats.org/drawingml/2006/main">
+          <a:prstGeom prst="rect">
+            <a:avLst/>
+          </a:prstGeom>
+          <a:noFill/>
+          <a:ln w="0">
+            <a:noFill/>
+            <a:prstDash val="solid"/>
+          </a:ln>
+        </p:spPr>
+        <p:txBody>
+          <a:bodyPr/>
+          <a:lstStyle/>
+          <a:p>
             <a:pPr>
               <a:buNone/>
               <a:defRPr sz="900" b="1">
@@ -2150,13 +1857,98 @@
               </a:defRPr>
             </a:pPr>
             <a:r>
-              <a:rPr sz="900" b="1">
+              <a:rPr sz="900" b="1" dirty="0">
                 <a:solidFill>
                   <a:srgbClr val="A8BAC9"/>
                 </a:solidFill>
               </a:rPr>
-              <a:t>ELEC3609/9609  ·  ASSIGNMENT 1  ·  GROUP 02</a:t>
-            </a:r>
+              <a:t>ELEC3609  ·  ASSIGNMENT 1  ·  GROUP </a:t>
+            </a:r>
+            <a:r>
+              <a:rPr lang="en-US" sz="900" b="1" dirty="0">
+                <a:solidFill>
+                  <a:srgbClr val="A8BAC9"/>
+                </a:solidFill>
+              </a:rPr>
+              <a:t>06</a:t>
+            </a:r>
+            <a:endParaRPr sz="900" b="1" dirty="0">
+              <a:solidFill>
+                <a:srgbClr val="A8BAC9"/>
+              </a:solidFill>
+            </a:endParaRPr>
+          </a:p>
+        </p:txBody>
+      </p:sp>
+      <p:sp>
+        <p:nvSpPr>
+          <p:cNvPr id="14" name="矩形 13">
+            <a:extLst>
+              <a:ext uri="{FF2B5EF4-FFF2-40B4-BE49-F238E27FC236}">
+                <a16:creationId xmlns:a16="http://schemas.microsoft.com/office/drawing/2014/main" id="{89B73E11-6978-9905-05C6-D269F6F90650}"/>
+              </a:ext>
+            </a:extLst>
+          </p:cNvPr>
+          <p:cNvSpPr>
+            <a:spLocks noGrp="1"/>
+          </p:cNvSpPr>
+          <p:nvPr/>
+        </p:nvSpPr>
+        <p:spPr>
+          <a:xfrm>
+            <a:off x="685799" y="5372100"/>
+            <a:ext cx="10949787" cy="342900"/>
+          </a:xfrm>
+          <a:prstGeom prst="rect">
+            <a:avLst/>
+          </a:prstGeom>
+          <a:noFill/>
+          <a:ln w="0">
+            <a:noFill/>
+            <a:prstDash val="solid"/>
+          </a:ln>
+        </p:spPr>
+        <p:txBody>
+          <a:bodyPr/>
+          <a:lstStyle/>
+          <a:p>
+            <a:pPr>
+              <a:buNone/>
+              <a:defRPr sz="1800" b="1">
+                <a:solidFill>
+                  <a:srgbClr val="FFFFFF"/>
+                </a:solidFill>
+              </a:defRPr>
+            </a:pPr>
+            <a:r>
+              <a:rPr lang="en-US" sz="1800" b="1" dirty="0">
+                <a:solidFill>
+                  <a:srgbClr val="FFFFFF"/>
+                </a:solidFill>
+              </a:rPr>
+              <a:t>Group members: Dakota Wu, Leo Li, Jiayuan Zhang, </a:t>
+            </a:r>
+            <a:r>
+              <a:rPr lang="en-US" sz="1800" b="1" dirty="0" err="1">
+                <a:solidFill>
+                  <a:srgbClr val="FFFFFF"/>
+                </a:solidFill>
+              </a:rPr>
+              <a:t>Yizhen</a:t>
+            </a:r>
+            <a:r>
+              <a:rPr lang="en-US" sz="1800" b="1" dirty="0">
+                <a:solidFill>
+                  <a:srgbClr val="FFFFFF"/>
+                </a:solidFill>
+              </a:rPr>
+              <a:t> Gou</a:t>
+            </a:r>
+            <a:endParaRPr sz="1800" b="1" dirty="0">
+              <a:solidFill>
+                <a:srgbClr val="FFFFFF"/>
+              </a:solidFill>
+            </a:endParaRPr>
           </a:p>
         </p:txBody>
       </p:sp>
@@ -2167,17 +1959,21 @@
       </p:ext>
     </p:extLst>
   </p:cSld>
+  <p:clrMapOvr>
+    <a:masterClrMapping/>
+  </p:clrMapOvr>
 </p:sld>
 </file>
 
 <file path=ppt/slides/slide2.xml><?xml version="1.0" encoding="utf-8"?>
-<p:sld xmlns:p="http://schemas.openxmlformats.org/presentationml/2006/main">
+<p:sld xmlns:a="http://schemas.openxmlformats.org/drawingml/2006/main" xmlns:r="http://schemas.openxmlformats.org/officeDocument/2006/relationships" xmlns:p="http://schemas.openxmlformats.org/presentationml/2006/main">
   <p:cSld>
     <p:bg>
       <p:bgPr>
-        <a:solidFill xmlns:a="http://schemas.openxmlformats.org/drawingml/2006/main">
+        <a:solidFill>
           <a:srgbClr val="F7F5EF"/>
         </a:solidFill>
+        <a:effectLst/>
       </p:bgPr>
     </p:bg>
     <p:spTree>
@@ -2187,40 +1983,45 @@
         <p:nvPr/>
       </p:nvGrpSpPr>
       <p:grpSpPr>
-        <a:xfrm xmlns:a="http://schemas.openxmlformats.org/drawingml/2006/main"/>
+        <a:xfrm>
+          <a:off x="0" y="0"/>
+          <a:ext cx="0" cy="0"/>
+          <a:chOff x="0" y="0"/>
+          <a:chExt cx="0" cy="0"/>
+        </a:xfrm>
       </p:grpSpPr>
       <p:sp>
         <p:nvSpPr>
-          <p:cNvPr id="17" name="">
-            <a:extLst xmlns:a="http://schemas.openxmlformats.org/drawingml/2006/main">
+          <p:cNvPr id="17" name="矩形 16">
+            <a:extLst>
               <a:ext uri="{FF2B5EF4-FFF2-40B4-BE49-F238E27FC236}">
                 <a16:creationId xmlns:a16="http://schemas.microsoft.com/office/drawing/2014/main" id="{9868E504-5EFE-4380-B8E7-5146F4401AF5}"/>
               </a:ext>
             </a:extLst>
           </p:cNvPr>
           <p:cNvSpPr>
-            <a:spLocks xmlns:a="http://schemas.openxmlformats.org/drawingml/2006/main" noGrp="1"/>
-          </p:cNvSpPr>
-          <p:nvPr/>
-        </p:nvSpPr>
-        <p:spPr>
-          <a:xfrm xmlns:a="http://schemas.openxmlformats.org/drawingml/2006/main">
+            <a:spLocks noGrp="1"/>
+          </p:cNvSpPr>
+          <p:nvPr/>
+        </p:nvSpPr>
+        <p:spPr>
+          <a:xfrm>
             <a:off x="9525000" y="400050"/>
             <a:ext cx="2114550" cy="228600"/>
           </a:xfrm>
-          <a:prstGeom xmlns:a="http://schemas.openxmlformats.org/drawingml/2006/main" prst="rect">
-            <a:avLst/>
-          </a:prstGeom>
-          <a:noFill xmlns:a="http://schemas.openxmlformats.org/drawingml/2006/main"/>
-          <a:ln xmlns:a="http://schemas.openxmlformats.org/drawingml/2006/main" w="0">
-            <a:noFill/>
-            <a:prstDash val="solid"/>
-          </a:ln>
-        </p:spPr>
-        <p:txBody>
-          <a:bodyPr xmlns:a="http://schemas.openxmlformats.org/drawingml/2006/main"/>
-          <a:lstStyle xmlns:a="http://schemas.openxmlformats.org/drawingml/2006/main"/>
-          <a:p xmlns:a="http://schemas.openxmlformats.org/drawingml/2006/main">
+          <a:prstGeom prst="rect">
+            <a:avLst/>
+          </a:prstGeom>
+          <a:noFill/>
+          <a:ln w="0">
+            <a:noFill/>
+            <a:prstDash val="solid"/>
+          </a:ln>
+        </p:spPr>
+        <p:txBody>
+          <a:bodyPr/>
+          <a:lstStyle/>
+          <a:p>
             <a:pPr>
               <a:buNone/>
               <a:defRPr sz="1125" b="1">
@@ -2242,36 +2043,36 @@
       </p:sp>
       <p:sp>
         <p:nvSpPr>
-          <p:cNvPr id="2" name="">
-            <a:extLst xmlns:a="http://schemas.openxmlformats.org/drawingml/2006/main">
+          <p:cNvPr id="2" name="矩形 1">
+            <a:extLst>
               <a:ext uri="{FF2B5EF4-FFF2-40B4-BE49-F238E27FC236}">
                 <a16:creationId xmlns:a16="http://schemas.microsoft.com/office/drawing/2014/main" id="{2E6AABE7-BC0F-4A31-ADD8-7BB50BA35AC8}"/>
               </a:ext>
             </a:extLst>
           </p:cNvPr>
           <p:cNvSpPr>
-            <a:spLocks xmlns:a="http://schemas.openxmlformats.org/drawingml/2006/main" noGrp="1"/>
-          </p:cNvSpPr>
-          <p:nvPr/>
-        </p:nvSpPr>
-        <p:spPr>
-          <a:xfrm xmlns:a="http://schemas.openxmlformats.org/drawingml/2006/main">
+            <a:spLocks noGrp="1"/>
+          </p:cNvSpPr>
+          <p:nvPr/>
+        </p:nvSpPr>
+        <p:spPr>
+          <a:xfrm>
             <a:off x="552450" y="781050"/>
             <a:ext cx="10477500" cy="685800"/>
           </a:xfrm>
-          <a:prstGeom xmlns:a="http://schemas.openxmlformats.org/drawingml/2006/main" prst="rect">
-            <a:avLst/>
-          </a:prstGeom>
-          <a:noFill xmlns:a="http://schemas.openxmlformats.org/drawingml/2006/main"/>
-          <a:ln xmlns:a="http://schemas.openxmlformats.org/drawingml/2006/main" w="0">
-            <a:noFill/>
-            <a:prstDash val="solid"/>
-          </a:ln>
-        </p:spPr>
-        <p:txBody>
-          <a:bodyPr xmlns:a="http://schemas.openxmlformats.org/drawingml/2006/main"/>
-          <a:lstStyle xmlns:a="http://schemas.openxmlformats.org/drawingml/2006/main"/>
-          <a:p xmlns:a="http://schemas.openxmlformats.org/drawingml/2006/main">
+          <a:prstGeom prst="rect">
+            <a:avLst/>
+          </a:prstGeom>
+          <a:noFill/>
+          <a:ln w="0">
+            <a:noFill/>
+            <a:prstDash val="solid"/>
+          </a:ln>
+        </p:spPr>
+        <p:txBody>
+          <a:bodyPr/>
+          <a:lstStyle/>
+          <a:p>
             <a:pPr>
               <a:buNone/>
               <a:defRPr sz="3150" b="1">
@@ -2293,67 +2094,74 @@
       </p:sp>
       <p:sp>
         <p:nvSpPr>
-          <p:cNvPr id="3" name="">
-            <a:extLst xmlns:a="http://schemas.openxmlformats.org/drawingml/2006/main">
+          <p:cNvPr id="3" name="矩形 2">
+            <a:extLst>
               <a:ext uri="{FF2B5EF4-FFF2-40B4-BE49-F238E27FC236}">
                 <a16:creationId xmlns:a16="http://schemas.microsoft.com/office/drawing/2014/main" id="{66DC2D34-3AE0-4D38-AB8A-C1363109797B}"/>
               </a:ext>
             </a:extLst>
           </p:cNvPr>
           <p:cNvSpPr>
-            <a:spLocks xmlns:a="http://schemas.openxmlformats.org/drawingml/2006/main" noGrp="1"/>
-          </p:cNvSpPr>
-          <p:nvPr/>
-        </p:nvSpPr>
-        <p:spPr>
-          <a:xfrm xmlns:a="http://schemas.openxmlformats.org/drawingml/2006/main">
+            <a:spLocks noGrp="1"/>
+          </p:cNvSpPr>
+          <p:nvPr/>
+        </p:nvSpPr>
+        <p:spPr>
+          <a:xfrm>
             <a:off x="552450" y="1524000"/>
             <a:ext cx="11087100" cy="28575"/>
           </a:xfrm>
-          <a:prstGeom xmlns:a="http://schemas.openxmlformats.org/drawingml/2006/main" prst="rect">
-            <a:avLst/>
-          </a:prstGeom>
-          <a:solidFill xmlns:a="http://schemas.openxmlformats.org/drawingml/2006/main">
+          <a:prstGeom prst="rect">
+            <a:avLst/>
+          </a:prstGeom>
+          <a:solidFill>
             <a:srgbClr val="2774C7"/>
           </a:solidFill>
-          <a:ln xmlns:a="http://schemas.openxmlformats.org/drawingml/2006/main" w="0">
-            <a:noFill/>
-            <a:prstDash val="solid"/>
-          </a:ln>
-        </p:spPr>
-      </p:sp>
-      <p:sp>
-        <p:nvSpPr>
-          <p:cNvPr id="4" name="">
-            <a:extLst xmlns:a="http://schemas.openxmlformats.org/drawingml/2006/main">
+          <a:ln w="0">
+            <a:noFill/>
+            <a:prstDash val="solid"/>
+          </a:ln>
+        </p:spPr>
+        <p:txBody>
+          <a:bodyPr/>
+          <a:lstStyle/>
+          <a:p>
+            <a:endParaRPr lang="zh-CN" altLang="en-US"/>
+          </a:p>
+        </p:txBody>
+      </p:sp>
+      <p:sp>
+        <p:nvSpPr>
+          <p:cNvPr id="4" name="矩形 3">
+            <a:extLst>
               <a:ext uri="{FF2B5EF4-FFF2-40B4-BE49-F238E27FC236}">
                 <a16:creationId xmlns:a16="http://schemas.microsoft.com/office/drawing/2014/main" id="{7738EF5D-AE28-4554-8575-48A87A1D3F9A}"/>
               </a:ext>
             </a:extLst>
           </p:cNvPr>
           <p:cNvSpPr>
-            <a:spLocks xmlns:a="http://schemas.openxmlformats.org/drawingml/2006/main" noGrp="1"/>
-          </p:cNvSpPr>
-          <p:nvPr/>
-        </p:nvSpPr>
-        <p:spPr>
-          <a:xfrm xmlns:a="http://schemas.openxmlformats.org/drawingml/2006/main">
+            <a:spLocks noGrp="1"/>
+          </p:cNvSpPr>
+          <p:nvPr/>
+        </p:nvSpPr>
+        <p:spPr>
+          <a:xfrm>
             <a:off x="552450" y="1657350"/>
             <a:ext cx="10477500" cy="361950"/>
           </a:xfrm>
-          <a:prstGeom xmlns:a="http://schemas.openxmlformats.org/drawingml/2006/main" prst="rect">
-            <a:avLst/>
-          </a:prstGeom>
-          <a:noFill xmlns:a="http://schemas.openxmlformats.org/drawingml/2006/main"/>
-          <a:ln xmlns:a="http://schemas.openxmlformats.org/drawingml/2006/main" w="0">
-            <a:noFill/>
-            <a:prstDash val="solid"/>
-          </a:ln>
-        </p:spPr>
-        <p:txBody>
-          <a:bodyPr xmlns:a="http://schemas.openxmlformats.org/drawingml/2006/main"/>
-          <a:lstStyle xmlns:a="http://schemas.openxmlformats.org/drawingml/2006/main"/>
-          <a:p xmlns:a="http://schemas.openxmlformats.org/drawingml/2006/main">
+          <a:prstGeom prst="rect">
+            <a:avLst/>
+          </a:prstGeom>
+          <a:noFill/>
+          <a:ln w="0">
+            <a:noFill/>
+            <a:prstDash val="solid"/>
+          </a:ln>
+        </p:spPr>
+        <p:txBody>
+          <a:bodyPr/>
+          <a:lstStyle/>
+          <a:p>
             <a:pPr>
               <a:buNone/>
               <a:defRPr sz="1275" b="0">
@@ -2375,104 +2183,118 @@
       </p:sp>
       <p:sp>
         <p:nvSpPr>
-          <p:cNvPr id="5" name="">
-            <a:extLst xmlns:a="http://schemas.openxmlformats.org/drawingml/2006/main">
+          <p:cNvPr id="5" name="矩形: 圆角 4">
+            <a:extLst>
               <a:ext uri="{FF2B5EF4-FFF2-40B4-BE49-F238E27FC236}">
                 <a16:creationId xmlns:a16="http://schemas.microsoft.com/office/drawing/2014/main" id="{8AE43767-6473-4078-986D-7C4F22ACF095}"/>
               </a:ext>
             </a:extLst>
           </p:cNvPr>
           <p:cNvSpPr>
-            <a:spLocks xmlns:a="http://schemas.openxmlformats.org/drawingml/2006/main" noGrp="1"/>
-          </p:cNvSpPr>
-          <p:nvPr/>
-        </p:nvSpPr>
-        <p:spPr>
-          <a:xfrm xmlns:a="http://schemas.openxmlformats.org/drawingml/2006/main">
+            <a:spLocks noGrp="1"/>
+          </p:cNvSpPr>
+          <p:nvPr/>
+        </p:nvSpPr>
+        <p:spPr>
+          <a:xfrm>
             <a:off x="552450" y="2247900"/>
             <a:ext cx="5219700" cy="3371850"/>
           </a:xfrm>
-          <a:prstGeom xmlns:a="http://schemas.openxmlformats.org/drawingml/2006/main" prst="roundRect">
+          <a:prstGeom prst="roundRect">
             <a:avLst>
               <a:gd name="adj" fmla="val 5085"/>
             </a:avLst>
           </a:prstGeom>
-          <a:solidFill xmlns:a="http://schemas.openxmlformats.org/drawingml/2006/main">
+          <a:solidFill>
             <a:srgbClr val="FFFFFF"/>
           </a:solidFill>
-          <a:ln xmlns:a="http://schemas.openxmlformats.org/drawingml/2006/main" w="9525">
+          <a:ln w="9525">
             <a:solidFill>
               <a:srgbClr val="CBD5DF"/>
             </a:solidFill>
             <a:prstDash val="solid"/>
           </a:ln>
         </p:spPr>
-      </p:sp>
-      <p:sp>
-        <p:nvSpPr>
-          <p:cNvPr id="6" name="">
-            <a:extLst xmlns:a="http://schemas.openxmlformats.org/drawingml/2006/main">
+        <p:txBody>
+          <a:bodyPr/>
+          <a:lstStyle/>
+          <a:p>
+            <a:endParaRPr lang="zh-CN" altLang="en-US"/>
+          </a:p>
+        </p:txBody>
+      </p:sp>
+      <p:sp>
+        <p:nvSpPr>
+          <p:cNvPr id="6" name="矩形: 圆角 5">
+            <a:extLst>
               <a:ext uri="{FF2B5EF4-FFF2-40B4-BE49-F238E27FC236}">
                 <a16:creationId xmlns:a16="http://schemas.microsoft.com/office/drawing/2014/main" id="{6EAA7248-5EF5-412B-AE83-E5C7229833BE}"/>
               </a:ext>
             </a:extLst>
           </p:cNvPr>
           <p:cNvSpPr>
-            <a:spLocks xmlns:a="http://schemas.openxmlformats.org/drawingml/2006/main" noGrp="1"/>
-          </p:cNvSpPr>
-          <p:nvPr/>
-        </p:nvSpPr>
-        <p:spPr>
-          <a:xfrm xmlns:a="http://schemas.openxmlformats.org/drawingml/2006/main">
+            <a:spLocks noGrp="1"/>
+          </p:cNvSpPr>
+          <p:nvPr/>
+        </p:nvSpPr>
+        <p:spPr>
+          <a:xfrm>
             <a:off x="5943600" y="2247900"/>
             <a:ext cx="5695950" cy="3371850"/>
           </a:xfrm>
-          <a:prstGeom xmlns:a="http://schemas.openxmlformats.org/drawingml/2006/main" prst="roundRect">
+          <a:prstGeom prst="roundRect">
             <a:avLst>
               <a:gd name="adj" fmla="val 5085"/>
             </a:avLst>
           </a:prstGeom>
-          <a:solidFill xmlns:a="http://schemas.openxmlformats.org/drawingml/2006/main">
+          <a:solidFill>
             <a:srgbClr val="12263A"/>
           </a:solidFill>
-          <a:ln xmlns:a="http://schemas.openxmlformats.org/drawingml/2006/main" w="0">
-            <a:noFill/>
-            <a:prstDash val="solid"/>
-          </a:ln>
-        </p:spPr>
-      </p:sp>
-      <p:sp>
-        <p:nvSpPr>
-          <p:cNvPr id="7" name="">
-            <a:extLst xmlns:a="http://schemas.openxmlformats.org/drawingml/2006/main">
+          <a:ln w="0">
+            <a:noFill/>
+            <a:prstDash val="solid"/>
+          </a:ln>
+        </p:spPr>
+        <p:txBody>
+          <a:bodyPr/>
+          <a:lstStyle/>
+          <a:p>
+            <a:endParaRPr lang="zh-CN" altLang="en-US"/>
+          </a:p>
+        </p:txBody>
+      </p:sp>
+      <p:sp>
+        <p:nvSpPr>
+          <p:cNvPr id="7" name="矩形 6">
+            <a:extLst>
               <a:ext uri="{FF2B5EF4-FFF2-40B4-BE49-F238E27FC236}">
                 <a16:creationId xmlns:a16="http://schemas.microsoft.com/office/drawing/2014/main" id="{F5BF48FC-E8EA-4156-8D50-0AE74D950649}"/>
               </a:ext>
             </a:extLst>
           </p:cNvPr>
           <p:cNvSpPr>
-            <a:spLocks xmlns:a="http://schemas.openxmlformats.org/drawingml/2006/main" noGrp="1"/>
-          </p:cNvSpPr>
-          <p:nvPr/>
-        </p:nvSpPr>
-        <p:spPr>
-          <a:xfrm xmlns:a="http://schemas.openxmlformats.org/drawingml/2006/main">
+            <a:spLocks noGrp="1"/>
+          </p:cNvSpPr>
+          <p:nvPr/>
+        </p:nvSpPr>
+        <p:spPr>
+          <a:xfrm>
             <a:off x="876300" y="2571750"/>
             <a:ext cx="2381250" cy="266700"/>
           </a:xfrm>
-          <a:prstGeom xmlns:a="http://schemas.openxmlformats.org/drawingml/2006/main" prst="rect">
-            <a:avLst/>
-          </a:prstGeom>
-          <a:noFill xmlns:a="http://schemas.openxmlformats.org/drawingml/2006/main"/>
-          <a:ln xmlns:a="http://schemas.openxmlformats.org/drawingml/2006/main" w="0">
-            <a:noFill/>
-            <a:prstDash val="solid"/>
-          </a:ln>
-        </p:spPr>
-        <p:txBody>
-          <a:bodyPr xmlns:a="http://schemas.openxmlformats.org/drawingml/2006/main"/>
-          <a:lstStyle xmlns:a="http://schemas.openxmlformats.org/drawingml/2006/main"/>
-          <a:p xmlns:a="http://schemas.openxmlformats.org/drawingml/2006/main">
+          <a:prstGeom prst="rect">
+            <a:avLst/>
+          </a:prstGeom>
+          <a:noFill/>
+          <a:ln w="0">
+            <a:noFill/>
+            <a:prstDash val="solid"/>
+          </a:ln>
+        </p:spPr>
+        <p:txBody>
+          <a:bodyPr/>
+          <a:lstStyle/>
+          <a:p>
             <a:pPr>
               <a:buNone/>
               <a:defRPr sz="1050" b="1">
@@ -2494,36 +2316,36 @@
       </p:sp>
       <p:sp>
         <p:nvSpPr>
-          <p:cNvPr id="8" name="">
-            <a:extLst xmlns:a="http://schemas.openxmlformats.org/drawingml/2006/main">
+          <p:cNvPr id="8" name="矩形 7">
+            <a:extLst>
               <a:ext uri="{FF2B5EF4-FFF2-40B4-BE49-F238E27FC236}">
                 <a16:creationId xmlns:a16="http://schemas.microsoft.com/office/drawing/2014/main" id="{8EAD0893-9FCF-4274-AA7E-273C10C5A078}"/>
               </a:ext>
             </a:extLst>
           </p:cNvPr>
           <p:cNvSpPr>
-            <a:spLocks xmlns:a="http://schemas.openxmlformats.org/drawingml/2006/main" noGrp="1"/>
-          </p:cNvSpPr>
-          <p:nvPr/>
-        </p:nvSpPr>
-        <p:spPr>
-          <a:xfrm xmlns:a="http://schemas.openxmlformats.org/drawingml/2006/main">
+            <a:spLocks noGrp="1"/>
+          </p:cNvSpPr>
+          <p:nvPr/>
+        </p:nvSpPr>
+        <p:spPr>
+          <a:xfrm>
             <a:off x="876300" y="3028950"/>
             <a:ext cx="4000500" cy="1257300"/>
           </a:xfrm>
-          <a:prstGeom xmlns:a="http://schemas.openxmlformats.org/drawingml/2006/main" prst="rect">
-            <a:avLst/>
-          </a:prstGeom>
-          <a:noFill xmlns:a="http://schemas.openxmlformats.org/drawingml/2006/main"/>
-          <a:ln xmlns:a="http://schemas.openxmlformats.org/drawingml/2006/main" w="0">
-            <a:noFill/>
-            <a:prstDash val="solid"/>
-          </a:ln>
-        </p:spPr>
-        <p:txBody>
-          <a:bodyPr xmlns:a="http://schemas.openxmlformats.org/drawingml/2006/main"/>
-          <a:lstStyle xmlns:a="http://schemas.openxmlformats.org/drawingml/2006/main"/>
-          <a:p xmlns:a="http://schemas.openxmlformats.org/drawingml/2006/main">
+          <a:prstGeom prst="rect">
+            <a:avLst/>
+          </a:prstGeom>
+          <a:noFill/>
+          <a:ln w="0">
+            <a:noFill/>
+            <a:prstDash val="solid"/>
+          </a:ln>
+        </p:spPr>
+        <p:txBody>
+          <a:bodyPr/>
+          <a:lstStyle/>
+          <a:p>
             <a:pPr>
               <a:buNone/>
               <a:defRPr sz="2400" b="1">
@@ -2541,7 +2363,7 @@
               <a:t>Work is split across</a:t>
             </a:r>
           </a:p>
-          <a:p xmlns:a="http://schemas.openxmlformats.org/drawingml/2006/main">
+          <a:p>
             <a:pPr>
               <a:buNone/>
               <a:defRPr sz="2400" b="1">
@@ -2559,7 +2381,7 @@
               <a:t>chat, calendars and</a:t>
             </a:r>
           </a:p>
-          <a:p xmlns:a="http://schemas.openxmlformats.org/drawingml/2006/main">
+          <a:p>
             <a:pPr>
               <a:buNone/>
               <a:defRPr sz="2400" b="1">
@@ -2581,36 +2403,36 @@
       </p:sp>
       <p:sp>
         <p:nvSpPr>
-          <p:cNvPr id="9" name="">
-            <a:extLst xmlns:a="http://schemas.openxmlformats.org/drawingml/2006/main">
+          <p:cNvPr id="9" name="矩形 8">
+            <a:extLst>
               <a:ext uri="{FF2B5EF4-FFF2-40B4-BE49-F238E27FC236}">
                 <a16:creationId xmlns:a16="http://schemas.microsoft.com/office/drawing/2014/main" id="{929364B8-2FCE-4C96-BA1B-F3191FC49C3A}"/>
               </a:ext>
             </a:extLst>
           </p:cNvPr>
           <p:cNvSpPr>
-            <a:spLocks xmlns:a="http://schemas.openxmlformats.org/drawingml/2006/main" noGrp="1"/>
-          </p:cNvSpPr>
-          <p:nvPr/>
-        </p:nvSpPr>
-        <p:spPr>
-          <a:xfrm xmlns:a="http://schemas.openxmlformats.org/drawingml/2006/main">
+            <a:spLocks noGrp="1"/>
+          </p:cNvSpPr>
+          <p:nvPr/>
+        </p:nvSpPr>
+        <p:spPr>
+          <a:xfrm>
             <a:off x="876300" y="4610100"/>
             <a:ext cx="4000500" cy="552450"/>
           </a:xfrm>
-          <a:prstGeom xmlns:a="http://schemas.openxmlformats.org/drawingml/2006/main" prst="rect">
-            <a:avLst/>
-          </a:prstGeom>
-          <a:noFill xmlns:a="http://schemas.openxmlformats.org/drawingml/2006/main"/>
-          <a:ln xmlns:a="http://schemas.openxmlformats.org/drawingml/2006/main" w="0">
-            <a:noFill/>
-            <a:prstDash val="solid"/>
-          </a:ln>
-        </p:spPr>
-        <p:txBody>
-          <a:bodyPr xmlns:a="http://schemas.openxmlformats.org/drawingml/2006/main"/>
-          <a:lstStyle xmlns:a="http://schemas.openxmlformats.org/drawingml/2006/main"/>
-          <a:p xmlns:a="http://schemas.openxmlformats.org/drawingml/2006/main">
+          <a:prstGeom prst="rect">
+            <a:avLst/>
+          </a:prstGeom>
+          <a:noFill/>
+          <a:ln w="0">
+            <a:noFill/>
+            <a:prstDash val="solid"/>
+          </a:ln>
+        </p:spPr>
+        <p:txBody>
+          <a:bodyPr/>
+          <a:lstStyle/>
+          <a:p>
             <a:pPr>
               <a:buNone/>
               <a:defRPr sz="1425" b="0">
@@ -2632,36 +2454,36 @@
       </p:sp>
       <p:sp>
         <p:nvSpPr>
-          <p:cNvPr id="10" name="">
-            <a:extLst xmlns:a="http://schemas.openxmlformats.org/drawingml/2006/main">
+          <p:cNvPr id="10" name="矩形 9">
+            <a:extLst>
               <a:ext uri="{FF2B5EF4-FFF2-40B4-BE49-F238E27FC236}">
                 <a16:creationId xmlns:a16="http://schemas.microsoft.com/office/drawing/2014/main" id="{82833E7F-263D-47EC-BCE9-62AC9AC42E5F}"/>
               </a:ext>
             </a:extLst>
           </p:cNvPr>
           <p:cNvSpPr>
-            <a:spLocks xmlns:a="http://schemas.openxmlformats.org/drawingml/2006/main" noGrp="1"/>
-          </p:cNvSpPr>
-          <p:nvPr/>
-        </p:nvSpPr>
-        <p:spPr>
-          <a:xfrm xmlns:a="http://schemas.openxmlformats.org/drawingml/2006/main">
+            <a:spLocks noGrp="1"/>
+          </p:cNvSpPr>
+          <p:nvPr/>
+        </p:nvSpPr>
+        <p:spPr>
+          <a:xfrm>
             <a:off x="6305550" y="2571750"/>
             <a:ext cx="2381250" cy="266700"/>
           </a:xfrm>
-          <a:prstGeom xmlns:a="http://schemas.openxmlformats.org/drawingml/2006/main" prst="rect">
-            <a:avLst/>
-          </a:prstGeom>
-          <a:noFill xmlns:a="http://schemas.openxmlformats.org/drawingml/2006/main"/>
-          <a:ln xmlns:a="http://schemas.openxmlformats.org/drawingml/2006/main" w="0">
-            <a:noFill/>
-            <a:prstDash val="solid"/>
-          </a:ln>
-        </p:spPr>
-        <p:txBody>
-          <a:bodyPr xmlns:a="http://schemas.openxmlformats.org/drawingml/2006/main"/>
-          <a:lstStyle xmlns:a="http://schemas.openxmlformats.org/drawingml/2006/main"/>
-          <a:p xmlns:a="http://schemas.openxmlformats.org/drawingml/2006/main">
+          <a:prstGeom prst="rect">
+            <a:avLst/>
+          </a:prstGeom>
+          <a:noFill/>
+          <a:ln w="0">
+            <a:noFill/>
+            <a:prstDash val="solid"/>
+          </a:ln>
+        </p:spPr>
+        <p:txBody>
+          <a:bodyPr/>
+          <a:lstStyle/>
+          <a:p>
             <a:pPr>
               <a:buNone/>
               <a:defRPr sz="1050" b="1">
@@ -2683,36 +2505,36 @@
       </p:sp>
       <p:sp>
         <p:nvSpPr>
-          <p:cNvPr id="11" name="">
-            <a:extLst xmlns:a="http://schemas.openxmlformats.org/drawingml/2006/main">
+          <p:cNvPr id="11" name="矩形 10">
+            <a:extLst>
               <a:ext uri="{FF2B5EF4-FFF2-40B4-BE49-F238E27FC236}">
                 <a16:creationId xmlns:a16="http://schemas.microsoft.com/office/drawing/2014/main" id="{86AFF03F-9C1B-45F5-8AEF-B3116DB81FB2}"/>
               </a:ext>
             </a:extLst>
           </p:cNvPr>
           <p:cNvSpPr>
-            <a:spLocks xmlns:a="http://schemas.openxmlformats.org/drawingml/2006/main" noGrp="1"/>
-          </p:cNvSpPr>
-          <p:nvPr/>
-        </p:nvSpPr>
-        <p:spPr>
-          <a:xfrm xmlns:a="http://schemas.openxmlformats.org/drawingml/2006/main">
+            <a:spLocks noGrp="1"/>
+          </p:cNvSpPr>
+          <p:nvPr/>
+        </p:nvSpPr>
+        <p:spPr>
+          <a:xfrm>
             <a:off x="6305550" y="3028950"/>
             <a:ext cx="4095750" cy="1257300"/>
           </a:xfrm>
-          <a:prstGeom xmlns:a="http://schemas.openxmlformats.org/drawingml/2006/main" prst="rect">
-            <a:avLst/>
-          </a:prstGeom>
-          <a:noFill xmlns:a="http://schemas.openxmlformats.org/drawingml/2006/main"/>
-          <a:ln xmlns:a="http://schemas.openxmlformats.org/drawingml/2006/main" w="0">
-            <a:noFill/>
-            <a:prstDash val="solid"/>
-          </a:ln>
-        </p:spPr>
-        <p:txBody>
-          <a:bodyPr xmlns:a="http://schemas.openxmlformats.org/drawingml/2006/main"/>
-          <a:lstStyle xmlns:a="http://schemas.openxmlformats.org/drawingml/2006/main"/>
-          <a:p xmlns:a="http://schemas.openxmlformats.org/drawingml/2006/main">
+          <a:prstGeom prst="rect">
+            <a:avLst/>
+          </a:prstGeom>
+          <a:noFill/>
+          <a:ln w="0">
+            <a:noFill/>
+            <a:prstDash val="solid"/>
+          </a:ln>
+        </p:spPr>
+        <p:txBody>
+          <a:bodyPr/>
+          <a:lstStyle/>
+          <a:p>
             <a:pPr>
               <a:buNone/>
               <a:defRPr sz="2400" b="1">
@@ -2730,7 +2552,7 @@
               <a:t>Teams reconstruct</a:t>
             </a:r>
           </a:p>
-          <a:p xmlns:a="http://schemas.openxmlformats.org/drawingml/2006/main">
+          <a:p>
             <a:pPr>
               <a:buNone/>
               <a:defRPr sz="2400" b="1">
@@ -2748,7 +2570,7 @@
               <a:t>who did what from</a:t>
             </a:r>
           </a:p>
-          <a:p xmlns:a="http://schemas.openxmlformats.org/drawingml/2006/main">
+          <a:p>
             <a:pPr>
               <a:buNone/>
               <a:defRPr sz="2400" b="1">
@@ -2770,36 +2592,36 @@
       </p:sp>
       <p:sp>
         <p:nvSpPr>
-          <p:cNvPr id="12" name="">
-            <a:extLst xmlns:a="http://schemas.openxmlformats.org/drawingml/2006/main">
+          <p:cNvPr id="12" name="矩形 11">
+            <a:extLst>
               <a:ext uri="{FF2B5EF4-FFF2-40B4-BE49-F238E27FC236}">
                 <a16:creationId xmlns:a16="http://schemas.microsoft.com/office/drawing/2014/main" id="{75E4427E-FE3B-44E3-B004-C3621A69A8D4}"/>
               </a:ext>
             </a:extLst>
           </p:cNvPr>
           <p:cNvSpPr>
-            <a:spLocks xmlns:a="http://schemas.openxmlformats.org/drawingml/2006/main" noGrp="1"/>
-          </p:cNvSpPr>
-          <p:nvPr/>
-        </p:nvSpPr>
-        <p:spPr>
-          <a:xfrm xmlns:a="http://schemas.openxmlformats.org/drawingml/2006/main">
+            <a:spLocks noGrp="1"/>
+          </p:cNvSpPr>
+          <p:nvPr/>
+        </p:nvSpPr>
+        <p:spPr>
+          <a:xfrm>
             <a:off x="6305550" y="4610100"/>
             <a:ext cx="4095750" cy="552450"/>
           </a:xfrm>
-          <a:prstGeom xmlns:a="http://schemas.openxmlformats.org/drawingml/2006/main" prst="rect">
-            <a:avLst/>
-          </a:prstGeom>
-          <a:noFill xmlns:a="http://schemas.openxmlformats.org/drawingml/2006/main"/>
-          <a:ln xmlns:a="http://schemas.openxmlformats.org/drawingml/2006/main" w="0">
-            <a:noFill/>
-            <a:prstDash val="solid"/>
-          </a:ln>
-        </p:spPr>
-        <p:txBody>
-          <a:bodyPr xmlns:a="http://schemas.openxmlformats.org/drawingml/2006/main"/>
-          <a:lstStyle xmlns:a="http://schemas.openxmlformats.org/drawingml/2006/main"/>
-          <a:p xmlns:a="http://schemas.openxmlformats.org/drawingml/2006/main">
+          <a:prstGeom prst="rect">
+            <a:avLst/>
+          </a:prstGeom>
+          <a:noFill/>
+          <a:ln w="0">
+            <a:noFill/>
+            <a:prstDash val="solid"/>
+          </a:ln>
+        </p:spPr>
+        <p:txBody>
+          <a:bodyPr/>
+          <a:lstStyle/>
+          <a:p>
             <a:pPr>
               <a:buNone/>
               <a:defRPr sz="1425" b="0">
@@ -2821,69 +2643,76 @@
       </p:sp>
       <p:sp>
         <p:nvSpPr>
-          <p:cNvPr id="13" name="">
-            <a:extLst xmlns:a="http://schemas.openxmlformats.org/drawingml/2006/main">
+          <p:cNvPr id="13" name="矩形: 圆角 12">
+            <a:extLst>
               <a:ext uri="{FF2B5EF4-FFF2-40B4-BE49-F238E27FC236}">
                 <a16:creationId xmlns:a16="http://schemas.microsoft.com/office/drawing/2014/main" id="{0CD73F75-D60A-4B0F-8E9D-C38962095C1D}"/>
               </a:ext>
             </a:extLst>
           </p:cNvPr>
           <p:cNvSpPr>
-            <a:spLocks xmlns:a="http://schemas.openxmlformats.org/drawingml/2006/main" noGrp="1"/>
-          </p:cNvSpPr>
-          <p:nvPr/>
-        </p:nvSpPr>
-        <p:spPr>
-          <a:xfrm xmlns:a="http://schemas.openxmlformats.org/drawingml/2006/main">
+            <a:spLocks noGrp="1"/>
+          </p:cNvSpPr>
+          <p:nvPr/>
+        </p:nvSpPr>
+        <p:spPr>
+          <a:xfrm>
             <a:off x="4895850" y="5219700"/>
             <a:ext cx="1847850" cy="400050"/>
           </a:xfrm>
-          <a:prstGeom xmlns:a="http://schemas.openxmlformats.org/drawingml/2006/main" prst="roundRect">
+          <a:prstGeom prst="roundRect">
             <a:avLst>
               <a:gd name="adj" fmla="val 47619"/>
             </a:avLst>
           </a:prstGeom>
-          <a:solidFill xmlns:a="http://schemas.openxmlformats.org/drawingml/2006/main">
+          <a:solidFill>
             <a:srgbClr val="E96B4B"/>
           </a:solidFill>
-          <a:ln xmlns:a="http://schemas.openxmlformats.org/drawingml/2006/main" w="0">
-            <a:noFill/>
-            <a:prstDash val="solid"/>
-          </a:ln>
-        </p:spPr>
-      </p:sp>
-      <p:sp>
-        <p:nvSpPr>
-          <p:cNvPr id="14" name="">
-            <a:extLst xmlns:a="http://schemas.openxmlformats.org/drawingml/2006/main">
+          <a:ln w="0">
+            <a:noFill/>
+            <a:prstDash val="solid"/>
+          </a:ln>
+        </p:spPr>
+        <p:txBody>
+          <a:bodyPr/>
+          <a:lstStyle/>
+          <a:p>
+            <a:endParaRPr lang="zh-CN" altLang="en-US"/>
+          </a:p>
+        </p:txBody>
+      </p:sp>
+      <p:sp>
+        <p:nvSpPr>
+          <p:cNvPr id="14" name="矩形 13">
+            <a:extLst>
               <a:ext uri="{FF2B5EF4-FFF2-40B4-BE49-F238E27FC236}">
                 <a16:creationId xmlns:a16="http://schemas.microsoft.com/office/drawing/2014/main" id="{18A7AA61-898D-4596-B22F-09AE61CEF99C}"/>
               </a:ext>
             </a:extLst>
           </p:cNvPr>
           <p:cNvSpPr>
-            <a:spLocks xmlns:a="http://schemas.openxmlformats.org/drawingml/2006/main" noGrp="1"/>
-          </p:cNvSpPr>
-          <p:nvPr/>
-        </p:nvSpPr>
-        <p:spPr>
-          <a:xfrm xmlns:a="http://schemas.openxmlformats.org/drawingml/2006/main">
+            <a:spLocks noGrp="1"/>
+          </p:cNvSpPr>
+          <p:nvPr/>
+        </p:nvSpPr>
+        <p:spPr>
+          <a:xfrm>
             <a:off x="5133975" y="5324475"/>
             <a:ext cx="1524000" cy="209550"/>
           </a:xfrm>
-          <a:prstGeom xmlns:a="http://schemas.openxmlformats.org/drawingml/2006/main" prst="rect">
-            <a:avLst/>
-          </a:prstGeom>
-          <a:noFill xmlns:a="http://schemas.openxmlformats.org/drawingml/2006/main"/>
-          <a:ln xmlns:a="http://schemas.openxmlformats.org/drawingml/2006/main" w="0">
-            <a:noFill/>
-            <a:prstDash val="solid"/>
-          </a:ln>
-        </p:spPr>
-        <p:txBody>
-          <a:bodyPr xmlns:a="http://schemas.openxmlformats.org/drawingml/2006/main"/>
-          <a:lstStyle xmlns:a="http://schemas.openxmlformats.org/drawingml/2006/main"/>
-          <a:p xmlns:a="http://schemas.openxmlformats.org/drawingml/2006/main">
+          <a:prstGeom prst="rect">
+            <a:avLst/>
+          </a:prstGeom>
+          <a:noFill/>
+          <a:ln w="0">
+            <a:noFill/>
+            <a:prstDash val="solid"/>
+          </a:ln>
+        </p:spPr>
+        <p:txBody>
+          <a:bodyPr/>
+          <a:lstStyle/>
+          <a:p>
             <a:pPr>
               <a:buNone/>
               <a:defRPr sz="975" b="1">
@@ -2905,36 +2734,36 @@
       </p:sp>
       <p:sp>
         <p:nvSpPr>
-          <p:cNvPr id="15" name="">
-            <a:extLst xmlns:a="http://schemas.openxmlformats.org/drawingml/2006/main">
+          <p:cNvPr id="15" name="矩形 14">
+            <a:extLst>
               <a:ext uri="{FF2B5EF4-FFF2-40B4-BE49-F238E27FC236}">
                 <a16:creationId xmlns:a16="http://schemas.microsoft.com/office/drawing/2014/main" id="{2BC45DE2-3B63-4359-8717-AEEA3EB6A22E}"/>
               </a:ext>
             </a:extLst>
           </p:cNvPr>
           <p:cNvSpPr>
-            <a:spLocks xmlns:a="http://schemas.openxmlformats.org/drawingml/2006/main" noGrp="1"/>
-          </p:cNvSpPr>
-          <p:nvPr/>
-        </p:nvSpPr>
-        <p:spPr>
-          <a:xfrm xmlns:a="http://schemas.openxmlformats.org/drawingml/2006/main">
+            <a:spLocks noGrp="1"/>
+          </p:cNvSpPr>
+          <p:nvPr/>
+        </p:nvSpPr>
+        <p:spPr>
+          <a:xfrm>
             <a:off x="552450" y="6496050"/>
             <a:ext cx="4953000" cy="190500"/>
           </a:xfrm>
-          <a:prstGeom xmlns:a="http://schemas.openxmlformats.org/drawingml/2006/main" prst="rect">
-            <a:avLst/>
-          </a:prstGeom>
-          <a:noFill xmlns:a="http://schemas.openxmlformats.org/drawingml/2006/main"/>
-          <a:ln xmlns:a="http://schemas.openxmlformats.org/drawingml/2006/main" w="0">
-            <a:noFill/>
-            <a:prstDash val="solid"/>
-          </a:ln>
-        </p:spPr>
-        <p:txBody>
-          <a:bodyPr xmlns:a="http://schemas.openxmlformats.org/drawingml/2006/main"/>
-          <a:lstStyle xmlns:a="http://schemas.openxmlformats.org/drawingml/2006/main"/>
-          <a:p xmlns:a="http://schemas.openxmlformats.org/drawingml/2006/main">
+          <a:prstGeom prst="rect">
+            <a:avLst/>
+          </a:prstGeom>
+          <a:noFill/>
+          <a:ln w="0">
+            <a:noFill/>
+            <a:prstDash val="solid"/>
+          </a:ln>
+        </p:spPr>
+        <p:txBody>
+          <a:bodyPr/>
+          <a:lstStyle/>
+          <a:p>
             <a:pPr>
               <a:buNone/>
               <a:defRPr sz="825" b="1">
@@ -2944,48 +2773,61 @@
               </a:defRPr>
             </a:pPr>
             <a:r>
-              <a:rPr sz="825" b="1">
+              <a:rPr sz="825" b="1" dirty="0">
                 <a:solidFill>
                   <a:srgbClr val="667482"/>
                 </a:solidFill>
               </a:rPr>
-              <a:t>STUDYCREW  |  ELEC3609/9609  |  GROUP 02</a:t>
-            </a:r>
-          </a:p>
-        </p:txBody>
-      </p:sp>
-      <p:sp>
-        <p:nvSpPr>
-          <p:cNvPr id="16" name="">
-            <a:extLst xmlns:a="http://schemas.openxmlformats.org/drawingml/2006/main">
+              <a:t>STUDYCREW  |  ELEC3609  |  GROUP 0</a:t>
+            </a:r>
+            <a:r>
+              <a:rPr lang="en-US" sz="825" b="1" dirty="0">
+                <a:solidFill>
+                  <a:srgbClr val="667482"/>
+                </a:solidFill>
+              </a:rPr>
+              <a:t>6</a:t>
+            </a:r>
+            <a:endParaRPr sz="825" b="1" dirty="0">
+              <a:solidFill>
+                <a:srgbClr val="667482"/>
+              </a:solidFill>
+            </a:endParaRPr>
+          </a:p>
+        </p:txBody>
+      </p:sp>
+      <p:sp>
+        <p:nvSpPr>
+          <p:cNvPr id="16" name="矩形 15">
+            <a:extLst>
               <a:ext uri="{FF2B5EF4-FFF2-40B4-BE49-F238E27FC236}">
                 <a16:creationId xmlns:a16="http://schemas.microsoft.com/office/drawing/2014/main" id="{819FE89D-4DCC-471C-8E67-369AEEFFE790}"/>
               </a:ext>
             </a:extLst>
           </p:cNvPr>
           <p:cNvSpPr>
-            <a:spLocks xmlns:a="http://schemas.openxmlformats.org/drawingml/2006/main" noGrp="1"/>
-          </p:cNvSpPr>
-          <p:nvPr/>
-        </p:nvSpPr>
-        <p:spPr>
-          <a:xfrm xmlns:a="http://schemas.openxmlformats.org/drawingml/2006/main">
+            <a:spLocks noGrp="1"/>
+          </p:cNvSpPr>
+          <p:nvPr/>
+        </p:nvSpPr>
+        <p:spPr>
+          <a:xfrm>
             <a:off x="11125200" y="6496050"/>
             <a:ext cx="514350" cy="190500"/>
           </a:xfrm>
-          <a:prstGeom xmlns:a="http://schemas.openxmlformats.org/drawingml/2006/main" prst="rect">
-            <a:avLst/>
-          </a:prstGeom>
-          <a:noFill xmlns:a="http://schemas.openxmlformats.org/drawingml/2006/main"/>
-          <a:ln xmlns:a="http://schemas.openxmlformats.org/drawingml/2006/main" w="0">
-            <a:noFill/>
-            <a:prstDash val="solid"/>
-          </a:ln>
-        </p:spPr>
-        <p:txBody>
-          <a:bodyPr xmlns:a="http://schemas.openxmlformats.org/drawingml/2006/main"/>
-          <a:lstStyle xmlns:a="http://schemas.openxmlformats.org/drawingml/2006/main"/>
-          <a:p xmlns:a="http://schemas.openxmlformats.org/drawingml/2006/main">
+          <a:prstGeom prst="rect">
+            <a:avLst/>
+          </a:prstGeom>
+          <a:noFill/>
+          <a:ln w="0">
+            <a:noFill/>
+            <a:prstDash val="solid"/>
+          </a:ln>
+        </p:spPr>
+        <p:txBody>
+          <a:bodyPr/>
+          <a:lstStyle/>
+          <a:p>
             <a:pPr>
               <a:buNone/>
               <a:defRPr sz="825" b="1">
@@ -3012,17 +2854,21 @@
       </p:ext>
     </p:extLst>
   </p:cSld>
+  <p:clrMapOvr>
+    <a:masterClrMapping/>
+  </p:clrMapOvr>
 </p:sld>
 </file>
 
 <file path=ppt/slides/slide3.xml><?xml version="1.0" encoding="utf-8"?>
-<p:sld xmlns:p="http://schemas.openxmlformats.org/presentationml/2006/main">
+<p:sld xmlns:a="http://schemas.openxmlformats.org/drawingml/2006/main" xmlns:r="http://schemas.openxmlformats.org/officeDocument/2006/relationships" xmlns:p="http://schemas.openxmlformats.org/presentationml/2006/main">
   <p:cSld>
     <p:bg>
       <p:bgPr>
-        <a:solidFill xmlns:a="http://schemas.openxmlformats.org/drawingml/2006/main">
+        <a:solidFill>
           <a:srgbClr val="F7F5EF"/>
         </a:solidFill>
+        <a:effectLst/>
       </p:bgPr>
     </p:bg>
     <p:spTree>
@@ -3032,40 +2878,45 @@
         <p:nvPr/>
       </p:nvGrpSpPr>
       <p:grpSpPr>
-        <a:xfrm xmlns:a="http://schemas.openxmlformats.org/drawingml/2006/main"/>
+        <a:xfrm>
+          <a:off x="0" y="0"/>
+          <a:ext cx="0" cy="0"/>
+          <a:chOff x="0" y="0"/>
+          <a:chExt cx="0" cy="0"/>
+        </a:xfrm>
       </p:grpSpPr>
       <p:sp>
         <p:nvSpPr>
-          <p:cNvPr id="24" name="">
-            <a:extLst xmlns:a="http://schemas.openxmlformats.org/drawingml/2006/main">
+          <p:cNvPr id="24" name="矩形 23">
+            <a:extLst>
               <a:ext uri="{FF2B5EF4-FFF2-40B4-BE49-F238E27FC236}">
                 <a16:creationId xmlns:a16="http://schemas.microsoft.com/office/drawing/2014/main" id="{FB398898-82BF-4112-B1EE-EE5DB2815B47}"/>
               </a:ext>
             </a:extLst>
           </p:cNvPr>
           <p:cNvSpPr>
-            <a:spLocks xmlns:a="http://schemas.openxmlformats.org/drawingml/2006/main" noGrp="1"/>
-          </p:cNvSpPr>
-          <p:nvPr/>
-        </p:nvSpPr>
-        <p:spPr>
-          <a:xfrm xmlns:a="http://schemas.openxmlformats.org/drawingml/2006/main">
+            <a:spLocks noGrp="1"/>
+          </p:cNvSpPr>
+          <p:nvPr/>
+        </p:nvSpPr>
+        <p:spPr>
+          <a:xfrm>
             <a:off x="9525000" y="400050"/>
             <a:ext cx="2114550" cy="228600"/>
           </a:xfrm>
-          <a:prstGeom xmlns:a="http://schemas.openxmlformats.org/drawingml/2006/main" prst="rect">
-            <a:avLst/>
-          </a:prstGeom>
-          <a:noFill xmlns:a="http://schemas.openxmlformats.org/drawingml/2006/main"/>
-          <a:ln xmlns:a="http://schemas.openxmlformats.org/drawingml/2006/main" w="0">
-            <a:noFill/>
-            <a:prstDash val="solid"/>
-          </a:ln>
-        </p:spPr>
-        <p:txBody>
-          <a:bodyPr xmlns:a="http://schemas.openxmlformats.org/drawingml/2006/main"/>
-          <a:lstStyle xmlns:a="http://schemas.openxmlformats.org/drawingml/2006/main"/>
-          <a:p xmlns:a="http://schemas.openxmlformats.org/drawingml/2006/main">
+          <a:prstGeom prst="rect">
+            <a:avLst/>
+          </a:prstGeom>
+          <a:noFill/>
+          <a:ln w="0">
+            <a:noFill/>
+            <a:prstDash val="solid"/>
+          </a:ln>
+        </p:spPr>
+        <p:txBody>
+          <a:bodyPr/>
+          <a:lstStyle/>
+          <a:p>
             <a:pPr>
               <a:buNone/>
               <a:defRPr sz="1125" b="1">
@@ -3087,36 +2938,36 @@
       </p:sp>
       <p:sp>
         <p:nvSpPr>
-          <p:cNvPr id="2" name="">
-            <a:extLst xmlns:a="http://schemas.openxmlformats.org/drawingml/2006/main">
+          <p:cNvPr id="2" name="矩形 1">
+            <a:extLst>
               <a:ext uri="{FF2B5EF4-FFF2-40B4-BE49-F238E27FC236}">
                 <a16:creationId xmlns:a16="http://schemas.microsoft.com/office/drawing/2014/main" id="{DCAF7D40-152E-456B-A594-A7C4080FAB1D}"/>
               </a:ext>
             </a:extLst>
           </p:cNvPr>
           <p:cNvSpPr>
-            <a:spLocks xmlns:a="http://schemas.openxmlformats.org/drawingml/2006/main" noGrp="1"/>
-          </p:cNvSpPr>
-          <p:nvPr/>
-        </p:nvSpPr>
-        <p:spPr>
-          <a:xfrm xmlns:a="http://schemas.openxmlformats.org/drawingml/2006/main">
+            <a:spLocks noGrp="1"/>
+          </p:cNvSpPr>
+          <p:nvPr/>
+        </p:nvSpPr>
+        <p:spPr>
+          <a:xfrm>
             <a:off x="552450" y="781050"/>
             <a:ext cx="10477500" cy="685800"/>
           </a:xfrm>
-          <a:prstGeom xmlns:a="http://schemas.openxmlformats.org/drawingml/2006/main" prst="rect">
-            <a:avLst/>
-          </a:prstGeom>
-          <a:noFill xmlns:a="http://schemas.openxmlformats.org/drawingml/2006/main"/>
-          <a:ln xmlns:a="http://schemas.openxmlformats.org/drawingml/2006/main" w="0">
-            <a:noFill/>
-            <a:prstDash val="solid"/>
-          </a:ln>
-        </p:spPr>
-        <p:txBody>
-          <a:bodyPr xmlns:a="http://schemas.openxmlformats.org/drawingml/2006/main"/>
-          <a:lstStyle xmlns:a="http://schemas.openxmlformats.org/drawingml/2006/main"/>
-          <a:p xmlns:a="http://schemas.openxmlformats.org/drawingml/2006/main">
+          <a:prstGeom prst="rect">
+            <a:avLst/>
+          </a:prstGeom>
+          <a:noFill/>
+          <a:ln w="0">
+            <a:noFill/>
+            <a:prstDash val="solid"/>
+          </a:ln>
+        </p:spPr>
+        <p:txBody>
+          <a:bodyPr/>
+          <a:lstStyle/>
+          <a:p>
             <a:pPr>
               <a:buNone/>
               <a:defRPr sz="3150" b="1">
@@ -3138,67 +2989,74 @@
       </p:sp>
       <p:sp>
         <p:nvSpPr>
-          <p:cNvPr id="3" name="">
-            <a:extLst xmlns:a="http://schemas.openxmlformats.org/drawingml/2006/main">
+          <p:cNvPr id="3" name="矩形 2">
+            <a:extLst>
               <a:ext uri="{FF2B5EF4-FFF2-40B4-BE49-F238E27FC236}">
                 <a16:creationId xmlns:a16="http://schemas.microsoft.com/office/drawing/2014/main" id="{8771E619-78CA-4510-80E3-D722A0D853E8}"/>
               </a:ext>
             </a:extLst>
           </p:cNvPr>
           <p:cNvSpPr>
-            <a:spLocks xmlns:a="http://schemas.openxmlformats.org/drawingml/2006/main" noGrp="1"/>
-          </p:cNvSpPr>
-          <p:nvPr/>
-        </p:nvSpPr>
-        <p:spPr>
-          <a:xfrm xmlns:a="http://schemas.openxmlformats.org/drawingml/2006/main">
+            <a:spLocks noGrp="1"/>
+          </p:cNvSpPr>
+          <p:nvPr/>
+        </p:nvSpPr>
+        <p:spPr>
+          <a:xfrm>
             <a:off x="552450" y="1524000"/>
             <a:ext cx="11087100" cy="28575"/>
           </a:xfrm>
-          <a:prstGeom xmlns:a="http://schemas.openxmlformats.org/drawingml/2006/main" prst="rect">
-            <a:avLst/>
-          </a:prstGeom>
-          <a:solidFill xmlns:a="http://schemas.openxmlformats.org/drawingml/2006/main">
+          <a:prstGeom prst="rect">
+            <a:avLst/>
+          </a:prstGeom>
+          <a:solidFill>
             <a:srgbClr val="2774C7"/>
           </a:solidFill>
-          <a:ln xmlns:a="http://schemas.openxmlformats.org/drawingml/2006/main" w="0">
-            <a:noFill/>
-            <a:prstDash val="solid"/>
-          </a:ln>
-        </p:spPr>
-      </p:sp>
-      <p:sp>
-        <p:nvSpPr>
-          <p:cNvPr id="4" name="">
-            <a:extLst xmlns:a="http://schemas.openxmlformats.org/drawingml/2006/main">
+          <a:ln w="0">
+            <a:noFill/>
+            <a:prstDash val="solid"/>
+          </a:ln>
+        </p:spPr>
+        <p:txBody>
+          <a:bodyPr/>
+          <a:lstStyle/>
+          <a:p>
+            <a:endParaRPr lang="zh-CN" altLang="en-US"/>
+          </a:p>
+        </p:txBody>
+      </p:sp>
+      <p:sp>
+        <p:nvSpPr>
+          <p:cNvPr id="4" name="矩形 3">
+            <a:extLst>
               <a:ext uri="{FF2B5EF4-FFF2-40B4-BE49-F238E27FC236}">
                 <a16:creationId xmlns:a16="http://schemas.microsoft.com/office/drawing/2014/main" id="{591D5560-663D-490A-B77B-DB0AA32B1B6B}"/>
               </a:ext>
             </a:extLst>
           </p:cNvPr>
           <p:cNvSpPr>
-            <a:spLocks xmlns:a="http://schemas.openxmlformats.org/drawingml/2006/main" noGrp="1"/>
-          </p:cNvSpPr>
-          <p:nvPr/>
-        </p:nvSpPr>
-        <p:spPr>
-          <a:xfrm xmlns:a="http://schemas.openxmlformats.org/drawingml/2006/main">
+            <a:spLocks noGrp="1"/>
+          </p:cNvSpPr>
+          <p:nvPr/>
+        </p:nvSpPr>
+        <p:spPr>
+          <a:xfrm>
             <a:off x="552450" y="1657350"/>
             <a:ext cx="10477500" cy="361950"/>
           </a:xfrm>
-          <a:prstGeom xmlns:a="http://schemas.openxmlformats.org/drawingml/2006/main" prst="rect">
-            <a:avLst/>
-          </a:prstGeom>
-          <a:noFill xmlns:a="http://schemas.openxmlformats.org/drawingml/2006/main"/>
-          <a:ln xmlns:a="http://schemas.openxmlformats.org/drawingml/2006/main" w="0">
-            <a:noFill/>
-            <a:prstDash val="solid"/>
-          </a:ln>
-        </p:spPr>
-        <p:txBody>
-          <a:bodyPr xmlns:a="http://schemas.openxmlformats.org/drawingml/2006/main"/>
-          <a:lstStyle xmlns:a="http://schemas.openxmlformats.org/drawingml/2006/main"/>
-          <a:p xmlns:a="http://schemas.openxmlformats.org/drawingml/2006/main">
+          <a:prstGeom prst="rect">
+            <a:avLst/>
+          </a:prstGeom>
+          <a:noFill/>
+          <a:ln w="0">
+            <a:noFill/>
+            <a:prstDash val="solid"/>
+          </a:ln>
+        </p:spPr>
+        <p:txBody>
+          <a:bodyPr/>
+          <a:lstStyle/>
+          <a:p>
             <a:pPr>
               <a:buNone/>
               <a:defRPr sz="1275" b="0">
@@ -3220,71 +3078,78 @@
       </p:sp>
       <p:sp>
         <p:nvSpPr>
-          <p:cNvPr id="5" name="">
-            <a:extLst xmlns:a="http://schemas.openxmlformats.org/drawingml/2006/main">
+          <p:cNvPr id="5" name="矩形: 圆角 4">
+            <a:extLst>
               <a:ext uri="{FF2B5EF4-FFF2-40B4-BE49-F238E27FC236}">
                 <a16:creationId xmlns:a16="http://schemas.microsoft.com/office/drawing/2014/main" id="{A42056F3-9113-4CCB-B41D-762C93954980}"/>
               </a:ext>
             </a:extLst>
           </p:cNvPr>
           <p:cNvSpPr>
-            <a:spLocks xmlns:a="http://schemas.openxmlformats.org/drawingml/2006/main" noGrp="1"/>
-          </p:cNvSpPr>
-          <p:nvPr/>
-        </p:nvSpPr>
-        <p:spPr>
-          <a:xfrm xmlns:a="http://schemas.openxmlformats.org/drawingml/2006/main">
+            <a:spLocks noGrp="1"/>
+          </p:cNvSpPr>
+          <p:nvPr/>
+        </p:nvSpPr>
+        <p:spPr>
+          <a:xfrm>
             <a:off x="552450" y="2343150"/>
             <a:ext cx="3105150" cy="2724150"/>
           </a:xfrm>
-          <a:prstGeom xmlns:a="http://schemas.openxmlformats.org/drawingml/2006/main" prst="roundRect">
+          <a:prstGeom prst="roundRect">
             <a:avLst>
               <a:gd name="adj" fmla="val 6294"/>
             </a:avLst>
           </a:prstGeom>
-          <a:solidFill xmlns:a="http://schemas.openxmlformats.org/drawingml/2006/main">
+          <a:solidFill>
             <a:srgbClr val="FFFFFF"/>
           </a:solidFill>
-          <a:ln xmlns:a="http://schemas.openxmlformats.org/drawingml/2006/main" w="9525">
+          <a:ln w="9525">
             <a:solidFill>
               <a:srgbClr val="CBD5DF"/>
             </a:solidFill>
             <a:prstDash val="solid"/>
           </a:ln>
         </p:spPr>
-      </p:sp>
-      <p:sp>
-        <p:nvSpPr>
-          <p:cNvPr id="6" name="">
-            <a:extLst xmlns:a="http://schemas.openxmlformats.org/drawingml/2006/main">
+        <p:txBody>
+          <a:bodyPr/>
+          <a:lstStyle/>
+          <a:p>
+            <a:endParaRPr lang="zh-CN" altLang="en-US"/>
+          </a:p>
+        </p:txBody>
+      </p:sp>
+      <p:sp>
+        <p:nvSpPr>
+          <p:cNvPr id="6" name="矩形 5">
+            <a:extLst>
               <a:ext uri="{FF2B5EF4-FFF2-40B4-BE49-F238E27FC236}">
                 <a16:creationId xmlns:a16="http://schemas.microsoft.com/office/drawing/2014/main" id="{8AADCA42-A283-4BDE-90D7-DB6AE59E54CD}"/>
               </a:ext>
             </a:extLst>
           </p:cNvPr>
           <p:cNvSpPr>
-            <a:spLocks xmlns:a="http://schemas.openxmlformats.org/drawingml/2006/main" noGrp="1"/>
-          </p:cNvSpPr>
-          <p:nvPr/>
-        </p:nvSpPr>
-        <p:spPr>
-          <a:xfrm xmlns:a="http://schemas.openxmlformats.org/drawingml/2006/main">
+            <a:spLocks noGrp="1"/>
+          </p:cNvSpPr>
+          <p:nvPr/>
+        </p:nvSpPr>
+        <p:spPr>
+          <a:xfrm>
             <a:off x="819150" y="2590800"/>
             <a:ext cx="628650" cy="342900"/>
           </a:xfrm>
-          <a:prstGeom xmlns:a="http://schemas.openxmlformats.org/drawingml/2006/main" prst="rect">
-            <a:avLst/>
-          </a:prstGeom>
-          <a:noFill xmlns:a="http://schemas.openxmlformats.org/drawingml/2006/main"/>
-          <a:ln xmlns:a="http://schemas.openxmlformats.org/drawingml/2006/main" w="0">
-            <a:noFill/>
-            <a:prstDash val="solid"/>
-          </a:ln>
-        </p:spPr>
-        <p:txBody>
-          <a:bodyPr xmlns:a="http://schemas.openxmlformats.org/drawingml/2006/main"/>
-          <a:lstStyle xmlns:a="http://schemas.openxmlformats.org/drawingml/2006/main"/>
-          <a:p xmlns:a="http://schemas.openxmlformats.org/drawingml/2006/main">
+          <a:prstGeom prst="rect">
+            <a:avLst/>
+          </a:prstGeom>
+          <a:noFill/>
+          <a:ln w="0">
+            <a:noFill/>
+            <a:prstDash val="solid"/>
+          </a:ln>
+        </p:spPr>
+        <p:txBody>
+          <a:bodyPr/>
+          <a:lstStyle/>
+          <a:p>
             <a:pPr>
               <a:buNone/>
               <a:defRPr sz="1275" b="1">
@@ -3306,36 +3171,36 @@
       </p:sp>
       <p:sp>
         <p:nvSpPr>
-          <p:cNvPr id="7" name="">
-            <a:extLst xmlns:a="http://schemas.openxmlformats.org/drawingml/2006/main">
+          <p:cNvPr id="7" name="矩形 6">
+            <a:extLst>
               <a:ext uri="{FF2B5EF4-FFF2-40B4-BE49-F238E27FC236}">
                 <a16:creationId xmlns:a16="http://schemas.microsoft.com/office/drawing/2014/main" id="{84917130-74F6-4219-A39C-CC4CD0CB1966}"/>
               </a:ext>
             </a:extLst>
           </p:cNvPr>
           <p:cNvSpPr>
-            <a:spLocks xmlns:a="http://schemas.openxmlformats.org/drawingml/2006/main" noGrp="1"/>
-          </p:cNvSpPr>
-          <p:nvPr/>
-        </p:nvSpPr>
-        <p:spPr>
-          <a:xfrm xmlns:a="http://schemas.openxmlformats.org/drawingml/2006/main">
+            <a:spLocks noGrp="1"/>
+          </p:cNvSpPr>
+          <p:nvPr/>
+        </p:nvSpPr>
+        <p:spPr>
+          <a:xfrm>
             <a:off x="819150" y="3105150"/>
             <a:ext cx="2381250" cy="361950"/>
           </a:xfrm>
-          <a:prstGeom xmlns:a="http://schemas.openxmlformats.org/drawingml/2006/main" prst="rect">
-            <a:avLst/>
-          </a:prstGeom>
-          <a:noFill xmlns:a="http://schemas.openxmlformats.org/drawingml/2006/main"/>
-          <a:ln xmlns:a="http://schemas.openxmlformats.org/drawingml/2006/main" w="0">
-            <a:noFill/>
-            <a:prstDash val="solid"/>
-          </a:ln>
-        </p:spPr>
-        <p:txBody>
-          <a:bodyPr xmlns:a="http://schemas.openxmlformats.org/drawingml/2006/main"/>
-          <a:lstStyle xmlns:a="http://schemas.openxmlformats.org/drawingml/2006/main"/>
-          <a:p xmlns:a="http://schemas.openxmlformats.org/drawingml/2006/main">
+          <a:prstGeom prst="rect">
+            <a:avLst/>
+          </a:prstGeom>
+          <a:noFill/>
+          <a:ln w="0">
+            <a:noFill/>
+            <a:prstDash val="solid"/>
+          </a:ln>
+        </p:spPr>
+        <p:txBody>
+          <a:bodyPr/>
+          <a:lstStyle/>
+          <a:p>
             <a:pPr>
               <a:buNone/>
               <a:defRPr sz="2025" b="1">
@@ -3357,36 +3222,36 @@
       </p:sp>
       <p:sp>
         <p:nvSpPr>
-          <p:cNvPr id="8" name="">
-            <a:extLst xmlns:a="http://schemas.openxmlformats.org/drawingml/2006/main">
+          <p:cNvPr id="8" name="矩形 7">
+            <a:extLst>
               <a:ext uri="{FF2B5EF4-FFF2-40B4-BE49-F238E27FC236}">
                 <a16:creationId xmlns:a16="http://schemas.microsoft.com/office/drawing/2014/main" id="{7345BDFB-62A7-4856-8749-FF9EB9A57505}"/>
               </a:ext>
             </a:extLst>
           </p:cNvPr>
           <p:cNvSpPr>
-            <a:spLocks xmlns:a="http://schemas.openxmlformats.org/drawingml/2006/main" noGrp="1"/>
-          </p:cNvSpPr>
-          <p:nvPr/>
-        </p:nvSpPr>
-        <p:spPr>
-          <a:xfrm xmlns:a="http://schemas.openxmlformats.org/drawingml/2006/main">
+            <a:spLocks noGrp="1"/>
+          </p:cNvSpPr>
+          <p:nvPr/>
+        </p:nvSpPr>
+        <p:spPr>
+          <a:xfrm>
             <a:off x="819150" y="3657600"/>
             <a:ext cx="2476500" cy="1066800"/>
           </a:xfrm>
-          <a:prstGeom xmlns:a="http://schemas.openxmlformats.org/drawingml/2006/main" prst="rect">
-            <a:avLst/>
-          </a:prstGeom>
-          <a:noFill xmlns:a="http://schemas.openxmlformats.org/drawingml/2006/main"/>
-          <a:ln xmlns:a="http://schemas.openxmlformats.org/drawingml/2006/main" w="0">
-            <a:noFill/>
-            <a:prstDash val="solid"/>
-          </a:ln>
-        </p:spPr>
-        <p:txBody>
-          <a:bodyPr xmlns:a="http://schemas.openxmlformats.org/drawingml/2006/main"/>
-          <a:lstStyle xmlns:a="http://schemas.openxmlformats.org/drawingml/2006/main"/>
-          <a:p xmlns:a="http://schemas.openxmlformats.org/drawingml/2006/main">
+          <a:prstGeom prst="rect">
+            <a:avLst/>
+          </a:prstGeom>
+          <a:noFill/>
+          <a:ln w="0">
+            <a:noFill/>
+            <a:prstDash val="solid"/>
+          </a:ln>
+        </p:spPr>
+        <p:txBody>
+          <a:bodyPr/>
+          <a:lstStyle/>
+          <a:p>
             <a:pPr>
               <a:buNone/>
               <a:defRPr sz="1575" b="0">
@@ -3404,7 +3269,7 @@
               <a:t>Create projects.</a:t>
             </a:r>
           </a:p>
-          <a:p xmlns:a="http://schemas.openxmlformats.org/drawingml/2006/main">
+          <a:p>
             <a:pPr>
               <a:buNone/>
               <a:defRPr sz="1575" b="0">
@@ -3422,7 +3287,7 @@
               <a:t>Assign tasks.</a:t>
             </a:r>
           </a:p>
-          <a:p xmlns:a="http://schemas.openxmlformats.org/drawingml/2006/main">
+          <a:p>
             <a:pPr>
               <a:buNone/>
               <a:defRPr sz="1575" b="0">
@@ -3444,71 +3309,78 @@
       </p:sp>
       <p:sp>
         <p:nvSpPr>
-          <p:cNvPr id="9" name="">
-            <a:extLst xmlns:a="http://schemas.openxmlformats.org/drawingml/2006/main">
+          <p:cNvPr id="9" name="矩形: 圆角 8">
+            <a:extLst>
               <a:ext uri="{FF2B5EF4-FFF2-40B4-BE49-F238E27FC236}">
                 <a16:creationId xmlns:a16="http://schemas.microsoft.com/office/drawing/2014/main" id="{90D7DA2E-577C-454C-AF06-6F53DFBEC8BA}"/>
               </a:ext>
             </a:extLst>
           </p:cNvPr>
           <p:cNvSpPr>
-            <a:spLocks xmlns:a="http://schemas.openxmlformats.org/drawingml/2006/main" noGrp="1"/>
-          </p:cNvSpPr>
-          <p:nvPr/>
-        </p:nvSpPr>
-        <p:spPr>
-          <a:xfrm xmlns:a="http://schemas.openxmlformats.org/drawingml/2006/main">
+            <a:spLocks noGrp="1"/>
+          </p:cNvSpPr>
+          <p:nvPr/>
+        </p:nvSpPr>
+        <p:spPr>
+          <a:xfrm>
             <a:off x="4038600" y="2343150"/>
             <a:ext cx="3105150" cy="2724150"/>
           </a:xfrm>
-          <a:prstGeom xmlns:a="http://schemas.openxmlformats.org/drawingml/2006/main" prst="roundRect">
+          <a:prstGeom prst="roundRect">
             <a:avLst>
               <a:gd name="adj" fmla="val 6294"/>
             </a:avLst>
           </a:prstGeom>
-          <a:solidFill xmlns:a="http://schemas.openxmlformats.org/drawingml/2006/main">
+          <a:solidFill>
             <a:srgbClr val="EAF2FA"/>
           </a:solidFill>
-          <a:ln xmlns:a="http://schemas.openxmlformats.org/drawingml/2006/main" w="9525">
+          <a:ln w="9525">
             <a:solidFill>
               <a:srgbClr val="CBD5DF"/>
             </a:solidFill>
             <a:prstDash val="solid"/>
           </a:ln>
         </p:spPr>
-      </p:sp>
-      <p:sp>
-        <p:nvSpPr>
-          <p:cNvPr id="10" name="">
-            <a:extLst xmlns:a="http://schemas.openxmlformats.org/drawingml/2006/main">
+        <p:txBody>
+          <a:bodyPr/>
+          <a:lstStyle/>
+          <a:p>
+            <a:endParaRPr lang="zh-CN" altLang="en-US"/>
+          </a:p>
+        </p:txBody>
+      </p:sp>
+      <p:sp>
+        <p:nvSpPr>
+          <p:cNvPr id="10" name="矩形 9">
+            <a:extLst>
               <a:ext uri="{FF2B5EF4-FFF2-40B4-BE49-F238E27FC236}">
                 <a16:creationId xmlns:a16="http://schemas.microsoft.com/office/drawing/2014/main" id="{3CA560B0-4751-4751-B910-A2EBA8D46B9D}"/>
               </a:ext>
             </a:extLst>
           </p:cNvPr>
           <p:cNvSpPr>
-            <a:spLocks xmlns:a="http://schemas.openxmlformats.org/drawingml/2006/main" noGrp="1"/>
-          </p:cNvSpPr>
-          <p:nvPr/>
-        </p:nvSpPr>
-        <p:spPr>
-          <a:xfrm xmlns:a="http://schemas.openxmlformats.org/drawingml/2006/main">
+            <a:spLocks noGrp="1"/>
+          </p:cNvSpPr>
+          <p:nvPr/>
+        </p:nvSpPr>
+        <p:spPr>
+          <a:xfrm>
             <a:off x="4305300" y="2590800"/>
             <a:ext cx="628650" cy="342900"/>
           </a:xfrm>
-          <a:prstGeom xmlns:a="http://schemas.openxmlformats.org/drawingml/2006/main" prst="rect">
-            <a:avLst/>
-          </a:prstGeom>
-          <a:noFill xmlns:a="http://schemas.openxmlformats.org/drawingml/2006/main"/>
-          <a:ln xmlns:a="http://schemas.openxmlformats.org/drawingml/2006/main" w="0">
-            <a:noFill/>
-            <a:prstDash val="solid"/>
-          </a:ln>
-        </p:spPr>
-        <p:txBody>
-          <a:bodyPr xmlns:a="http://schemas.openxmlformats.org/drawingml/2006/main"/>
-          <a:lstStyle xmlns:a="http://schemas.openxmlformats.org/drawingml/2006/main"/>
-          <a:p xmlns:a="http://schemas.openxmlformats.org/drawingml/2006/main">
+          <a:prstGeom prst="rect">
+            <a:avLst/>
+          </a:prstGeom>
+          <a:noFill/>
+          <a:ln w="0">
+            <a:noFill/>
+            <a:prstDash val="solid"/>
+          </a:ln>
+        </p:spPr>
+        <p:txBody>
+          <a:bodyPr/>
+          <a:lstStyle/>
+          <a:p>
             <a:pPr>
               <a:buNone/>
               <a:defRPr sz="1275" b="1">
@@ -3530,36 +3402,36 @@
       </p:sp>
       <p:sp>
         <p:nvSpPr>
-          <p:cNvPr id="11" name="">
-            <a:extLst xmlns:a="http://schemas.openxmlformats.org/drawingml/2006/main">
+          <p:cNvPr id="11" name="矩形 10">
+            <a:extLst>
               <a:ext uri="{FF2B5EF4-FFF2-40B4-BE49-F238E27FC236}">
                 <a16:creationId xmlns:a16="http://schemas.microsoft.com/office/drawing/2014/main" id="{FAC25ADE-62EF-4BF7-A501-A928C699099D}"/>
               </a:ext>
             </a:extLst>
           </p:cNvPr>
           <p:cNvSpPr>
-            <a:spLocks xmlns:a="http://schemas.openxmlformats.org/drawingml/2006/main" noGrp="1"/>
-          </p:cNvSpPr>
-          <p:nvPr/>
-        </p:nvSpPr>
-        <p:spPr>
-          <a:xfrm xmlns:a="http://schemas.openxmlformats.org/drawingml/2006/main">
+            <a:spLocks noGrp="1"/>
+          </p:cNvSpPr>
+          <p:nvPr/>
+        </p:nvSpPr>
+        <p:spPr>
+          <a:xfrm>
             <a:off x="4305300" y="3105150"/>
             <a:ext cx="2381250" cy="361950"/>
           </a:xfrm>
-          <a:prstGeom xmlns:a="http://schemas.openxmlformats.org/drawingml/2006/main" prst="rect">
-            <a:avLst/>
-          </a:prstGeom>
-          <a:noFill xmlns:a="http://schemas.openxmlformats.org/drawingml/2006/main"/>
-          <a:ln xmlns:a="http://schemas.openxmlformats.org/drawingml/2006/main" w="0">
-            <a:noFill/>
-            <a:prstDash val="solid"/>
-          </a:ln>
-        </p:spPr>
-        <p:txBody>
-          <a:bodyPr xmlns:a="http://schemas.openxmlformats.org/drawingml/2006/main"/>
-          <a:lstStyle xmlns:a="http://schemas.openxmlformats.org/drawingml/2006/main"/>
-          <a:p xmlns:a="http://schemas.openxmlformats.org/drawingml/2006/main">
+          <a:prstGeom prst="rect">
+            <a:avLst/>
+          </a:prstGeom>
+          <a:noFill/>
+          <a:ln w="0">
+            <a:noFill/>
+            <a:prstDash val="solid"/>
+          </a:ln>
+        </p:spPr>
+        <p:txBody>
+          <a:bodyPr/>
+          <a:lstStyle/>
+          <a:p>
             <a:pPr>
               <a:buNone/>
               <a:defRPr sz="2025" b="1">
@@ -3581,36 +3453,36 @@
       </p:sp>
       <p:sp>
         <p:nvSpPr>
-          <p:cNvPr id="12" name="">
-            <a:extLst xmlns:a="http://schemas.openxmlformats.org/drawingml/2006/main">
+          <p:cNvPr id="12" name="矩形 11">
+            <a:extLst>
               <a:ext uri="{FF2B5EF4-FFF2-40B4-BE49-F238E27FC236}">
                 <a16:creationId xmlns:a16="http://schemas.microsoft.com/office/drawing/2014/main" id="{76530A9C-3388-4C6E-A397-A83F028DD6C7}"/>
               </a:ext>
             </a:extLst>
           </p:cNvPr>
           <p:cNvSpPr>
-            <a:spLocks xmlns:a="http://schemas.openxmlformats.org/drawingml/2006/main" noGrp="1"/>
-          </p:cNvSpPr>
-          <p:nvPr/>
-        </p:nvSpPr>
-        <p:spPr>
-          <a:xfrm xmlns:a="http://schemas.openxmlformats.org/drawingml/2006/main">
+            <a:spLocks noGrp="1"/>
+          </p:cNvSpPr>
+          <p:nvPr/>
+        </p:nvSpPr>
+        <p:spPr>
+          <a:xfrm>
             <a:off x="4305300" y="3657600"/>
             <a:ext cx="2476500" cy="1066800"/>
           </a:xfrm>
-          <a:prstGeom xmlns:a="http://schemas.openxmlformats.org/drawingml/2006/main" prst="rect">
-            <a:avLst/>
-          </a:prstGeom>
-          <a:noFill xmlns:a="http://schemas.openxmlformats.org/drawingml/2006/main"/>
-          <a:ln xmlns:a="http://schemas.openxmlformats.org/drawingml/2006/main" w="0">
-            <a:noFill/>
-            <a:prstDash val="solid"/>
-          </a:ln>
-        </p:spPr>
-        <p:txBody>
-          <a:bodyPr xmlns:a="http://schemas.openxmlformats.org/drawingml/2006/main"/>
-          <a:lstStyle xmlns:a="http://schemas.openxmlformats.org/drawingml/2006/main"/>
-          <a:p xmlns:a="http://schemas.openxmlformats.org/drawingml/2006/main">
+          <a:prstGeom prst="rect">
+            <a:avLst/>
+          </a:prstGeom>
+          <a:noFill/>
+          <a:ln w="0">
+            <a:noFill/>
+            <a:prstDash val="solid"/>
+          </a:ln>
+        </p:spPr>
+        <p:txBody>
+          <a:bodyPr/>
+          <a:lstStyle/>
+          <a:p>
             <a:pPr>
               <a:buNone/>
               <a:defRPr sz="1575" b="0">
@@ -3628,7 +3500,7 @@
               <a:t>Progress work.</a:t>
             </a:r>
           </a:p>
-          <a:p xmlns:a="http://schemas.openxmlformats.org/drawingml/2006/main">
+          <a:p>
             <a:pPr>
               <a:buNone/>
               <a:defRPr sz="1575" b="0">
@@ -3646,7 +3518,7 @@
               <a:t>Discuss blockers.</a:t>
             </a:r>
           </a:p>
-          <a:p xmlns:a="http://schemas.openxmlformats.org/drawingml/2006/main">
+          <a:p>
             <a:pPr>
               <a:buNone/>
               <a:defRPr sz="1575" b="0">
@@ -3668,71 +3540,78 @@
       </p:sp>
       <p:sp>
         <p:nvSpPr>
-          <p:cNvPr id="13" name="">
-            <a:extLst xmlns:a="http://schemas.openxmlformats.org/drawingml/2006/main">
+          <p:cNvPr id="13" name="矩形: 圆角 12">
+            <a:extLst>
               <a:ext uri="{FF2B5EF4-FFF2-40B4-BE49-F238E27FC236}">
                 <a16:creationId xmlns:a16="http://schemas.microsoft.com/office/drawing/2014/main" id="{C45F3564-6F45-4C3F-8B81-5F0D237BF838}"/>
               </a:ext>
             </a:extLst>
           </p:cNvPr>
           <p:cNvSpPr>
-            <a:spLocks xmlns:a="http://schemas.openxmlformats.org/drawingml/2006/main" noGrp="1"/>
-          </p:cNvSpPr>
-          <p:nvPr/>
-        </p:nvSpPr>
-        <p:spPr>
-          <a:xfrm xmlns:a="http://schemas.openxmlformats.org/drawingml/2006/main">
+            <a:spLocks noGrp="1"/>
+          </p:cNvSpPr>
+          <p:nvPr/>
+        </p:nvSpPr>
+        <p:spPr>
+          <a:xfrm>
             <a:off x="7524750" y="2343150"/>
             <a:ext cx="3105150" cy="2724150"/>
           </a:xfrm>
-          <a:prstGeom xmlns:a="http://schemas.openxmlformats.org/drawingml/2006/main" prst="roundRect">
+          <a:prstGeom prst="roundRect">
             <a:avLst>
               <a:gd name="adj" fmla="val 6294"/>
             </a:avLst>
           </a:prstGeom>
-          <a:solidFill xmlns:a="http://schemas.openxmlformats.org/drawingml/2006/main">
+          <a:solidFill>
             <a:srgbClr val="FFFFFF"/>
           </a:solidFill>
-          <a:ln xmlns:a="http://schemas.openxmlformats.org/drawingml/2006/main" w="9525">
+          <a:ln w="9525">
             <a:solidFill>
               <a:srgbClr val="CBD5DF"/>
             </a:solidFill>
             <a:prstDash val="solid"/>
           </a:ln>
         </p:spPr>
-      </p:sp>
-      <p:sp>
-        <p:nvSpPr>
-          <p:cNvPr id="14" name="">
-            <a:extLst xmlns:a="http://schemas.openxmlformats.org/drawingml/2006/main">
+        <p:txBody>
+          <a:bodyPr/>
+          <a:lstStyle/>
+          <a:p>
+            <a:endParaRPr lang="zh-CN" altLang="en-US"/>
+          </a:p>
+        </p:txBody>
+      </p:sp>
+      <p:sp>
+        <p:nvSpPr>
+          <p:cNvPr id="14" name="矩形 13">
+            <a:extLst>
               <a:ext uri="{FF2B5EF4-FFF2-40B4-BE49-F238E27FC236}">
                 <a16:creationId xmlns:a16="http://schemas.microsoft.com/office/drawing/2014/main" id="{2FCE345A-EA6B-438E-B96E-811E8992B9E6}"/>
               </a:ext>
             </a:extLst>
           </p:cNvPr>
           <p:cNvSpPr>
-            <a:spLocks xmlns:a="http://schemas.openxmlformats.org/drawingml/2006/main" noGrp="1"/>
-          </p:cNvSpPr>
-          <p:nvPr/>
-        </p:nvSpPr>
-        <p:spPr>
-          <a:xfrm xmlns:a="http://schemas.openxmlformats.org/drawingml/2006/main">
+            <a:spLocks noGrp="1"/>
+          </p:cNvSpPr>
+          <p:nvPr/>
+        </p:nvSpPr>
+        <p:spPr>
+          <a:xfrm>
             <a:off x="7791450" y="2590800"/>
             <a:ext cx="628650" cy="342900"/>
           </a:xfrm>
-          <a:prstGeom xmlns:a="http://schemas.openxmlformats.org/drawingml/2006/main" prst="rect">
-            <a:avLst/>
-          </a:prstGeom>
-          <a:noFill xmlns:a="http://schemas.openxmlformats.org/drawingml/2006/main"/>
-          <a:ln xmlns:a="http://schemas.openxmlformats.org/drawingml/2006/main" w="0">
-            <a:noFill/>
-            <a:prstDash val="solid"/>
-          </a:ln>
-        </p:spPr>
-        <p:txBody>
-          <a:bodyPr xmlns:a="http://schemas.openxmlformats.org/drawingml/2006/main"/>
-          <a:lstStyle xmlns:a="http://schemas.openxmlformats.org/drawingml/2006/main"/>
-          <a:p xmlns:a="http://schemas.openxmlformats.org/drawingml/2006/main">
+          <a:prstGeom prst="rect">
+            <a:avLst/>
+          </a:prstGeom>
+          <a:noFill/>
+          <a:ln w="0">
+            <a:noFill/>
+            <a:prstDash val="solid"/>
+          </a:ln>
+        </p:spPr>
+        <p:txBody>
+          <a:bodyPr/>
+          <a:lstStyle/>
+          <a:p>
             <a:pPr>
               <a:buNone/>
               <a:defRPr sz="1275" b="1">
@@ -3754,36 +3633,36 @@
       </p:sp>
       <p:sp>
         <p:nvSpPr>
-          <p:cNvPr id="15" name="">
-            <a:extLst xmlns:a="http://schemas.openxmlformats.org/drawingml/2006/main">
+          <p:cNvPr id="15" name="矩形 14">
+            <a:extLst>
               <a:ext uri="{FF2B5EF4-FFF2-40B4-BE49-F238E27FC236}">
                 <a16:creationId xmlns:a16="http://schemas.microsoft.com/office/drawing/2014/main" id="{82C1E229-7B4B-46E8-A402-33D566B7BA10}"/>
               </a:ext>
             </a:extLst>
           </p:cNvPr>
           <p:cNvSpPr>
-            <a:spLocks xmlns:a="http://schemas.openxmlformats.org/drawingml/2006/main" noGrp="1"/>
-          </p:cNvSpPr>
-          <p:nvPr/>
-        </p:nvSpPr>
-        <p:spPr>
-          <a:xfrm xmlns:a="http://schemas.openxmlformats.org/drawingml/2006/main">
+            <a:spLocks noGrp="1"/>
+          </p:cNvSpPr>
+          <p:nvPr/>
+        </p:nvSpPr>
+        <p:spPr>
+          <a:xfrm>
             <a:off x="7791450" y="3105150"/>
             <a:ext cx="2381250" cy="361950"/>
           </a:xfrm>
-          <a:prstGeom xmlns:a="http://schemas.openxmlformats.org/drawingml/2006/main" prst="rect">
-            <a:avLst/>
-          </a:prstGeom>
-          <a:noFill xmlns:a="http://schemas.openxmlformats.org/drawingml/2006/main"/>
-          <a:ln xmlns:a="http://schemas.openxmlformats.org/drawingml/2006/main" w="0">
-            <a:noFill/>
-            <a:prstDash val="solid"/>
-          </a:ln>
-        </p:spPr>
-        <p:txBody>
-          <a:bodyPr xmlns:a="http://schemas.openxmlformats.org/drawingml/2006/main"/>
-          <a:lstStyle xmlns:a="http://schemas.openxmlformats.org/drawingml/2006/main"/>
-          <a:p xmlns:a="http://schemas.openxmlformats.org/drawingml/2006/main">
+          <a:prstGeom prst="rect">
+            <a:avLst/>
+          </a:prstGeom>
+          <a:noFill/>
+          <a:ln w="0">
+            <a:noFill/>
+            <a:prstDash val="solid"/>
+          </a:ln>
+        </p:spPr>
+        <p:txBody>
+          <a:bodyPr/>
+          <a:lstStyle/>
+          <a:p>
             <a:pPr>
               <a:buNone/>
               <a:defRPr sz="2025" b="1">
@@ -3805,36 +3684,36 @@
       </p:sp>
       <p:sp>
         <p:nvSpPr>
-          <p:cNvPr id="16" name="">
-            <a:extLst xmlns:a="http://schemas.openxmlformats.org/drawingml/2006/main">
+          <p:cNvPr id="16" name="矩形 15">
+            <a:extLst>
               <a:ext uri="{FF2B5EF4-FFF2-40B4-BE49-F238E27FC236}">
                 <a16:creationId xmlns:a16="http://schemas.microsoft.com/office/drawing/2014/main" id="{5B8CD48D-D9D4-486A-98AA-15A866EFB7C6}"/>
               </a:ext>
             </a:extLst>
           </p:cNvPr>
           <p:cNvSpPr>
-            <a:spLocks xmlns:a="http://schemas.openxmlformats.org/drawingml/2006/main" noGrp="1"/>
-          </p:cNvSpPr>
-          <p:nvPr/>
-        </p:nvSpPr>
-        <p:spPr>
-          <a:xfrm xmlns:a="http://schemas.openxmlformats.org/drawingml/2006/main">
+            <a:spLocks noGrp="1"/>
+          </p:cNvSpPr>
+          <p:nvPr/>
+        </p:nvSpPr>
+        <p:spPr>
+          <a:xfrm>
             <a:off x="7791450" y="3657600"/>
             <a:ext cx="2476500" cy="1066800"/>
           </a:xfrm>
-          <a:prstGeom xmlns:a="http://schemas.openxmlformats.org/drawingml/2006/main" prst="rect">
-            <a:avLst/>
-          </a:prstGeom>
-          <a:noFill xmlns:a="http://schemas.openxmlformats.org/drawingml/2006/main"/>
-          <a:ln xmlns:a="http://schemas.openxmlformats.org/drawingml/2006/main" w="0">
-            <a:noFill/>
-            <a:prstDash val="solid"/>
-          </a:ln>
-        </p:spPr>
-        <p:txBody>
-          <a:bodyPr xmlns:a="http://schemas.openxmlformats.org/drawingml/2006/main"/>
-          <a:lstStyle xmlns:a="http://schemas.openxmlformats.org/drawingml/2006/main"/>
-          <a:p xmlns:a="http://schemas.openxmlformats.org/drawingml/2006/main">
+          <a:prstGeom prst="rect">
+            <a:avLst/>
+          </a:prstGeom>
+          <a:noFill/>
+          <a:ln w="0">
+            <a:noFill/>
+            <a:prstDash val="solid"/>
+          </a:ln>
+        </p:spPr>
+        <p:txBody>
+          <a:bodyPr/>
+          <a:lstStyle/>
+          <a:p>
             <a:pPr>
               <a:buNone/>
               <a:defRPr sz="1575" b="0">
@@ -3852,7 +3731,7 @@
               <a:t>See activity totals.</a:t>
             </a:r>
           </a:p>
-          <a:p xmlns:a="http://schemas.openxmlformats.org/drawingml/2006/main">
+          <a:p>
             <a:pPr>
               <a:buNone/>
               <a:defRPr sz="1575" b="0">
@@ -3870,7 +3749,7 @@
               <a:t>Drill into events.</a:t>
             </a:r>
           </a:p>
-          <a:p xmlns:a="http://schemas.openxmlformats.org/drawingml/2006/main">
+          <a:p>
             <a:pPr>
               <a:buNone/>
               <a:defRPr sz="1575" b="0">
@@ -3892,36 +3771,36 @@
       </p:sp>
       <p:sp>
         <p:nvSpPr>
-          <p:cNvPr id="17" name="">
-            <a:extLst xmlns:a="http://schemas.openxmlformats.org/drawingml/2006/main">
+          <p:cNvPr id="17" name="矩形 16">
+            <a:extLst>
               <a:ext uri="{FF2B5EF4-FFF2-40B4-BE49-F238E27FC236}">
                 <a16:creationId xmlns:a16="http://schemas.microsoft.com/office/drawing/2014/main" id="{F2513228-DD49-4D68-A83F-005654297AAF}"/>
               </a:ext>
             </a:extLst>
           </p:cNvPr>
           <p:cNvSpPr>
-            <a:spLocks xmlns:a="http://schemas.openxmlformats.org/drawingml/2006/main" noGrp="1"/>
-          </p:cNvSpPr>
-          <p:nvPr/>
-        </p:nvSpPr>
-        <p:spPr>
-          <a:xfrm xmlns:a="http://schemas.openxmlformats.org/drawingml/2006/main">
+            <a:spLocks noGrp="1"/>
+          </p:cNvSpPr>
+          <p:nvPr/>
+        </p:nvSpPr>
+        <p:spPr>
+          <a:xfrm>
             <a:off x="3705225" y="3333750"/>
             <a:ext cx="323850" cy="457200"/>
           </a:xfrm>
-          <a:prstGeom xmlns:a="http://schemas.openxmlformats.org/drawingml/2006/main" prst="rect">
-            <a:avLst/>
-          </a:prstGeom>
-          <a:noFill xmlns:a="http://schemas.openxmlformats.org/drawingml/2006/main"/>
-          <a:ln xmlns:a="http://schemas.openxmlformats.org/drawingml/2006/main" w="0">
-            <a:noFill/>
-            <a:prstDash val="solid"/>
-          </a:ln>
-        </p:spPr>
-        <p:txBody>
-          <a:bodyPr xmlns:a="http://schemas.openxmlformats.org/drawingml/2006/main"/>
-          <a:lstStyle xmlns:a="http://schemas.openxmlformats.org/drawingml/2006/main"/>
-          <a:p xmlns:a="http://schemas.openxmlformats.org/drawingml/2006/main">
+          <a:prstGeom prst="rect">
+            <a:avLst/>
+          </a:prstGeom>
+          <a:noFill/>
+          <a:ln w="0">
+            <a:noFill/>
+            <a:prstDash val="solid"/>
+          </a:ln>
+        </p:spPr>
+        <p:txBody>
+          <a:bodyPr/>
+          <a:lstStyle/>
+          <a:p>
             <a:pPr>
               <a:buNone/>
               <a:defRPr sz="2550" b="1">
@@ -3943,36 +3822,36 @@
       </p:sp>
       <p:sp>
         <p:nvSpPr>
-          <p:cNvPr id="18" name="">
-            <a:extLst xmlns:a="http://schemas.openxmlformats.org/drawingml/2006/main">
+          <p:cNvPr id="18" name="矩形 17">
+            <a:extLst>
               <a:ext uri="{FF2B5EF4-FFF2-40B4-BE49-F238E27FC236}">
                 <a16:creationId xmlns:a16="http://schemas.microsoft.com/office/drawing/2014/main" id="{53583048-F408-4C74-912F-B5599396AE56}"/>
               </a:ext>
             </a:extLst>
           </p:cNvPr>
           <p:cNvSpPr>
-            <a:spLocks xmlns:a="http://schemas.openxmlformats.org/drawingml/2006/main" noGrp="1"/>
-          </p:cNvSpPr>
-          <p:nvPr/>
-        </p:nvSpPr>
-        <p:spPr>
-          <a:xfrm xmlns:a="http://schemas.openxmlformats.org/drawingml/2006/main">
+            <a:spLocks noGrp="1"/>
+          </p:cNvSpPr>
+          <p:nvPr/>
+        </p:nvSpPr>
+        <p:spPr>
+          <a:xfrm>
             <a:off x="7191375" y="3333750"/>
             <a:ext cx="323850" cy="457200"/>
           </a:xfrm>
-          <a:prstGeom xmlns:a="http://schemas.openxmlformats.org/drawingml/2006/main" prst="rect">
-            <a:avLst/>
-          </a:prstGeom>
-          <a:noFill xmlns:a="http://schemas.openxmlformats.org/drawingml/2006/main"/>
-          <a:ln xmlns:a="http://schemas.openxmlformats.org/drawingml/2006/main" w="0">
-            <a:noFill/>
-            <a:prstDash val="solid"/>
-          </a:ln>
-        </p:spPr>
-        <p:txBody>
-          <a:bodyPr xmlns:a="http://schemas.openxmlformats.org/drawingml/2006/main"/>
-          <a:lstStyle xmlns:a="http://schemas.openxmlformats.org/drawingml/2006/main"/>
-          <a:p xmlns:a="http://schemas.openxmlformats.org/drawingml/2006/main">
+          <a:prstGeom prst="rect">
+            <a:avLst/>
+          </a:prstGeom>
+          <a:noFill/>
+          <a:ln w="0">
+            <a:noFill/>
+            <a:prstDash val="solid"/>
+          </a:ln>
+        </p:spPr>
+        <p:txBody>
+          <a:bodyPr/>
+          <a:lstStyle/>
+          <a:p>
             <a:pPr>
               <a:buNone/>
               <a:defRPr sz="2550" b="1">
@@ -3994,69 +3873,76 @@
       </p:sp>
       <p:sp>
         <p:nvSpPr>
-          <p:cNvPr id="19" name="">
-            <a:extLst xmlns:a="http://schemas.openxmlformats.org/drawingml/2006/main">
+          <p:cNvPr id="19" name="矩形: 圆角 18">
+            <a:extLst>
               <a:ext uri="{FF2B5EF4-FFF2-40B4-BE49-F238E27FC236}">
                 <a16:creationId xmlns:a16="http://schemas.microsoft.com/office/drawing/2014/main" id="{22B05FC5-FD94-4FDF-9BC0-DF0F10F55079}"/>
               </a:ext>
             </a:extLst>
           </p:cNvPr>
           <p:cNvSpPr>
-            <a:spLocks xmlns:a="http://schemas.openxmlformats.org/drawingml/2006/main" noGrp="1"/>
-          </p:cNvSpPr>
-          <p:nvPr/>
-        </p:nvSpPr>
-        <p:spPr>
-          <a:xfrm xmlns:a="http://schemas.openxmlformats.org/drawingml/2006/main">
+            <a:spLocks noGrp="1"/>
+          </p:cNvSpPr>
+          <p:nvPr/>
+        </p:nvSpPr>
+        <p:spPr>
+          <a:xfrm>
             <a:off x="552450" y="5334000"/>
             <a:ext cx="10077450" cy="666750"/>
           </a:xfrm>
-          <a:prstGeom xmlns:a="http://schemas.openxmlformats.org/drawingml/2006/main" prst="roundRect">
+          <a:prstGeom prst="roundRect">
             <a:avLst>
               <a:gd name="adj" fmla="val 20000"/>
             </a:avLst>
           </a:prstGeom>
-          <a:solidFill xmlns:a="http://schemas.openxmlformats.org/drawingml/2006/main">
+          <a:solidFill>
             <a:srgbClr val="12263A"/>
           </a:solidFill>
-          <a:ln xmlns:a="http://schemas.openxmlformats.org/drawingml/2006/main" w="0">
-            <a:noFill/>
-            <a:prstDash val="solid"/>
-          </a:ln>
-        </p:spPr>
-      </p:sp>
-      <p:sp>
-        <p:nvSpPr>
-          <p:cNvPr id="20" name="">
-            <a:extLst xmlns:a="http://schemas.openxmlformats.org/drawingml/2006/main">
+          <a:ln w="0">
+            <a:noFill/>
+            <a:prstDash val="solid"/>
+          </a:ln>
+        </p:spPr>
+        <p:txBody>
+          <a:bodyPr/>
+          <a:lstStyle/>
+          <a:p>
+            <a:endParaRPr lang="zh-CN" altLang="en-US"/>
+          </a:p>
+        </p:txBody>
+      </p:sp>
+      <p:sp>
+        <p:nvSpPr>
+          <p:cNvPr id="20" name="矩形 19">
+            <a:extLst>
               <a:ext uri="{FF2B5EF4-FFF2-40B4-BE49-F238E27FC236}">
                 <a16:creationId xmlns:a16="http://schemas.microsoft.com/office/drawing/2014/main" id="{D448524E-E92C-4C58-8A3D-0D2437F0D48A}"/>
               </a:ext>
             </a:extLst>
           </p:cNvPr>
           <p:cNvSpPr>
-            <a:spLocks xmlns:a="http://schemas.openxmlformats.org/drawingml/2006/main" noGrp="1"/>
-          </p:cNvSpPr>
-          <p:nvPr/>
-        </p:nvSpPr>
-        <p:spPr>
-          <a:xfrm xmlns:a="http://schemas.openxmlformats.org/drawingml/2006/main">
+            <a:spLocks noGrp="1"/>
+          </p:cNvSpPr>
+          <p:nvPr/>
+        </p:nvSpPr>
+        <p:spPr>
+          <a:xfrm>
             <a:off x="838200" y="5534025"/>
             <a:ext cx="3333750" cy="266700"/>
           </a:xfrm>
-          <a:prstGeom xmlns:a="http://schemas.openxmlformats.org/drawingml/2006/main" prst="rect">
-            <a:avLst/>
-          </a:prstGeom>
-          <a:noFill xmlns:a="http://schemas.openxmlformats.org/drawingml/2006/main"/>
-          <a:ln xmlns:a="http://schemas.openxmlformats.org/drawingml/2006/main" w="0">
-            <a:noFill/>
-            <a:prstDash val="solid"/>
-          </a:ln>
-        </p:spPr>
-        <p:txBody>
-          <a:bodyPr xmlns:a="http://schemas.openxmlformats.org/drawingml/2006/main"/>
-          <a:lstStyle xmlns:a="http://schemas.openxmlformats.org/drawingml/2006/main"/>
-          <a:p xmlns:a="http://schemas.openxmlformats.org/drawingml/2006/main">
+          <a:prstGeom prst="rect">
+            <a:avLst/>
+          </a:prstGeom>
+          <a:noFill/>
+          <a:ln w="0">
+            <a:noFill/>
+            <a:prstDash val="solid"/>
+          </a:ln>
+        </p:spPr>
+        <p:txBody>
+          <a:bodyPr/>
+          <a:lstStyle/>
+          <a:p>
             <a:pPr>
               <a:buNone/>
               <a:defRPr sz="1275" b="1">
@@ -4078,36 +3964,36 @@
       </p:sp>
       <p:sp>
         <p:nvSpPr>
-          <p:cNvPr id="21" name="">
-            <a:extLst xmlns:a="http://schemas.openxmlformats.org/drawingml/2006/main">
+          <p:cNvPr id="21" name="矩形 20">
+            <a:extLst>
               <a:ext uri="{FF2B5EF4-FFF2-40B4-BE49-F238E27FC236}">
                 <a16:creationId xmlns:a16="http://schemas.microsoft.com/office/drawing/2014/main" id="{E80C3469-7B6C-47E3-9D96-93DAABD3D372}"/>
               </a:ext>
             </a:extLst>
           </p:cNvPr>
           <p:cNvSpPr>
-            <a:spLocks xmlns:a="http://schemas.openxmlformats.org/drawingml/2006/main" noGrp="1"/>
-          </p:cNvSpPr>
-          <p:nvPr/>
-        </p:nvSpPr>
-        <p:spPr>
-          <a:xfrm xmlns:a="http://schemas.openxmlformats.org/drawingml/2006/main">
+            <a:spLocks noGrp="1"/>
+          </p:cNvSpPr>
+          <p:nvPr/>
+        </p:nvSpPr>
+        <p:spPr>
+          <a:xfrm>
             <a:off x="6772275" y="5524500"/>
             <a:ext cx="3524250" cy="266700"/>
           </a:xfrm>
-          <a:prstGeom xmlns:a="http://schemas.openxmlformats.org/drawingml/2006/main" prst="rect">
-            <a:avLst/>
-          </a:prstGeom>
-          <a:noFill xmlns:a="http://schemas.openxmlformats.org/drawingml/2006/main"/>
-          <a:ln xmlns:a="http://schemas.openxmlformats.org/drawingml/2006/main" w="0">
-            <a:noFill/>
-            <a:prstDash val="solid"/>
-          </a:ln>
-        </p:spPr>
-        <p:txBody>
-          <a:bodyPr xmlns:a="http://schemas.openxmlformats.org/drawingml/2006/main"/>
-          <a:lstStyle xmlns:a="http://schemas.openxmlformats.org/drawingml/2006/main"/>
-          <a:p xmlns:a="http://schemas.openxmlformats.org/drawingml/2006/main">
+          <a:prstGeom prst="rect">
+            <a:avLst/>
+          </a:prstGeom>
+          <a:noFill/>
+          <a:ln w="0">
+            <a:noFill/>
+            <a:prstDash val="solid"/>
+          </a:ln>
+        </p:spPr>
+        <p:txBody>
+          <a:bodyPr/>
+          <a:lstStyle/>
+          <a:p>
             <a:pPr>
               <a:buNone/>
               <a:defRPr sz="1350" b="0" i="1">
@@ -4129,36 +4015,36 @@
       </p:sp>
       <p:sp>
         <p:nvSpPr>
-          <p:cNvPr id="22" name="">
-            <a:extLst xmlns:a="http://schemas.openxmlformats.org/drawingml/2006/main">
+          <p:cNvPr id="22" name="矩形 21">
+            <a:extLst>
               <a:ext uri="{FF2B5EF4-FFF2-40B4-BE49-F238E27FC236}">
                 <a16:creationId xmlns:a16="http://schemas.microsoft.com/office/drawing/2014/main" id="{E9CDBA11-39EF-440C-BE69-FC917BA051EE}"/>
               </a:ext>
             </a:extLst>
           </p:cNvPr>
           <p:cNvSpPr>
-            <a:spLocks xmlns:a="http://schemas.openxmlformats.org/drawingml/2006/main" noGrp="1"/>
-          </p:cNvSpPr>
-          <p:nvPr/>
-        </p:nvSpPr>
-        <p:spPr>
-          <a:xfrm xmlns:a="http://schemas.openxmlformats.org/drawingml/2006/main">
+            <a:spLocks noGrp="1"/>
+          </p:cNvSpPr>
+          <p:nvPr/>
+        </p:nvSpPr>
+        <p:spPr>
+          <a:xfrm>
             <a:off x="552450" y="6496050"/>
             <a:ext cx="4953000" cy="190500"/>
           </a:xfrm>
-          <a:prstGeom xmlns:a="http://schemas.openxmlformats.org/drawingml/2006/main" prst="rect">
-            <a:avLst/>
-          </a:prstGeom>
-          <a:noFill xmlns:a="http://schemas.openxmlformats.org/drawingml/2006/main"/>
-          <a:ln xmlns:a="http://schemas.openxmlformats.org/drawingml/2006/main" w="0">
-            <a:noFill/>
-            <a:prstDash val="solid"/>
-          </a:ln>
-        </p:spPr>
-        <p:txBody>
-          <a:bodyPr xmlns:a="http://schemas.openxmlformats.org/drawingml/2006/main"/>
-          <a:lstStyle xmlns:a="http://schemas.openxmlformats.org/drawingml/2006/main"/>
-          <a:p xmlns:a="http://schemas.openxmlformats.org/drawingml/2006/main">
+          <a:prstGeom prst="rect">
+            <a:avLst/>
+          </a:prstGeom>
+          <a:noFill/>
+          <a:ln w="0">
+            <a:noFill/>
+            <a:prstDash val="solid"/>
+          </a:ln>
+        </p:spPr>
+        <p:txBody>
+          <a:bodyPr/>
+          <a:lstStyle/>
+          <a:p>
             <a:pPr>
               <a:buNone/>
               <a:defRPr sz="825" b="1">
@@ -4168,48 +4054,48 @@
               </a:defRPr>
             </a:pPr>
             <a:r>
-              <a:rPr sz="825" b="1">
+              <a:rPr lang="en-US" altLang="zh-CN" sz="825" b="1" dirty="0">
                 <a:solidFill>
                   <a:srgbClr val="667482"/>
                 </a:solidFill>
               </a:rPr>
-              <a:t>STUDYCREW  |  ELEC3609/9609  |  GROUP 02</a:t>
-            </a:r>
-          </a:p>
-        </p:txBody>
-      </p:sp>
-      <p:sp>
-        <p:nvSpPr>
-          <p:cNvPr id="23" name="">
-            <a:extLst xmlns:a="http://schemas.openxmlformats.org/drawingml/2006/main">
+              <a:t>STUDYCREW  |  ELEC3609  |  GROUP 06</a:t>
+            </a:r>
+          </a:p>
+        </p:txBody>
+      </p:sp>
+      <p:sp>
+        <p:nvSpPr>
+          <p:cNvPr id="23" name="矩形 22">
+            <a:extLst>
               <a:ext uri="{FF2B5EF4-FFF2-40B4-BE49-F238E27FC236}">
                 <a16:creationId xmlns:a16="http://schemas.microsoft.com/office/drawing/2014/main" id="{FFFA6F42-13C0-4041-A7A6-C27BD419DF3B}"/>
               </a:ext>
             </a:extLst>
           </p:cNvPr>
           <p:cNvSpPr>
-            <a:spLocks xmlns:a="http://schemas.openxmlformats.org/drawingml/2006/main" noGrp="1"/>
-          </p:cNvSpPr>
-          <p:nvPr/>
-        </p:nvSpPr>
-        <p:spPr>
-          <a:xfrm xmlns:a="http://schemas.openxmlformats.org/drawingml/2006/main">
+            <a:spLocks noGrp="1"/>
+          </p:cNvSpPr>
+          <p:nvPr/>
+        </p:nvSpPr>
+        <p:spPr>
+          <a:xfrm>
             <a:off x="11125200" y="6496050"/>
             <a:ext cx="514350" cy="190500"/>
           </a:xfrm>
-          <a:prstGeom xmlns:a="http://schemas.openxmlformats.org/drawingml/2006/main" prst="rect">
-            <a:avLst/>
-          </a:prstGeom>
-          <a:noFill xmlns:a="http://schemas.openxmlformats.org/drawingml/2006/main"/>
-          <a:ln xmlns:a="http://schemas.openxmlformats.org/drawingml/2006/main" w="0">
-            <a:noFill/>
-            <a:prstDash val="solid"/>
-          </a:ln>
-        </p:spPr>
-        <p:txBody>
-          <a:bodyPr xmlns:a="http://schemas.openxmlformats.org/drawingml/2006/main"/>
-          <a:lstStyle xmlns:a="http://schemas.openxmlformats.org/drawingml/2006/main"/>
-          <a:p xmlns:a="http://schemas.openxmlformats.org/drawingml/2006/main">
+          <a:prstGeom prst="rect">
+            <a:avLst/>
+          </a:prstGeom>
+          <a:noFill/>
+          <a:ln w="0">
+            <a:noFill/>
+            <a:prstDash val="solid"/>
+          </a:ln>
+        </p:spPr>
+        <p:txBody>
+          <a:bodyPr/>
+          <a:lstStyle/>
+          <a:p>
             <a:pPr>
               <a:buNone/>
               <a:defRPr sz="825" b="1">
@@ -4236,17 +4122,21 @@
       </p:ext>
     </p:extLst>
   </p:cSld>
+  <p:clrMapOvr>
+    <a:masterClrMapping/>
+  </p:clrMapOvr>
 </p:sld>
 </file>
 
 <file path=ppt/slides/slide4.xml><?xml version="1.0" encoding="utf-8"?>
-<p:sld xmlns:p="http://schemas.openxmlformats.org/presentationml/2006/main">
+<p:sld xmlns:a="http://schemas.openxmlformats.org/drawingml/2006/main" xmlns:r="http://schemas.openxmlformats.org/officeDocument/2006/relationships" xmlns:p="http://schemas.openxmlformats.org/presentationml/2006/main">
   <p:cSld>
     <p:bg>
       <p:bgPr>
-        <a:solidFill xmlns:a="http://schemas.openxmlformats.org/drawingml/2006/main">
+        <a:solidFill>
           <a:srgbClr val="F7F5EF"/>
         </a:solidFill>
+        <a:effectLst/>
       </p:bgPr>
     </p:bg>
     <p:spTree>
@@ -4256,40 +4146,45 @@
         <p:nvPr/>
       </p:nvGrpSpPr>
       <p:grpSpPr>
-        <a:xfrm xmlns:a="http://schemas.openxmlformats.org/drawingml/2006/main"/>
+        <a:xfrm>
+          <a:off x="0" y="0"/>
+          <a:ext cx="0" cy="0"/>
+          <a:chOff x="0" y="0"/>
+          <a:chExt cx="0" cy="0"/>
+        </a:xfrm>
       </p:grpSpPr>
       <p:sp>
         <p:nvSpPr>
-          <p:cNvPr id="15" name="">
-            <a:extLst xmlns:a="http://schemas.openxmlformats.org/drawingml/2006/main">
+          <p:cNvPr id="15" name="矩形 14">
+            <a:extLst>
               <a:ext uri="{FF2B5EF4-FFF2-40B4-BE49-F238E27FC236}">
                 <a16:creationId xmlns:a16="http://schemas.microsoft.com/office/drawing/2014/main" id="{239A3C96-7D53-45DC-9E7C-0787A0A580F9}"/>
               </a:ext>
             </a:extLst>
           </p:cNvPr>
           <p:cNvSpPr>
-            <a:spLocks xmlns:a="http://schemas.openxmlformats.org/drawingml/2006/main" noGrp="1"/>
-          </p:cNvSpPr>
-          <p:nvPr/>
-        </p:nvSpPr>
-        <p:spPr>
-          <a:xfrm xmlns:a="http://schemas.openxmlformats.org/drawingml/2006/main">
+            <a:spLocks noGrp="1"/>
+          </p:cNvSpPr>
+          <p:nvPr/>
+        </p:nvSpPr>
+        <p:spPr>
+          <a:xfrm>
             <a:off x="9525000" y="400050"/>
             <a:ext cx="2114550" cy="228600"/>
           </a:xfrm>
-          <a:prstGeom xmlns:a="http://schemas.openxmlformats.org/drawingml/2006/main" prst="rect">
-            <a:avLst/>
-          </a:prstGeom>
-          <a:noFill xmlns:a="http://schemas.openxmlformats.org/drawingml/2006/main"/>
-          <a:ln xmlns:a="http://schemas.openxmlformats.org/drawingml/2006/main" w="0">
-            <a:noFill/>
-            <a:prstDash val="solid"/>
-          </a:ln>
-        </p:spPr>
-        <p:txBody>
-          <a:bodyPr xmlns:a="http://schemas.openxmlformats.org/drawingml/2006/main"/>
-          <a:lstStyle xmlns:a="http://schemas.openxmlformats.org/drawingml/2006/main"/>
-          <a:p xmlns:a="http://schemas.openxmlformats.org/drawingml/2006/main">
+          <a:prstGeom prst="rect">
+            <a:avLst/>
+          </a:prstGeom>
+          <a:noFill/>
+          <a:ln w="0">
+            <a:noFill/>
+            <a:prstDash val="solid"/>
+          </a:ln>
+        </p:spPr>
+        <p:txBody>
+          <a:bodyPr/>
+          <a:lstStyle/>
+          <a:p>
             <a:pPr>
               <a:buNone/>
               <a:defRPr sz="1125" b="1">
@@ -4311,36 +4206,36 @@
       </p:sp>
       <p:sp>
         <p:nvSpPr>
-          <p:cNvPr id="2" name="">
-            <a:extLst xmlns:a="http://schemas.openxmlformats.org/drawingml/2006/main">
+          <p:cNvPr id="2" name="矩形 1">
+            <a:extLst>
               <a:ext uri="{FF2B5EF4-FFF2-40B4-BE49-F238E27FC236}">
                 <a16:creationId xmlns:a16="http://schemas.microsoft.com/office/drawing/2014/main" id="{88F5A75B-0C0B-4174-B61A-999B85C50D1F}"/>
               </a:ext>
             </a:extLst>
           </p:cNvPr>
           <p:cNvSpPr>
-            <a:spLocks xmlns:a="http://schemas.openxmlformats.org/drawingml/2006/main" noGrp="1"/>
-          </p:cNvSpPr>
-          <p:nvPr/>
-        </p:nvSpPr>
-        <p:spPr>
-          <a:xfrm xmlns:a="http://schemas.openxmlformats.org/drawingml/2006/main">
+            <a:spLocks noGrp="1"/>
+          </p:cNvSpPr>
+          <p:nvPr/>
+        </p:nvSpPr>
+        <p:spPr>
+          <a:xfrm>
             <a:off x="552450" y="781050"/>
             <a:ext cx="10477500" cy="685800"/>
           </a:xfrm>
-          <a:prstGeom xmlns:a="http://schemas.openxmlformats.org/drawingml/2006/main" prst="rect">
-            <a:avLst/>
-          </a:prstGeom>
-          <a:noFill xmlns:a="http://schemas.openxmlformats.org/drawingml/2006/main"/>
-          <a:ln xmlns:a="http://schemas.openxmlformats.org/drawingml/2006/main" w="0">
-            <a:noFill/>
-            <a:prstDash val="solid"/>
-          </a:ln>
-        </p:spPr>
-        <p:txBody>
-          <a:bodyPr xmlns:a="http://schemas.openxmlformats.org/drawingml/2006/main"/>
-          <a:lstStyle xmlns:a="http://schemas.openxmlformats.org/drawingml/2006/main"/>
-          <a:p xmlns:a="http://schemas.openxmlformats.org/drawingml/2006/main">
+          <a:prstGeom prst="rect">
+            <a:avLst/>
+          </a:prstGeom>
+          <a:noFill/>
+          <a:ln w="0">
+            <a:noFill/>
+            <a:prstDash val="solid"/>
+          </a:ln>
+        </p:spPr>
+        <p:txBody>
+          <a:bodyPr/>
+          <a:lstStyle/>
+          <a:p>
             <a:pPr>
               <a:buNone/>
               <a:defRPr sz="3150" b="1">
@@ -4362,67 +4257,74 @@
       </p:sp>
       <p:sp>
         <p:nvSpPr>
-          <p:cNvPr id="3" name="">
-            <a:extLst xmlns:a="http://schemas.openxmlformats.org/drawingml/2006/main">
+          <p:cNvPr id="3" name="矩形 2">
+            <a:extLst>
               <a:ext uri="{FF2B5EF4-FFF2-40B4-BE49-F238E27FC236}">
                 <a16:creationId xmlns:a16="http://schemas.microsoft.com/office/drawing/2014/main" id="{921C5D07-3A0B-418E-9A2D-67A550E81ED1}"/>
               </a:ext>
             </a:extLst>
           </p:cNvPr>
           <p:cNvSpPr>
-            <a:spLocks xmlns:a="http://schemas.openxmlformats.org/drawingml/2006/main" noGrp="1"/>
-          </p:cNvSpPr>
-          <p:nvPr/>
-        </p:nvSpPr>
-        <p:spPr>
-          <a:xfrm xmlns:a="http://schemas.openxmlformats.org/drawingml/2006/main">
+            <a:spLocks noGrp="1"/>
+          </p:cNvSpPr>
+          <p:nvPr/>
+        </p:nvSpPr>
+        <p:spPr>
+          <a:xfrm>
             <a:off x="552450" y="1524000"/>
             <a:ext cx="11087100" cy="28575"/>
           </a:xfrm>
-          <a:prstGeom xmlns:a="http://schemas.openxmlformats.org/drawingml/2006/main" prst="rect">
-            <a:avLst/>
-          </a:prstGeom>
-          <a:solidFill xmlns:a="http://schemas.openxmlformats.org/drawingml/2006/main">
+          <a:prstGeom prst="rect">
+            <a:avLst/>
+          </a:prstGeom>
+          <a:solidFill>
             <a:srgbClr val="2774C7"/>
           </a:solidFill>
-          <a:ln xmlns:a="http://schemas.openxmlformats.org/drawingml/2006/main" w="0">
-            <a:noFill/>
-            <a:prstDash val="solid"/>
-          </a:ln>
-        </p:spPr>
-      </p:sp>
-      <p:sp>
-        <p:nvSpPr>
-          <p:cNvPr id="4" name="">
-            <a:extLst xmlns:a="http://schemas.openxmlformats.org/drawingml/2006/main">
+          <a:ln w="0">
+            <a:noFill/>
+            <a:prstDash val="solid"/>
+          </a:ln>
+        </p:spPr>
+        <p:txBody>
+          <a:bodyPr/>
+          <a:lstStyle/>
+          <a:p>
+            <a:endParaRPr lang="zh-CN" altLang="en-US"/>
+          </a:p>
+        </p:txBody>
+      </p:sp>
+      <p:sp>
+        <p:nvSpPr>
+          <p:cNvPr id="4" name="矩形 3">
+            <a:extLst>
               <a:ext uri="{FF2B5EF4-FFF2-40B4-BE49-F238E27FC236}">
                 <a16:creationId xmlns:a16="http://schemas.microsoft.com/office/drawing/2014/main" id="{090D9C22-0114-4F65-80F8-753FF5E6FA3C}"/>
               </a:ext>
             </a:extLst>
           </p:cNvPr>
           <p:cNvSpPr>
-            <a:spLocks xmlns:a="http://schemas.openxmlformats.org/drawingml/2006/main" noGrp="1"/>
-          </p:cNvSpPr>
-          <p:nvPr/>
-        </p:nvSpPr>
-        <p:spPr>
-          <a:xfrm xmlns:a="http://schemas.openxmlformats.org/drawingml/2006/main">
+            <a:spLocks noGrp="1"/>
+          </p:cNvSpPr>
+          <p:nvPr/>
+        </p:nvSpPr>
+        <p:spPr>
+          <a:xfrm>
             <a:off x="552450" y="1657350"/>
             <a:ext cx="10477500" cy="361950"/>
           </a:xfrm>
-          <a:prstGeom xmlns:a="http://schemas.openxmlformats.org/drawingml/2006/main" prst="rect">
-            <a:avLst/>
-          </a:prstGeom>
-          <a:noFill xmlns:a="http://schemas.openxmlformats.org/drawingml/2006/main"/>
-          <a:ln xmlns:a="http://schemas.openxmlformats.org/drawingml/2006/main" w="0">
-            <a:noFill/>
-            <a:prstDash val="solid"/>
-          </a:ln>
-        </p:spPr>
-        <p:txBody>
-          <a:bodyPr xmlns:a="http://schemas.openxmlformats.org/drawingml/2006/main"/>
-          <a:lstStyle xmlns:a="http://schemas.openxmlformats.org/drawingml/2006/main"/>
-          <a:p xmlns:a="http://schemas.openxmlformats.org/drawingml/2006/main">
+          <a:prstGeom prst="rect">
+            <a:avLst/>
+          </a:prstGeom>
+          <a:noFill/>
+          <a:ln w="0">
+            <a:noFill/>
+            <a:prstDash val="solid"/>
+          </a:ln>
+        </p:spPr>
+        <p:txBody>
+          <a:bodyPr/>
+          <a:lstStyle/>
+          <a:p>
             <a:pPr>
               <a:buNone/>
               <a:defRPr sz="1275" b="0">
@@ -4444,150 +4346,164 @@
       </p:sp>
       <p:sp>
         <p:nvSpPr>
-          <p:cNvPr id="5" name="">
-            <a:extLst xmlns:a="http://schemas.openxmlformats.org/drawingml/2006/main">
+          <p:cNvPr id="5" name="矩形: 圆角 4">
+            <a:extLst>
               <a:ext uri="{FF2B5EF4-FFF2-40B4-BE49-F238E27FC236}">
                 <a16:creationId xmlns:a16="http://schemas.microsoft.com/office/drawing/2014/main" id="{7FBE0574-52D7-4EE6-B008-B229BFBDBEE9}"/>
               </a:ext>
             </a:extLst>
           </p:cNvPr>
           <p:cNvSpPr>
-            <a:spLocks xmlns:a="http://schemas.openxmlformats.org/drawingml/2006/main" noGrp="1"/>
-          </p:cNvSpPr>
-          <p:nvPr/>
-        </p:nvSpPr>
-        <p:spPr>
-          <a:xfrm xmlns:a="http://schemas.openxmlformats.org/drawingml/2006/main">
+            <a:spLocks noGrp="1"/>
+          </p:cNvSpPr>
+          <p:nvPr/>
+        </p:nvSpPr>
+        <p:spPr>
+          <a:xfrm>
             <a:off x="552450" y="2152650"/>
             <a:ext cx="5257800" cy="3543300"/>
           </a:xfrm>
-          <a:prstGeom xmlns:a="http://schemas.openxmlformats.org/drawingml/2006/main" prst="roundRect">
+          <a:prstGeom prst="roundRect">
             <a:avLst>
               <a:gd name="adj" fmla="val 4301"/>
             </a:avLst>
           </a:prstGeom>
-          <a:solidFill xmlns:a="http://schemas.openxmlformats.org/drawingml/2006/main">
+          <a:solidFill>
             <a:srgbClr val="FFFFFF"/>
           </a:solidFill>
-          <a:ln xmlns:a="http://schemas.openxmlformats.org/drawingml/2006/main" w="9525">
+          <a:ln w="9525">
             <a:solidFill>
               <a:srgbClr val="CBD5DF"/>
             </a:solidFill>
             <a:prstDash val="solid"/>
           </a:ln>
         </p:spPr>
-      </p:sp>
-      <p:sp>
-        <p:nvSpPr>
-          <p:cNvPr id="6" name="">
-            <a:extLst xmlns:a="http://schemas.openxmlformats.org/drawingml/2006/main">
+        <p:txBody>
+          <a:bodyPr/>
+          <a:lstStyle/>
+          <a:p>
+            <a:endParaRPr lang="zh-CN" altLang="en-US"/>
+          </a:p>
+        </p:txBody>
+      </p:sp>
+      <p:sp>
+        <p:nvSpPr>
+          <p:cNvPr id="6" name="矩形: 圆角 5">
+            <a:extLst>
               <a:ext uri="{FF2B5EF4-FFF2-40B4-BE49-F238E27FC236}">
                 <a16:creationId xmlns:a16="http://schemas.microsoft.com/office/drawing/2014/main" id="{2E03BAA7-3EB0-48A7-92EC-12F363D0B1C1}"/>
               </a:ext>
             </a:extLst>
           </p:cNvPr>
           <p:cNvSpPr>
-            <a:spLocks xmlns:a="http://schemas.openxmlformats.org/drawingml/2006/main" noGrp="1"/>
-          </p:cNvSpPr>
-          <p:nvPr/>
-        </p:nvSpPr>
-        <p:spPr>
-          <a:xfrm xmlns:a="http://schemas.openxmlformats.org/drawingml/2006/main">
+            <a:spLocks noGrp="1"/>
+          </p:cNvSpPr>
+          <p:nvPr/>
+        </p:nvSpPr>
+        <p:spPr>
+          <a:xfrm>
             <a:off x="5981700" y="2152650"/>
             <a:ext cx="5657850" cy="3543300"/>
           </a:xfrm>
-          <a:prstGeom xmlns:a="http://schemas.openxmlformats.org/drawingml/2006/main" prst="roundRect">
+          <a:prstGeom prst="roundRect">
             <a:avLst>
               <a:gd name="adj" fmla="val 4301"/>
             </a:avLst>
           </a:prstGeom>
-          <a:solidFill xmlns:a="http://schemas.openxmlformats.org/drawingml/2006/main">
+          <a:solidFill>
             <a:srgbClr val="FFFFFF"/>
           </a:solidFill>
-          <a:ln xmlns:a="http://schemas.openxmlformats.org/drawingml/2006/main" w="9525">
+          <a:ln w="9525">
             <a:solidFill>
               <a:srgbClr val="CBD5DF"/>
             </a:solidFill>
             <a:prstDash val="solid"/>
           </a:ln>
         </p:spPr>
+        <p:txBody>
+          <a:bodyPr/>
+          <a:lstStyle/>
+          <a:p>
+            <a:endParaRPr lang="zh-CN" altLang="en-US"/>
+          </a:p>
+        </p:txBody>
       </p:sp>
       <p:pic>
         <p:nvPicPr>
-          <p:cNvPr id="24" name=""/>
+          <p:cNvPr id="24" name="图片 23"/>
           <p:cNvPicPr>
-            <a:picLocks xmlns:a="http://schemas.openxmlformats.org/drawingml/2006/main" noChangeAspect="1"/>
+            <a:picLocks noChangeAspect="1"/>
           </p:cNvPicPr>
           <p:nvPr/>
         </p:nvPicPr>
         <p:blipFill>
-          <a:blip xmlns:r="http://schemas.openxmlformats.org/officeDocument/2006/relationships" xmlns:a="http://schemas.openxmlformats.org/drawingml/2006/main" r:embed="R32d8ec87a39446d3"/>
-          <a:stretch xmlns:a="http://schemas.openxmlformats.org/drawingml/2006/main"/>
+          <a:blip r:embed="rId3"/>
+          <a:stretch/>
         </p:blipFill>
         <p:spPr>
-          <a:xfrm xmlns:a="http://schemas.openxmlformats.org/drawingml/2006/main">
+          <a:xfrm>
             <a:off x="986790" y="2324100"/>
             <a:ext cx="4389120" cy="2743200"/>
           </a:xfrm>
-          <a:prstGeom xmlns:a="http://schemas.openxmlformats.org/drawingml/2006/main" prst="rect">
+          <a:prstGeom prst="rect">
             <a:avLst/>
           </a:prstGeom>
         </p:spPr>
       </p:pic>
       <p:pic>
         <p:nvPicPr>
-          <p:cNvPr id="25" name=""/>
+          <p:cNvPr id="25" name="图片 24"/>
           <p:cNvPicPr>
-            <a:picLocks xmlns:a="http://schemas.openxmlformats.org/drawingml/2006/main" noChangeAspect="1"/>
+            <a:picLocks noChangeAspect="1"/>
           </p:cNvPicPr>
           <p:nvPr/>
         </p:nvPicPr>
         <p:blipFill>
-          <a:blip xmlns:r="http://schemas.openxmlformats.org/officeDocument/2006/relationships" xmlns:a="http://schemas.openxmlformats.org/drawingml/2006/main" r:embed="R44f41d651fac48a6"/>
-          <a:stretch xmlns:a="http://schemas.openxmlformats.org/drawingml/2006/main"/>
+          <a:blip r:embed="rId4"/>
+          <a:stretch/>
         </p:blipFill>
         <p:spPr>
-          <a:xfrm xmlns:a="http://schemas.openxmlformats.org/drawingml/2006/main">
+          <a:xfrm>
             <a:off x="6616065" y="2324100"/>
             <a:ext cx="4389120" cy="2743200"/>
           </a:xfrm>
-          <a:prstGeom xmlns:a="http://schemas.openxmlformats.org/drawingml/2006/main" prst="rect">
+          <a:prstGeom prst="rect">
             <a:avLst/>
           </a:prstGeom>
         </p:spPr>
       </p:pic>
       <p:sp>
         <p:nvSpPr>
-          <p:cNvPr id="9" name="">
-            <a:extLst xmlns:a="http://schemas.openxmlformats.org/drawingml/2006/main">
+          <p:cNvPr id="9" name="矩形 8">
+            <a:extLst>
               <a:ext uri="{FF2B5EF4-FFF2-40B4-BE49-F238E27FC236}">
                 <a16:creationId xmlns:a16="http://schemas.microsoft.com/office/drawing/2014/main" id="{62A3BF05-273A-4481-92ED-3C7A8658A92D}"/>
               </a:ext>
             </a:extLst>
           </p:cNvPr>
           <p:cNvSpPr>
-            <a:spLocks xmlns:a="http://schemas.openxmlformats.org/drawingml/2006/main" noGrp="1"/>
-          </p:cNvSpPr>
-          <p:nvPr/>
-        </p:nvSpPr>
-        <p:spPr>
-          <a:xfrm xmlns:a="http://schemas.openxmlformats.org/drawingml/2006/main">
+            <a:spLocks noGrp="1"/>
+          </p:cNvSpPr>
+          <p:nvPr/>
+        </p:nvSpPr>
+        <p:spPr>
+          <a:xfrm>
             <a:off x="781050" y="5219700"/>
             <a:ext cx="1714500" cy="247650"/>
           </a:xfrm>
-          <a:prstGeom xmlns:a="http://schemas.openxmlformats.org/drawingml/2006/main" prst="rect">
-            <a:avLst/>
-          </a:prstGeom>
-          <a:noFill xmlns:a="http://schemas.openxmlformats.org/drawingml/2006/main"/>
-          <a:ln xmlns:a="http://schemas.openxmlformats.org/drawingml/2006/main" w="0">
-            <a:noFill/>
-            <a:prstDash val="solid"/>
-          </a:ln>
-        </p:spPr>
-        <p:txBody>
-          <a:bodyPr xmlns:a="http://schemas.openxmlformats.org/drawingml/2006/main"/>
-          <a:lstStyle xmlns:a="http://schemas.openxmlformats.org/drawingml/2006/main"/>
-          <a:p xmlns:a="http://schemas.openxmlformats.org/drawingml/2006/main">
+          <a:prstGeom prst="rect">
+            <a:avLst/>
+          </a:prstGeom>
+          <a:noFill/>
+          <a:ln w="0">
+            <a:noFill/>
+            <a:prstDash val="solid"/>
+          </a:ln>
+        </p:spPr>
+        <p:txBody>
+          <a:bodyPr/>
+          <a:lstStyle/>
+          <a:p>
             <a:pPr>
               <a:buNone/>
               <a:defRPr sz="1125" b="1">
@@ -4609,36 +4525,36 @@
       </p:sp>
       <p:sp>
         <p:nvSpPr>
-          <p:cNvPr id="10" name="">
-            <a:extLst xmlns:a="http://schemas.openxmlformats.org/drawingml/2006/main">
+          <p:cNvPr id="10" name="矩形 9">
+            <a:extLst>
               <a:ext uri="{FF2B5EF4-FFF2-40B4-BE49-F238E27FC236}">
                 <a16:creationId xmlns:a16="http://schemas.microsoft.com/office/drawing/2014/main" id="{B5C7316F-7E29-4933-86F4-D7907112DE6B}"/>
               </a:ext>
             </a:extLst>
           </p:cNvPr>
           <p:cNvSpPr>
-            <a:spLocks xmlns:a="http://schemas.openxmlformats.org/drawingml/2006/main" noGrp="1"/>
-          </p:cNvSpPr>
-          <p:nvPr/>
-        </p:nvSpPr>
-        <p:spPr>
-          <a:xfrm xmlns:a="http://schemas.openxmlformats.org/drawingml/2006/main">
+            <a:spLocks noGrp="1"/>
+          </p:cNvSpPr>
+          <p:nvPr/>
+        </p:nvSpPr>
+        <p:spPr>
+          <a:xfrm>
             <a:off x="2190750" y="5219700"/>
             <a:ext cx="3238500" cy="266700"/>
           </a:xfrm>
-          <a:prstGeom xmlns:a="http://schemas.openxmlformats.org/drawingml/2006/main" prst="rect">
-            <a:avLst/>
-          </a:prstGeom>
-          <a:noFill xmlns:a="http://schemas.openxmlformats.org/drawingml/2006/main"/>
-          <a:ln xmlns:a="http://schemas.openxmlformats.org/drawingml/2006/main" w="0">
-            <a:noFill/>
-            <a:prstDash val="solid"/>
-          </a:ln>
-        </p:spPr>
-        <p:txBody>
-          <a:bodyPr xmlns:a="http://schemas.openxmlformats.org/drawingml/2006/main"/>
-          <a:lstStyle xmlns:a="http://schemas.openxmlformats.org/drawingml/2006/main"/>
-          <a:p xmlns:a="http://schemas.openxmlformats.org/drawingml/2006/main">
+          <a:prstGeom prst="rect">
+            <a:avLst/>
+          </a:prstGeom>
+          <a:noFill/>
+          <a:ln w="0">
+            <a:noFill/>
+            <a:prstDash val="solid"/>
+          </a:ln>
+        </p:spPr>
+        <p:txBody>
+          <a:bodyPr/>
+          <a:lstStyle/>
+          <a:p>
             <a:pPr>
               <a:buNone/>
               <a:defRPr sz="1125" b="0">
@@ -4660,36 +4576,36 @@
       </p:sp>
       <p:sp>
         <p:nvSpPr>
-          <p:cNvPr id="11" name="">
-            <a:extLst xmlns:a="http://schemas.openxmlformats.org/drawingml/2006/main">
+          <p:cNvPr id="11" name="矩形 10">
+            <a:extLst>
               <a:ext uri="{FF2B5EF4-FFF2-40B4-BE49-F238E27FC236}">
                 <a16:creationId xmlns:a16="http://schemas.microsoft.com/office/drawing/2014/main" id="{F775AE2F-3FD1-46D0-92FA-12ECBB22153E}"/>
               </a:ext>
             </a:extLst>
           </p:cNvPr>
           <p:cNvSpPr>
-            <a:spLocks xmlns:a="http://schemas.openxmlformats.org/drawingml/2006/main" noGrp="1"/>
-          </p:cNvSpPr>
-          <p:nvPr/>
-        </p:nvSpPr>
-        <p:spPr>
-          <a:xfrm xmlns:a="http://schemas.openxmlformats.org/drawingml/2006/main">
+            <a:spLocks noGrp="1"/>
+          </p:cNvSpPr>
+          <p:nvPr/>
+        </p:nvSpPr>
+        <p:spPr>
+          <a:xfrm>
             <a:off x="6210300" y="5219700"/>
             <a:ext cx="1524000" cy="247650"/>
           </a:xfrm>
-          <a:prstGeom xmlns:a="http://schemas.openxmlformats.org/drawingml/2006/main" prst="rect">
-            <a:avLst/>
-          </a:prstGeom>
-          <a:noFill xmlns:a="http://schemas.openxmlformats.org/drawingml/2006/main"/>
-          <a:ln xmlns:a="http://schemas.openxmlformats.org/drawingml/2006/main" w="0">
-            <a:noFill/>
-            <a:prstDash val="solid"/>
-          </a:ln>
-        </p:spPr>
-        <p:txBody>
-          <a:bodyPr xmlns:a="http://schemas.openxmlformats.org/drawingml/2006/main"/>
-          <a:lstStyle xmlns:a="http://schemas.openxmlformats.org/drawingml/2006/main"/>
-          <a:p xmlns:a="http://schemas.openxmlformats.org/drawingml/2006/main">
+          <a:prstGeom prst="rect">
+            <a:avLst/>
+          </a:prstGeom>
+          <a:noFill/>
+          <a:ln w="0">
+            <a:noFill/>
+            <a:prstDash val="solid"/>
+          </a:ln>
+        </p:spPr>
+        <p:txBody>
+          <a:bodyPr/>
+          <a:lstStyle/>
+          <a:p>
             <a:pPr>
               <a:buNone/>
               <a:defRPr sz="1125" b="1">
@@ -4711,36 +4627,36 @@
       </p:sp>
       <p:sp>
         <p:nvSpPr>
-          <p:cNvPr id="12" name="">
-            <a:extLst xmlns:a="http://schemas.openxmlformats.org/drawingml/2006/main">
+          <p:cNvPr id="12" name="矩形 11">
+            <a:extLst>
               <a:ext uri="{FF2B5EF4-FFF2-40B4-BE49-F238E27FC236}">
                 <a16:creationId xmlns:a16="http://schemas.microsoft.com/office/drawing/2014/main" id="{B2813877-2572-4CE4-8A3D-62D0ADB159DA}"/>
               </a:ext>
             </a:extLst>
           </p:cNvPr>
           <p:cNvSpPr>
-            <a:spLocks xmlns:a="http://schemas.openxmlformats.org/drawingml/2006/main" noGrp="1"/>
-          </p:cNvSpPr>
-          <p:nvPr/>
-        </p:nvSpPr>
-        <p:spPr>
-          <a:xfrm xmlns:a="http://schemas.openxmlformats.org/drawingml/2006/main">
+            <a:spLocks noGrp="1"/>
+          </p:cNvSpPr>
+          <p:nvPr/>
+        </p:nvSpPr>
+        <p:spPr>
+          <a:xfrm>
             <a:off x="7381875" y="5219700"/>
             <a:ext cx="3857625" cy="266700"/>
           </a:xfrm>
-          <a:prstGeom xmlns:a="http://schemas.openxmlformats.org/drawingml/2006/main" prst="rect">
-            <a:avLst/>
-          </a:prstGeom>
-          <a:noFill xmlns:a="http://schemas.openxmlformats.org/drawingml/2006/main"/>
-          <a:ln xmlns:a="http://schemas.openxmlformats.org/drawingml/2006/main" w="0">
-            <a:noFill/>
-            <a:prstDash val="solid"/>
-          </a:ln>
-        </p:spPr>
-        <p:txBody>
-          <a:bodyPr xmlns:a="http://schemas.openxmlformats.org/drawingml/2006/main"/>
-          <a:lstStyle xmlns:a="http://schemas.openxmlformats.org/drawingml/2006/main"/>
-          <a:p xmlns:a="http://schemas.openxmlformats.org/drawingml/2006/main">
+          <a:prstGeom prst="rect">
+            <a:avLst/>
+          </a:prstGeom>
+          <a:noFill/>
+          <a:ln w="0">
+            <a:noFill/>
+            <a:prstDash val="solid"/>
+          </a:ln>
+        </p:spPr>
+        <p:txBody>
+          <a:bodyPr/>
+          <a:lstStyle/>
+          <a:p>
             <a:pPr>
               <a:buNone/>
               <a:defRPr sz="1125" b="0">
@@ -4762,36 +4678,36 @@
       </p:sp>
       <p:sp>
         <p:nvSpPr>
-          <p:cNvPr id="13" name="">
-            <a:extLst xmlns:a="http://schemas.openxmlformats.org/drawingml/2006/main">
+          <p:cNvPr id="13" name="矩形 12">
+            <a:extLst>
               <a:ext uri="{FF2B5EF4-FFF2-40B4-BE49-F238E27FC236}">
                 <a16:creationId xmlns:a16="http://schemas.microsoft.com/office/drawing/2014/main" id="{BFD9B7E4-BEAD-41CE-B6AB-05BC66725479}"/>
               </a:ext>
             </a:extLst>
           </p:cNvPr>
           <p:cNvSpPr>
-            <a:spLocks xmlns:a="http://schemas.openxmlformats.org/drawingml/2006/main" noGrp="1"/>
-          </p:cNvSpPr>
-          <p:nvPr/>
-        </p:nvSpPr>
-        <p:spPr>
-          <a:xfrm xmlns:a="http://schemas.openxmlformats.org/drawingml/2006/main">
+            <a:spLocks noGrp="1"/>
+          </p:cNvSpPr>
+          <p:nvPr/>
+        </p:nvSpPr>
+        <p:spPr>
+          <a:xfrm>
             <a:off x="552450" y="6496050"/>
             <a:ext cx="4953000" cy="190500"/>
           </a:xfrm>
-          <a:prstGeom xmlns:a="http://schemas.openxmlformats.org/drawingml/2006/main" prst="rect">
-            <a:avLst/>
-          </a:prstGeom>
-          <a:noFill xmlns:a="http://schemas.openxmlformats.org/drawingml/2006/main"/>
-          <a:ln xmlns:a="http://schemas.openxmlformats.org/drawingml/2006/main" w="0">
-            <a:noFill/>
-            <a:prstDash val="solid"/>
-          </a:ln>
-        </p:spPr>
-        <p:txBody>
-          <a:bodyPr xmlns:a="http://schemas.openxmlformats.org/drawingml/2006/main"/>
-          <a:lstStyle xmlns:a="http://schemas.openxmlformats.org/drawingml/2006/main"/>
-          <a:p xmlns:a="http://schemas.openxmlformats.org/drawingml/2006/main">
+          <a:prstGeom prst="rect">
+            <a:avLst/>
+          </a:prstGeom>
+          <a:noFill/>
+          <a:ln w="0">
+            <a:noFill/>
+            <a:prstDash val="solid"/>
+          </a:ln>
+        </p:spPr>
+        <p:txBody>
+          <a:bodyPr/>
+          <a:lstStyle/>
+          <a:p>
             <a:pPr>
               <a:buNone/>
               <a:defRPr sz="825" b="1">
@@ -4801,48 +4717,48 @@
               </a:defRPr>
             </a:pPr>
             <a:r>
-              <a:rPr sz="825" b="1">
+              <a:rPr lang="en-US" altLang="zh-CN" sz="825" b="1" dirty="0">
                 <a:solidFill>
                   <a:srgbClr val="667482"/>
                 </a:solidFill>
               </a:rPr>
-              <a:t>STUDYCREW  |  ELEC3609/9609  |  GROUP 02</a:t>
-            </a:r>
-          </a:p>
-        </p:txBody>
-      </p:sp>
-      <p:sp>
-        <p:nvSpPr>
-          <p:cNvPr id="14" name="">
-            <a:extLst xmlns:a="http://schemas.openxmlformats.org/drawingml/2006/main">
+              <a:t>STUDYCREW  |  ELEC3609  |  GROUP 06</a:t>
+            </a:r>
+          </a:p>
+        </p:txBody>
+      </p:sp>
+      <p:sp>
+        <p:nvSpPr>
+          <p:cNvPr id="14" name="矩形 13">
+            <a:extLst>
               <a:ext uri="{FF2B5EF4-FFF2-40B4-BE49-F238E27FC236}">
                 <a16:creationId xmlns:a16="http://schemas.microsoft.com/office/drawing/2014/main" id="{AE3F6730-AF8D-4700-8654-B3E03084E4E8}"/>
               </a:ext>
             </a:extLst>
           </p:cNvPr>
           <p:cNvSpPr>
-            <a:spLocks xmlns:a="http://schemas.openxmlformats.org/drawingml/2006/main" noGrp="1"/>
-          </p:cNvSpPr>
-          <p:nvPr/>
-        </p:nvSpPr>
-        <p:spPr>
-          <a:xfrm xmlns:a="http://schemas.openxmlformats.org/drawingml/2006/main">
+            <a:spLocks noGrp="1"/>
+          </p:cNvSpPr>
+          <p:nvPr/>
+        </p:nvSpPr>
+        <p:spPr>
+          <a:xfrm>
             <a:off x="11125200" y="6496050"/>
             <a:ext cx="514350" cy="190500"/>
           </a:xfrm>
-          <a:prstGeom xmlns:a="http://schemas.openxmlformats.org/drawingml/2006/main" prst="rect">
-            <a:avLst/>
-          </a:prstGeom>
-          <a:noFill xmlns:a="http://schemas.openxmlformats.org/drawingml/2006/main"/>
-          <a:ln xmlns:a="http://schemas.openxmlformats.org/drawingml/2006/main" w="0">
-            <a:noFill/>
-            <a:prstDash val="solid"/>
-          </a:ln>
-        </p:spPr>
-        <p:txBody>
-          <a:bodyPr xmlns:a="http://schemas.openxmlformats.org/drawingml/2006/main"/>
-          <a:lstStyle xmlns:a="http://schemas.openxmlformats.org/drawingml/2006/main"/>
-          <a:p xmlns:a="http://schemas.openxmlformats.org/drawingml/2006/main">
+          <a:prstGeom prst="rect">
+            <a:avLst/>
+          </a:prstGeom>
+          <a:noFill/>
+          <a:ln w="0">
+            <a:noFill/>
+            <a:prstDash val="solid"/>
+          </a:ln>
+        </p:spPr>
+        <p:txBody>
+          <a:bodyPr/>
+          <a:lstStyle/>
+          <a:p>
             <a:pPr>
               <a:buNone/>
               <a:defRPr sz="825" b="1">
@@ -4869,17 +4785,21 @@
       </p:ext>
     </p:extLst>
   </p:cSld>
+  <p:clrMapOvr>
+    <a:masterClrMapping/>
+  </p:clrMapOvr>
 </p:sld>
 </file>
 
 <file path=ppt/slides/slide5.xml><?xml version="1.0" encoding="utf-8"?>
-<p:sld xmlns:p="http://schemas.openxmlformats.org/presentationml/2006/main">
+<p:sld xmlns:a="http://schemas.openxmlformats.org/drawingml/2006/main" xmlns:r="http://schemas.openxmlformats.org/officeDocument/2006/relationships" xmlns:p="http://schemas.openxmlformats.org/presentationml/2006/main">
   <p:cSld>
     <p:bg>
       <p:bgPr>
-        <a:solidFill xmlns:a="http://schemas.openxmlformats.org/drawingml/2006/main">
+        <a:solidFill>
           <a:srgbClr val="F7F5EF"/>
         </a:solidFill>
+        <a:effectLst/>
       </p:bgPr>
     </p:bg>
     <p:spTree>
@@ -4889,40 +4809,45 @@
         <p:nvPr/>
       </p:nvGrpSpPr>
       <p:grpSpPr>
-        <a:xfrm xmlns:a="http://schemas.openxmlformats.org/drawingml/2006/main"/>
+        <a:xfrm>
+          <a:off x="0" y="0"/>
+          <a:ext cx="0" cy="0"/>
+          <a:chOff x="0" y="0"/>
+          <a:chExt cx="0" cy="0"/>
+        </a:xfrm>
       </p:grpSpPr>
       <p:sp>
         <p:nvSpPr>
-          <p:cNvPr id="27" name="">
-            <a:extLst xmlns:a="http://schemas.openxmlformats.org/drawingml/2006/main">
+          <p:cNvPr id="27" name="矩形 26">
+            <a:extLst>
               <a:ext uri="{FF2B5EF4-FFF2-40B4-BE49-F238E27FC236}">
                 <a16:creationId xmlns:a16="http://schemas.microsoft.com/office/drawing/2014/main" id="{1E33DF86-AF3C-431E-AAF9-BA8A1B39AF7B}"/>
               </a:ext>
             </a:extLst>
           </p:cNvPr>
           <p:cNvSpPr>
-            <a:spLocks xmlns:a="http://schemas.openxmlformats.org/drawingml/2006/main" noGrp="1"/>
-          </p:cNvSpPr>
-          <p:nvPr/>
-        </p:nvSpPr>
-        <p:spPr>
-          <a:xfrm xmlns:a="http://schemas.openxmlformats.org/drawingml/2006/main">
+            <a:spLocks noGrp="1"/>
+          </p:cNvSpPr>
+          <p:nvPr/>
+        </p:nvSpPr>
+        <p:spPr>
+          <a:xfrm>
             <a:off x="9525000" y="400050"/>
             <a:ext cx="2114550" cy="228600"/>
           </a:xfrm>
-          <a:prstGeom xmlns:a="http://schemas.openxmlformats.org/drawingml/2006/main" prst="rect">
-            <a:avLst/>
-          </a:prstGeom>
-          <a:noFill xmlns:a="http://schemas.openxmlformats.org/drawingml/2006/main"/>
-          <a:ln xmlns:a="http://schemas.openxmlformats.org/drawingml/2006/main" w="0">
-            <a:noFill/>
-            <a:prstDash val="solid"/>
-          </a:ln>
-        </p:spPr>
-        <p:txBody>
-          <a:bodyPr xmlns:a="http://schemas.openxmlformats.org/drawingml/2006/main"/>
-          <a:lstStyle xmlns:a="http://schemas.openxmlformats.org/drawingml/2006/main"/>
-          <a:p xmlns:a="http://schemas.openxmlformats.org/drawingml/2006/main">
+          <a:prstGeom prst="rect">
+            <a:avLst/>
+          </a:prstGeom>
+          <a:noFill/>
+          <a:ln w="0">
+            <a:noFill/>
+            <a:prstDash val="solid"/>
+          </a:ln>
+        </p:spPr>
+        <p:txBody>
+          <a:bodyPr/>
+          <a:lstStyle/>
+          <a:p>
             <a:pPr>
               <a:buNone/>
               <a:defRPr sz="1125" b="1">
@@ -4944,36 +4869,36 @@
       </p:sp>
       <p:sp>
         <p:nvSpPr>
-          <p:cNvPr id="2" name="">
-            <a:extLst xmlns:a="http://schemas.openxmlformats.org/drawingml/2006/main">
+          <p:cNvPr id="2" name="矩形 1">
+            <a:extLst>
               <a:ext uri="{FF2B5EF4-FFF2-40B4-BE49-F238E27FC236}">
                 <a16:creationId xmlns:a16="http://schemas.microsoft.com/office/drawing/2014/main" id="{13DE60CA-0F8D-41E3-9A3A-4269719EAEC8}"/>
               </a:ext>
             </a:extLst>
           </p:cNvPr>
           <p:cNvSpPr>
-            <a:spLocks xmlns:a="http://schemas.openxmlformats.org/drawingml/2006/main" noGrp="1"/>
-          </p:cNvSpPr>
-          <p:nvPr/>
-        </p:nvSpPr>
-        <p:spPr>
-          <a:xfrm xmlns:a="http://schemas.openxmlformats.org/drawingml/2006/main">
+            <a:spLocks noGrp="1"/>
+          </p:cNvSpPr>
+          <p:nvPr/>
+        </p:nvSpPr>
+        <p:spPr>
+          <a:xfrm>
             <a:off x="552450" y="781050"/>
             <a:ext cx="10477500" cy="685800"/>
           </a:xfrm>
-          <a:prstGeom xmlns:a="http://schemas.openxmlformats.org/drawingml/2006/main" prst="rect">
-            <a:avLst/>
-          </a:prstGeom>
-          <a:noFill xmlns:a="http://schemas.openxmlformats.org/drawingml/2006/main"/>
-          <a:ln xmlns:a="http://schemas.openxmlformats.org/drawingml/2006/main" w="0">
-            <a:noFill/>
-            <a:prstDash val="solid"/>
-          </a:ln>
-        </p:spPr>
-        <p:txBody>
-          <a:bodyPr xmlns:a="http://schemas.openxmlformats.org/drawingml/2006/main"/>
-          <a:lstStyle xmlns:a="http://schemas.openxmlformats.org/drawingml/2006/main"/>
-          <a:p xmlns:a="http://schemas.openxmlformats.org/drawingml/2006/main">
+          <a:prstGeom prst="rect">
+            <a:avLst/>
+          </a:prstGeom>
+          <a:noFill/>
+          <a:ln w="0">
+            <a:noFill/>
+            <a:prstDash val="solid"/>
+          </a:ln>
+        </p:spPr>
+        <p:txBody>
+          <a:bodyPr/>
+          <a:lstStyle/>
+          <a:p>
             <a:pPr>
               <a:buNone/>
               <a:defRPr sz="2850" b="1">
@@ -4995,67 +4920,74 @@
       </p:sp>
       <p:sp>
         <p:nvSpPr>
-          <p:cNvPr id="3" name="">
-            <a:extLst xmlns:a="http://schemas.openxmlformats.org/drawingml/2006/main">
+          <p:cNvPr id="3" name="矩形 2">
+            <a:extLst>
               <a:ext uri="{FF2B5EF4-FFF2-40B4-BE49-F238E27FC236}">
                 <a16:creationId xmlns:a16="http://schemas.microsoft.com/office/drawing/2014/main" id="{EA6980B1-4FBF-4B8C-AFA4-C8565108B3E7}"/>
               </a:ext>
             </a:extLst>
           </p:cNvPr>
           <p:cNvSpPr>
-            <a:spLocks xmlns:a="http://schemas.openxmlformats.org/drawingml/2006/main" noGrp="1"/>
-          </p:cNvSpPr>
-          <p:nvPr/>
-        </p:nvSpPr>
-        <p:spPr>
-          <a:xfrm xmlns:a="http://schemas.openxmlformats.org/drawingml/2006/main">
+            <a:spLocks noGrp="1"/>
+          </p:cNvSpPr>
+          <p:nvPr/>
+        </p:nvSpPr>
+        <p:spPr>
+          <a:xfrm>
             <a:off x="552450" y="1524000"/>
             <a:ext cx="11087100" cy="28575"/>
           </a:xfrm>
-          <a:prstGeom xmlns:a="http://schemas.openxmlformats.org/drawingml/2006/main" prst="rect">
-            <a:avLst/>
-          </a:prstGeom>
-          <a:solidFill xmlns:a="http://schemas.openxmlformats.org/drawingml/2006/main">
+          <a:prstGeom prst="rect">
+            <a:avLst/>
+          </a:prstGeom>
+          <a:solidFill>
             <a:srgbClr val="2774C7"/>
           </a:solidFill>
-          <a:ln xmlns:a="http://schemas.openxmlformats.org/drawingml/2006/main" w="0">
-            <a:noFill/>
-            <a:prstDash val="solid"/>
-          </a:ln>
-        </p:spPr>
-      </p:sp>
-      <p:sp>
-        <p:nvSpPr>
-          <p:cNvPr id="4" name="">
-            <a:extLst xmlns:a="http://schemas.openxmlformats.org/drawingml/2006/main">
+          <a:ln w="0">
+            <a:noFill/>
+            <a:prstDash val="solid"/>
+          </a:ln>
+        </p:spPr>
+        <p:txBody>
+          <a:bodyPr/>
+          <a:lstStyle/>
+          <a:p>
+            <a:endParaRPr lang="zh-CN" altLang="en-US"/>
+          </a:p>
+        </p:txBody>
+      </p:sp>
+      <p:sp>
+        <p:nvSpPr>
+          <p:cNvPr id="4" name="矩形 3">
+            <a:extLst>
               <a:ext uri="{FF2B5EF4-FFF2-40B4-BE49-F238E27FC236}">
                 <a16:creationId xmlns:a16="http://schemas.microsoft.com/office/drawing/2014/main" id="{320C76D6-41B0-493B-8F14-E57139F0B10F}"/>
               </a:ext>
             </a:extLst>
           </p:cNvPr>
           <p:cNvSpPr>
-            <a:spLocks xmlns:a="http://schemas.openxmlformats.org/drawingml/2006/main" noGrp="1"/>
-          </p:cNvSpPr>
-          <p:nvPr/>
-        </p:nvSpPr>
-        <p:spPr>
-          <a:xfrm xmlns:a="http://schemas.openxmlformats.org/drawingml/2006/main">
+            <a:spLocks noGrp="1"/>
+          </p:cNvSpPr>
+          <p:nvPr/>
+        </p:nvSpPr>
+        <p:spPr>
+          <a:xfrm>
             <a:off x="552450" y="1657350"/>
             <a:ext cx="10477500" cy="361950"/>
           </a:xfrm>
-          <a:prstGeom xmlns:a="http://schemas.openxmlformats.org/drawingml/2006/main" prst="rect">
-            <a:avLst/>
-          </a:prstGeom>
-          <a:noFill xmlns:a="http://schemas.openxmlformats.org/drawingml/2006/main"/>
-          <a:ln xmlns:a="http://schemas.openxmlformats.org/drawingml/2006/main" w="0">
-            <a:noFill/>
-            <a:prstDash val="solid"/>
-          </a:ln>
-        </p:spPr>
-        <p:txBody>
-          <a:bodyPr xmlns:a="http://schemas.openxmlformats.org/drawingml/2006/main"/>
-          <a:lstStyle xmlns:a="http://schemas.openxmlformats.org/drawingml/2006/main"/>
-          <a:p xmlns:a="http://schemas.openxmlformats.org/drawingml/2006/main">
+          <a:prstGeom prst="rect">
+            <a:avLst/>
+          </a:prstGeom>
+          <a:noFill/>
+          <a:ln w="0">
+            <a:noFill/>
+            <a:prstDash val="solid"/>
+          </a:ln>
+        </p:spPr>
+        <p:txBody>
+          <a:bodyPr/>
+          <a:lstStyle/>
+          <a:p>
             <a:pPr>
               <a:buNone/>
               <a:defRPr sz="1275" b="0">
@@ -5077,71 +5009,78 @@
       </p:sp>
       <p:sp>
         <p:nvSpPr>
-          <p:cNvPr id="5" name="">
-            <a:extLst xmlns:a="http://schemas.openxmlformats.org/drawingml/2006/main">
+          <p:cNvPr id="5" name="矩形: 圆角 4">
+            <a:extLst>
               <a:ext uri="{FF2B5EF4-FFF2-40B4-BE49-F238E27FC236}">
                 <a16:creationId xmlns:a16="http://schemas.microsoft.com/office/drawing/2014/main" id="{11CE8003-60F8-47B8-BD3D-D3DF52905045}"/>
               </a:ext>
             </a:extLst>
           </p:cNvPr>
           <p:cNvSpPr>
-            <a:spLocks xmlns:a="http://schemas.openxmlformats.org/drawingml/2006/main" noGrp="1"/>
-          </p:cNvSpPr>
-          <p:nvPr/>
-        </p:nvSpPr>
-        <p:spPr>
-          <a:xfrm xmlns:a="http://schemas.openxmlformats.org/drawingml/2006/main">
+            <a:spLocks noGrp="1"/>
+          </p:cNvSpPr>
+          <p:nvPr/>
+        </p:nvSpPr>
+        <p:spPr>
+          <a:xfrm>
             <a:off x="552450" y="2152650"/>
             <a:ext cx="1943100" cy="1123950"/>
           </a:xfrm>
-          <a:prstGeom xmlns:a="http://schemas.openxmlformats.org/drawingml/2006/main" prst="roundRect">
+          <a:prstGeom prst="roundRect">
             <a:avLst>
               <a:gd name="adj" fmla="val 13559"/>
             </a:avLst>
           </a:prstGeom>
-          <a:solidFill xmlns:a="http://schemas.openxmlformats.org/drawingml/2006/main">
+          <a:solidFill>
             <a:srgbClr val="FFFFFF"/>
           </a:solidFill>
-          <a:ln xmlns:a="http://schemas.openxmlformats.org/drawingml/2006/main" w="9525">
+          <a:ln w="9525">
             <a:solidFill>
               <a:srgbClr val="CBD5DF"/>
             </a:solidFill>
             <a:prstDash val="solid"/>
           </a:ln>
         </p:spPr>
-      </p:sp>
-      <p:sp>
-        <p:nvSpPr>
-          <p:cNvPr id="6" name="">
-            <a:extLst xmlns:a="http://schemas.openxmlformats.org/drawingml/2006/main">
+        <p:txBody>
+          <a:bodyPr/>
+          <a:lstStyle/>
+          <a:p>
+            <a:endParaRPr lang="zh-CN" altLang="en-US"/>
+          </a:p>
+        </p:txBody>
+      </p:sp>
+      <p:sp>
+        <p:nvSpPr>
+          <p:cNvPr id="6" name="矩形 5">
+            <a:extLst>
               <a:ext uri="{FF2B5EF4-FFF2-40B4-BE49-F238E27FC236}">
                 <a16:creationId xmlns:a16="http://schemas.microsoft.com/office/drawing/2014/main" id="{4DD47A2F-517A-4FFA-B1BF-E5463E6FBD4F}"/>
               </a:ext>
             </a:extLst>
           </p:cNvPr>
           <p:cNvSpPr>
-            <a:spLocks xmlns:a="http://schemas.openxmlformats.org/drawingml/2006/main" noGrp="1"/>
-          </p:cNvSpPr>
-          <p:nvPr/>
-        </p:nvSpPr>
-        <p:spPr>
-          <a:xfrm xmlns:a="http://schemas.openxmlformats.org/drawingml/2006/main">
+            <a:spLocks noGrp="1"/>
+          </p:cNvSpPr>
+          <p:nvPr/>
+        </p:nvSpPr>
+        <p:spPr>
+          <a:xfrm>
             <a:off x="781050" y="2305050"/>
             <a:ext cx="819150" cy="495300"/>
           </a:xfrm>
-          <a:prstGeom xmlns:a="http://schemas.openxmlformats.org/drawingml/2006/main" prst="rect">
-            <a:avLst/>
-          </a:prstGeom>
-          <a:noFill xmlns:a="http://schemas.openxmlformats.org/drawingml/2006/main"/>
-          <a:ln xmlns:a="http://schemas.openxmlformats.org/drawingml/2006/main" w="0">
-            <a:noFill/>
-            <a:prstDash val="solid"/>
-          </a:ln>
-        </p:spPr>
-        <p:txBody>
-          <a:bodyPr xmlns:a="http://schemas.openxmlformats.org/drawingml/2006/main"/>
-          <a:lstStyle xmlns:a="http://schemas.openxmlformats.org/drawingml/2006/main"/>
-          <a:p xmlns:a="http://schemas.openxmlformats.org/drawingml/2006/main">
+          <a:prstGeom prst="rect">
+            <a:avLst/>
+          </a:prstGeom>
+          <a:noFill/>
+          <a:ln w="0">
+            <a:noFill/>
+            <a:prstDash val="solid"/>
+          </a:ln>
+        </p:spPr>
+        <p:txBody>
+          <a:bodyPr/>
+          <a:lstStyle/>
+          <a:p>
             <a:pPr>
               <a:buNone/>
               <a:defRPr sz="3000" b="1">
@@ -5163,36 +5102,36 @@
       </p:sp>
       <p:sp>
         <p:nvSpPr>
-          <p:cNvPr id="7" name="">
-            <a:extLst xmlns:a="http://schemas.openxmlformats.org/drawingml/2006/main">
+          <p:cNvPr id="7" name="矩形 6">
+            <a:extLst>
               <a:ext uri="{FF2B5EF4-FFF2-40B4-BE49-F238E27FC236}">
                 <a16:creationId xmlns:a16="http://schemas.microsoft.com/office/drawing/2014/main" id="{09E1171D-1AFF-4C6E-9B8F-1A3CAED601DF}"/>
               </a:ext>
             </a:extLst>
           </p:cNvPr>
           <p:cNvSpPr>
-            <a:spLocks xmlns:a="http://schemas.openxmlformats.org/drawingml/2006/main" noGrp="1"/>
-          </p:cNvSpPr>
-          <p:nvPr/>
-        </p:nvSpPr>
-        <p:spPr>
-          <a:xfrm xmlns:a="http://schemas.openxmlformats.org/drawingml/2006/main">
+            <a:spLocks noGrp="1"/>
+          </p:cNvSpPr>
+          <p:nvPr/>
+        </p:nvSpPr>
+        <p:spPr>
+          <a:xfrm>
             <a:off x="781050" y="2847975"/>
             <a:ext cx="1524000" cy="247650"/>
           </a:xfrm>
-          <a:prstGeom xmlns:a="http://schemas.openxmlformats.org/drawingml/2006/main" prst="rect">
-            <a:avLst/>
-          </a:prstGeom>
-          <a:noFill xmlns:a="http://schemas.openxmlformats.org/drawingml/2006/main"/>
-          <a:ln xmlns:a="http://schemas.openxmlformats.org/drawingml/2006/main" w="0">
-            <a:noFill/>
-            <a:prstDash val="solid"/>
-          </a:ln>
-        </p:spPr>
-        <p:txBody>
-          <a:bodyPr xmlns:a="http://schemas.openxmlformats.org/drawingml/2006/main"/>
-          <a:lstStyle xmlns:a="http://schemas.openxmlformats.org/drawingml/2006/main"/>
-          <a:p xmlns:a="http://schemas.openxmlformats.org/drawingml/2006/main">
+          <a:prstGeom prst="rect">
+            <a:avLst/>
+          </a:prstGeom>
+          <a:noFill/>
+          <a:ln w="0">
+            <a:noFill/>
+            <a:prstDash val="solid"/>
+          </a:ln>
+        </p:spPr>
+        <p:txBody>
+          <a:bodyPr/>
+          <a:lstStyle/>
+          <a:p>
             <a:pPr>
               <a:buNone/>
               <a:defRPr sz="1050" b="0">
@@ -5214,71 +5153,78 @@
       </p:sp>
       <p:sp>
         <p:nvSpPr>
-          <p:cNvPr id="8" name="">
-            <a:extLst xmlns:a="http://schemas.openxmlformats.org/drawingml/2006/main">
+          <p:cNvPr id="8" name="矩形: 圆角 7">
+            <a:extLst>
               <a:ext uri="{FF2B5EF4-FFF2-40B4-BE49-F238E27FC236}">
                 <a16:creationId xmlns:a16="http://schemas.microsoft.com/office/drawing/2014/main" id="{C1BD1802-9842-4BBE-A3CB-E047A0F63641}"/>
               </a:ext>
             </a:extLst>
           </p:cNvPr>
           <p:cNvSpPr>
-            <a:spLocks xmlns:a="http://schemas.openxmlformats.org/drawingml/2006/main" noGrp="1"/>
-          </p:cNvSpPr>
-          <p:nvPr/>
-        </p:nvSpPr>
-        <p:spPr>
-          <a:xfrm xmlns:a="http://schemas.openxmlformats.org/drawingml/2006/main">
+            <a:spLocks noGrp="1"/>
+          </p:cNvSpPr>
+          <p:nvPr/>
+        </p:nvSpPr>
+        <p:spPr>
+          <a:xfrm>
             <a:off x="2724150" y="2152650"/>
             <a:ext cx="1943100" cy="1123950"/>
           </a:xfrm>
-          <a:prstGeom xmlns:a="http://schemas.openxmlformats.org/drawingml/2006/main" prst="roundRect">
+          <a:prstGeom prst="roundRect">
             <a:avLst>
               <a:gd name="adj" fmla="val 13559"/>
             </a:avLst>
           </a:prstGeom>
-          <a:solidFill xmlns:a="http://schemas.openxmlformats.org/drawingml/2006/main">
+          <a:solidFill>
             <a:srgbClr val="FFFFFF"/>
           </a:solidFill>
-          <a:ln xmlns:a="http://schemas.openxmlformats.org/drawingml/2006/main" w="9525">
+          <a:ln w="9525">
             <a:solidFill>
               <a:srgbClr val="CBD5DF"/>
             </a:solidFill>
             <a:prstDash val="solid"/>
           </a:ln>
         </p:spPr>
-      </p:sp>
-      <p:sp>
-        <p:nvSpPr>
-          <p:cNvPr id="9" name="">
-            <a:extLst xmlns:a="http://schemas.openxmlformats.org/drawingml/2006/main">
+        <p:txBody>
+          <a:bodyPr/>
+          <a:lstStyle/>
+          <a:p>
+            <a:endParaRPr lang="zh-CN" altLang="en-US"/>
+          </a:p>
+        </p:txBody>
+      </p:sp>
+      <p:sp>
+        <p:nvSpPr>
+          <p:cNvPr id="9" name="矩形 8">
+            <a:extLst>
               <a:ext uri="{FF2B5EF4-FFF2-40B4-BE49-F238E27FC236}">
                 <a16:creationId xmlns:a16="http://schemas.microsoft.com/office/drawing/2014/main" id="{849690F9-E634-4640-834D-8E40D7457CF3}"/>
               </a:ext>
             </a:extLst>
           </p:cNvPr>
           <p:cNvSpPr>
-            <a:spLocks xmlns:a="http://schemas.openxmlformats.org/drawingml/2006/main" noGrp="1"/>
-          </p:cNvSpPr>
-          <p:nvPr/>
-        </p:nvSpPr>
-        <p:spPr>
-          <a:xfrm xmlns:a="http://schemas.openxmlformats.org/drawingml/2006/main">
+            <a:spLocks noGrp="1"/>
+          </p:cNvSpPr>
+          <p:nvPr/>
+        </p:nvSpPr>
+        <p:spPr>
+          <a:xfrm>
             <a:off x="2952750" y="2305050"/>
             <a:ext cx="819150" cy="495300"/>
           </a:xfrm>
-          <a:prstGeom xmlns:a="http://schemas.openxmlformats.org/drawingml/2006/main" prst="rect">
-            <a:avLst/>
-          </a:prstGeom>
-          <a:noFill xmlns:a="http://schemas.openxmlformats.org/drawingml/2006/main"/>
-          <a:ln xmlns:a="http://schemas.openxmlformats.org/drawingml/2006/main" w="0">
-            <a:noFill/>
-            <a:prstDash val="solid"/>
-          </a:ln>
-        </p:spPr>
-        <p:txBody>
-          <a:bodyPr xmlns:a="http://schemas.openxmlformats.org/drawingml/2006/main"/>
-          <a:lstStyle xmlns:a="http://schemas.openxmlformats.org/drawingml/2006/main"/>
-          <a:p xmlns:a="http://schemas.openxmlformats.org/drawingml/2006/main">
+          <a:prstGeom prst="rect">
+            <a:avLst/>
+          </a:prstGeom>
+          <a:noFill/>
+          <a:ln w="0">
+            <a:noFill/>
+            <a:prstDash val="solid"/>
+          </a:ln>
+        </p:spPr>
+        <p:txBody>
+          <a:bodyPr/>
+          <a:lstStyle/>
+          <a:p>
             <a:pPr>
               <a:buNone/>
               <a:defRPr sz="3000" b="1">
@@ -5300,36 +5246,36 @@
       </p:sp>
       <p:sp>
         <p:nvSpPr>
-          <p:cNvPr id="10" name="">
-            <a:extLst xmlns:a="http://schemas.openxmlformats.org/drawingml/2006/main">
+          <p:cNvPr id="10" name="矩形 9">
+            <a:extLst>
               <a:ext uri="{FF2B5EF4-FFF2-40B4-BE49-F238E27FC236}">
                 <a16:creationId xmlns:a16="http://schemas.microsoft.com/office/drawing/2014/main" id="{C40D18B9-F778-46AA-8B58-45AE04E242E7}"/>
               </a:ext>
             </a:extLst>
           </p:cNvPr>
           <p:cNvSpPr>
-            <a:spLocks xmlns:a="http://schemas.openxmlformats.org/drawingml/2006/main" noGrp="1"/>
-          </p:cNvSpPr>
-          <p:nvPr/>
-        </p:nvSpPr>
-        <p:spPr>
-          <a:xfrm xmlns:a="http://schemas.openxmlformats.org/drawingml/2006/main">
+            <a:spLocks noGrp="1"/>
+          </p:cNvSpPr>
+          <p:nvPr/>
+        </p:nvSpPr>
+        <p:spPr>
+          <a:xfrm>
             <a:off x="2952750" y="2847975"/>
             <a:ext cx="1524000" cy="247650"/>
           </a:xfrm>
-          <a:prstGeom xmlns:a="http://schemas.openxmlformats.org/drawingml/2006/main" prst="rect">
-            <a:avLst/>
-          </a:prstGeom>
-          <a:noFill xmlns:a="http://schemas.openxmlformats.org/drawingml/2006/main"/>
-          <a:ln xmlns:a="http://schemas.openxmlformats.org/drawingml/2006/main" w="0">
-            <a:noFill/>
-            <a:prstDash val="solid"/>
-          </a:ln>
-        </p:spPr>
-        <p:txBody>
-          <a:bodyPr xmlns:a="http://schemas.openxmlformats.org/drawingml/2006/main"/>
-          <a:lstStyle xmlns:a="http://schemas.openxmlformats.org/drawingml/2006/main"/>
-          <a:p xmlns:a="http://schemas.openxmlformats.org/drawingml/2006/main">
+          <a:prstGeom prst="rect">
+            <a:avLst/>
+          </a:prstGeom>
+          <a:noFill/>
+          <a:ln w="0">
+            <a:noFill/>
+            <a:prstDash val="solid"/>
+          </a:ln>
+        </p:spPr>
+        <p:txBody>
+          <a:bodyPr/>
+          <a:lstStyle/>
+          <a:p>
             <a:pPr>
               <a:buNone/>
               <a:defRPr sz="1050" b="0">
@@ -5351,71 +5297,78 @@
       </p:sp>
       <p:sp>
         <p:nvSpPr>
-          <p:cNvPr id="11" name="">
-            <a:extLst xmlns:a="http://schemas.openxmlformats.org/drawingml/2006/main">
+          <p:cNvPr id="11" name="矩形: 圆角 10">
+            <a:extLst>
               <a:ext uri="{FF2B5EF4-FFF2-40B4-BE49-F238E27FC236}">
                 <a16:creationId xmlns:a16="http://schemas.microsoft.com/office/drawing/2014/main" id="{FC9D3A31-DC52-4CD5-BE1C-0FDDD83100ED}"/>
               </a:ext>
             </a:extLst>
           </p:cNvPr>
           <p:cNvSpPr>
-            <a:spLocks xmlns:a="http://schemas.openxmlformats.org/drawingml/2006/main" noGrp="1"/>
-          </p:cNvSpPr>
-          <p:nvPr/>
-        </p:nvSpPr>
-        <p:spPr>
-          <a:xfrm xmlns:a="http://schemas.openxmlformats.org/drawingml/2006/main">
+            <a:spLocks noGrp="1"/>
+          </p:cNvSpPr>
+          <p:nvPr/>
+        </p:nvSpPr>
+        <p:spPr>
+          <a:xfrm>
             <a:off x="4895850" y="2152650"/>
             <a:ext cx="1943100" cy="1123950"/>
           </a:xfrm>
-          <a:prstGeom xmlns:a="http://schemas.openxmlformats.org/drawingml/2006/main" prst="roundRect">
+          <a:prstGeom prst="roundRect">
             <a:avLst>
               <a:gd name="adj" fmla="val 13559"/>
             </a:avLst>
           </a:prstGeom>
-          <a:solidFill xmlns:a="http://schemas.openxmlformats.org/drawingml/2006/main">
+          <a:solidFill>
             <a:srgbClr val="FFFFFF"/>
           </a:solidFill>
-          <a:ln xmlns:a="http://schemas.openxmlformats.org/drawingml/2006/main" w="9525">
+          <a:ln w="9525">
             <a:solidFill>
               <a:srgbClr val="CBD5DF"/>
             </a:solidFill>
             <a:prstDash val="solid"/>
           </a:ln>
         </p:spPr>
-      </p:sp>
-      <p:sp>
-        <p:nvSpPr>
-          <p:cNvPr id="12" name="">
-            <a:extLst xmlns:a="http://schemas.openxmlformats.org/drawingml/2006/main">
+        <p:txBody>
+          <a:bodyPr/>
+          <a:lstStyle/>
+          <a:p>
+            <a:endParaRPr lang="zh-CN" altLang="en-US"/>
+          </a:p>
+        </p:txBody>
+      </p:sp>
+      <p:sp>
+        <p:nvSpPr>
+          <p:cNvPr id="12" name="矩形 11">
+            <a:extLst>
               <a:ext uri="{FF2B5EF4-FFF2-40B4-BE49-F238E27FC236}">
                 <a16:creationId xmlns:a16="http://schemas.microsoft.com/office/drawing/2014/main" id="{E3CC7242-D2CC-4232-9CBB-9C13FC8CA5DD}"/>
               </a:ext>
             </a:extLst>
           </p:cNvPr>
           <p:cNvSpPr>
-            <a:spLocks xmlns:a="http://schemas.openxmlformats.org/drawingml/2006/main" noGrp="1"/>
-          </p:cNvSpPr>
-          <p:nvPr/>
-        </p:nvSpPr>
-        <p:spPr>
-          <a:xfrm xmlns:a="http://schemas.openxmlformats.org/drawingml/2006/main">
+            <a:spLocks noGrp="1"/>
+          </p:cNvSpPr>
+          <p:nvPr/>
+        </p:nvSpPr>
+        <p:spPr>
+          <a:xfrm>
             <a:off x="5124450" y="2305050"/>
             <a:ext cx="819150" cy="495300"/>
           </a:xfrm>
-          <a:prstGeom xmlns:a="http://schemas.openxmlformats.org/drawingml/2006/main" prst="rect">
-            <a:avLst/>
-          </a:prstGeom>
-          <a:noFill xmlns:a="http://schemas.openxmlformats.org/drawingml/2006/main"/>
-          <a:ln xmlns:a="http://schemas.openxmlformats.org/drawingml/2006/main" w="0">
-            <a:noFill/>
-            <a:prstDash val="solid"/>
-          </a:ln>
-        </p:spPr>
-        <p:txBody>
-          <a:bodyPr xmlns:a="http://schemas.openxmlformats.org/drawingml/2006/main"/>
-          <a:lstStyle xmlns:a="http://schemas.openxmlformats.org/drawingml/2006/main"/>
-          <a:p xmlns:a="http://schemas.openxmlformats.org/drawingml/2006/main">
+          <a:prstGeom prst="rect">
+            <a:avLst/>
+          </a:prstGeom>
+          <a:noFill/>
+          <a:ln w="0">
+            <a:noFill/>
+            <a:prstDash val="solid"/>
+          </a:ln>
+        </p:spPr>
+        <p:txBody>
+          <a:bodyPr/>
+          <a:lstStyle/>
+          <a:p>
             <a:pPr>
               <a:buNone/>
               <a:defRPr sz="3000" b="1">
@@ -5437,36 +5390,36 @@
       </p:sp>
       <p:sp>
         <p:nvSpPr>
-          <p:cNvPr id="13" name="">
-            <a:extLst xmlns:a="http://schemas.openxmlformats.org/drawingml/2006/main">
+          <p:cNvPr id="13" name="矩形 12">
+            <a:extLst>
               <a:ext uri="{FF2B5EF4-FFF2-40B4-BE49-F238E27FC236}">
                 <a16:creationId xmlns:a16="http://schemas.microsoft.com/office/drawing/2014/main" id="{E0DEFFE5-F655-4891-BF09-94ECE071A05A}"/>
               </a:ext>
             </a:extLst>
           </p:cNvPr>
           <p:cNvSpPr>
-            <a:spLocks xmlns:a="http://schemas.openxmlformats.org/drawingml/2006/main" noGrp="1"/>
-          </p:cNvSpPr>
-          <p:nvPr/>
-        </p:nvSpPr>
-        <p:spPr>
-          <a:xfrm xmlns:a="http://schemas.openxmlformats.org/drawingml/2006/main">
+            <a:spLocks noGrp="1"/>
+          </p:cNvSpPr>
+          <p:nvPr/>
+        </p:nvSpPr>
+        <p:spPr>
+          <a:xfrm>
             <a:off x="5124450" y="2847975"/>
             <a:ext cx="1524000" cy="247650"/>
           </a:xfrm>
-          <a:prstGeom xmlns:a="http://schemas.openxmlformats.org/drawingml/2006/main" prst="rect">
-            <a:avLst/>
-          </a:prstGeom>
-          <a:noFill xmlns:a="http://schemas.openxmlformats.org/drawingml/2006/main"/>
-          <a:ln xmlns:a="http://schemas.openxmlformats.org/drawingml/2006/main" w="0">
-            <a:noFill/>
-            <a:prstDash val="solid"/>
-          </a:ln>
-        </p:spPr>
-        <p:txBody>
-          <a:bodyPr xmlns:a="http://schemas.openxmlformats.org/drawingml/2006/main"/>
-          <a:lstStyle xmlns:a="http://schemas.openxmlformats.org/drawingml/2006/main"/>
-          <a:p xmlns:a="http://schemas.openxmlformats.org/drawingml/2006/main">
+          <a:prstGeom prst="rect">
+            <a:avLst/>
+          </a:prstGeom>
+          <a:noFill/>
+          <a:ln w="0">
+            <a:noFill/>
+            <a:prstDash val="solid"/>
+          </a:ln>
+        </p:spPr>
+        <p:txBody>
+          <a:bodyPr/>
+          <a:lstStyle/>
+          <a:p>
             <a:pPr>
               <a:buNone/>
               <a:defRPr sz="1050" b="0">
@@ -5488,69 +5441,76 @@
       </p:sp>
       <p:sp>
         <p:nvSpPr>
-          <p:cNvPr id="14" name="">
-            <a:extLst xmlns:a="http://schemas.openxmlformats.org/drawingml/2006/main">
+          <p:cNvPr id="14" name="矩形: 圆角 13">
+            <a:extLst>
               <a:ext uri="{FF2B5EF4-FFF2-40B4-BE49-F238E27FC236}">
                 <a16:creationId xmlns:a16="http://schemas.microsoft.com/office/drawing/2014/main" id="{456425F9-31D7-4C86-AC36-82B5A584358A}"/>
               </a:ext>
             </a:extLst>
           </p:cNvPr>
           <p:cNvSpPr>
-            <a:spLocks xmlns:a="http://schemas.openxmlformats.org/drawingml/2006/main" noGrp="1"/>
-          </p:cNvSpPr>
-          <p:nvPr/>
-        </p:nvSpPr>
-        <p:spPr>
-          <a:xfrm xmlns:a="http://schemas.openxmlformats.org/drawingml/2006/main">
+            <a:spLocks noGrp="1"/>
+          </p:cNvSpPr>
+          <p:nvPr/>
+        </p:nvSpPr>
+        <p:spPr>
+          <a:xfrm>
             <a:off x="7239000" y="2152650"/>
             <a:ext cx="4400550" cy="2743200"/>
           </a:xfrm>
-          <a:prstGeom xmlns:a="http://schemas.openxmlformats.org/drawingml/2006/main" prst="roundRect">
+          <a:prstGeom prst="roundRect">
             <a:avLst>
               <a:gd name="adj" fmla="val 6250"/>
             </a:avLst>
           </a:prstGeom>
-          <a:solidFill xmlns:a="http://schemas.openxmlformats.org/drawingml/2006/main">
+          <a:solidFill>
             <a:srgbClr val="12263A"/>
           </a:solidFill>
-          <a:ln xmlns:a="http://schemas.openxmlformats.org/drawingml/2006/main" w="0">
-            <a:noFill/>
-            <a:prstDash val="solid"/>
-          </a:ln>
-        </p:spPr>
-      </p:sp>
-      <p:sp>
-        <p:nvSpPr>
-          <p:cNvPr id="15" name="">
-            <a:extLst xmlns:a="http://schemas.openxmlformats.org/drawingml/2006/main">
+          <a:ln w="0">
+            <a:noFill/>
+            <a:prstDash val="solid"/>
+          </a:ln>
+        </p:spPr>
+        <p:txBody>
+          <a:bodyPr/>
+          <a:lstStyle/>
+          <a:p>
+            <a:endParaRPr lang="zh-CN" altLang="en-US"/>
+          </a:p>
+        </p:txBody>
+      </p:sp>
+      <p:sp>
+        <p:nvSpPr>
+          <p:cNvPr id="15" name="矩形 14">
+            <a:extLst>
               <a:ext uri="{FF2B5EF4-FFF2-40B4-BE49-F238E27FC236}">
                 <a16:creationId xmlns:a16="http://schemas.microsoft.com/office/drawing/2014/main" id="{2FFCA451-2DCD-46AB-9877-A0F877692283}"/>
               </a:ext>
             </a:extLst>
           </p:cNvPr>
           <p:cNvSpPr>
-            <a:spLocks xmlns:a="http://schemas.openxmlformats.org/drawingml/2006/main" noGrp="1"/>
-          </p:cNvSpPr>
-          <p:nvPr/>
-        </p:nvSpPr>
-        <p:spPr>
-          <a:xfrm xmlns:a="http://schemas.openxmlformats.org/drawingml/2006/main">
+            <a:spLocks noGrp="1"/>
+          </p:cNvSpPr>
+          <p:nvPr/>
+        </p:nvSpPr>
+        <p:spPr>
+          <a:xfrm>
             <a:off x="7524750" y="2419350"/>
             <a:ext cx="3143250" cy="266700"/>
           </a:xfrm>
-          <a:prstGeom xmlns:a="http://schemas.openxmlformats.org/drawingml/2006/main" prst="rect">
-            <a:avLst/>
-          </a:prstGeom>
-          <a:noFill xmlns:a="http://schemas.openxmlformats.org/drawingml/2006/main"/>
-          <a:ln xmlns:a="http://schemas.openxmlformats.org/drawingml/2006/main" w="0">
-            <a:noFill/>
-            <a:prstDash val="solid"/>
-          </a:ln>
-        </p:spPr>
-        <p:txBody>
-          <a:bodyPr xmlns:a="http://schemas.openxmlformats.org/drawingml/2006/main"/>
-          <a:lstStyle xmlns:a="http://schemas.openxmlformats.org/drawingml/2006/main"/>
-          <a:p xmlns:a="http://schemas.openxmlformats.org/drawingml/2006/main">
+          <a:prstGeom prst="rect">
+            <a:avLst/>
+          </a:prstGeom>
+          <a:noFill/>
+          <a:ln w="0">
+            <a:noFill/>
+            <a:prstDash val="solid"/>
+          </a:ln>
+        </p:spPr>
+        <p:txBody>
+          <a:bodyPr/>
+          <a:lstStyle/>
+          <a:p>
             <a:pPr>
               <a:buNone/>
               <a:defRPr sz="1125" b="1">
@@ -5572,36 +5532,36 @@
       </p:sp>
       <p:sp>
         <p:nvSpPr>
-          <p:cNvPr id="16" name="">
-            <a:extLst xmlns:a="http://schemas.openxmlformats.org/drawingml/2006/main">
+          <p:cNvPr id="16" name="矩形 15">
+            <a:extLst>
               <a:ext uri="{FF2B5EF4-FFF2-40B4-BE49-F238E27FC236}">
                 <a16:creationId xmlns:a16="http://schemas.microsoft.com/office/drawing/2014/main" id="{757B0C2A-ED09-4478-AEF5-6123CC928B27}"/>
               </a:ext>
             </a:extLst>
           </p:cNvPr>
           <p:cNvSpPr>
-            <a:spLocks xmlns:a="http://schemas.openxmlformats.org/drawingml/2006/main" noGrp="1"/>
-          </p:cNvSpPr>
-          <p:nvPr/>
-        </p:nvSpPr>
-        <p:spPr>
-          <a:xfrm xmlns:a="http://schemas.openxmlformats.org/drawingml/2006/main">
+            <a:spLocks noGrp="1"/>
+          </p:cNvSpPr>
+          <p:nvPr/>
+        </p:nvSpPr>
+        <p:spPr>
+          <a:xfrm>
             <a:off x="7524750" y="2952750"/>
             <a:ext cx="3238500" cy="323850"/>
           </a:xfrm>
-          <a:prstGeom xmlns:a="http://schemas.openxmlformats.org/drawingml/2006/main" prst="rect">
-            <a:avLst/>
-          </a:prstGeom>
-          <a:noFill xmlns:a="http://schemas.openxmlformats.org/drawingml/2006/main"/>
-          <a:ln xmlns:a="http://schemas.openxmlformats.org/drawingml/2006/main" w="0">
-            <a:noFill/>
-            <a:prstDash val="solid"/>
-          </a:ln>
-        </p:spPr>
-        <p:txBody>
-          <a:bodyPr xmlns:a="http://schemas.openxmlformats.org/drawingml/2006/main"/>
-          <a:lstStyle xmlns:a="http://schemas.openxmlformats.org/drawingml/2006/main"/>
-          <a:p xmlns:a="http://schemas.openxmlformats.org/drawingml/2006/main">
+          <a:prstGeom prst="rect">
+            <a:avLst/>
+          </a:prstGeom>
+          <a:noFill/>
+          <a:ln w="0">
+            <a:noFill/>
+            <a:prstDash val="solid"/>
+          </a:ln>
+        </p:spPr>
+        <p:txBody>
+          <a:bodyPr/>
+          <a:lstStyle/>
+          <a:p>
             <a:pPr>
               <a:buNone/>
               <a:defRPr sz="1725" b="1">
@@ -5623,36 +5583,36 @@
       </p:sp>
       <p:sp>
         <p:nvSpPr>
-          <p:cNvPr id="17" name="">
-            <a:extLst xmlns:a="http://schemas.openxmlformats.org/drawingml/2006/main">
+          <p:cNvPr id="17" name="矩形 16">
+            <a:extLst>
               <a:ext uri="{FF2B5EF4-FFF2-40B4-BE49-F238E27FC236}">
                 <a16:creationId xmlns:a16="http://schemas.microsoft.com/office/drawing/2014/main" id="{64A37891-5993-4D03-B3E9-231EE710C79B}"/>
               </a:ext>
             </a:extLst>
           </p:cNvPr>
           <p:cNvSpPr>
-            <a:spLocks xmlns:a="http://schemas.openxmlformats.org/drawingml/2006/main" noGrp="1"/>
-          </p:cNvSpPr>
-          <p:nvPr/>
-        </p:nvSpPr>
-        <p:spPr>
-          <a:xfrm xmlns:a="http://schemas.openxmlformats.org/drawingml/2006/main">
+            <a:spLocks noGrp="1"/>
+          </p:cNvSpPr>
+          <p:nvPr/>
+        </p:nvSpPr>
+        <p:spPr>
+          <a:xfrm>
             <a:off x="7524750" y="3543300"/>
             <a:ext cx="3238500" cy="323850"/>
           </a:xfrm>
-          <a:prstGeom xmlns:a="http://schemas.openxmlformats.org/drawingml/2006/main" prst="rect">
-            <a:avLst/>
-          </a:prstGeom>
-          <a:noFill xmlns:a="http://schemas.openxmlformats.org/drawingml/2006/main"/>
-          <a:ln xmlns:a="http://schemas.openxmlformats.org/drawingml/2006/main" w="0">
-            <a:noFill/>
-            <a:prstDash val="solid"/>
-          </a:ln>
-        </p:spPr>
-        <p:txBody>
-          <a:bodyPr xmlns:a="http://schemas.openxmlformats.org/drawingml/2006/main"/>
-          <a:lstStyle xmlns:a="http://schemas.openxmlformats.org/drawingml/2006/main"/>
-          <a:p xmlns:a="http://schemas.openxmlformats.org/drawingml/2006/main">
+          <a:prstGeom prst="rect">
+            <a:avLst/>
+          </a:prstGeom>
+          <a:noFill/>
+          <a:ln w="0">
+            <a:noFill/>
+            <a:prstDash val="solid"/>
+          </a:ln>
+        </p:spPr>
+        <p:txBody>
+          <a:bodyPr/>
+          <a:lstStyle/>
+          <a:p>
             <a:pPr>
               <a:buNone/>
               <a:defRPr sz="1725" b="1">
@@ -5674,36 +5634,36 @@
       </p:sp>
       <p:sp>
         <p:nvSpPr>
-          <p:cNvPr id="18" name="">
-            <a:extLst xmlns:a="http://schemas.openxmlformats.org/drawingml/2006/main">
+          <p:cNvPr id="18" name="矩形 17">
+            <a:extLst>
               <a:ext uri="{FF2B5EF4-FFF2-40B4-BE49-F238E27FC236}">
                 <a16:creationId xmlns:a16="http://schemas.microsoft.com/office/drawing/2014/main" id="{1A24EC7A-B806-499E-B4DA-CF40E30644D2}"/>
               </a:ext>
             </a:extLst>
           </p:cNvPr>
           <p:cNvSpPr>
-            <a:spLocks xmlns:a="http://schemas.openxmlformats.org/drawingml/2006/main" noGrp="1"/>
-          </p:cNvSpPr>
-          <p:nvPr/>
-        </p:nvSpPr>
-        <p:spPr>
-          <a:xfrm xmlns:a="http://schemas.openxmlformats.org/drawingml/2006/main">
+            <a:spLocks noGrp="1"/>
+          </p:cNvSpPr>
+          <p:nvPr/>
+        </p:nvSpPr>
+        <p:spPr>
+          <a:xfrm>
             <a:off x="7524750" y="4133850"/>
             <a:ext cx="3238500" cy="323850"/>
           </a:xfrm>
-          <a:prstGeom xmlns:a="http://schemas.openxmlformats.org/drawingml/2006/main" prst="rect">
-            <a:avLst/>
-          </a:prstGeom>
-          <a:noFill xmlns:a="http://schemas.openxmlformats.org/drawingml/2006/main"/>
-          <a:ln xmlns:a="http://schemas.openxmlformats.org/drawingml/2006/main" w="0">
-            <a:noFill/>
-            <a:prstDash val="solid"/>
-          </a:ln>
-        </p:spPr>
-        <p:txBody>
-          <a:bodyPr xmlns:a="http://schemas.openxmlformats.org/drawingml/2006/main"/>
-          <a:lstStyle xmlns:a="http://schemas.openxmlformats.org/drawingml/2006/main"/>
-          <a:p xmlns:a="http://schemas.openxmlformats.org/drawingml/2006/main">
+          <a:prstGeom prst="rect">
+            <a:avLst/>
+          </a:prstGeom>
+          <a:noFill/>
+          <a:ln w="0">
+            <a:noFill/>
+            <a:prstDash val="solid"/>
+          </a:ln>
+        </p:spPr>
+        <p:txBody>
+          <a:bodyPr/>
+          <a:lstStyle/>
+          <a:p>
             <a:pPr>
               <a:buNone/>
               <a:defRPr sz="1725" b="1">
@@ -5725,69 +5685,76 @@
       </p:sp>
       <p:sp>
         <p:nvSpPr>
-          <p:cNvPr id="19" name="">
-            <a:extLst xmlns:a="http://schemas.openxmlformats.org/drawingml/2006/main">
+          <p:cNvPr id="19" name="矩形: 圆角 18">
+            <a:extLst>
               <a:ext uri="{FF2B5EF4-FFF2-40B4-BE49-F238E27FC236}">
                 <a16:creationId xmlns:a16="http://schemas.microsoft.com/office/drawing/2014/main" id="{74FC6F8B-DA09-437F-9D3C-E55B1268C654}"/>
               </a:ext>
             </a:extLst>
           </p:cNvPr>
           <p:cNvSpPr>
-            <a:spLocks xmlns:a="http://schemas.openxmlformats.org/drawingml/2006/main" noGrp="1"/>
-          </p:cNvSpPr>
-          <p:nvPr/>
-        </p:nvSpPr>
-        <p:spPr>
-          <a:xfrm xmlns:a="http://schemas.openxmlformats.org/drawingml/2006/main">
+            <a:spLocks noGrp="1"/>
+          </p:cNvSpPr>
+          <p:nvPr/>
+        </p:nvSpPr>
+        <p:spPr>
+          <a:xfrm>
             <a:off x="552450" y="3619500"/>
             <a:ext cx="6286500" cy="1276350"/>
           </a:xfrm>
-          <a:prstGeom xmlns:a="http://schemas.openxmlformats.org/drawingml/2006/main" prst="roundRect">
+          <a:prstGeom prst="roundRect">
             <a:avLst>
               <a:gd name="adj" fmla="val 11940"/>
             </a:avLst>
           </a:prstGeom>
-          <a:solidFill xmlns:a="http://schemas.openxmlformats.org/drawingml/2006/main">
+          <a:solidFill>
             <a:srgbClr val="EAF2FA"/>
           </a:solidFill>
-          <a:ln xmlns:a="http://schemas.openxmlformats.org/drawingml/2006/main" w="0">
-            <a:noFill/>
-            <a:prstDash val="solid"/>
-          </a:ln>
-        </p:spPr>
-      </p:sp>
-      <p:sp>
-        <p:nvSpPr>
-          <p:cNvPr id="20" name="">
-            <a:extLst xmlns:a="http://schemas.openxmlformats.org/drawingml/2006/main">
+          <a:ln w="0">
+            <a:noFill/>
+            <a:prstDash val="solid"/>
+          </a:ln>
+        </p:spPr>
+        <p:txBody>
+          <a:bodyPr/>
+          <a:lstStyle/>
+          <a:p>
+            <a:endParaRPr lang="zh-CN" altLang="en-US"/>
+          </a:p>
+        </p:txBody>
+      </p:sp>
+      <p:sp>
+        <p:nvSpPr>
+          <p:cNvPr id="20" name="矩形 19">
+            <a:extLst>
               <a:ext uri="{FF2B5EF4-FFF2-40B4-BE49-F238E27FC236}">
                 <a16:creationId xmlns:a16="http://schemas.microsoft.com/office/drawing/2014/main" id="{DB391451-ECB7-4D03-A835-CA85FDA843A5}"/>
               </a:ext>
             </a:extLst>
           </p:cNvPr>
           <p:cNvSpPr>
-            <a:spLocks xmlns:a="http://schemas.openxmlformats.org/drawingml/2006/main" noGrp="1"/>
-          </p:cNvSpPr>
-          <p:nvPr/>
-        </p:nvSpPr>
-        <p:spPr>
-          <a:xfrm xmlns:a="http://schemas.openxmlformats.org/drawingml/2006/main">
+            <a:spLocks noGrp="1"/>
+          </p:cNvSpPr>
+          <p:nvPr/>
+        </p:nvSpPr>
+        <p:spPr>
+          <a:xfrm>
             <a:off x="819150" y="3848100"/>
             <a:ext cx="2286000" cy="247650"/>
           </a:xfrm>
-          <a:prstGeom xmlns:a="http://schemas.openxmlformats.org/drawingml/2006/main" prst="rect">
-            <a:avLst/>
-          </a:prstGeom>
-          <a:noFill xmlns:a="http://schemas.openxmlformats.org/drawingml/2006/main"/>
-          <a:ln xmlns:a="http://schemas.openxmlformats.org/drawingml/2006/main" w="0">
-            <a:noFill/>
-            <a:prstDash val="solid"/>
-          </a:ln>
-        </p:spPr>
-        <p:txBody>
-          <a:bodyPr xmlns:a="http://schemas.openxmlformats.org/drawingml/2006/main"/>
-          <a:lstStyle xmlns:a="http://schemas.openxmlformats.org/drawingml/2006/main"/>
-          <a:p xmlns:a="http://schemas.openxmlformats.org/drawingml/2006/main">
+          <a:prstGeom prst="rect">
+            <a:avLst/>
+          </a:prstGeom>
+          <a:noFill/>
+          <a:ln w="0">
+            <a:noFill/>
+            <a:prstDash val="solid"/>
+          </a:ln>
+        </p:spPr>
+        <p:txBody>
+          <a:bodyPr/>
+          <a:lstStyle/>
+          <a:p>
             <a:pPr>
               <a:buNone/>
               <a:defRPr sz="1125" b="1">
@@ -5809,36 +5776,36 @@
       </p:sp>
       <p:sp>
         <p:nvSpPr>
-          <p:cNvPr id="21" name="">
-            <a:extLst xmlns:a="http://schemas.openxmlformats.org/drawingml/2006/main">
+          <p:cNvPr id="21" name="矩形 20">
+            <a:extLst>
               <a:ext uri="{FF2B5EF4-FFF2-40B4-BE49-F238E27FC236}">
                 <a16:creationId xmlns:a16="http://schemas.microsoft.com/office/drawing/2014/main" id="{93510D59-F81F-43CA-8BB3-BF464BE3DA7E}"/>
               </a:ext>
             </a:extLst>
           </p:cNvPr>
           <p:cNvSpPr>
-            <a:spLocks xmlns:a="http://schemas.openxmlformats.org/drawingml/2006/main" noGrp="1"/>
-          </p:cNvSpPr>
-          <p:nvPr/>
-        </p:nvSpPr>
-        <p:spPr>
-          <a:xfrm xmlns:a="http://schemas.openxmlformats.org/drawingml/2006/main">
+            <a:spLocks noGrp="1"/>
+          </p:cNvSpPr>
+          <p:nvPr/>
+        </p:nvSpPr>
+        <p:spPr>
+          <a:xfrm>
             <a:off x="819150" y="4229100"/>
             <a:ext cx="5600700" cy="552450"/>
           </a:xfrm>
-          <a:prstGeom xmlns:a="http://schemas.openxmlformats.org/drawingml/2006/main" prst="rect">
-            <a:avLst/>
-          </a:prstGeom>
-          <a:noFill xmlns:a="http://schemas.openxmlformats.org/drawingml/2006/main"/>
-          <a:ln xmlns:a="http://schemas.openxmlformats.org/drawingml/2006/main" w="0">
-            <a:noFill/>
-            <a:prstDash val="solid"/>
-          </a:ln>
-        </p:spPr>
-        <p:txBody>
-          <a:bodyPr xmlns:a="http://schemas.openxmlformats.org/drawingml/2006/main"/>
-          <a:lstStyle xmlns:a="http://schemas.openxmlformats.org/drawingml/2006/main"/>
-          <a:p xmlns:a="http://schemas.openxmlformats.org/drawingml/2006/main">
+          <a:prstGeom prst="rect">
+            <a:avLst/>
+          </a:prstGeom>
+          <a:noFill/>
+          <a:ln w="0">
+            <a:noFill/>
+            <a:prstDash val="solid"/>
+          </a:ln>
+        </p:spPr>
+        <p:txBody>
+          <a:bodyPr/>
+          <a:lstStyle/>
+          <a:p>
             <a:pPr>
               <a:buNone/>
               <a:defRPr sz="1350" b="0">
@@ -5860,71 +5827,78 @@
       </p:sp>
       <p:sp>
         <p:nvSpPr>
-          <p:cNvPr id="22" name="">
-            <a:extLst xmlns:a="http://schemas.openxmlformats.org/drawingml/2006/main">
+          <p:cNvPr id="22" name="矩形: 圆角 21">
+            <a:extLst>
               <a:ext uri="{FF2B5EF4-FFF2-40B4-BE49-F238E27FC236}">
                 <a16:creationId xmlns:a16="http://schemas.microsoft.com/office/drawing/2014/main" id="{8654AD0B-414A-4AED-951B-27453F0DE167}"/>
               </a:ext>
             </a:extLst>
           </p:cNvPr>
           <p:cNvSpPr>
-            <a:spLocks xmlns:a="http://schemas.openxmlformats.org/drawingml/2006/main" noGrp="1"/>
-          </p:cNvSpPr>
-          <p:nvPr/>
-        </p:nvSpPr>
-        <p:spPr>
-          <a:xfrm xmlns:a="http://schemas.openxmlformats.org/drawingml/2006/main">
+            <a:spLocks noGrp="1"/>
+          </p:cNvSpPr>
+          <p:nvPr/>
+        </p:nvSpPr>
+        <p:spPr>
+          <a:xfrm>
             <a:off x="552450" y="5219700"/>
             <a:ext cx="11087100" cy="704850"/>
           </a:xfrm>
-          <a:prstGeom xmlns:a="http://schemas.openxmlformats.org/drawingml/2006/main" prst="roundRect">
+          <a:prstGeom prst="roundRect">
             <a:avLst>
               <a:gd name="adj" fmla="val 18919"/>
             </a:avLst>
           </a:prstGeom>
-          <a:solidFill xmlns:a="http://schemas.openxmlformats.org/drawingml/2006/main">
+          <a:solidFill>
             <a:srgbClr val="FFFFFF"/>
           </a:solidFill>
-          <a:ln xmlns:a="http://schemas.openxmlformats.org/drawingml/2006/main" w="9525">
+          <a:ln w="9525">
             <a:solidFill>
               <a:srgbClr val="CBD5DF"/>
             </a:solidFill>
             <a:prstDash val="solid"/>
           </a:ln>
         </p:spPr>
-      </p:sp>
-      <p:sp>
-        <p:nvSpPr>
-          <p:cNvPr id="23" name="">
-            <a:extLst xmlns:a="http://schemas.openxmlformats.org/drawingml/2006/main">
+        <p:txBody>
+          <a:bodyPr/>
+          <a:lstStyle/>
+          <a:p>
+            <a:endParaRPr lang="zh-CN" altLang="en-US"/>
+          </a:p>
+        </p:txBody>
+      </p:sp>
+      <p:sp>
+        <p:nvSpPr>
+          <p:cNvPr id="23" name="矩形 22">
+            <a:extLst>
               <a:ext uri="{FF2B5EF4-FFF2-40B4-BE49-F238E27FC236}">
                 <a16:creationId xmlns:a16="http://schemas.microsoft.com/office/drawing/2014/main" id="{D299CB6D-5119-4522-9167-3D3159C97981}"/>
               </a:ext>
             </a:extLst>
           </p:cNvPr>
           <p:cNvSpPr>
-            <a:spLocks xmlns:a="http://schemas.openxmlformats.org/drawingml/2006/main" noGrp="1"/>
-          </p:cNvSpPr>
-          <p:nvPr/>
-        </p:nvSpPr>
-        <p:spPr>
-          <a:xfrm xmlns:a="http://schemas.openxmlformats.org/drawingml/2006/main">
+            <a:spLocks noGrp="1"/>
+          </p:cNvSpPr>
+          <p:nvPr/>
+        </p:nvSpPr>
+        <p:spPr>
+          <a:xfrm>
             <a:off x="800100" y="5448300"/>
             <a:ext cx="1428750" cy="228600"/>
           </a:xfrm>
-          <a:prstGeom xmlns:a="http://schemas.openxmlformats.org/drawingml/2006/main" prst="rect">
-            <a:avLst/>
-          </a:prstGeom>
-          <a:noFill xmlns:a="http://schemas.openxmlformats.org/drawingml/2006/main"/>
-          <a:ln xmlns:a="http://schemas.openxmlformats.org/drawingml/2006/main" w="0">
-            <a:noFill/>
-            <a:prstDash val="solid"/>
-          </a:ln>
-        </p:spPr>
-        <p:txBody>
-          <a:bodyPr xmlns:a="http://schemas.openxmlformats.org/drawingml/2006/main"/>
-          <a:lstStyle xmlns:a="http://schemas.openxmlformats.org/drawingml/2006/main"/>
-          <a:p xmlns:a="http://schemas.openxmlformats.org/drawingml/2006/main">
+          <a:prstGeom prst="rect">
+            <a:avLst/>
+          </a:prstGeom>
+          <a:noFill/>
+          <a:ln w="0">
+            <a:noFill/>
+            <a:prstDash val="solid"/>
+          </a:ln>
+        </p:spPr>
+        <p:txBody>
+          <a:bodyPr/>
+          <a:lstStyle/>
+          <a:p>
             <a:pPr>
               <a:buNone/>
               <a:defRPr sz="1050" b="1">
@@ -5946,36 +5920,36 @@
       </p:sp>
       <p:sp>
         <p:nvSpPr>
-          <p:cNvPr id="24" name="">
-            <a:extLst xmlns:a="http://schemas.openxmlformats.org/drawingml/2006/main">
+          <p:cNvPr id="24" name="矩形 23">
+            <a:extLst>
               <a:ext uri="{FF2B5EF4-FFF2-40B4-BE49-F238E27FC236}">
                 <a16:creationId xmlns:a16="http://schemas.microsoft.com/office/drawing/2014/main" id="{8A12F390-44C3-4261-85D8-F02FCEA2DA3F}"/>
               </a:ext>
             </a:extLst>
           </p:cNvPr>
           <p:cNvSpPr>
-            <a:spLocks xmlns:a="http://schemas.openxmlformats.org/drawingml/2006/main" noGrp="1"/>
-          </p:cNvSpPr>
-          <p:nvPr/>
-        </p:nvSpPr>
-        <p:spPr>
-          <a:xfrm xmlns:a="http://schemas.openxmlformats.org/drawingml/2006/main">
+            <a:spLocks noGrp="1"/>
+          </p:cNvSpPr>
+          <p:nvPr/>
+        </p:nvSpPr>
+        <p:spPr>
+          <a:xfrm>
             <a:off x="2247900" y="5429250"/>
             <a:ext cx="8858250" cy="266700"/>
           </a:xfrm>
-          <a:prstGeom xmlns:a="http://schemas.openxmlformats.org/drawingml/2006/main" prst="rect">
-            <a:avLst/>
-          </a:prstGeom>
-          <a:noFill xmlns:a="http://schemas.openxmlformats.org/drawingml/2006/main"/>
-          <a:ln xmlns:a="http://schemas.openxmlformats.org/drawingml/2006/main" w="0">
-            <a:noFill/>
-            <a:prstDash val="solid"/>
-          </a:ln>
-        </p:spPr>
-        <p:txBody>
-          <a:bodyPr xmlns:a="http://schemas.openxmlformats.org/drawingml/2006/main"/>
-          <a:lstStyle xmlns:a="http://schemas.openxmlformats.org/drawingml/2006/main"/>
-          <a:p xmlns:a="http://schemas.openxmlformats.org/drawingml/2006/main">
+          <a:prstGeom prst="rect">
+            <a:avLst/>
+          </a:prstGeom>
+          <a:noFill/>
+          <a:ln w="0">
+            <a:noFill/>
+            <a:prstDash val="solid"/>
+          </a:ln>
+        </p:spPr>
+        <p:txBody>
+          <a:bodyPr/>
+          <a:lstStyle/>
+          <a:p>
             <a:pPr>
               <a:buNone/>
               <a:defRPr sz="1275" b="1">
@@ -5985,48 +5959,53 @@
               </a:defRPr>
             </a:pPr>
             <a:r>
-              <a:rPr sz="1275" b="1">
+              <a:rPr lang="zh-CN" altLang="zh-CN" sz="1275" b="1" dirty="0">
                 <a:solidFill>
                   <a:srgbClr val="12263A"/>
                 </a:solidFill>
               </a:rPr>
-              <a:t>React  ·  Express  ·  PostgreSQL + Prisma  ·  Vitest + Playwright  ·  Docker + GitHub Actions</a:t>
-            </a:r>
-          </a:p>
-        </p:txBody>
-      </p:sp>
-      <p:sp>
-        <p:nvSpPr>
-          <p:cNvPr id="25" name="">
-            <a:extLst xmlns:a="http://schemas.openxmlformats.org/drawingml/2006/main">
+              <a:t>React · Django + Django REST Framework · PostgreSQL · Django ORM · Django Tests + Playwright · Docker + GitHub Actions</a:t>
+            </a:r>
+            <a:endParaRPr sz="1275" b="1" dirty="0">
+              <a:solidFill>
+                <a:srgbClr val="12263A"/>
+              </a:solidFill>
+            </a:endParaRPr>
+          </a:p>
+        </p:txBody>
+      </p:sp>
+      <p:sp>
+        <p:nvSpPr>
+          <p:cNvPr id="25" name="矩形 24">
+            <a:extLst>
               <a:ext uri="{FF2B5EF4-FFF2-40B4-BE49-F238E27FC236}">
                 <a16:creationId xmlns:a16="http://schemas.microsoft.com/office/drawing/2014/main" id="{392D60F0-095D-45AB-9E13-AF3104562458}"/>
               </a:ext>
             </a:extLst>
           </p:cNvPr>
           <p:cNvSpPr>
-            <a:spLocks xmlns:a="http://schemas.openxmlformats.org/drawingml/2006/main" noGrp="1"/>
-          </p:cNvSpPr>
-          <p:nvPr/>
-        </p:nvSpPr>
-        <p:spPr>
-          <a:xfrm xmlns:a="http://schemas.openxmlformats.org/drawingml/2006/main">
+            <a:spLocks noGrp="1"/>
+          </p:cNvSpPr>
+          <p:nvPr/>
+        </p:nvSpPr>
+        <p:spPr>
+          <a:xfrm>
             <a:off x="552450" y="6496050"/>
             <a:ext cx="4953000" cy="190500"/>
           </a:xfrm>
-          <a:prstGeom xmlns:a="http://schemas.openxmlformats.org/drawingml/2006/main" prst="rect">
-            <a:avLst/>
-          </a:prstGeom>
-          <a:noFill xmlns:a="http://schemas.openxmlformats.org/drawingml/2006/main"/>
-          <a:ln xmlns:a="http://schemas.openxmlformats.org/drawingml/2006/main" w="0">
-            <a:noFill/>
-            <a:prstDash val="solid"/>
-          </a:ln>
-        </p:spPr>
-        <p:txBody>
-          <a:bodyPr xmlns:a="http://schemas.openxmlformats.org/drawingml/2006/main"/>
-          <a:lstStyle xmlns:a="http://schemas.openxmlformats.org/drawingml/2006/main"/>
-          <a:p xmlns:a="http://schemas.openxmlformats.org/drawingml/2006/main">
+          <a:prstGeom prst="rect">
+            <a:avLst/>
+          </a:prstGeom>
+          <a:noFill/>
+          <a:ln w="0">
+            <a:noFill/>
+            <a:prstDash val="solid"/>
+          </a:ln>
+        </p:spPr>
+        <p:txBody>
+          <a:bodyPr/>
+          <a:lstStyle/>
+          <a:p>
             <a:pPr>
               <a:buNone/>
               <a:defRPr sz="825" b="1">
@@ -6036,48 +6015,48 @@
               </a:defRPr>
             </a:pPr>
             <a:r>
-              <a:rPr sz="825" b="1">
+              <a:rPr lang="en-US" altLang="zh-CN" sz="825" b="1" dirty="0">
                 <a:solidFill>
                   <a:srgbClr val="667482"/>
                 </a:solidFill>
               </a:rPr>
-              <a:t>STUDYCREW  |  ELEC3609/9609  |  GROUP 02</a:t>
-            </a:r>
-          </a:p>
-        </p:txBody>
-      </p:sp>
-      <p:sp>
-        <p:nvSpPr>
-          <p:cNvPr id="26" name="">
-            <a:extLst xmlns:a="http://schemas.openxmlformats.org/drawingml/2006/main">
+              <a:t>STUDYCREW  |  ELEC3609  |  GROUP 06</a:t>
+            </a:r>
+          </a:p>
+        </p:txBody>
+      </p:sp>
+      <p:sp>
+        <p:nvSpPr>
+          <p:cNvPr id="26" name="矩形 25">
+            <a:extLst>
               <a:ext uri="{FF2B5EF4-FFF2-40B4-BE49-F238E27FC236}">
                 <a16:creationId xmlns:a16="http://schemas.microsoft.com/office/drawing/2014/main" id="{04C44A13-0935-489F-92DD-F397EA72BD99}"/>
               </a:ext>
             </a:extLst>
           </p:cNvPr>
           <p:cNvSpPr>
-            <a:spLocks xmlns:a="http://schemas.openxmlformats.org/drawingml/2006/main" noGrp="1"/>
-          </p:cNvSpPr>
-          <p:nvPr/>
-        </p:nvSpPr>
-        <p:spPr>
-          <a:xfrm xmlns:a="http://schemas.openxmlformats.org/drawingml/2006/main">
+            <a:spLocks noGrp="1"/>
+          </p:cNvSpPr>
+          <p:nvPr/>
+        </p:nvSpPr>
+        <p:spPr>
+          <a:xfrm>
             <a:off x="11125200" y="6496050"/>
             <a:ext cx="514350" cy="190500"/>
           </a:xfrm>
-          <a:prstGeom xmlns:a="http://schemas.openxmlformats.org/drawingml/2006/main" prst="rect">
-            <a:avLst/>
-          </a:prstGeom>
-          <a:noFill xmlns:a="http://schemas.openxmlformats.org/drawingml/2006/main"/>
-          <a:ln xmlns:a="http://schemas.openxmlformats.org/drawingml/2006/main" w="0">
-            <a:noFill/>
-            <a:prstDash val="solid"/>
-          </a:ln>
-        </p:spPr>
-        <p:txBody>
-          <a:bodyPr xmlns:a="http://schemas.openxmlformats.org/drawingml/2006/main"/>
-          <a:lstStyle xmlns:a="http://schemas.openxmlformats.org/drawingml/2006/main"/>
-          <a:p xmlns:a="http://schemas.openxmlformats.org/drawingml/2006/main">
+          <a:prstGeom prst="rect">
+            <a:avLst/>
+          </a:prstGeom>
+          <a:noFill/>
+          <a:ln w="0">
+            <a:noFill/>
+            <a:prstDash val="solid"/>
+          </a:ln>
+        </p:spPr>
+        <p:txBody>
+          <a:bodyPr/>
+          <a:lstStyle/>
+          <a:p>
             <a:pPr>
               <a:buNone/>
               <a:defRPr sz="825" b="1">
@@ -6104,17 +6083,21 @@
       </p:ext>
     </p:extLst>
   </p:cSld>
+  <p:clrMapOvr>
+    <a:masterClrMapping/>
+  </p:clrMapOvr>
 </p:sld>
 </file>
 
 <file path=ppt/slides/slide6.xml><?xml version="1.0" encoding="utf-8"?>
-<p:sld xmlns:p="http://schemas.openxmlformats.org/presentationml/2006/main">
+<p:sld xmlns:a="http://schemas.openxmlformats.org/drawingml/2006/main" xmlns:r="http://schemas.openxmlformats.org/officeDocument/2006/relationships" xmlns:p="http://schemas.openxmlformats.org/presentationml/2006/main">
   <p:cSld>
     <p:bg>
       <p:bgPr>
-        <a:solidFill xmlns:a="http://schemas.openxmlformats.org/drawingml/2006/main">
+        <a:solidFill>
           <a:srgbClr val="F7F5EF"/>
         </a:solidFill>
+        <a:effectLst/>
       </p:bgPr>
     </p:bg>
     <p:spTree>
@@ -6124,40 +6107,45 @@
         <p:nvPr/>
       </p:nvGrpSpPr>
       <p:grpSpPr>
-        <a:xfrm xmlns:a="http://schemas.openxmlformats.org/drawingml/2006/main"/>
+        <a:xfrm>
+          <a:off x="0" y="0"/>
+          <a:ext cx="0" cy="0"/>
+          <a:chOff x="0" y="0"/>
+          <a:chExt cx="0" cy="0"/>
+        </a:xfrm>
       </p:grpSpPr>
       <p:sp>
         <p:nvSpPr>
-          <p:cNvPr id="34" name="">
-            <a:extLst xmlns:a="http://schemas.openxmlformats.org/drawingml/2006/main">
+          <p:cNvPr id="34" name="矩形 33">
+            <a:extLst>
               <a:ext uri="{FF2B5EF4-FFF2-40B4-BE49-F238E27FC236}">
                 <a16:creationId xmlns:a16="http://schemas.microsoft.com/office/drawing/2014/main" id="{E18663A0-7734-4764-90DB-CC87B689F3DC}"/>
               </a:ext>
             </a:extLst>
           </p:cNvPr>
           <p:cNvSpPr>
-            <a:spLocks xmlns:a="http://schemas.openxmlformats.org/drawingml/2006/main" noGrp="1"/>
-          </p:cNvSpPr>
-          <p:nvPr/>
-        </p:nvSpPr>
-        <p:spPr>
-          <a:xfrm xmlns:a="http://schemas.openxmlformats.org/drawingml/2006/main">
+            <a:spLocks noGrp="1"/>
+          </p:cNvSpPr>
+          <p:nvPr/>
+        </p:nvSpPr>
+        <p:spPr>
+          <a:xfrm>
             <a:off x="9525000" y="400050"/>
             <a:ext cx="2114550" cy="228600"/>
           </a:xfrm>
-          <a:prstGeom xmlns:a="http://schemas.openxmlformats.org/drawingml/2006/main" prst="rect">
-            <a:avLst/>
-          </a:prstGeom>
-          <a:noFill xmlns:a="http://schemas.openxmlformats.org/drawingml/2006/main"/>
-          <a:ln xmlns:a="http://schemas.openxmlformats.org/drawingml/2006/main" w="0">
-            <a:noFill/>
-            <a:prstDash val="solid"/>
-          </a:ln>
-        </p:spPr>
-        <p:txBody>
-          <a:bodyPr xmlns:a="http://schemas.openxmlformats.org/drawingml/2006/main"/>
-          <a:lstStyle xmlns:a="http://schemas.openxmlformats.org/drawingml/2006/main"/>
-          <a:p xmlns:a="http://schemas.openxmlformats.org/drawingml/2006/main">
+          <a:prstGeom prst="rect">
+            <a:avLst/>
+          </a:prstGeom>
+          <a:noFill/>
+          <a:ln w="0">
+            <a:noFill/>
+            <a:prstDash val="solid"/>
+          </a:ln>
+        </p:spPr>
+        <p:txBody>
+          <a:bodyPr/>
+          <a:lstStyle/>
+          <a:p>
             <a:pPr>
               <a:buNone/>
               <a:defRPr sz="1125" b="1">
@@ -6179,36 +6167,36 @@
       </p:sp>
       <p:sp>
         <p:nvSpPr>
-          <p:cNvPr id="2" name="">
-            <a:extLst xmlns:a="http://schemas.openxmlformats.org/drawingml/2006/main">
+          <p:cNvPr id="2" name="矩形 1">
+            <a:extLst>
               <a:ext uri="{FF2B5EF4-FFF2-40B4-BE49-F238E27FC236}">
                 <a16:creationId xmlns:a16="http://schemas.microsoft.com/office/drawing/2014/main" id="{733235E8-A1D1-44DB-82DB-AC844A02204F}"/>
               </a:ext>
             </a:extLst>
           </p:cNvPr>
           <p:cNvSpPr>
-            <a:spLocks xmlns:a="http://schemas.openxmlformats.org/drawingml/2006/main" noGrp="1"/>
-          </p:cNvSpPr>
-          <p:nvPr/>
-        </p:nvSpPr>
-        <p:spPr>
-          <a:xfrm xmlns:a="http://schemas.openxmlformats.org/drawingml/2006/main">
+            <a:spLocks noGrp="1"/>
+          </p:cNvSpPr>
+          <p:nvPr/>
+        </p:nvSpPr>
+        <p:spPr>
+          <a:xfrm>
             <a:off x="552450" y="781050"/>
             <a:ext cx="10477500" cy="685800"/>
           </a:xfrm>
-          <a:prstGeom xmlns:a="http://schemas.openxmlformats.org/drawingml/2006/main" prst="rect">
-            <a:avLst/>
-          </a:prstGeom>
-          <a:noFill xmlns:a="http://schemas.openxmlformats.org/drawingml/2006/main"/>
-          <a:ln xmlns:a="http://schemas.openxmlformats.org/drawingml/2006/main" w="0">
-            <a:noFill/>
-            <a:prstDash val="solid"/>
-          </a:ln>
-        </p:spPr>
-        <p:txBody>
-          <a:bodyPr xmlns:a="http://schemas.openxmlformats.org/drawingml/2006/main"/>
-          <a:lstStyle xmlns:a="http://schemas.openxmlformats.org/drawingml/2006/main"/>
-          <a:p xmlns:a="http://schemas.openxmlformats.org/drawingml/2006/main">
+          <a:prstGeom prst="rect">
+            <a:avLst/>
+          </a:prstGeom>
+          <a:noFill/>
+          <a:ln w="0">
+            <a:noFill/>
+            <a:prstDash val="solid"/>
+          </a:ln>
+        </p:spPr>
+        <p:txBody>
+          <a:bodyPr/>
+          <a:lstStyle/>
+          <a:p>
             <a:pPr>
               <a:buNone/>
               <a:defRPr sz="3150" b="1">
@@ -6230,67 +6218,74 @@
       </p:sp>
       <p:sp>
         <p:nvSpPr>
-          <p:cNvPr id="3" name="">
-            <a:extLst xmlns:a="http://schemas.openxmlformats.org/drawingml/2006/main">
+          <p:cNvPr id="3" name="矩形 2">
+            <a:extLst>
               <a:ext uri="{FF2B5EF4-FFF2-40B4-BE49-F238E27FC236}">
                 <a16:creationId xmlns:a16="http://schemas.microsoft.com/office/drawing/2014/main" id="{90349687-4EA4-4B81-A341-BB102662282C}"/>
               </a:ext>
             </a:extLst>
           </p:cNvPr>
           <p:cNvSpPr>
-            <a:spLocks xmlns:a="http://schemas.openxmlformats.org/drawingml/2006/main" noGrp="1"/>
-          </p:cNvSpPr>
-          <p:nvPr/>
-        </p:nvSpPr>
-        <p:spPr>
-          <a:xfrm xmlns:a="http://schemas.openxmlformats.org/drawingml/2006/main">
+            <a:spLocks noGrp="1"/>
+          </p:cNvSpPr>
+          <p:nvPr/>
+        </p:nvSpPr>
+        <p:spPr>
+          <a:xfrm>
             <a:off x="552450" y="1524000"/>
             <a:ext cx="11087100" cy="28575"/>
           </a:xfrm>
-          <a:prstGeom xmlns:a="http://schemas.openxmlformats.org/drawingml/2006/main" prst="rect">
-            <a:avLst/>
-          </a:prstGeom>
-          <a:solidFill xmlns:a="http://schemas.openxmlformats.org/drawingml/2006/main">
+          <a:prstGeom prst="rect">
+            <a:avLst/>
+          </a:prstGeom>
+          <a:solidFill>
             <a:srgbClr val="2774C7"/>
           </a:solidFill>
-          <a:ln xmlns:a="http://schemas.openxmlformats.org/drawingml/2006/main" w="0">
-            <a:noFill/>
-            <a:prstDash val="solid"/>
-          </a:ln>
-        </p:spPr>
-      </p:sp>
-      <p:sp>
-        <p:nvSpPr>
-          <p:cNvPr id="4" name="">
-            <a:extLst xmlns:a="http://schemas.openxmlformats.org/drawingml/2006/main">
+          <a:ln w="0">
+            <a:noFill/>
+            <a:prstDash val="solid"/>
+          </a:ln>
+        </p:spPr>
+        <p:txBody>
+          <a:bodyPr/>
+          <a:lstStyle/>
+          <a:p>
+            <a:endParaRPr lang="zh-CN" altLang="en-US"/>
+          </a:p>
+        </p:txBody>
+      </p:sp>
+      <p:sp>
+        <p:nvSpPr>
+          <p:cNvPr id="4" name="矩形 3">
+            <a:extLst>
               <a:ext uri="{FF2B5EF4-FFF2-40B4-BE49-F238E27FC236}">
                 <a16:creationId xmlns:a16="http://schemas.microsoft.com/office/drawing/2014/main" id="{B4258612-C83F-4424-93AC-A7DC5B8A3BF8}"/>
               </a:ext>
             </a:extLst>
           </p:cNvPr>
           <p:cNvSpPr>
-            <a:spLocks xmlns:a="http://schemas.openxmlformats.org/drawingml/2006/main" noGrp="1"/>
-          </p:cNvSpPr>
-          <p:nvPr/>
-        </p:nvSpPr>
-        <p:spPr>
-          <a:xfrm xmlns:a="http://schemas.openxmlformats.org/drawingml/2006/main">
+            <a:spLocks noGrp="1"/>
+          </p:cNvSpPr>
+          <p:nvPr/>
+        </p:nvSpPr>
+        <p:spPr>
+          <a:xfrm>
             <a:off x="552450" y="1657350"/>
             <a:ext cx="10477500" cy="361950"/>
           </a:xfrm>
-          <a:prstGeom xmlns:a="http://schemas.openxmlformats.org/drawingml/2006/main" prst="rect">
-            <a:avLst/>
-          </a:prstGeom>
-          <a:noFill xmlns:a="http://schemas.openxmlformats.org/drawingml/2006/main"/>
-          <a:ln xmlns:a="http://schemas.openxmlformats.org/drawingml/2006/main" w="0">
-            <a:noFill/>
-            <a:prstDash val="solid"/>
-          </a:ln>
-        </p:spPr>
-        <p:txBody>
-          <a:bodyPr xmlns:a="http://schemas.openxmlformats.org/drawingml/2006/main"/>
-          <a:lstStyle xmlns:a="http://schemas.openxmlformats.org/drawingml/2006/main"/>
-          <a:p xmlns:a="http://schemas.openxmlformats.org/drawingml/2006/main">
+          <a:prstGeom prst="rect">
+            <a:avLst/>
+          </a:prstGeom>
+          <a:noFill/>
+          <a:ln w="0">
+            <a:noFill/>
+            <a:prstDash val="solid"/>
+          </a:ln>
+        </p:spPr>
+        <p:txBody>
+          <a:bodyPr/>
+          <a:lstStyle/>
+          <a:p>
             <a:pPr>
               <a:buNone/>
               <a:defRPr sz="1275" b="0">
@@ -6312,36 +6307,36 @@
       </p:sp>
       <p:sp>
         <p:nvSpPr>
-          <p:cNvPr id="5" name="">
-            <a:extLst xmlns:a="http://schemas.openxmlformats.org/drawingml/2006/main">
+          <p:cNvPr id="5" name="矩形 4">
+            <a:extLst>
               <a:ext uri="{FF2B5EF4-FFF2-40B4-BE49-F238E27FC236}">
                 <a16:creationId xmlns:a16="http://schemas.microsoft.com/office/drawing/2014/main" id="{E027BA91-0DE2-40F7-925A-C854802C3EF4}"/>
               </a:ext>
             </a:extLst>
           </p:cNvPr>
           <p:cNvSpPr>
-            <a:spLocks xmlns:a="http://schemas.openxmlformats.org/drawingml/2006/main" noGrp="1"/>
-          </p:cNvSpPr>
-          <p:nvPr/>
-        </p:nvSpPr>
-        <p:spPr>
-          <a:xfrm xmlns:a="http://schemas.openxmlformats.org/drawingml/2006/main">
+            <a:spLocks noGrp="1"/>
+          </p:cNvSpPr>
+          <p:nvPr/>
+        </p:nvSpPr>
+        <p:spPr>
+          <a:xfrm>
             <a:off x="3295650" y="2571750"/>
             <a:ext cx="571500" cy="228600"/>
           </a:xfrm>
-          <a:prstGeom xmlns:a="http://schemas.openxmlformats.org/drawingml/2006/main" prst="rect">
-            <a:avLst/>
-          </a:prstGeom>
-          <a:noFill xmlns:a="http://schemas.openxmlformats.org/drawingml/2006/main"/>
-          <a:ln xmlns:a="http://schemas.openxmlformats.org/drawingml/2006/main" w="0">
-            <a:noFill/>
-            <a:prstDash val="solid"/>
-          </a:ln>
-        </p:spPr>
-        <p:txBody>
-          <a:bodyPr xmlns:a="http://schemas.openxmlformats.org/drawingml/2006/main"/>
-          <a:lstStyle xmlns:a="http://schemas.openxmlformats.org/drawingml/2006/main"/>
-          <a:p xmlns:a="http://schemas.openxmlformats.org/drawingml/2006/main">
+          <a:prstGeom prst="rect">
+            <a:avLst/>
+          </a:prstGeom>
+          <a:noFill/>
+          <a:ln w="0">
+            <a:noFill/>
+            <a:prstDash val="solid"/>
+          </a:ln>
+        </p:spPr>
+        <p:txBody>
+          <a:bodyPr/>
+          <a:lstStyle/>
+          <a:p>
             <a:pPr>
               <a:buNone/>
               <a:defRPr sz="975" b="1">
@@ -6363,67 +6358,74 @@
       </p:sp>
       <p:sp>
         <p:nvSpPr>
-          <p:cNvPr id="6" name="">
-            <a:extLst xmlns:a="http://schemas.openxmlformats.org/drawingml/2006/main">
+          <p:cNvPr id="6" name="矩形 5">
+            <a:extLst>
               <a:ext uri="{FF2B5EF4-FFF2-40B4-BE49-F238E27FC236}">
                 <a16:creationId xmlns:a16="http://schemas.microsoft.com/office/drawing/2014/main" id="{9524697F-244B-45F1-B405-5A7C3F431DEE}"/>
               </a:ext>
             </a:extLst>
           </p:cNvPr>
           <p:cNvSpPr>
-            <a:spLocks xmlns:a="http://schemas.openxmlformats.org/drawingml/2006/main" noGrp="1"/>
-          </p:cNvSpPr>
-          <p:nvPr/>
-        </p:nvSpPr>
-        <p:spPr>
-          <a:xfrm xmlns:a="http://schemas.openxmlformats.org/drawingml/2006/main">
+            <a:spLocks noGrp="1"/>
+          </p:cNvSpPr>
+          <p:nvPr/>
+        </p:nvSpPr>
+        <p:spPr>
+          <a:xfrm>
             <a:off x="3295650" y="2819400"/>
             <a:ext cx="9525" cy="2057400"/>
           </a:xfrm>
-          <a:prstGeom xmlns:a="http://schemas.openxmlformats.org/drawingml/2006/main" prst="rect">
-            <a:avLst/>
-          </a:prstGeom>
-          <a:solidFill xmlns:a="http://schemas.openxmlformats.org/drawingml/2006/main">
+          <a:prstGeom prst="rect">
+            <a:avLst/>
+          </a:prstGeom>
+          <a:solidFill>
             <a:srgbClr val="CBD5DF"/>
           </a:solidFill>
-          <a:ln xmlns:a="http://schemas.openxmlformats.org/drawingml/2006/main" w="0">
-            <a:noFill/>
-            <a:prstDash val="solid"/>
-          </a:ln>
-        </p:spPr>
-      </p:sp>
-      <p:sp>
-        <p:nvSpPr>
-          <p:cNvPr id="7" name="">
-            <a:extLst xmlns:a="http://schemas.openxmlformats.org/drawingml/2006/main">
+          <a:ln w="0">
+            <a:noFill/>
+            <a:prstDash val="solid"/>
+          </a:ln>
+        </p:spPr>
+        <p:txBody>
+          <a:bodyPr/>
+          <a:lstStyle/>
+          <a:p>
+            <a:endParaRPr lang="zh-CN" altLang="en-US"/>
+          </a:p>
+        </p:txBody>
+      </p:sp>
+      <p:sp>
+        <p:nvSpPr>
+          <p:cNvPr id="7" name="矩形 6">
+            <a:extLst>
               <a:ext uri="{FF2B5EF4-FFF2-40B4-BE49-F238E27FC236}">
                 <a16:creationId xmlns:a16="http://schemas.microsoft.com/office/drawing/2014/main" id="{42A35CC4-3F83-4C6C-B83A-816E44AA5547}"/>
               </a:ext>
             </a:extLst>
           </p:cNvPr>
           <p:cNvSpPr>
-            <a:spLocks xmlns:a="http://schemas.openxmlformats.org/drawingml/2006/main" noGrp="1"/>
-          </p:cNvSpPr>
-          <p:nvPr/>
-        </p:nvSpPr>
-        <p:spPr>
-          <a:xfrm xmlns:a="http://schemas.openxmlformats.org/drawingml/2006/main">
+            <a:spLocks noGrp="1"/>
+          </p:cNvSpPr>
+          <p:nvPr/>
+        </p:nvSpPr>
+        <p:spPr>
+          <a:xfrm>
             <a:off x="4248150" y="2571750"/>
             <a:ext cx="571500" cy="228600"/>
           </a:xfrm>
-          <a:prstGeom xmlns:a="http://schemas.openxmlformats.org/drawingml/2006/main" prst="rect">
-            <a:avLst/>
-          </a:prstGeom>
-          <a:noFill xmlns:a="http://schemas.openxmlformats.org/drawingml/2006/main"/>
-          <a:ln xmlns:a="http://schemas.openxmlformats.org/drawingml/2006/main" w="0">
-            <a:noFill/>
-            <a:prstDash val="solid"/>
-          </a:ln>
-        </p:spPr>
-        <p:txBody>
-          <a:bodyPr xmlns:a="http://schemas.openxmlformats.org/drawingml/2006/main"/>
-          <a:lstStyle xmlns:a="http://schemas.openxmlformats.org/drawingml/2006/main"/>
-          <a:p xmlns:a="http://schemas.openxmlformats.org/drawingml/2006/main">
+          <a:prstGeom prst="rect">
+            <a:avLst/>
+          </a:prstGeom>
+          <a:noFill/>
+          <a:ln w="0">
+            <a:noFill/>
+            <a:prstDash val="solid"/>
+          </a:ln>
+        </p:spPr>
+        <p:txBody>
+          <a:bodyPr/>
+          <a:lstStyle/>
+          <a:p>
             <a:pPr>
               <a:buNone/>
               <a:defRPr sz="975" b="1">
@@ -6445,67 +6447,74 @@
       </p:sp>
       <p:sp>
         <p:nvSpPr>
-          <p:cNvPr id="8" name="">
-            <a:extLst xmlns:a="http://schemas.openxmlformats.org/drawingml/2006/main">
+          <p:cNvPr id="8" name="矩形 7">
+            <a:extLst>
               <a:ext uri="{FF2B5EF4-FFF2-40B4-BE49-F238E27FC236}">
                 <a16:creationId xmlns:a16="http://schemas.microsoft.com/office/drawing/2014/main" id="{98560EF9-1D69-4E44-B9A0-8CB6FF8C33F7}"/>
               </a:ext>
             </a:extLst>
           </p:cNvPr>
           <p:cNvSpPr>
-            <a:spLocks xmlns:a="http://schemas.openxmlformats.org/drawingml/2006/main" noGrp="1"/>
-          </p:cNvSpPr>
-          <p:nvPr/>
-        </p:nvSpPr>
-        <p:spPr>
-          <a:xfrm xmlns:a="http://schemas.openxmlformats.org/drawingml/2006/main">
+            <a:spLocks noGrp="1"/>
+          </p:cNvSpPr>
+          <p:nvPr/>
+        </p:nvSpPr>
+        <p:spPr>
+          <a:xfrm>
             <a:off x="4248150" y="2819400"/>
             <a:ext cx="9525" cy="2057400"/>
           </a:xfrm>
-          <a:prstGeom xmlns:a="http://schemas.openxmlformats.org/drawingml/2006/main" prst="rect">
-            <a:avLst/>
-          </a:prstGeom>
-          <a:solidFill xmlns:a="http://schemas.openxmlformats.org/drawingml/2006/main">
+          <a:prstGeom prst="rect">
+            <a:avLst/>
+          </a:prstGeom>
+          <a:solidFill>
             <a:srgbClr val="CBD5DF"/>
           </a:solidFill>
-          <a:ln xmlns:a="http://schemas.openxmlformats.org/drawingml/2006/main" w="0">
-            <a:noFill/>
-            <a:prstDash val="solid"/>
-          </a:ln>
-        </p:spPr>
-      </p:sp>
-      <p:sp>
-        <p:nvSpPr>
-          <p:cNvPr id="9" name="">
-            <a:extLst xmlns:a="http://schemas.openxmlformats.org/drawingml/2006/main">
+          <a:ln w="0">
+            <a:noFill/>
+            <a:prstDash val="solid"/>
+          </a:ln>
+        </p:spPr>
+        <p:txBody>
+          <a:bodyPr/>
+          <a:lstStyle/>
+          <a:p>
+            <a:endParaRPr lang="zh-CN" altLang="en-US"/>
+          </a:p>
+        </p:txBody>
+      </p:sp>
+      <p:sp>
+        <p:nvSpPr>
+          <p:cNvPr id="9" name="矩形 8">
+            <a:extLst>
               <a:ext uri="{FF2B5EF4-FFF2-40B4-BE49-F238E27FC236}">
                 <a16:creationId xmlns:a16="http://schemas.microsoft.com/office/drawing/2014/main" id="{3EE60A0F-2260-43D4-83AD-FC717D4037C0}"/>
               </a:ext>
             </a:extLst>
           </p:cNvPr>
           <p:cNvSpPr>
-            <a:spLocks xmlns:a="http://schemas.openxmlformats.org/drawingml/2006/main" noGrp="1"/>
-          </p:cNvSpPr>
-          <p:nvPr/>
-        </p:nvSpPr>
-        <p:spPr>
-          <a:xfrm xmlns:a="http://schemas.openxmlformats.org/drawingml/2006/main">
+            <a:spLocks noGrp="1"/>
+          </p:cNvSpPr>
+          <p:nvPr/>
+        </p:nvSpPr>
+        <p:spPr>
+          <a:xfrm>
             <a:off x="5200650" y="2571750"/>
             <a:ext cx="571500" cy="228600"/>
           </a:xfrm>
-          <a:prstGeom xmlns:a="http://schemas.openxmlformats.org/drawingml/2006/main" prst="rect">
-            <a:avLst/>
-          </a:prstGeom>
-          <a:noFill xmlns:a="http://schemas.openxmlformats.org/drawingml/2006/main"/>
-          <a:ln xmlns:a="http://schemas.openxmlformats.org/drawingml/2006/main" w="0">
-            <a:noFill/>
-            <a:prstDash val="solid"/>
-          </a:ln>
-        </p:spPr>
-        <p:txBody>
-          <a:bodyPr xmlns:a="http://schemas.openxmlformats.org/drawingml/2006/main"/>
-          <a:lstStyle xmlns:a="http://schemas.openxmlformats.org/drawingml/2006/main"/>
-          <a:p xmlns:a="http://schemas.openxmlformats.org/drawingml/2006/main">
+          <a:prstGeom prst="rect">
+            <a:avLst/>
+          </a:prstGeom>
+          <a:noFill/>
+          <a:ln w="0">
+            <a:noFill/>
+            <a:prstDash val="solid"/>
+          </a:ln>
+        </p:spPr>
+        <p:txBody>
+          <a:bodyPr/>
+          <a:lstStyle/>
+          <a:p>
             <a:pPr>
               <a:buNone/>
               <a:defRPr sz="975" b="1">
@@ -6527,67 +6536,74 @@
       </p:sp>
       <p:sp>
         <p:nvSpPr>
-          <p:cNvPr id="10" name="">
-            <a:extLst xmlns:a="http://schemas.openxmlformats.org/drawingml/2006/main">
+          <p:cNvPr id="10" name="矩形 9">
+            <a:extLst>
               <a:ext uri="{FF2B5EF4-FFF2-40B4-BE49-F238E27FC236}">
                 <a16:creationId xmlns:a16="http://schemas.microsoft.com/office/drawing/2014/main" id="{9ECE5C4F-AAD8-47D8-8B45-3086054FBEA6}"/>
               </a:ext>
             </a:extLst>
           </p:cNvPr>
           <p:cNvSpPr>
-            <a:spLocks xmlns:a="http://schemas.openxmlformats.org/drawingml/2006/main" noGrp="1"/>
-          </p:cNvSpPr>
-          <p:nvPr/>
-        </p:nvSpPr>
-        <p:spPr>
-          <a:xfrm xmlns:a="http://schemas.openxmlformats.org/drawingml/2006/main">
+            <a:spLocks noGrp="1"/>
+          </p:cNvSpPr>
+          <p:nvPr/>
+        </p:nvSpPr>
+        <p:spPr>
+          <a:xfrm>
             <a:off x="5200650" y="2819400"/>
             <a:ext cx="9525" cy="2057400"/>
           </a:xfrm>
-          <a:prstGeom xmlns:a="http://schemas.openxmlformats.org/drawingml/2006/main" prst="rect">
-            <a:avLst/>
-          </a:prstGeom>
-          <a:solidFill xmlns:a="http://schemas.openxmlformats.org/drawingml/2006/main">
+          <a:prstGeom prst="rect">
+            <a:avLst/>
+          </a:prstGeom>
+          <a:solidFill>
             <a:srgbClr val="CBD5DF"/>
           </a:solidFill>
-          <a:ln xmlns:a="http://schemas.openxmlformats.org/drawingml/2006/main" w="0">
-            <a:noFill/>
-            <a:prstDash val="solid"/>
-          </a:ln>
-        </p:spPr>
-      </p:sp>
-      <p:sp>
-        <p:nvSpPr>
-          <p:cNvPr id="11" name="">
-            <a:extLst xmlns:a="http://schemas.openxmlformats.org/drawingml/2006/main">
+          <a:ln w="0">
+            <a:noFill/>
+            <a:prstDash val="solid"/>
+          </a:ln>
+        </p:spPr>
+        <p:txBody>
+          <a:bodyPr/>
+          <a:lstStyle/>
+          <a:p>
+            <a:endParaRPr lang="zh-CN" altLang="en-US"/>
+          </a:p>
+        </p:txBody>
+      </p:sp>
+      <p:sp>
+        <p:nvSpPr>
+          <p:cNvPr id="11" name="矩形 10">
+            <a:extLst>
               <a:ext uri="{FF2B5EF4-FFF2-40B4-BE49-F238E27FC236}">
                 <a16:creationId xmlns:a16="http://schemas.microsoft.com/office/drawing/2014/main" id="{E8F47676-9037-4C44-B0E7-ECE626557E4B}"/>
               </a:ext>
             </a:extLst>
           </p:cNvPr>
           <p:cNvSpPr>
-            <a:spLocks xmlns:a="http://schemas.openxmlformats.org/drawingml/2006/main" noGrp="1"/>
-          </p:cNvSpPr>
-          <p:nvPr/>
-        </p:nvSpPr>
-        <p:spPr>
-          <a:xfrm xmlns:a="http://schemas.openxmlformats.org/drawingml/2006/main">
+            <a:spLocks noGrp="1"/>
+          </p:cNvSpPr>
+          <p:nvPr/>
+        </p:nvSpPr>
+        <p:spPr>
+          <a:xfrm>
             <a:off x="6153150" y="2571750"/>
             <a:ext cx="571500" cy="228600"/>
           </a:xfrm>
-          <a:prstGeom xmlns:a="http://schemas.openxmlformats.org/drawingml/2006/main" prst="rect">
-            <a:avLst/>
-          </a:prstGeom>
-          <a:noFill xmlns:a="http://schemas.openxmlformats.org/drawingml/2006/main"/>
-          <a:ln xmlns:a="http://schemas.openxmlformats.org/drawingml/2006/main" w="0">
-            <a:noFill/>
-            <a:prstDash val="solid"/>
-          </a:ln>
-        </p:spPr>
-        <p:txBody>
-          <a:bodyPr xmlns:a="http://schemas.openxmlformats.org/drawingml/2006/main"/>
-          <a:lstStyle xmlns:a="http://schemas.openxmlformats.org/drawingml/2006/main"/>
-          <a:p xmlns:a="http://schemas.openxmlformats.org/drawingml/2006/main">
+          <a:prstGeom prst="rect">
+            <a:avLst/>
+          </a:prstGeom>
+          <a:noFill/>
+          <a:ln w="0">
+            <a:noFill/>
+            <a:prstDash val="solid"/>
+          </a:ln>
+        </p:spPr>
+        <p:txBody>
+          <a:bodyPr/>
+          <a:lstStyle/>
+          <a:p>
             <a:pPr>
               <a:buNone/>
               <a:defRPr sz="975" b="1">
@@ -6609,67 +6625,74 @@
       </p:sp>
       <p:sp>
         <p:nvSpPr>
-          <p:cNvPr id="12" name="">
-            <a:extLst xmlns:a="http://schemas.openxmlformats.org/drawingml/2006/main">
+          <p:cNvPr id="12" name="矩形 11">
+            <a:extLst>
               <a:ext uri="{FF2B5EF4-FFF2-40B4-BE49-F238E27FC236}">
                 <a16:creationId xmlns:a16="http://schemas.microsoft.com/office/drawing/2014/main" id="{D1869610-EA90-4ADA-AD37-4F99298E156A}"/>
               </a:ext>
             </a:extLst>
           </p:cNvPr>
           <p:cNvSpPr>
-            <a:spLocks xmlns:a="http://schemas.openxmlformats.org/drawingml/2006/main" noGrp="1"/>
-          </p:cNvSpPr>
-          <p:nvPr/>
-        </p:nvSpPr>
-        <p:spPr>
-          <a:xfrm xmlns:a="http://schemas.openxmlformats.org/drawingml/2006/main">
+            <a:spLocks noGrp="1"/>
+          </p:cNvSpPr>
+          <p:nvPr/>
+        </p:nvSpPr>
+        <p:spPr>
+          <a:xfrm>
             <a:off x="6153150" y="2819400"/>
             <a:ext cx="9525" cy="2057400"/>
           </a:xfrm>
-          <a:prstGeom xmlns:a="http://schemas.openxmlformats.org/drawingml/2006/main" prst="rect">
-            <a:avLst/>
-          </a:prstGeom>
-          <a:solidFill xmlns:a="http://schemas.openxmlformats.org/drawingml/2006/main">
+          <a:prstGeom prst="rect">
+            <a:avLst/>
+          </a:prstGeom>
+          <a:solidFill>
             <a:srgbClr val="CBD5DF"/>
           </a:solidFill>
-          <a:ln xmlns:a="http://schemas.openxmlformats.org/drawingml/2006/main" w="0">
-            <a:noFill/>
-            <a:prstDash val="solid"/>
-          </a:ln>
-        </p:spPr>
-      </p:sp>
-      <p:sp>
-        <p:nvSpPr>
-          <p:cNvPr id="13" name="">
-            <a:extLst xmlns:a="http://schemas.openxmlformats.org/drawingml/2006/main">
+          <a:ln w="0">
+            <a:noFill/>
+            <a:prstDash val="solid"/>
+          </a:ln>
+        </p:spPr>
+        <p:txBody>
+          <a:bodyPr/>
+          <a:lstStyle/>
+          <a:p>
+            <a:endParaRPr lang="zh-CN" altLang="en-US"/>
+          </a:p>
+        </p:txBody>
+      </p:sp>
+      <p:sp>
+        <p:nvSpPr>
+          <p:cNvPr id="13" name="矩形 12">
+            <a:extLst>
               <a:ext uri="{FF2B5EF4-FFF2-40B4-BE49-F238E27FC236}">
                 <a16:creationId xmlns:a16="http://schemas.microsoft.com/office/drawing/2014/main" id="{2649D819-6CEC-40A4-B282-349239665F46}"/>
               </a:ext>
             </a:extLst>
           </p:cNvPr>
           <p:cNvSpPr>
-            <a:spLocks xmlns:a="http://schemas.openxmlformats.org/drawingml/2006/main" noGrp="1"/>
-          </p:cNvSpPr>
-          <p:nvPr/>
-        </p:nvSpPr>
-        <p:spPr>
-          <a:xfrm xmlns:a="http://schemas.openxmlformats.org/drawingml/2006/main">
+            <a:spLocks noGrp="1"/>
+          </p:cNvSpPr>
+          <p:nvPr/>
+        </p:nvSpPr>
+        <p:spPr>
+          <a:xfrm>
             <a:off x="7105650" y="2571750"/>
             <a:ext cx="571500" cy="228600"/>
           </a:xfrm>
-          <a:prstGeom xmlns:a="http://schemas.openxmlformats.org/drawingml/2006/main" prst="rect">
-            <a:avLst/>
-          </a:prstGeom>
-          <a:noFill xmlns:a="http://schemas.openxmlformats.org/drawingml/2006/main"/>
-          <a:ln xmlns:a="http://schemas.openxmlformats.org/drawingml/2006/main" w="0">
-            <a:noFill/>
-            <a:prstDash val="solid"/>
-          </a:ln>
-        </p:spPr>
-        <p:txBody>
-          <a:bodyPr xmlns:a="http://schemas.openxmlformats.org/drawingml/2006/main"/>
-          <a:lstStyle xmlns:a="http://schemas.openxmlformats.org/drawingml/2006/main"/>
-          <a:p xmlns:a="http://schemas.openxmlformats.org/drawingml/2006/main">
+          <a:prstGeom prst="rect">
+            <a:avLst/>
+          </a:prstGeom>
+          <a:noFill/>
+          <a:ln w="0">
+            <a:noFill/>
+            <a:prstDash val="solid"/>
+          </a:ln>
+        </p:spPr>
+        <p:txBody>
+          <a:bodyPr/>
+          <a:lstStyle/>
+          <a:p>
             <a:pPr>
               <a:buNone/>
               <a:defRPr sz="975" b="1">
@@ -6691,67 +6714,74 @@
       </p:sp>
       <p:sp>
         <p:nvSpPr>
-          <p:cNvPr id="14" name="">
-            <a:extLst xmlns:a="http://schemas.openxmlformats.org/drawingml/2006/main">
+          <p:cNvPr id="14" name="矩形 13">
+            <a:extLst>
               <a:ext uri="{FF2B5EF4-FFF2-40B4-BE49-F238E27FC236}">
                 <a16:creationId xmlns:a16="http://schemas.microsoft.com/office/drawing/2014/main" id="{E96C7170-B3E4-4569-ABD8-9AECC72FF782}"/>
               </a:ext>
             </a:extLst>
           </p:cNvPr>
           <p:cNvSpPr>
-            <a:spLocks xmlns:a="http://schemas.openxmlformats.org/drawingml/2006/main" noGrp="1"/>
-          </p:cNvSpPr>
-          <p:nvPr/>
-        </p:nvSpPr>
-        <p:spPr>
-          <a:xfrm xmlns:a="http://schemas.openxmlformats.org/drawingml/2006/main">
+            <a:spLocks noGrp="1"/>
+          </p:cNvSpPr>
+          <p:nvPr/>
+        </p:nvSpPr>
+        <p:spPr>
+          <a:xfrm>
             <a:off x="7105650" y="2819400"/>
             <a:ext cx="9525" cy="2057400"/>
           </a:xfrm>
-          <a:prstGeom xmlns:a="http://schemas.openxmlformats.org/drawingml/2006/main" prst="rect">
-            <a:avLst/>
-          </a:prstGeom>
-          <a:solidFill xmlns:a="http://schemas.openxmlformats.org/drawingml/2006/main">
+          <a:prstGeom prst="rect">
+            <a:avLst/>
+          </a:prstGeom>
+          <a:solidFill>
             <a:srgbClr val="CBD5DF"/>
           </a:solidFill>
-          <a:ln xmlns:a="http://schemas.openxmlformats.org/drawingml/2006/main" w="0">
-            <a:noFill/>
-            <a:prstDash val="solid"/>
-          </a:ln>
-        </p:spPr>
-      </p:sp>
-      <p:sp>
-        <p:nvSpPr>
-          <p:cNvPr id="15" name="">
-            <a:extLst xmlns:a="http://schemas.openxmlformats.org/drawingml/2006/main">
+          <a:ln w="0">
+            <a:noFill/>
+            <a:prstDash val="solid"/>
+          </a:ln>
+        </p:spPr>
+        <p:txBody>
+          <a:bodyPr/>
+          <a:lstStyle/>
+          <a:p>
+            <a:endParaRPr lang="zh-CN" altLang="en-US"/>
+          </a:p>
+        </p:txBody>
+      </p:sp>
+      <p:sp>
+        <p:nvSpPr>
+          <p:cNvPr id="15" name="矩形 14">
+            <a:extLst>
               <a:ext uri="{FF2B5EF4-FFF2-40B4-BE49-F238E27FC236}">
                 <a16:creationId xmlns:a16="http://schemas.microsoft.com/office/drawing/2014/main" id="{7C99B469-4A66-4C88-9E8E-29D5DCAAB432}"/>
               </a:ext>
             </a:extLst>
           </p:cNvPr>
           <p:cNvSpPr>
-            <a:spLocks xmlns:a="http://schemas.openxmlformats.org/drawingml/2006/main" noGrp="1"/>
-          </p:cNvSpPr>
-          <p:nvPr/>
-        </p:nvSpPr>
-        <p:spPr>
-          <a:xfrm xmlns:a="http://schemas.openxmlformats.org/drawingml/2006/main">
+            <a:spLocks noGrp="1"/>
+          </p:cNvSpPr>
+          <p:nvPr/>
+        </p:nvSpPr>
+        <p:spPr>
+          <a:xfrm>
             <a:off x="8058150" y="2571750"/>
             <a:ext cx="571500" cy="228600"/>
           </a:xfrm>
-          <a:prstGeom xmlns:a="http://schemas.openxmlformats.org/drawingml/2006/main" prst="rect">
-            <a:avLst/>
-          </a:prstGeom>
-          <a:noFill xmlns:a="http://schemas.openxmlformats.org/drawingml/2006/main"/>
-          <a:ln xmlns:a="http://schemas.openxmlformats.org/drawingml/2006/main" w="0">
-            <a:noFill/>
-            <a:prstDash val="solid"/>
-          </a:ln>
-        </p:spPr>
-        <p:txBody>
-          <a:bodyPr xmlns:a="http://schemas.openxmlformats.org/drawingml/2006/main"/>
-          <a:lstStyle xmlns:a="http://schemas.openxmlformats.org/drawingml/2006/main"/>
-          <a:p xmlns:a="http://schemas.openxmlformats.org/drawingml/2006/main">
+          <a:prstGeom prst="rect">
+            <a:avLst/>
+          </a:prstGeom>
+          <a:noFill/>
+          <a:ln w="0">
+            <a:noFill/>
+            <a:prstDash val="solid"/>
+          </a:ln>
+        </p:spPr>
+        <p:txBody>
+          <a:bodyPr/>
+          <a:lstStyle/>
+          <a:p>
             <a:pPr>
               <a:buNone/>
               <a:defRPr sz="975" b="1">
@@ -6773,67 +6803,74 @@
       </p:sp>
       <p:sp>
         <p:nvSpPr>
-          <p:cNvPr id="16" name="">
-            <a:extLst xmlns:a="http://schemas.openxmlformats.org/drawingml/2006/main">
+          <p:cNvPr id="16" name="矩形 15">
+            <a:extLst>
               <a:ext uri="{FF2B5EF4-FFF2-40B4-BE49-F238E27FC236}">
                 <a16:creationId xmlns:a16="http://schemas.microsoft.com/office/drawing/2014/main" id="{9D4AE8FE-F0A3-4248-9078-472D67558BC5}"/>
               </a:ext>
             </a:extLst>
           </p:cNvPr>
           <p:cNvSpPr>
-            <a:spLocks xmlns:a="http://schemas.openxmlformats.org/drawingml/2006/main" noGrp="1"/>
-          </p:cNvSpPr>
-          <p:nvPr/>
-        </p:nvSpPr>
-        <p:spPr>
-          <a:xfrm xmlns:a="http://schemas.openxmlformats.org/drawingml/2006/main">
+            <a:spLocks noGrp="1"/>
+          </p:cNvSpPr>
+          <p:nvPr/>
+        </p:nvSpPr>
+        <p:spPr>
+          <a:xfrm>
             <a:off x="8058150" y="2819400"/>
             <a:ext cx="9525" cy="2057400"/>
           </a:xfrm>
-          <a:prstGeom xmlns:a="http://schemas.openxmlformats.org/drawingml/2006/main" prst="rect">
-            <a:avLst/>
-          </a:prstGeom>
-          <a:solidFill xmlns:a="http://schemas.openxmlformats.org/drawingml/2006/main">
+          <a:prstGeom prst="rect">
+            <a:avLst/>
+          </a:prstGeom>
+          <a:solidFill>
             <a:srgbClr val="CBD5DF"/>
           </a:solidFill>
-          <a:ln xmlns:a="http://schemas.openxmlformats.org/drawingml/2006/main" w="0">
-            <a:noFill/>
-            <a:prstDash val="solid"/>
-          </a:ln>
-        </p:spPr>
-      </p:sp>
-      <p:sp>
-        <p:nvSpPr>
-          <p:cNvPr id="17" name="">
-            <a:extLst xmlns:a="http://schemas.openxmlformats.org/drawingml/2006/main">
+          <a:ln w="0">
+            <a:noFill/>
+            <a:prstDash val="solid"/>
+          </a:ln>
+        </p:spPr>
+        <p:txBody>
+          <a:bodyPr/>
+          <a:lstStyle/>
+          <a:p>
+            <a:endParaRPr lang="zh-CN" altLang="en-US"/>
+          </a:p>
+        </p:txBody>
+      </p:sp>
+      <p:sp>
+        <p:nvSpPr>
+          <p:cNvPr id="17" name="矩形 16">
+            <a:extLst>
               <a:ext uri="{FF2B5EF4-FFF2-40B4-BE49-F238E27FC236}">
                 <a16:creationId xmlns:a16="http://schemas.microsoft.com/office/drawing/2014/main" id="{648DF74E-3A30-46BE-A3D9-7D05556BFB78}"/>
               </a:ext>
             </a:extLst>
           </p:cNvPr>
           <p:cNvSpPr>
-            <a:spLocks xmlns:a="http://schemas.openxmlformats.org/drawingml/2006/main" noGrp="1"/>
-          </p:cNvSpPr>
-          <p:nvPr/>
-        </p:nvSpPr>
-        <p:spPr>
-          <a:xfrm xmlns:a="http://schemas.openxmlformats.org/drawingml/2006/main">
+            <a:spLocks noGrp="1"/>
+          </p:cNvSpPr>
+          <p:nvPr/>
+        </p:nvSpPr>
+        <p:spPr>
+          <a:xfrm>
             <a:off x="9010650" y="2571750"/>
             <a:ext cx="571500" cy="228600"/>
           </a:xfrm>
-          <a:prstGeom xmlns:a="http://schemas.openxmlformats.org/drawingml/2006/main" prst="rect">
-            <a:avLst/>
-          </a:prstGeom>
-          <a:noFill xmlns:a="http://schemas.openxmlformats.org/drawingml/2006/main"/>
-          <a:ln xmlns:a="http://schemas.openxmlformats.org/drawingml/2006/main" w="0">
-            <a:noFill/>
-            <a:prstDash val="solid"/>
-          </a:ln>
-        </p:spPr>
-        <p:txBody>
-          <a:bodyPr xmlns:a="http://schemas.openxmlformats.org/drawingml/2006/main"/>
-          <a:lstStyle xmlns:a="http://schemas.openxmlformats.org/drawingml/2006/main"/>
-          <a:p xmlns:a="http://schemas.openxmlformats.org/drawingml/2006/main">
+          <a:prstGeom prst="rect">
+            <a:avLst/>
+          </a:prstGeom>
+          <a:noFill/>
+          <a:ln w="0">
+            <a:noFill/>
+            <a:prstDash val="solid"/>
+          </a:ln>
+        </p:spPr>
+        <p:txBody>
+          <a:bodyPr/>
+          <a:lstStyle/>
+          <a:p>
             <a:pPr>
               <a:buNone/>
               <a:defRPr sz="975" b="1">
@@ -6855,67 +6892,74 @@
       </p:sp>
       <p:sp>
         <p:nvSpPr>
-          <p:cNvPr id="18" name="">
-            <a:extLst xmlns:a="http://schemas.openxmlformats.org/drawingml/2006/main">
+          <p:cNvPr id="18" name="矩形 17">
+            <a:extLst>
               <a:ext uri="{FF2B5EF4-FFF2-40B4-BE49-F238E27FC236}">
                 <a16:creationId xmlns:a16="http://schemas.microsoft.com/office/drawing/2014/main" id="{4AEFBA1C-FB1D-4AF1-B7F0-3E3484AA83D5}"/>
               </a:ext>
             </a:extLst>
           </p:cNvPr>
           <p:cNvSpPr>
-            <a:spLocks xmlns:a="http://schemas.openxmlformats.org/drawingml/2006/main" noGrp="1"/>
-          </p:cNvSpPr>
-          <p:nvPr/>
-        </p:nvSpPr>
-        <p:spPr>
-          <a:xfrm xmlns:a="http://schemas.openxmlformats.org/drawingml/2006/main">
+            <a:spLocks noGrp="1"/>
+          </p:cNvSpPr>
+          <p:nvPr/>
+        </p:nvSpPr>
+        <p:spPr>
+          <a:xfrm>
             <a:off x="9010650" y="2819400"/>
             <a:ext cx="9525" cy="2057400"/>
           </a:xfrm>
-          <a:prstGeom xmlns:a="http://schemas.openxmlformats.org/drawingml/2006/main" prst="rect">
-            <a:avLst/>
-          </a:prstGeom>
-          <a:solidFill xmlns:a="http://schemas.openxmlformats.org/drawingml/2006/main">
+          <a:prstGeom prst="rect">
+            <a:avLst/>
+          </a:prstGeom>
+          <a:solidFill>
             <a:srgbClr val="CBD5DF"/>
           </a:solidFill>
-          <a:ln xmlns:a="http://schemas.openxmlformats.org/drawingml/2006/main" w="0">
-            <a:noFill/>
-            <a:prstDash val="solid"/>
-          </a:ln>
-        </p:spPr>
-      </p:sp>
-      <p:sp>
-        <p:nvSpPr>
-          <p:cNvPr id="19" name="">
-            <a:extLst xmlns:a="http://schemas.openxmlformats.org/drawingml/2006/main">
+          <a:ln w="0">
+            <a:noFill/>
+            <a:prstDash val="solid"/>
+          </a:ln>
+        </p:spPr>
+        <p:txBody>
+          <a:bodyPr/>
+          <a:lstStyle/>
+          <a:p>
+            <a:endParaRPr lang="zh-CN" altLang="en-US"/>
+          </a:p>
+        </p:txBody>
+      </p:sp>
+      <p:sp>
+        <p:nvSpPr>
+          <p:cNvPr id="19" name="矩形 18">
+            <a:extLst>
               <a:ext uri="{FF2B5EF4-FFF2-40B4-BE49-F238E27FC236}">
                 <a16:creationId xmlns:a16="http://schemas.microsoft.com/office/drawing/2014/main" id="{4B72FB7F-2527-43D8-89A7-DA7459B1143A}"/>
               </a:ext>
             </a:extLst>
           </p:cNvPr>
           <p:cNvSpPr>
-            <a:spLocks xmlns:a="http://schemas.openxmlformats.org/drawingml/2006/main" noGrp="1"/>
-          </p:cNvSpPr>
-          <p:nvPr/>
-        </p:nvSpPr>
-        <p:spPr>
-          <a:xfrm xmlns:a="http://schemas.openxmlformats.org/drawingml/2006/main">
+            <a:spLocks noGrp="1"/>
+          </p:cNvSpPr>
+          <p:nvPr/>
+        </p:nvSpPr>
+        <p:spPr>
+          <a:xfrm>
             <a:off x="9963150" y="2571750"/>
             <a:ext cx="571500" cy="228600"/>
           </a:xfrm>
-          <a:prstGeom xmlns:a="http://schemas.openxmlformats.org/drawingml/2006/main" prst="rect">
-            <a:avLst/>
-          </a:prstGeom>
-          <a:noFill xmlns:a="http://schemas.openxmlformats.org/drawingml/2006/main"/>
-          <a:ln xmlns:a="http://schemas.openxmlformats.org/drawingml/2006/main" w="0">
-            <a:noFill/>
-            <a:prstDash val="solid"/>
-          </a:ln>
-        </p:spPr>
-        <p:txBody>
-          <a:bodyPr xmlns:a="http://schemas.openxmlformats.org/drawingml/2006/main"/>
-          <a:lstStyle xmlns:a="http://schemas.openxmlformats.org/drawingml/2006/main"/>
-          <a:p xmlns:a="http://schemas.openxmlformats.org/drawingml/2006/main">
+          <a:prstGeom prst="rect">
+            <a:avLst/>
+          </a:prstGeom>
+          <a:noFill/>
+          <a:ln w="0">
+            <a:noFill/>
+            <a:prstDash val="solid"/>
+          </a:ln>
+        </p:spPr>
+        <p:txBody>
+          <a:bodyPr/>
+          <a:lstStyle/>
+          <a:p>
             <a:pPr>
               <a:buNone/>
               <a:defRPr sz="975" b="1">
@@ -6937,67 +6981,74 @@
       </p:sp>
       <p:sp>
         <p:nvSpPr>
-          <p:cNvPr id="20" name="">
-            <a:extLst xmlns:a="http://schemas.openxmlformats.org/drawingml/2006/main">
+          <p:cNvPr id="20" name="矩形 19">
+            <a:extLst>
               <a:ext uri="{FF2B5EF4-FFF2-40B4-BE49-F238E27FC236}">
                 <a16:creationId xmlns:a16="http://schemas.microsoft.com/office/drawing/2014/main" id="{28CA7E87-AD9B-4592-8983-93186D24FF61}"/>
               </a:ext>
             </a:extLst>
           </p:cNvPr>
           <p:cNvSpPr>
-            <a:spLocks xmlns:a="http://schemas.openxmlformats.org/drawingml/2006/main" noGrp="1"/>
-          </p:cNvSpPr>
-          <p:nvPr/>
-        </p:nvSpPr>
-        <p:spPr>
-          <a:xfrm xmlns:a="http://schemas.openxmlformats.org/drawingml/2006/main">
+            <a:spLocks noGrp="1"/>
+          </p:cNvSpPr>
+          <p:nvPr/>
+        </p:nvSpPr>
+        <p:spPr>
+          <a:xfrm>
             <a:off x="9963150" y="2819400"/>
             <a:ext cx="9525" cy="2057400"/>
           </a:xfrm>
-          <a:prstGeom xmlns:a="http://schemas.openxmlformats.org/drawingml/2006/main" prst="rect">
-            <a:avLst/>
-          </a:prstGeom>
-          <a:solidFill xmlns:a="http://schemas.openxmlformats.org/drawingml/2006/main">
+          <a:prstGeom prst="rect">
+            <a:avLst/>
+          </a:prstGeom>
+          <a:solidFill>
             <a:srgbClr val="CBD5DF"/>
           </a:solidFill>
-          <a:ln xmlns:a="http://schemas.openxmlformats.org/drawingml/2006/main" w="0">
-            <a:noFill/>
-            <a:prstDash val="solid"/>
-          </a:ln>
-        </p:spPr>
-      </p:sp>
-      <p:sp>
-        <p:nvSpPr>
-          <p:cNvPr id="21" name="">
-            <a:extLst xmlns:a="http://schemas.openxmlformats.org/drawingml/2006/main">
+          <a:ln w="0">
+            <a:noFill/>
+            <a:prstDash val="solid"/>
+          </a:ln>
+        </p:spPr>
+        <p:txBody>
+          <a:bodyPr/>
+          <a:lstStyle/>
+          <a:p>
+            <a:endParaRPr lang="zh-CN" altLang="en-US"/>
+          </a:p>
+        </p:txBody>
+      </p:sp>
+      <p:sp>
+        <p:nvSpPr>
+          <p:cNvPr id="21" name="矩形 20">
+            <a:extLst>
               <a:ext uri="{FF2B5EF4-FFF2-40B4-BE49-F238E27FC236}">
                 <a16:creationId xmlns:a16="http://schemas.microsoft.com/office/drawing/2014/main" id="{FA72C716-AFF4-430C-B2AC-7D13117E8C71}"/>
               </a:ext>
             </a:extLst>
           </p:cNvPr>
           <p:cNvSpPr>
-            <a:spLocks xmlns:a="http://schemas.openxmlformats.org/drawingml/2006/main" noGrp="1"/>
-          </p:cNvSpPr>
-          <p:nvPr/>
-        </p:nvSpPr>
-        <p:spPr>
-          <a:xfrm xmlns:a="http://schemas.openxmlformats.org/drawingml/2006/main">
+            <a:spLocks noGrp="1"/>
+          </p:cNvSpPr>
+          <p:nvPr/>
+        </p:nvSpPr>
+        <p:spPr>
+          <a:xfrm>
             <a:off x="552450" y="3028950"/>
             <a:ext cx="2381250" cy="266700"/>
           </a:xfrm>
-          <a:prstGeom xmlns:a="http://schemas.openxmlformats.org/drawingml/2006/main" prst="rect">
-            <a:avLst/>
-          </a:prstGeom>
-          <a:noFill xmlns:a="http://schemas.openxmlformats.org/drawingml/2006/main"/>
-          <a:ln xmlns:a="http://schemas.openxmlformats.org/drawingml/2006/main" w="0">
-            <a:noFill/>
-            <a:prstDash val="solid"/>
-          </a:ln>
-        </p:spPr>
-        <p:txBody>
-          <a:bodyPr xmlns:a="http://schemas.openxmlformats.org/drawingml/2006/main"/>
-          <a:lstStyle xmlns:a="http://schemas.openxmlformats.org/drawingml/2006/main"/>
-          <a:p xmlns:a="http://schemas.openxmlformats.org/drawingml/2006/main">
+          <a:prstGeom prst="rect">
+            <a:avLst/>
+          </a:prstGeom>
+          <a:noFill/>
+          <a:ln w="0">
+            <a:noFill/>
+            <a:prstDash val="solid"/>
+          </a:ln>
+        </p:spPr>
+        <p:txBody>
+          <a:bodyPr/>
+          <a:lstStyle/>
+          <a:p>
             <a:pPr>
               <a:buNone/>
               <a:defRPr sz="1275" b="1">
@@ -7019,69 +7070,76 @@
       </p:sp>
       <p:sp>
         <p:nvSpPr>
-          <p:cNvPr id="22" name="">
-            <a:extLst xmlns:a="http://schemas.openxmlformats.org/drawingml/2006/main">
+          <p:cNvPr id="22" name="矩形: 圆角 21">
+            <a:extLst>
               <a:ext uri="{FF2B5EF4-FFF2-40B4-BE49-F238E27FC236}">
                 <a16:creationId xmlns:a16="http://schemas.microsoft.com/office/drawing/2014/main" id="{E113B143-2A8E-4130-8BBE-3542B99F70AA}"/>
               </a:ext>
             </a:extLst>
           </p:cNvPr>
           <p:cNvSpPr>
-            <a:spLocks xmlns:a="http://schemas.openxmlformats.org/drawingml/2006/main" noGrp="1"/>
-          </p:cNvSpPr>
-          <p:nvPr/>
-        </p:nvSpPr>
-        <p:spPr>
-          <a:xfrm xmlns:a="http://schemas.openxmlformats.org/drawingml/2006/main">
+            <a:spLocks noGrp="1"/>
+          </p:cNvSpPr>
+          <p:nvPr/>
+        </p:nvSpPr>
+        <p:spPr>
+          <a:xfrm>
             <a:off x="3352800" y="2971800"/>
             <a:ext cx="819150" cy="323850"/>
           </a:xfrm>
-          <a:prstGeom xmlns:a="http://schemas.openxmlformats.org/drawingml/2006/main" prst="roundRect">
+          <a:prstGeom prst="roundRect">
             <a:avLst>
               <a:gd name="adj" fmla="val 38095"/>
             </a:avLst>
           </a:prstGeom>
-          <a:solidFill xmlns:a="http://schemas.openxmlformats.org/drawingml/2006/main">
+          <a:solidFill>
             <a:srgbClr val="E96B4B"/>
           </a:solidFill>
-          <a:ln xmlns:a="http://schemas.openxmlformats.org/drawingml/2006/main" w="0">
-            <a:noFill/>
-            <a:prstDash val="solid"/>
-          </a:ln>
-        </p:spPr>
-      </p:sp>
-      <p:sp>
-        <p:nvSpPr>
-          <p:cNvPr id="23" name="">
-            <a:extLst xmlns:a="http://schemas.openxmlformats.org/drawingml/2006/main">
+          <a:ln w="0">
+            <a:noFill/>
+            <a:prstDash val="solid"/>
+          </a:ln>
+        </p:spPr>
+        <p:txBody>
+          <a:bodyPr/>
+          <a:lstStyle/>
+          <a:p>
+            <a:endParaRPr lang="zh-CN" altLang="en-US"/>
+          </a:p>
+        </p:txBody>
+      </p:sp>
+      <p:sp>
+        <p:nvSpPr>
+          <p:cNvPr id="23" name="矩形 22">
+            <a:extLst>
               <a:ext uri="{FF2B5EF4-FFF2-40B4-BE49-F238E27FC236}">
                 <a16:creationId xmlns:a16="http://schemas.microsoft.com/office/drawing/2014/main" id="{FA52F02F-0D57-475B-ACBF-333809BB20D7}"/>
               </a:ext>
             </a:extLst>
           </p:cNvPr>
           <p:cNvSpPr>
-            <a:spLocks xmlns:a="http://schemas.openxmlformats.org/drawingml/2006/main" noGrp="1"/>
-          </p:cNvSpPr>
-          <p:nvPr/>
-        </p:nvSpPr>
-        <p:spPr>
-          <a:xfrm xmlns:a="http://schemas.openxmlformats.org/drawingml/2006/main">
+            <a:spLocks noGrp="1"/>
+          </p:cNvSpPr>
+          <p:nvPr/>
+        </p:nvSpPr>
+        <p:spPr>
+          <a:xfrm>
             <a:off x="552450" y="3505200"/>
             <a:ext cx="2381250" cy="266700"/>
           </a:xfrm>
-          <a:prstGeom xmlns:a="http://schemas.openxmlformats.org/drawingml/2006/main" prst="rect">
-            <a:avLst/>
-          </a:prstGeom>
-          <a:noFill xmlns:a="http://schemas.openxmlformats.org/drawingml/2006/main"/>
-          <a:ln xmlns:a="http://schemas.openxmlformats.org/drawingml/2006/main" w="0">
-            <a:noFill/>
-            <a:prstDash val="solid"/>
-          </a:ln>
-        </p:spPr>
-        <p:txBody>
-          <a:bodyPr xmlns:a="http://schemas.openxmlformats.org/drawingml/2006/main"/>
-          <a:lstStyle xmlns:a="http://schemas.openxmlformats.org/drawingml/2006/main"/>
-          <a:p xmlns:a="http://schemas.openxmlformats.org/drawingml/2006/main">
+          <a:prstGeom prst="rect">
+            <a:avLst/>
+          </a:prstGeom>
+          <a:noFill/>
+          <a:ln w="0">
+            <a:noFill/>
+            <a:prstDash val="solid"/>
+          </a:ln>
+        </p:spPr>
+        <p:txBody>
+          <a:bodyPr/>
+          <a:lstStyle/>
+          <a:p>
             <a:pPr>
               <a:buNone/>
               <a:defRPr sz="1275" b="1">
@@ -7103,69 +7161,76 @@
       </p:sp>
       <p:sp>
         <p:nvSpPr>
-          <p:cNvPr id="24" name="">
-            <a:extLst xmlns:a="http://schemas.openxmlformats.org/drawingml/2006/main">
+          <p:cNvPr id="24" name="矩形: 圆角 23">
+            <a:extLst>
               <a:ext uri="{FF2B5EF4-FFF2-40B4-BE49-F238E27FC236}">
                 <a16:creationId xmlns:a16="http://schemas.microsoft.com/office/drawing/2014/main" id="{05D1A0EB-1BF5-4B5E-9C42-29AE4E0F86E8}"/>
               </a:ext>
             </a:extLst>
           </p:cNvPr>
           <p:cNvSpPr>
-            <a:spLocks xmlns:a="http://schemas.openxmlformats.org/drawingml/2006/main" noGrp="1"/>
-          </p:cNvSpPr>
-          <p:nvPr/>
-        </p:nvSpPr>
-        <p:spPr>
-          <a:xfrm xmlns:a="http://schemas.openxmlformats.org/drawingml/2006/main">
+            <a:spLocks noGrp="1"/>
+          </p:cNvSpPr>
+          <p:nvPr/>
+        </p:nvSpPr>
+        <p:spPr>
+          <a:xfrm>
             <a:off x="4305300" y="3448050"/>
             <a:ext cx="3676650" cy="323850"/>
           </a:xfrm>
-          <a:prstGeom xmlns:a="http://schemas.openxmlformats.org/drawingml/2006/main" prst="roundRect">
+          <a:prstGeom prst="roundRect">
             <a:avLst>
               <a:gd name="adj" fmla="val 38095"/>
             </a:avLst>
           </a:prstGeom>
-          <a:solidFill xmlns:a="http://schemas.openxmlformats.org/drawingml/2006/main">
+          <a:solidFill>
             <a:srgbClr val="2774C7"/>
           </a:solidFill>
-          <a:ln xmlns:a="http://schemas.openxmlformats.org/drawingml/2006/main" w="0">
-            <a:noFill/>
-            <a:prstDash val="solid"/>
-          </a:ln>
-        </p:spPr>
-      </p:sp>
-      <p:sp>
-        <p:nvSpPr>
-          <p:cNvPr id="25" name="">
-            <a:extLst xmlns:a="http://schemas.openxmlformats.org/drawingml/2006/main">
+          <a:ln w="0">
+            <a:noFill/>
+            <a:prstDash val="solid"/>
+          </a:ln>
+        </p:spPr>
+        <p:txBody>
+          <a:bodyPr/>
+          <a:lstStyle/>
+          <a:p>
+            <a:endParaRPr lang="zh-CN" altLang="en-US"/>
+          </a:p>
+        </p:txBody>
+      </p:sp>
+      <p:sp>
+        <p:nvSpPr>
+          <p:cNvPr id="25" name="矩形 24">
+            <a:extLst>
               <a:ext uri="{FF2B5EF4-FFF2-40B4-BE49-F238E27FC236}">
                 <a16:creationId xmlns:a16="http://schemas.microsoft.com/office/drawing/2014/main" id="{1ABB8136-5455-4D6C-9298-6039CA241714}"/>
               </a:ext>
             </a:extLst>
           </p:cNvPr>
           <p:cNvSpPr>
-            <a:spLocks xmlns:a="http://schemas.openxmlformats.org/drawingml/2006/main" noGrp="1"/>
-          </p:cNvSpPr>
-          <p:nvPr/>
-        </p:nvSpPr>
-        <p:spPr>
-          <a:xfrm xmlns:a="http://schemas.openxmlformats.org/drawingml/2006/main">
+            <a:spLocks noGrp="1"/>
+          </p:cNvSpPr>
+          <p:nvPr/>
+        </p:nvSpPr>
+        <p:spPr>
+          <a:xfrm>
             <a:off x="552450" y="3981450"/>
             <a:ext cx="2381250" cy="266700"/>
           </a:xfrm>
-          <a:prstGeom xmlns:a="http://schemas.openxmlformats.org/drawingml/2006/main" prst="rect">
-            <a:avLst/>
-          </a:prstGeom>
-          <a:noFill xmlns:a="http://schemas.openxmlformats.org/drawingml/2006/main"/>
-          <a:ln xmlns:a="http://schemas.openxmlformats.org/drawingml/2006/main" w="0">
-            <a:noFill/>
-            <a:prstDash val="solid"/>
-          </a:ln>
-        </p:spPr>
-        <p:txBody>
-          <a:bodyPr xmlns:a="http://schemas.openxmlformats.org/drawingml/2006/main"/>
-          <a:lstStyle xmlns:a="http://schemas.openxmlformats.org/drawingml/2006/main"/>
-          <a:p xmlns:a="http://schemas.openxmlformats.org/drawingml/2006/main">
+          <a:prstGeom prst="rect">
+            <a:avLst/>
+          </a:prstGeom>
+          <a:noFill/>
+          <a:ln w="0">
+            <a:noFill/>
+            <a:prstDash val="solid"/>
+          </a:ln>
+        </p:spPr>
+        <p:txBody>
+          <a:bodyPr/>
+          <a:lstStyle/>
+          <a:p>
             <a:pPr>
               <a:buNone/>
               <a:defRPr sz="1275" b="1">
@@ -7187,69 +7252,76 @@
       </p:sp>
       <p:sp>
         <p:nvSpPr>
-          <p:cNvPr id="26" name="">
-            <a:extLst xmlns:a="http://schemas.openxmlformats.org/drawingml/2006/main">
+          <p:cNvPr id="26" name="矩形: 圆角 25">
+            <a:extLst>
               <a:ext uri="{FF2B5EF4-FFF2-40B4-BE49-F238E27FC236}">
                 <a16:creationId xmlns:a16="http://schemas.microsoft.com/office/drawing/2014/main" id="{0F22CCC1-B973-4A97-A8CB-D5AD776056B1}"/>
               </a:ext>
             </a:extLst>
           </p:cNvPr>
           <p:cNvSpPr>
-            <a:spLocks xmlns:a="http://schemas.openxmlformats.org/drawingml/2006/main" noGrp="1"/>
-          </p:cNvSpPr>
-          <p:nvPr/>
-        </p:nvSpPr>
-        <p:spPr>
-          <a:xfrm xmlns:a="http://schemas.openxmlformats.org/drawingml/2006/main">
+            <a:spLocks noGrp="1"/>
+          </p:cNvSpPr>
+          <p:nvPr/>
+        </p:nvSpPr>
+        <p:spPr>
+          <a:xfrm>
             <a:off x="8115300" y="3924300"/>
             <a:ext cx="1771650" cy="323850"/>
           </a:xfrm>
-          <a:prstGeom xmlns:a="http://schemas.openxmlformats.org/drawingml/2006/main" prst="roundRect">
+          <a:prstGeom prst="roundRect">
             <a:avLst>
               <a:gd name="adj" fmla="val 38095"/>
             </a:avLst>
           </a:prstGeom>
-          <a:solidFill xmlns:a="http://schemas.openxmlformats.org/drawingml/2006/main">
+          <a:solidFill>
             <a:srgbClr val="12263A"/>
           </a:solidFill>
-          <a:ln xmlns:a="http://schemas.openxmlformats.org/drawingml/2006/main" w="0">
-            <a:noFill/>
-            <a:prstDash val="solid"/>
-          </a:ln>
-        </p:spPr>
-      </p:sp>
-      <p:sp>
-        <p:nvSpPr>
-          <p:cNvPr id="27" name="">
-            <a:extLst xmlns:a="http://schemas.openxmlformats.org/drawingml/2006/main">
+          <a:ln w="0">
+            <a:noFill/>
+            <a:prstDash val="solid"/>
+          </a:ln>
+        </p:spPr>
+        <p:txBody>
+          <a:bodyPr/>
+          <a:lstStyle/>
+          <a:p>
+            <a:endParaRPr lang="zh-CN" altLang="en-US"/>
+          </a:p>
+        </p:txBody>
+      </p:sp>
+      <p:sp>
+        <p:nvSpPr>
+          <p:cNvPr id="27" name="矩形 26">
+            <a:extLst>
               <a:ext uri="{FF2B5EF4-FFF2-40B4-BE49-F238E27FC236}">
                 <a16:creationId xmlns:a16="http://schemas.microsoft.com/office/drawing/2014/main" id="{40A95331-39F2-412F-BAF2-46E7E75667AA}"/>
               </a:ext>
             </a:extLst>
           </p:cNvPr>
           <p:cNvSpPr>
-            <a:spLocks xmlns:a="http://schemas.openxmlformats.org/drawingml/2006/main" noGrp="1"/>
-          </p:cNvSpPr>
-          <p:nvPr/>
-        </p:nvSpPr>
-        <p:spPr>
-          <a:xfrm xmlns:a="http://schemas.openxmlformats.org/drawingml/2006/main">
+            <a:spLocks noGrp="1"/>
+          </p:cNvSpPr>
+          <p:nvPr/>
+        </p:nvSpPr>
+        <p:spPr>
+          <a:xfrm>
             <a:off x="552450" y="4457700"/>
             <a:ext cx="2381250" cy="266700"/>
           </a:xfrm>
-          <a:prstGeom xmlns:a="http://schemas.openxmlformats.org/drawingml/2006/main" prst="rect">
-            <a:avLst/>
-          </a:prstGeom>
-          <a:noFill xmlns:a="http://schemas.openxmlformats.org/drawingml/2006/main"/>
-          <a:ln xmlns:a="http://schemas.openxmlformats.org/drawingml/2006/main" w="0">
-            <a:noFill/>
-            <a:prstDash val="solid"/>
-          </a:ln>
-        </p:spPr>
-        <p:txBody>
-          <a:bodyPr xmlns:a="http://schemas.openxmlformats.org/drawingml/2006/main"/>
-          <a:lstStyle xmlns:a="http://schemas.openxmlformats.org/drawingml/2006/main"/>
-          <a:p xmlns:a="http://schemas.openxmlformats.org/drawingml/2006/main">
+          <a:prstGeom prst="rect">
+            <a:avLst/>
+          </a:prstGeom>
+          <a:noFill/>
+          <a:ln w="0">
+            <a:noFill/>
+            <a:prstDash val="solid"/>
+          </a:ln>
+        </p:spPr>
+        <p:txBody>
+          <a:bodyPr/>
+          <a:lstStyle/>
+          <a:p>
             <a:pPr>
               <a:buNone/>
               <a:defRPr sz="1275" b="1">
@@ -7271,102 +7343,116 @@
       </p:sp>
       <p:sp>
         <p:nvSpPr>
-          <p:cNvPr id="28" name="">
-            <a:extLst xmlns:a="http://schemas.openxmlformats.org/drawingml/2006/main">
+          <p:cNvPr id="28" name="矩形: 圆角 27">
+            <a:extLst>
               <a:ext uri="{FF2B5EF4-FFF2-40B4-BE49-F238E27FC236}">
                 <a16:creationId xmlns:a16="http://schemas.microsoft.com/office/drawing/2014/main" id="{EFBFB779-17A6-41E5-8BE0-1D5DB2ACDF94}"/>
               </a:ext>
             </a:extLst>
           </p:cNvPr>
           <p:cNvSpPr>
-            <a:spLocks xmlns:a="http://schemas.openxmlformats.org/drawingml/2006/main" noGrp="1"/>
-          </p:cNvSpPr>
-          <p:nvPr/>
-        </p:nvSpPr>
-        <p:spPr>
-          <a:xfrm xmlns:a="http://schemas.openxmlformats.org/drawingml/2006/main">
+            <a:spLocks noGrp="1"/>
+          </p:cNvSpPr>
+          <p:nvPr/>
+        </p:nvSpPr>
+        <p:spPr>
+          <a:xfrm>
             <a:off x="10020300" y="4400550"/>
             <a:ext cx="819150" cy="323850"/>
           </a:xfrm>
-          <a:prstGeom xmlns:a="http://schemas.openxmlformats.org/drawingml/2006/main" prst="roundRect">
+          <a:prstGeom prst="roundRect">
             <a:avLst>
               <a:gd name="adj" fmla="val 38095"/>
             </a:avLst>
           </a:prstGeom>
-          <a:solidFill xmlns:a="http://schemas.openxmlformats.org/drawingml/2006/main">
+          <a:solidFill>
             <a:srgbClr val="4D7C78"/>
           </a:solidFill>
-          <a:ln xmlns:a="http://schemas.openxmlformats.org/drawingml/2006/main" w="0">
-            <a:noFill/>
-            <a:prstDash val="solid"/>
-          </a:ln>
-        </p:spPr>
-      </p:sp>
-      <p:sp>
-        <p:nvSpPr>
-          <p:cNvPr id="29" name="">
-            <a:extLst xmlns:a="http://schemas.openxmlformats.org/drawingml/2006/main">
+          <a:ln w="0">
+            <a:noFill/>
+            <a:prstDash val="solid"/>
+          </a:ln>
+        </p:spPr>
+        <p:txBody>
+          <a:bodyPr/>
+          <a:lstStyle/>
+          <a:p>
+            <a:endParaRPr lang="zh-CN" altLang="en-US"/>
+          </a:p>
+        </p:txBody>
+      </p:sp>
+      <p:sp>
+        <p:nvSpPr>
+          <p:cNvPr id="29" name="矩形: 圆角 28">
+            <a:extLst>
               <a:ext uri="{FF2B5EF4-FFF2-40B4-BE49-F238E27FC236}">
                 <a16:creationId xmlns:a16="http://schemas.microsoft.com/office/drawing/2014/main" id="{BEE74DCE-F58A-4D50-AB9F-3AB9854EEE51}"/>
               </a:ext>
             </a:extLst>
           </p:cNvPr>
           <p:cNvSpPr>
-            <a:spLocks xmlns:a="http://schemas.openxmlformats.org/drawingml/2006/main" noGrp="1"/>
-          </p:cNvSpPr>
-          <p:nvPr/>
-        </p:nvSpPr>
-        <p:spPr>
-          <a:xfrm xmlns:a="http://schemas.openxmlformats.org/drawingml/2006/main">
+            <a:spLocks noGrp="1"/>
+          </p:cNvSpPr>
+          <p:nvPr/>
+        </p:nvSpPr>
+        <p:spPr>
+          <a:xfrm>
             <a:off x="552450" y="5105400"/>
             <a:ext cx="11087100" cy="800100"/>
           </a:xfrm>
-          <a:prstGeom xmlns:a="http://schemas.openxmlformats.org/drawingml/2006/main" prst="roundRect">
+          <a:prstGeom prst="roundRect">
             <a:avLst>
               <a:gd name="adj" fmla="val 18750"/>
             </a:avLst>
           </a:prstGeom>
-          <a:solidFill xmlns:a="http://schemas.openxmlformats.org/drawingml/2006/main">
+          <a:solidFill>
             <a:srgbClr val="12263A"/>
           </a:solidFill>
-          <a:ln xmlns:a="http://schemas.openxmlformats.org/drawingml/2006/main" w="0">
-            <a:noFill/>
-            <a:prstDash val="solid"/>
-          </a:ln>
-        </p:spPr>
-      </p:sp>
-      <p:sp>
-        <p:nvSpPr>
-          <p:cNvPr id="30" name="">
-            <a:extLst xmlns:a="http://schemas.openxmlformats.org/drawingml/2006/main">
+          <a:ln w="0">
+            <a:noFill/>
+            <a:prstDash val="solid"/>
+          </a:ln>
+        </p:spPr>
+        <p:txBody>
+          <a:bodyPr/>
+          <a:lstStyle/>
+          <a:p>
+            <a:endParaRPr lang="zh-CN" altLang="en-US"/>
+          </a:p>
+        </p:txBody>
+      </p:sp>
+      <p:sp>
+        <p:nvSpPr>
+          <p:cNvPr id="30" name="矩形 29">
+            <a:extLst>
               <a:ext uri="{FF2B5EF4-FFF2-40B4-BE49-F238E27FC236}">
                 <a16:creationId xmlns:a16="http://schemas.microsoft.com/office/drawing/2014/main" id="{AFF8851F-0D88-4A85-AE9F-6DCFBBF64DC4}"/>
               </a:ext>
             </a:extLst>
           </p:cNvPr>
           <p:cNvSpPr>
-            <a:spLocks xmlns:a="http://schemas.openxmlformats.org/drawingml/2006/main" noGrp="1"/>
-          </p:cNvSpPr>
-          <p:nvPr/>
-        </p:nvSpPr>
-        <p:spPr>
-          <a:xfrm xmlns:a="http://schemas.openxmlformats.org/drawingml/2006/main">
+            <a:spLocks noGrp="1"/>
+          </p:cNvSpPr>
+          <p:nvPr/>
+        </p:nvSpPr>
+        <p:spPr>
+          <a:xfrm>
             <a:off x="800100" y="5362575"/>
             <a:ext cx="1619250" cy="228600"/>
           </a:xfrm>
-          <a:prstGeom xmlns:a="http://schemas.openxmlformats.org/drawingml/2006/main" prst="rect">
-            <a:avLst/>
-          </a:prstGeom>
-          <a:noFill xmlns:a="http://schemas.openxmlformats.org/drawingml/2006/main"/>
-          <a:ln xmlns:a="http://schemas.openxmlformats.org/drawingml/2006/main" w="0">
-            <a:noFill/>
-            <a:prstDash val="solid"/>
-          </a:ln>
-        </p:spPr>
-        <p:txBody>
-          <a:bodyPr xmlns:a="http://schemas.openxmlformats.org/drawingml/2006/main"/>
-          <a:lstStyle xmlns:a="http://schemas.openxmlformats.org/drawingml/2006/main"/>
-          <a:p xmlns:a="http://schemas.openxmlformats.org/drawingml/2006/main">
+          <a:prstGeom prst="rect">
+            <a:avLst/>
+          </a:prstGeom>
+          <a:noFill/>
+          <a:ln w="0">
+            <a:noFill/>
+            <a:prstDash val="solid"/>
+          </a:ln>
+        </p:spPr>
+        <p:txBody>
+          <a:bodyPr/>
+          <a:lstStyle/>
+          <a:p>
             <a:pPr>
               <a:buNone/>
               <a:defRPr sz="1050" b="1">
@@ -7388,36 +7474,36 @@
       </p:sp>
       <p:sp>
         <p:nvSpPr>
-          <p:cNvPr id="31" name="">
-            <a:extLst xmlns:a="http://schemas.openxmlformats.org/drawingml/2006/main">
+          <p:cNvPr id="31" name="矩形 30">
+            <a:extLst>
               <a:ext uri="{FF2B5EF4-FFF2-40B4-BE49-F238E27FC236}">
                 <a16:creationId xmlns:a16="http://schemas.microsoft.com/office/drawing/2014/main" id="{C2483013-232E-44B0-9022-587F13AEEE81}"/>
               </a:ext>
             </a:extLst>
           </p:cNvPr>
           <p:cNvSpPr>
-            <a:spLocks xmlns:a="http://schemas.openxmlformats.org/drawingml/2006/main" noGrp="1"/>
-          </p:cNvSpPr>
-          <p:nvPr/>
-        </p:nvSpPr>
-        <p:spPr>
-          <a:xfrm xmlns:a="http://schemas.openxmlformats.org/drawingml/2006/main">
+            <a:spLocks noGrp="1"/>
+          </p:cNvSpPr>
+          <p:nvPr/>
+        </p:nvSpPr>
+        <p:spPr>
+          <a:xfrm>
             <a:off x="2476500" y="5343525"/>
             <a:ext cx="8572500" cy="266700"/>
           </a:xfrm>
-          <a:prstGeom xmlns:a="http://schemas.openxmlformats.org/drawingml/2006/main" prst="rect">
-            <a:avLst/>
-          </a:prstGeom>
-          <a:noFill xmlns:a="http://schemas.openxmlformats.org/drawingml/2006/main"/>
-          <a:ln xmlns:a="http://schemas.openxmlformats.org/drawingml/2006/main" w="0">
-            <a:noFill/>
-            <a:prstDash val="solid"/>
-          </a:ln>
-        </p:spPr>
-        <p:txBody>
-          <a:bodyPr xmlns:a="http://schemas.openxmlformats.org/drawingml/2006/main"/>
-          <a:lstStyle xmlns:a="http://schemas.openxmlformats.org/drawingml/2006/main"/>
-          <a:p xmlns:a="http://schemas.openxmlformats.org/drawingml/2006/main">
+          <a:prstGeom prst="rect">
+            <a:avLst/>
+          </a:prstGeom>
+          <a:noFill/>
+          <a:ln w="0">
+            <a:noFill/>
+            <a:prstDash val="solid"/>
+          </a:ln>
+        </p:spPr>
+        <p:txBody>
+          <a:bodyPr/>
+          <a:lstStyle/>
+          <a:p>
             <a:pPr>
               <a:buNone/>
               <a:defRPr sz="1425" b="1">
@@ -7439,36 +7525,36 @@
       </p:sp>
       <p:sp>
         <p:nvSpPr>
-          <p:cNvPr id="32" name="">
-            <a:extLst xmlns:a="http://schemas.openxmlformats.org/drawingml/2006/main">
+          <p:cNvPr id="32" name="矩形 31">
+            <a:extLst>
               <a:ext uri="{FF2B5EF4-FFF2-40B4-BE49-F238E27FC236}">
                 <a16:creationId xmlns:a16="http://schemas.microsoft.com/office/drawing/2014/main" id="{22C68E35-1DEC-45E8-9116-71DEAC7C1BDE}"/>
               </a:ext>
             </a:extLst>
           </p:cNvPr>
           <p:cNvSpPr>
-            <a:spLocks xmlns:a="http://schemas.openxmlformats.org/drawingml/2006/main" noGrp="1"/>
-          </p:cNvSpPr>
-          <p:nvPr/>
-        </p:nvSpPr>
-        <p:spPr>
-          <a:xfrm xmlns:a="http://schemas.openxmlformats.org/drawingml/2006/main">
+            <a:spLocks noGrp="1"/>
+          </p:cNvSpPr>
+          <p:nvPr/>
+        </p:nvSpPr>
+        <p:spPr>
+          <a:xfrm>
             <a:off x="552450" y="6496050"/>
             <a:ext cx="4953000" cy="190500"/>
           </a:xfrm>
-          <a:prstGeom xmlns:a="http://schemas.openxmlformats.org/drawingml/2006/main" prst="rect">
-            <a:avLst/>
-          </a:prstGeom>
-          <a:noFill xmlns:a="http://schemas.openxmlformats.org/drawingml/2006/main"/>
-          <a:ln xmlns:a="http://schemas.openxmlformats.org/drawingml/2006/main" w="0">
-            <a:noFill/>
-            <a:prstDash val="solid"/>
-          </a:ln>
-        </p:spPr>
-        <p:txBody>
-          <a:bodyPr xmlns:a="http://schemas.openxmlformats.org/drawingml/2006/main"/>
-          <a:lstStyle xmlns:a="http://schemas.openxmlformats.org/drawingml/2006/main"/>
-          <a:p xmlns:a="http://schemas.openxmlformats.org/drawingml/2006/main">
+          <a:prstGeom prst="rect">
+            <a:avLst/>
+          </a:prstGeom>
+          <a:noFill/>
+          <a:ln w="0">
+            <a:noFill/>
+            <a:prstDash val="solid"/>
+          </a:ln>
+        </p:spPr>
+        <p:txBody>
+          <a:bodyPr/>
+          <a:lstStyle/>
+          <a:p>
             <a:pPr>
               <a:buNone/>
               <a:defRPr sz="825" b="1">
@@ -7478,48 +7564,48 @@
               </a:defRPr>
             </a:pPr>
             <a:r>
-              <a:rPr sz="825" b="1">
+              <a:rPr lang="en-US" altLang="zh-CN" sz="825" b="1" dirty="0">
                 <a:solidFill>
                   <a:srgbClr val="667482"/>
                 </a:solidFill>
               </a:rPr>
-              <a:t>STUDYCREW  |  ELEC3609/9609  |  GROUP 02</a:t>
-            </a:r>
-          </a:p>
-        </p:txBody>
-      </p:sp>
-      <p:sp>
-        <p:nvSpPr>
-          <p:cNvPr id="33" name="">
-            <a:extLst xmlns:a="http://schemas.openxmlformats.org/drawingml/2006/main">
+              <a:t>STUDYCREW  |  ELEC3609  |  GROUP 06</a:t>
+            </a:r>
+          </a:p>
+        </p:txBody>
+      </p:sp>
+      <p:sp>
+        <p:nvSpPr>
+          <p:cNvPr id="33" name="矩形 32">
+            <a:extLst>
               <a:ext uri="{FF2B5EF4-FFF2-40B4-BE49-F238E27FC236}">
                 <a16:creationId xmlns:a16="http://schemas.microsoft.com/office/drawing/2014/main" id="{B6EE5841-A08E-481B-9F63-3E9169E8204E}"/>
               </a:ext>
             </a:extLst>
           </p:cNvPr>
           <p:cNvSpPr>
-            <a:spLocks xmlns:a="http://schemas.openxmlformats.org/drawingml/2006/main" noGrp="1"/>
-          </p:cNvSpPr>
-          <p:nvPr/>
-        </p:nvSpPr>
-        <p:spPr>
-          <a:xfrm xmlns:a="http://schemas.openxmlformats.org/drawingml/2006/main">
+            <a:spLocks noGrp="1"/>
+          </p:cNvSpPr>
+          <p:nvPr/>
+        </p:nvSpPr>
+        <p:spPr>
+          <a:xfrm>
             <a:off x="11125200" y="6496050"/>
             <a:ext cx="514350" cy="190500"/>
           </a:xfrm>
-          <a:prstGeom xmlns:a="http://schemas.openxmlformats.org/drawingml/2006/main" prst="rect">
-            <a:avLst/>
-          </a:prstGeom>
-          <a:noFill xmlns:a="http://schemas.openxmlformats.org/drawingml/2006/main"/>
-          <a:ln xmlns:a="http://schemas.openxmlformats.org/drawingml/2006/main" w="0">
-            <a:noFill/>
-            <a:prstDash val="solid"/>
-          </a:ln>
-        </p:spPr>
-        <p:txBody>
-          <a:bodyPr xmlns:a="http://schemas.openxmlformats.org/drawingml/2006/main"/>
-          <a:lstStyle xmlns:a="http://schemas.openxmlformats.org/drawingml/2006/main"/>
-          <a:p xmlns:a="http://schemas.openxmlformats.org/drawingml/2006/main">
+          <a:prstGeom prst="rect">
+            <a:avLst/>
+          </a:prstGeom>
+          <a:noFill/>
+          <a:ln w="0">
+            <a:noFill/>
+            <a:prstDash val="solid"/>
+          </a:ln>
+        </p:spPr>
+        <p:txBody>
+          <a:bodyPr/>
+          <a:lstStyle/>
+          <a:p>
             <a:pPr>
               <a:buNone/>
               <a:defRPr sz="825" b="1">
@@ -7542,70 +7628,77 @@
       <p:sp>
         <p:nvSpPr>
           <p:cNvPr id="35" name="framework-strip">
-            <a:extLst xmlns:a="http://schemas.openxmlformats.org/drawingml/2006/main">
+            <a:extLst>
               <a:ext uri="{FF2B5EF4-FFF2-40B4-BE49-F238E27FC236}">
                 <a16:creationId xmlns:a16="http://schemas.microsoft.com/office/drawing/2014/main" id="{7242F7D8-4EBD-454B-9A51-9E0794F7A1D7}"/>
               </a:ext>
             </a:extLst>
           </p:cNvPr>
           <p:cNvSpPr>
-            <a:spLocks xmlns:a="http://schemas.openxmlformats.org/drawingml/2006/main" noGrp="1"/>
-          </p:cNvSpPr>
-          <p:nvPr/>
-        </p:nvSpPr>
-        <p:spPr>
-          <a:xfrm xmlns:a="http://schemas.openxmlformats.org/drawingml/2006/main">
+            <a:spLocks noGrp="1"/>
+          </p:cNvSpPr>
+          <p:nvPr/>
+        </p:nvSpPr>
+        <p:spPr>
+          <a:xfrm>
             <a:off x="552450" y="2076450"/>
             <a:ext cx="11087100" cy="400050"/>
           </a:xfrm>
-          <a:prstGeom xmlns:a="http://schemas.openxmlformats.org/drawingml/2006/main" prst="roundRect">
+          <a:prstGeom prst="roundRect">
             <a:avLst>
               <a:gd name="adj" fmla="val 28571"/>
             </a:avLst>
           </a:prstGeom>
-          <a:solidFill xmlns:a="http://schemas.openxmlformats.org/drawingml/2006/main">
+          <a:solidFill>
             <a:srgbClr val="EAF2FA"/>
           </a:solidFill>
-          <a:ln xmlns:a="http://schemas.openxmlformats.org/drawingml/2006/main" w="9525">
+          <a:ln w="9525">
             <a:solidFill>
               <a:srgbClr val="CBD5DF"/>
             </a:solidFill>
             <a:prstDash val="solid"/>
           </a:ln>
         </p:spPr>
+        <p:txBody>
+          <a:bodyPr/>
+          <a:lstStyle/>
+          <a:p>
+            <a:endParaRPr lang="zh-CN" altLang="en-US"/>
+          </a:p>
+        </p:txBody>
       </p:sp>
       <p:sp>
         <p:nvSpPr>
           <p:cNvPr id="36" name="framework-label">
-            <a:extLst xmlns:a="http://schemas.openxmlformats.org/drawingml/2006/main">
+            <a:extLst>
               <a:ext uri="{FF2B5EF4-FFF2-40B4-BE49-F238E27FC236}">
                 <a16:creationId xmlns:a16="http://schemas.microsoft.com/office/drawing/2014/main" id="{5401567E-948B-45B3-9D7F-B8C0798DAC51}"/>
               </a:ext>
             </a:extLst>
           </p:cNvPr>
           <p:cNvSpPr>
-            <a:spLocks xmlns:a="http://schemas.openxmlformats.org/drawingml/2006/main" noGrp="1"/>
-          </p:cNvSpPr>
-          <p:nvPr/>
-        </p:nvSpPr>
-        <p:spPr>
-          <a:xfrm xmlns:a="http://schemas.openxmlformats.org/drawingml/2006/main">
+            <a:spLocks noGrp="1"/>
+          </p:cNvSpPr>
+          <p:nvPr/>
+        </p:nvSpPr>
+        <p:spPr>
+          <a:xfrm>
             <a:off x="781050" y="2152650"/>
             <a:ext cx="1428750" cy="247650"/>
           </a:xfrm>
-          <a:prstGeom xmlns:a="http://schemas.openxmlformats.org/drawingml/2006/main" prst="rect">
-            <a:avLst/>
-          </a:prstGeom>
-          <a:noFill xmlns:a="http://schemas.openxmlformats.org/drawingml/2006/main"/>
-          <a:ln xmlns:a="http://schemas.openxmlformats.org/drawingml/2006/main" w="0">
-            <a:noFill/>
-            <a:prstDash val="solid"/>
-          </a:ln>
-        </p:spPr>
-        <p:txBody>
-          <a:bodyPr xmlns:a="http://schemas.openxmlformats.org/drawingml/2006/main"/>
-          <a:lstStyle xmlns:a="http://schemas.openxmlformats.org/drawingml/2006/main"/>
-          <a:p xmlns:a="http://schemas.openxmlformats.org/drawingml/2006/main">
+          <a:prstGeom prst="rect">
+            <a:avLst/>
+          </a:prstGeom>
+          <a:noFill/>
+          <a:ln w="0">
+            <a:noFill/>
+            <a:prstDash val="solid"/>
+          </a:ln>
+        </p:spPr>
+        <p:txBody>
+          <a:bodyPr/>
+          <a:lstStyle/>
+          <a:p>
             <a:pPr>
               <a:buNone/>
               <a:defRPr sz="1200" b="1">
@@ -7628,35 +7721,35 @@
       <p:sp>
         <p:nvSpPr>
           <p:cNvPr id="37" name="framework-list">
-            <a:extLst xmlns:a="http://schemas.openxmlformats.org/drawingml/2006/main">
+            <a:extLst>
               <a:ext uri="{FF2B5EF4-FFF2-40B4-BE49-F238E27FC236}">
                 <a16:creationId xmlns:a16="http://schemas.microsoft.com/office/drawing/2014/main" id="{EB13FE2A-9DFE-4004-8720-6AC345E49E40}"/>
               </a:ext>
             </a:extLst>
           </p:cNvPr>
           <p:cNvSpPr>
-            <a:spLocks xmlns:a="http://schemas.openxmlformats.org/drawingml/2006/main" noGrp="1"/>
-          </p:cNvSpPr>
-          <p:nvPr/>
-        </p:nvSpPr>
-        <p:spPr>
-          <a:xfrm xmlns:a="http://schemas.openxmlformats.org/drawingml/2006/main">
+            <a:spLocks noGrp="1"/>
+          </p:cNvSpPr>
+          <p:nvPr/>
+        </p:nvSpPr>
+        <p:spPr>
+          <a:xfrm>
             <a:off x="2228850" y="2143125"/>
             <a:ext cx="9048750" cy="266700"/>
           </a:xfrm>
-          <a:prstGeom xmlns:a="http://schemas.openxmlformats.org/drawingml/2006/main" prst="rect">
-            <a:avLst/>
-          </a:prstGeom>
-          <a:noFill xmlns:a="http://schemas.openxmlformats.org/drawingml/2006/main"/>
-          <a:ln xmlns:a="http://schemas.openxmlformats.org/drawingml/2006/main" w="0">
-            <a:noFill/>
-            <a:prstDash val="solid"/>
-          </a:ln>
-        </p:spPr>
-        <p:txBody>
-          <a:bodyPr xmlns:a="http://schemas.openxmlformats.org/drawingml/2006/main"/>
-          <a:lstStyle xmlns:a="http://schemas.openxmlformats.org/drawingml/2006/main"/>
-          <a:p xmlns:a="http://schemas.openxmlformats.org/drawingml/2006/main">
+          <a:prstGeom prst="rect">
+            <a:avLst/>
+          </a:prstGeom>
+          <a:noFill/>
+          <a:ln w="0">
+            <a:noFill/>
+            <a:prstDash val="solid"/>
+          </a:ln>
+        </p:spPr>
+        <p:txBody>
+          <a:bodyPr/>
+          <a:lstStyle/>
+          <a:p>
             <a:pPr>
               <a:buNone/>
               <a:defRPr sz="1200" b="1">
@@ -7666,13 +7759,18 @@
               </a:defRPr>
             </a:pPr>
             <a:r>
-              <a:rPr sz="1200" b="1">
+              <a:rPr lang="zh-CN" altLang="zh-CN" sz="1200" b="1" dirty="0">
                 <a:solidFill>
                   <a:srgbClr val="12263A"/>
                 </a:solidFill>
               </a:rPr>
-              <a:t>React  ·  Express  ·  PostgreSQL + Prisma  ·  Vitest + Playwright  ·  Docker + GitHub Actions</a:t>
-            </a:r>
+              <a:t>React · Django + DRF · PostgreSQL + Django ORM · Django Tests + Playwright · Docker + GitHub Actions</a:t>
+            </a:r>
+            <a:endParaRPr sz="1200" b="1" dirty="0">
+              <a:solidFill>
+                <a:srgbClr val="12263A"/>
+              </a:solidFill>
+            </a:endParaRPr>
           </a:p>
         </p:txBody>
       </p:sp>
@@ -7683,6 +7781,9 @@
       </p:ext>
     </p:extLst>
   </p:cSld>
+  <p:clrMapOvr>
+    <a:masterClrMapping/>
+  </p:clrMapOvr>
 </p:sld>
 </file>
 
@@ -7928,5 +8029,254 @@
       </a:bgFillStyleLst>
     </a:fmtScheme>
   </a:themeElements>
+  <a:objectDefaults/>
+  <a:extraClrSchemeLst/>
+</a:theme>
+</file>
+
+<file path=ppt/theme/theme2.xml><?xml version="1.0" encoding="utf-8"?>
+<a:theme xmlns:a="http://schemas.openxmlformats.org/drawingml/2006/main" name="ChatGPT">
+  <a:themeElements>
+    <a:clrScheme name="StudyCrew Editorial">
+      <a:dk1>
+        <a:srgbClr val="0B1825"/>
+      </a:dk1>
+      <a:lt1>
+        <a:srgbClr val="FFFFFF"/>
+      </a:lt1>
+      <a:dk2>
+        <a:srgbClr val="12263A"/>
+      </a:dk2>
+      <a:lt2>
+        <a:srgbClr val="EAF2FA"/>
+      </a:lt2>
+      <a:accent1>
+        <a:srgbClr val="2774C7"/>
+      </a:accent1>
+      <a:accent2>
+        <a:srgbClr val="E96B4B"/>
+      </a:accent2>
+      <a:accent3>
+        <a:srgbClr val="BFE2D4"/>
+      </a:accent3>
+      <a:accent4>
+        <a:srgbClr val="D8A72A"/>
+      </a:accent4>
+      <a:accent5>
+        <a:srgbClr val="4D7C78"/>
+      </a:accent5>
+      <a:accent6>
+        <a:srgbClr val="8A6F4D"/>
+      </a:accent6>
+      <a:hlink>
+        <a:srgbClr val="2774C7"/>
+      </a:hlink>
+      <a:folHlink>
+        <a:srgbClr val="E96B4B"/>
+      </a:folHlink>
+    </a:clrScheme>
+    <a:fontScheme name="Office">
+      <a:majorFont>
+        <a:latin typeface="Calibri Light"/>
+        <a:ea typeface="Calibri Light"/>
+        <a:cs typeface="Calibri Light"/>
+      </a:majorFont>
+      <a:minorFont>
+        <a:latin typeface="Calibri"/>
+        <a:ea typeface="Calibri"/>
+        <a:cs typeface="Calibri"/>
+      </a:minorFont>
+    </a:fontScheme>
+    <a:fmtScheme name="StudyCrew Editorial">
+      <a:fillStyleLst>
+        <a:solidFill>
+          <a:schemeClr val="phClr"/>
+        </a:solidFill>
+        <a:gradFill>
+          <a:gsLst>
+            <a:gs pos="0">
+              <a:schemeClr val="phClr">
+                <a:tint val="67000"/>
+                <a:lumMod val="110000"/>
+                <a:satMod val="105000"/>
+              </a:schemeClr>
+            </a:gs>
+            <a:gs pos="50000">
+              <a:schemeClr val="phClr">
+                <a:tint val="73000"/>
+                <a:lumMod val="105000"/>
+                <a:satMod val="103000"/>
+              </a:schemeClr>
+            </a:gs>
+            <a:gs pos="100000">
+              <a:schemeClr val="phClr">
+                <a:tint val="81000"/>
+                <a:lumMod val="105000"/>
+                <a:satMod val="109000"/>
+              </a:schemeClr>
+            </a:gs>
+          </a:gsLst>
+          <a:lin ang="5400000" scaled="0"/>
+        </a:gradFill>
+        <a:gradFill>
+          <a:gsLst>
+            <a:gs pos="0">
+              <a:schemeClr val="phClr">
+                <a:tint val="94000"/>
+                <a:lumMod val="102000"/>
+                <a:satMod val="103000"/>
+              </a:schemeClr>
+            </a:gs>
+            <a:gs pos="50000">
+              <a:schemeClr val="phClr">
+                <a:shade val="100000"/>
+                <a:lumMod val="100000"/>
+                <a:satMod val="110000"/>
+              </a:schemeClr>
+            </a:gs>
+            <a:gs pos="100000">
+              <a:schemeClr val="phClr">
+                <a:shade val="78000"/>
+                <a:lumMod val="99000"/>
+                <a:satMod val="120000"/>
+              </a:schemeClr>
+            </a:gs>
+          </a:gsLst>
+          <a:lin ang="5400000" scaled="0"/>
+        </a:gradFill>
+      </a:fillStyleLst>
+      <a:lnStyleLst>
+        <a:ln w="12700">
+          <a:solidFill>
+            <a:schemeClr val="phClr"/>
+          </a:solidFill>
+          <a:prstDash val="solid"/>
+        </a:ln>
+        <a:ln w="19050">
+          <a:solidFill>
+            <a:schemeClr val="phClr"/>
+          </a:solidFill>
+          <a:prstDash val="solid"/>
+        </a:ln>
+        <a:ln w="25400">
+          <a:solidFill>
+            <a:schemeClr val="phClr"/>
+          </a:solidFill>
+          <a:prstDash val="solid"/>
+        </a:ln>
+      </a:lnStyleLst>
+      <a:effectStyleLst>
+        <a:effectStyle>
+          <a:effectLst/>
+        </a:effectStyle>
+        <a:effectStyle>
+          <a:effectLst/>
+        </a:effectStyle>
+        <a:effectStyle>
+          <a:effectLst>
+            <a:outerShdw blurRad="57150" dist="19050" dir="5400000">
+              <a:srgbClr val="000000">
+                <a:alpha val="16000"/>
+              </a:srgbClr>
+            </a:outerShdw>
+          </a:effectLst>
+        </a:effectStyle>
+        <a:effectStyle>
+          <a:effectLst>
+            <a:outerShdw blurRad="19050" dist="9525" dir="5400000">
+              <a:srgbClr val="000000">
+                <a:alpha val="6000"/>
+              </a:srgbClr>
+            </a:outerShdw>
+          </a:effectLst>
+        </a:effectStyle>
+        <a:effectStyle>
+          <a:effectLst>
+            <a:outerShdw blurRad="28575" dist="9525" dir="5400000">
+              <a:srgbClr val="000000">
+                <a:alpha val="8000"/>
+              </a:srgbClr>
+            </a:outerShdw>
+          </a:effectLst>
+        </a:effectStyle>
+        <a:effectStyle>
+          <a:effectLst>
+            <a:outerShdw blurRad="57150" dist="19050" dir="5400000">
+              <a:srgbClr val="000000">
+                <a:alpha val="10000"/>
+              </a:srgbClr>
+            </a:outerShdw>
+          </a:effectLst>
+        </a:effectStyle>
+        <a:effectStyle>
+          <a:effectLst>
+            <a:outerShdw blurRad="114300" dist="38100" dir="5400000">
+              <a:srgbClr val="000000">
+                <a:alpha val="12000"/>
+              </a:srgbClr>
+            </a:outerShdw>
+          </a:effectLst>
+        </a:effectStyle>
+        <a:effectStyle>
+          <a:effectLst>
+            <a:outerShdw blurRad="171450" dist="57150" dir="5400000">
+              <a:srgbClr val="000000">
+                <a:alpha val="16000"/>
+              </a:srgbClr>
+            </a:outerShdw>
+          </a:effectLst>
+        </a:effectStyle>
+        <a:effectStyle>
+          <a:effectLst>
+            <a:outerShdw blurRad="266700" dist="95250" dir="5400000">
+              <a:srgbClr val="000000">
+                <a:alpha val="24000"/>
+              </a:srgbClr>
+            </a:outerShdw>
+          </a:effectLst>
+        </a:effectStyle>
+      </a:effectStyleLst>
+      <a:bgFillStyleLst>
+        <a:solidFill>
+          <a:schemeClr val="phClr"/>
+        </a:solidFill>
+        <a:solidFill>
+          <a:schemeClr val="phClr">
+            <a:tint val="95000"/>
+            <a:satMod val="170000"/>
+          </a:schemeClr>
+        </a:solidFill>
+        <a:gradFill>
+          <a:gsLst>
+            <a:gs pos="0">
+              <a:schemeClr val="phClr">
+                <a:tint val="93000"/>
+                <a:shade val="98000"/>
+                <a:lumMod val="102000"/>
+                <a:satMod val="150000"/>
+              </a:schemeClr>
+            </a:gs>
+            <a:gs pos="50000">
+              <a:schemeClr val="phClr">
+                <a:tint val="98000"/>
+                <a:shade val="90000"/>
+                <a:lumMod val="103000"/>
+                <a:satMod val="130000"/>
+              </a:schemeClr>
+            </a:gs>
+            <a:gs pos="100000">
+              <a:schemeClr val="phClr">
+                <a:shade val="63000"/>
+                <a:satMod val="120000"/>
+              </a:schemeClr>
+            </a:gs>
+          </a:gsLst>
+          <a:lin ang="5400000" scaled="0"/>
+        </a:gradFill>
+      </a:bgFillStyleLst>
+    </a:fmtScheme>
+  </a:themeElements>
+  <a:objectDefaults/>
+  <a:extraClrSchemeLst/>
 </a:theme>
 </file>